--- a/docs/KPI_ROI_経営報告.pptx
+++ b/docs/KPI_ROI_経営報告.pptx
@@ -972,8 +972,8 @@
         </p:nvSpPr>
         <p:spPr>
           <a:xfrm>
-            <a:off x="457200" y="182880"/>
-            <a:ext cx="10972800" cy="384048"/>
+            <a:off x="457200" y="128016"/>
+            <a:ext cx="10972800" cy="347472"/>
           </a:xfrm>
           <a:prstGeom prst="rect">
             <a:avLst/>
@@ -989,7 +989,7 @@
               <a:buNone/>
             </a:pPr>
             <a:r>
-              <a:rPr lang="en-US" sz="1900" b="1" dirty="0">
+              <a:rPr lang="en-US" sz="1700" b="1" dirty="0">
                 <a:solidFill>
                   <a:srgbClr val="1F2A24"/>
                 </a:solidFill>
@@ -999,7 +999,7 @@
               </a:rPr>
               <a:t>経営報告KPI体系 ― 4つのゴールを4つの視点で測る</a:t>
             </a:r>
-            <a:endParaRPr lang="en-US" sz="1900" dirty="0"/>
+            <a:endParaRPr lang="en-US" sz="1700" dirty="0"/>
           </a:p>
         </p:txBody>
       </p:sp>
@@ -1011,8 +1011,8 @@
         </p:nvSpPr>
         <p:spPr>
           <a:xfrm>
-            <a:off x="457200" y="585216"/>
-            <a:ext cx="11338560" cy="329184"/>
+            <a:off x="457200" y="475488"/>
+            <a:ext cx="11338560" cy="292608"/>
           </a:xfrm>
           <a:prstGeom prst="rect">
             <a:avLst/>
@@ -1028,7 +1028,7 @@
               <a:buNone/>
             </a:pPr>
             <a:r>
-              <a:rPr lang="en-US" sz="1200" b="1" dirty="0">
+              <a:rPr lang="en-US" sz="1050" b="1" dirty="0">
                 <a:solidFill>
                   <a:srgbClr val="00953B"/>
                 </a:solidFill>
@@ -1042,7 +1042,7 @@
               <a:buNone/>
             </a:pPr>
             <a:r>
-              <a:rPr lang="en-US" sz="1200" b="1" dirty="0">
+              <a:rPr lang="en-US" sz="1050" b="1" dirty="0">
                 <a:solidFill>
                   <a:srgbClr val="1F2A24"/>
                 </a:solidFill>
@@ -1052,7 +1052,7 @@
               </a:rPr>
               <a:t>全KPIはPhase 0の実測でベースラインを確定し、LEBが毎月計測 → 四半期で経営報告。未達はSLAクレジット・是正計画をセットで報告（やりっぱなしにしない）</a:t>
             </a:r>
-            <a:endParaRPr lang="en-US" sz="1200" dirty="0"/>
+            <a:endParaRPr lang="en-US" sz="1050" dirty="0"/>
           </a:p>
         </p:txBody>
       </p:sp>
@@ -1071,7 +1071,7 @@
           </p:nvPr>
         </p:nvGraphicFramePr>
         <p:xfrm>
-          <a:off x="457200" y="987552"/>
+          <a:off x="457200" y="822960"/>
           <a:ext cx="11274552" cy="914400"/>
         </p:xfrm>
         <a:graphic>
@@ -1084,7 +1084,7 @@
                 <a:gridCol w="4416552"/>
                 <a:gridCol w="1463040"/>
               </a:tblGrid>
-              <a:tr h="333756">
+              <a:tr h="278892">
                 <a:tc>
                   <a:txBody>
                     <a:bodyPr/>
@@ -1094,7 +1094,7 @@
                         <a:buNone/>
                       </a:pPr>
                       <a:r>
-                        <a:rPr lang="en-US" sz="950" b="1" dirty="0">
+                        <a:rPr lang="en-US" sz="900" b="1" dirty="0">
                           <a:solidFill>
                             <a:srgbClr val="FFFFFF"/>
                           </a:solidFill>
@@ -1111,7 +1111,7 @@
                       </a:endParaRPr>
                     </a:p>
                   </a:txBody>
-                  <a:tcPr marL="32004" marR="32004" marT="32004" marB="32004" anchor="ctr">
+                  <a:tcPr marL="22860" marR="22860" marT="22860" marB="22860" anchor="ctr">
                     <a:lnL w="6350" cap="flat" cmpd="sng" algn="ctr">
                       <a:solidFill>
                         <a:srgbClr val="C9D3CD"/>
@@ -1162,7 +1162,7 @@
                         <a:buNone/>
                       </a:pPr>
                       <a:r>
-                        <a:rPr lang="en-US" sz="950" b="1" dirty="0">
+                        <a:rPr lang="en-US" sz="900" b="1" dirty="0">
                           <a:solidFill>
                             <a:srgbClr val="FFFFFF"/>
                           </a:solidFill>
@@ -1179,7 +1179,7 @@
                       </a:endParaRPr>
                     </a:p>
                   </a:txBody>
-                  <a:tcPr marL="32004" marR="32004" marT="32004" marB="32004" anchor="ctr">
+                  <a:tcPr marL="22860" marR="22860" marT="22860" marB="22860" anchor="ctr">
                     <a:lnL w="6350" cap="flat" cmpd="sng" algn="ctr">
                       <a:solidFill>
                         <a:srgbClr val="C9D3CD"/>
@@ -1230,7 +1230,7 @@
                         <a:buNone/>
                       </a:pPr>
                       <a:r>
-                        <a:rPr lang="en-US" sz="950" b="1" dirty="0">
+                        <a:rPr lang="en-US" sz="900" b="1" dirty="0">
                           <a:solidFill>
                             <a:srgbClr val="FFFFFF"/>
                           </a:solidFill>
@@ -1247,7 +1247,7 @@
                       </a:endParaRPr>
                     </a:p>
                   </a:txBody>
-                  <a:tcPr marL="32004" marR="32004" marT="32004" marB="32004" anchor="ctr">
+                  <a:tcPr marL="22860" marR="22860" marT="22860" marB="22860" anchor="ctr">
                     <a:lnL w="6350" cap="flat" cmpd="sng" algn="ctr">
                       <a:solidFill>
                         <a:srgbClr val="C9D3CD"/>
@@ -1298,7 +1298,7 @@
                         <a:buNone/>
                       </a:pPr>
                       <a:r>
-                        <a:rPr lang="en-US" sz="950" b="1" dirty="0">
+                        <a:rPr lang="en-US" sz="900" b="1" dirty="0">
                           <a:solidFill>
                             <a:srgbClr val="FFFFFF"/>
                           </a:solidFill>
@@ -1315,7 +1315,7 @@
                       </a:endParaRPr>
                     </a:p>
                   </a:txBody>
-                  <a:tcPr marL="32004" marR="32004" marT="32004" marB="32004" anchor="ctr">
+                  <a:tcPr marL="22860" marR="22860" marT="22860" marB="22860" anchor="ctr">
                     <a:lnL w="6350" cap="flat" cmpd="sng" algn="ctr">
                       <a:solidFill>
                         <a:srgbClr val="C9D3CD"/>
@@ -1358,7 +1358,7 @@
                   </a:tcPr>
                 </a:tc>
               </a:tr>
-              <a:tr h="333756">
+              <a:tr h="278892">
                 <a:tc>
                   <a:txBody>
                     <a:bodyPr/>
@@ -1368,7 +1368,7 @@
                         <a:buNone/>
                       </a:pPr>
                       <a:r>
-                        <a:rPr lang="en-US" sz="880" b="1" dirty="0">
+                        <a:rPr lang="en-US" sz="830" b="1" dirty="0">
                           <a:solidFill>
                             <a:srgbClr val="1F2A24"/>
                           </a:solidFill>
@@ -1385,7 +1385,7 @@
                       </a:endParaRPr>
                     </a:p>
                   </a:txBody>
-                  <a:tcPr marL="32004" marR="32004" marT="32004" marB="32004" anchor="ctr">
+                  <a:tcPr marL="22860" marR="22860" marT="22860" marB="22860" anchor="ctr">
                     <a:lnL w="6350" cap="flat" cmpd="sng" algn="ctr">
                       <a:solidFill>
                         <a:srgbClr val="C9D3CD"/>
@@ -1436,7 +1436,7 @@
                         <a:buNone/>
                       </a:pPr>
                       <a:r>
-                        <a:rPr lang="en-US" sz="880" b="1" dirty="0">
+                        <a:rPr lang="en-US" sz="830" b="1" dirty="0">
                           <a:solidFill>
                             <a:srgbClr val="1F2A24"/>
                           </a:solidFill>
@@ -1453,7 +1453,7 @@
                       </a:endParaRPr>
                     </a:p>
                   </a:txBody>
-                  <a:tcPr marL="32004" marR="32004" marT="32004" marB="32004" anchor="ctr">
+                  <a:tcPr marL="22860" marR="22860" marT="22860" marB="22860" anchor="ctr">
                     <a:lnL w="6350" cap="flat" cmpd="sng" algn="ctr">
                       <a:solidFill>
                         <a:srgbClr val="C9D3CD"/>
@@ -1504,7 +1504,7 @@
                         <a:buNone/>
                       </a:pPr>
                       <a:r>
-                        <a:rPr lang="en-US" sz="880" dirty="0">
+                        <a:rPr lang="en-US" sz="830" dirty="0">
                           <a:solidFill>
                             <a:srgbClr val="1F2A24"/>
                           </a:solidFill>
@@ -1521,7 +1521,7 @@
                       </a:endParaRPr>
                     </a:p>
                   </a:txBody>
-                  <a:tcPr marL="32004" marR="32004" marT="32004" marB="32004" anchor="ctr">
+                  <a:tcPr marL="22860" marR="22860" marT="22860" marB="22860" anchor="ctr">
                     <a:lnL w="6350" cap="flat" cmpd="sng" algn="ctr">
                       <a:solidFill>
                         <a:srgbClr val="C9D3CD"/>
@@ -1572,7 +1572,7 @@
                         <a:buNone/>
                       </a:pPr>
                       <a:r>
-                        <a:rPr lang="en-US" sz="880" dirty="0">
+                        <a:rPr lang="en-US" sz="830" dirty="0">
                           <a:solidFill>
                             <a:srgbClr val="1F2A24"/>
                           </a:solidFill>
@@ -1593,7 +1593,7 @@
                         <a:buNone/>
                       </a:pPr>
                       <a:r>
-                        <a:rPr lang="en-US" sz="800" b="1" dirty="0">
+                        <a:rPr lang="en-US" sz="750" b="1" dirty="0">
                           <a:solidFill>
                             <a:srgbClr val="1F4E79"/>
                           </a:solidFill>
@@ -1610,7 +1610,7 @@
                       </a:endParaRPr>
                     </a:p>
                   </a:txBody>
-                  <a:tcPr marL="32004" marR="32004" marT="32004" marB="32004" anchor="ctr">
+                  <a:tcPr marL="22860" marR="22860" marT="22860" marB="22860" anchor="ctr">
                     <a:lnL w="6350" cap="flat" cmpd="sng" algn="ctr">
                       <a:solidFill>
                         <a:srgbClr val="C9D3CD"/>
@@ -1653,7 +1653,7 @@
                   </a:tcPr>
                 </a:tc>
               </a:tr>
-              <a:tr h="333756">
+              <a:tr h="278892">
                 <a:tc>
                   <a:txBody>
                     <a:bodyPr/>
@@ -1663,7 +1663,7 @@
                         <a:buNone/>
                       </a:pPr>
                       <a:r>
-                        <a:rPr lang="en-US" sz="880" b="1" dirty="0">
+                        <a:rPr lang="en-US" sz="830" b="1" dirty="0">
                           <a:solidFill>
                             <a:srgbClr val="1F2A24"/>
                           </a:solidFill>
@@ -1680,7 +1680,7 @@
                       </a:endParaRPr>
                     </a:p>
                   </a:txBody>
-                  <a:tcPr marL="32004" marR="32004" marT="32004" marB="32004" anchor="ctr">
+                  <a:tcPr marL="22860" marR="22860" marT="22860" marB="22860" anchor="ctr">
                     <a:lnL w="6350" cap="flat" cmpd="sng" algn="ctr">
                       <a:solidFill>
                         <a:srgbClr val="C9D3CD"/>
@@ -1731,7 +1731,7 @@
                         <a:buNone/>
                       </a:pPr>
                       <a:r>
-                        <a:rPr lang="en-US" sz="880" b="1" dirty="0">
+                        <a:rPr lang="en-US" sz="830" b="1" dirty="0">
                           <a:solidFill>
                             <a:srgbClr val="1F2A24"/>
                           </a:solidFill>
@@ -1748,7 +1748,7 @@
                       </a:endParaRPr>
                     </a:p>
                   </a:txBody>
-                  <a:tcPr marL="32004" marR="32004" marT="32004" marB="32004" anchor="ctr">
+                  <a:tcPr marL="22860" marR="22860" marT="22860" marB="22860" anchor="ctr">
                     <a:lnL w="6350" cap="flat" cmpd="sng" algn="ctr">
                       <a:solidFill>
                         <a:srgbClr val="C9D3CD"/>
@@ -1799,7 +1799,7 @@
                         <a:buNone/>
                       </a:pPr>
                       <a:r>
-                        <a:rPr lang="en-US" sz="880" dirty="0">
+                        <a:rPr lang="en-US" sz="830" dirty="0">
                           <a:solidFill>
                             <a:srgbClr val="1F2A24"/>
                           </a:solidFill>
@@ -1816,7 +1816,7 @@
                       </a:endParaRPr>
                     </a:p>
                   </a:txBody>
-                  <a:tcPr marL="32004" marR="32004" marT="32004" marB="32004" anchor="ctr">
+                  <a:tcPr marL="22860" marR="22860" marT="22860" marB="22860" anchor="ctr">
                     <a:lnL w="6350" cap="flat" cmpd="sng" algn="ctr">
                       <a:solidFill>
                         <a:srgbClr val="C9D3CD"/>
@@ -1867,7 +1867,7 @@
                         <a:buNone/>
                       </a:pPr>
                       <a:r>
-                        <a:rPr lang="en-US" sz="880" dirty="0">
+                        <a:rPr lang="en-US" sz="830" dirty="0">
                           <a:solidFill>
                             <a:srgbClr val="1F2A24"/>
                           </a:solidFill>
@@ -1888,7 +1888,7 @@
                         <a:buNone/>
                       </a:pPr>
                       <a:r>
-                        <a:rPr lang="en-US" sz="800" b="1" dirty="0">
+                        <a:rPr lang="en-US" sz="750" b="1" dirty="0">
                           <a:solidFill>
                             <a:srgbClr val="5A6660"/>
                           </a:solidFill>
@@ -1905,7 +1905,7 @@
                       </a:endParaRPr>
                     </a:p>
                   </a:txBody>
-                  <a:tcPr marL="32004" marR="32004" marT="32004" marB="32004" anchor="ctr">
+                  <a:tcPr marL="22860" marR="22860" marT="22860" marB="22860" anchor="ctr">
                     <a:lnL w="6350" cap="flat" cmpd="sng" algn="ctr">
                       <a:solidFill>
                         <a:srgbClr val="C9D3CD"/>
@@ -1948,7 +1948,7 @@
                   </a:tcPr>
                 </a:tc>
               </a:tr>
-              <a:tr h="333756">
+              <a:tr h="278892">
                 <a:tc>
                   <a:txBody>
                     <a:bodyPr/>
@@ -1958,7 +1958,7 @@
                         <a:buNone/>
                       </a:pPr>
                       <a:r>
-                        <a:rPr lang="en-US" sz="880" b="1" dirty="0">
+                        <a:rPr lang="en-US" sz="830" b="1" dirty="0">
                           <a:solidFill>
                             <a:srgbClr val="1F2A24"/>
                           </a:solidFill>
@@ -1975,7 +1975,7 @@
                       </a:endParaRPr>
                     </a:p>
                   </a:txBody>
-                  <a:tcPr marL="32004" marR="32004" marT="32004" marB="32004" anchor="ctr">
+                  <a:tcPr marL="22860" marR="22860" marT="22860" marB="22860" anchor="ctr">
                     <a:lnL w="6350" cap="flat" cmpd="sng" algn="ctr">
                       <a:solidFill>
                         <a:srgbClr val="C9D3CD"/>
@@ -2026,7 +2026,7 @@
                         <a:buNone/>
                       </a:pPr>
                       <a:r>
-                        <a:rPr lang="en-US" sz="880" b="1" dirty="0">
+                        <a:rPr lang="en-US" sz="830" b="1" dirty="0">
                           <a:solidFill>
                             <a:srgbClr val="1F2A24"/>
                           </a:solidFill>
@@ -2043,7 +2043,7 @@
                       </a:endParaRPr>
                     </a:p>
                   </a:txBody>
-                  <a:tcPr marL="32004" marR="32004" marT="32004" marB="32004" anchor="ctr">
+                  <a:tcPr marL="22860" marR="22860" marT="22860" marB="22860" anchor="ctr">
                     <a:lnL w="6350" cap="flat" cmpd="sng" algn="ctr">
                       <a:solidFill>
                         <a:srgbClr val="C9D3CD"/>
@@ -2094,7 +2094,7 @@
                         <a:buNone/>
                       </a:pPr>
                       <a:r>
-                        <a:rPr lang="en-US" sz="880" dirty="0">
+                        <a:rPr lang="en-US" sz="830" dirty="0">
                           <a:solidFill>
                             <a:srgbClr val="1F2A24"/>
                           </a:solidFill>
@@ -2111,7 +2111,7 @@
                       </a:endParaRPr>
                     </a:p>
                   </a:txBody>
-                  <a:tcPr marL="32004" marR="32004" marT="32004" marB="32004" anchor="ctr">
+                  <a:tcPr marL="22860" marR="22860" marT="22860" marB="22860" anchor="ctr">
                     <a:lnL w="6350" cap="flat" cmpd="sng" algn="ctr">
                       <a:solidFill>
                         <a:srgbClr val="C9D3CD"/>
@@ -2162,7 +2162,7 @@
                         <a:buNone/>
                       </a:pPr>
                       <a:r>
-                        <a:rPr lang="en-US" sz="880" dirty="0">
+                        <a:rPr lang="en-US" sz="830" dirty="0">
                           <a:solidFill>
                             <a:srgbClr val="1F2A24"/>
                           </a:solidFill>
@@ -2183,7 +2183,7 @@
                         <a:buNone/>
                       </a:pPr>
                       <a:r>
-                        <a:rPr lang="en-US" sz="800" b="1" dirty="0">
+                        <a:rPr lang="en-US" sz="750" b="1" dirty="0">
                           <a:solidFill>
                             <a:srgbClr val="5A6660"/>
                           </a:solidFill>
@@ -2200,7 +2200,7 @@
                       </a:endParaRPr>
                     </a:p>
                   </a:txBody>
-                  <a:tcPr marL="32004" marR="32004" marT="32004" marB="32004" anchor="ctr">
+                  <a:tcPr marL="22860" marR="22860" marT="22860" marB="22860" anchor="ctr">
                     <a:lnL w="6350" cap="flat" cmpd="sng" algn="ctr">
                       <a:solidFill>
                         <a:srgbClr val="C9D3CD"/>
@@ -2243,7 +2243,7 @@
                   </a:tcPr>
                 </a:tc>
               </a:tr>
-              <a:tr h="333756">
+              <a:tr h="278892">
                 <a:tc>
                   <a:txBody>
                     <a:bodyPr/>
@@ -2253,7 +2253,7 @@
                         <a:buNone/>
                       </a:pPr>
                       <a:r>
-                        <a:rPr lang="en-US" sz="880" b="1" dirty="0">
+                        <a:rPr lang="en-US" sz="830" b="1" dirty="0">
                           <a:solidFill>
                             <a:srgbClr val="1F2A24"/>
                           </a:solidFill>
@@ -2270,7 +2270,7 @@
                       </a:endParaRPr>
                     </a:p>
                   </a:txBody>
-                  <a:tcPr marL="32004" marR="32004" marT="32004" marB="32004" anchor="ctr">
+                  <a:tcPr marL="22860" marR="22860" marT="22860" marB="22860" anchor="ctr">
                     <a:lnL w="6350" cap="flat" cmpd="sng" algn="ctr">
                       <a:solidFill>
                         <a:srgbClr val="C9D3CD"/>
@@ -2321,7 +2321,7 @@
                         <a:buNone/>
                       </a:pPr>
                       <a:r>
-                        <a:rPr lang="en-US" sz="880" b="1" dirty="0">
+                        <a:rPr lang="en-US" sz="830" b="1" dirty="0">
                           <a:solidFill>
                             <a:srgbClr val="1F2A24"/>
                           </a:solidFill>
@@ -2338,7 +2338,7 @@
                       </a:endParaRPr>
                     </a:p>
                   </a:txBody>
-                  <a:tcPr marL="32004" marR="32004" marT="32004" marB="32004" anchor="ctr">
+                  <a:tcPr marL="22860" marR="22860" marT="22860" marB="22860" anchor="ctr">
                     <a:lnL w="6350" cap="flat" cmpd="sng" algn="ctr">
                       <a:solidFill>
                         <a:srgbClr val="C9D3CD"/>
@@ -2389,7 +2389,7 @@
                         <a:buNone/>
                       </a:pPr>
                       <a:r>
-                        <a:rPr lang="en-US" sz="880" dirty="0">
+                        <a:rPr lang="en-US" sz="830" dirty="0">
                           <a:solidFill>
                             <a:srgbClr val="1F2A24"/>
                           </a:solidFill>
@@ -2406,7 +2406,7 @@
                       </a:endParaRPr>
                     </a:p>
                   </a:txBody>
-                  <a:tcPr marL="32004" marR="32004" marT="32004" marB="32004" anchor="ctr">
+                  <a:tcPr marL="22860" marR="22860" marT="22860" marB="22860" anchor="ctr">
                     <a:lnL w="6350" cap="flat" cmpd="sng" algn="ctr">
                       <a:solidFill>
                         <a:srgbClr val="C9D3CD"/>
@@ -2457,7 +2457,7 @@
                         <a:buNone/>
                       </a:pPr>
                       <a:r>
-                        <a:rPr lang="en-US" sz="880" dirty="0">
+                        <a:rPr lang="en-US" sz="830" dirty="0">
                           <a:solidFill>
                             <a:srgbClr val="1F2A24"/>
                           </a:solidFill>
@@ -2478,7 +2478,7 @@
                         <a:buNone/>
                       </a:pPr>
                       <a:r>
-                        <a:rPr lang="en-US" sz="800" b="1" dirty="0">
+                        <a:rPr lang="en-US" sz="750" b="1" dirty="0">
                           <a:solidFill>
                             <a:srgbClr val="5A6660"/>
                           </a:solidFill>
@@ -2495,7 +2495,7 @@
                       </a:endParaRPr>
                     </a:p>
                   </a:txBody>
-                  <a:tcPr marL="32004" marR="32004" marT="32004" marB="32004" anchor="ctr">
+                  <a:tcPr marL="22860" marR="22860" marT="22860" marB="22860" anchor="ctr">
                     <a:lnL w="6350" cap="flat" cmpd="sng" algn="ctr">
                       <a:solidFill>
                         <a:srgbClr val="C9D3CD"/>
@@ -2538,7 +2538,7 @@
                   </a:tcPr>
                 </a:tc>
               </a:tr>
-              <a:tr h="333756">
+              <a:tr h="278892">
                 <a:tc>
                   <a:txBody>
                     <a:bodyPr/>
@@ -2548,7 +2548,7 @@
                         <a:buNone/>
                       </a:pPr>
                       <a:r>
-                        <a:rPr lang="en-US" sz="880" b="1" dirty="0">
+                        <a:rPr lang="en-US" sz="830" b="1" dirty="0">
                           <a:solidFill>
                             <a:srgbClr val="1F2A24"/>
                           </a:solidFill>
@@ -2565,7 +2565,7 @@
                       </a:endParaRPr>
                     </a:p>
                   </a:txBody>
-                  <a:tcPr marL="32004" marR="32004" marT="32004" marB="32004" anchor="ctr">
+                  <a:tcPr marL="22860" marR="22860" marT="22860" marB="22860" anchor="ctr">
                     <a:lnL w="6350" cap="flat" cmpd="sng" algn="ctr">
                       <a:solidFill>
                         <a:srgbClr val="C9D3CD"/>
@@ -2616,7 +2616,7 @@
                         <a:buNone/>
                       </a:pPr>
                       <a:r>
-                        <a:rPr lang="en-US" sz="880" b="1" dirty="0">
+                        <a:rPr lang="en-US" sz="830" b="1" dirty="0">
                           <a:solidFill>
                             <a:srgbClr val="1F2A24"/>
                           </a:solidFill>
@@ -2633,7 +2633,7 @@
                       </a:endParaRPr>
                     </a:p>
                   </a:txBody>
-                  <a:tcPr marL="32004" marR="32004" marT="32004" marB="32004" anchor="ctr">
+                  <a:tcPr marL="22860" marR="22860" marT="22860" marB="22860" anchor="ctr">
                     <a:lnL w="6350" cap="flat" cmpd="sng" algn="ctr">
                       <a:solidFill>
                         <a:srgbClr val="C9D3CD"/>
@@ -2684,7 +2684,7 @@
                         <a:buNone/>
                       </a:pPr>
                       <a:r>
-                        <a:rPr lang="en-US" sz="880" dirty="0">
+                        <a:rPr lang="en-US" sz="830" dirty="0">
                           <a:solidFill>
                             <a:srgbClr val="1F2A24"/>
                           </a:solidFill>
@@ -2701,7 +2701,7 @@
                       </a:endParaRPr>
                     </a:p>
                   </a:txBody>
-                  <a:tcPr marL="32004" marR="32004" marT="32004" marB="32004" anchor="ctr">
+                  <a:tcPr marL="22860" marR="22860" marT="22860" marB="22860" anchor="ctr">
                     <a:lnL w="6350" cap="flat" cmpd="sng" algn="ctr">
                       <a:solidFill>
                         <a:srgbClr val="C9D3CD"/>
@@ -2752,7 +2752,7 @@
                         <a:buNone/>
                       </a:pPr>
                       <a:r>
-                        <a:rPr lang="en-US" sz="880" dirty="0">
+                        <a:rPr lang="en-US" sz="830" dirty="0">
                           <a:solidFill>
                             <a:srgbClr val="1F2A24"/>
                           </a:solidFill>
@@ -2773,7 +2773,7 @@
                         <a:buNone/>
                       </a:pPr>
                       <a:r>
-                        <a:rPr lang="en-US" sz="800" b="1" dirty="0">
+                        <a:rPr lang="en-US" sz="750" b="1" dirty="0">
                           <a:solidFill>
                             <a:srgbClr val="5A6660"/>
                           </a:solidFill>
@@ -2790,7 +2790,7 @@
                       </a:endParaRPr>
                     </a:p>
                   </a:txBody>
-                  <a:tcPr marL="32004" marR="32004" marT="32004" marB="32004" anchor="ctr">
+                  <a:tcPr marL="22860" marR="22860" marT="22860" marB="22860" anchor="ctr">
                     <a:lnL w="6350" cap="flat" cmpd="sng" algn="ctr">
                       <a:solidFill>
                         <a:srgbClr val="C9D3CD"/>
@@ -2833,7 +2833,7 @@
                   </a:tcPr>
                 </a:tc>
               </a:tr>
-              <a:tr h="333756">
+              <a:tr h="278892">
                 <a:tc>
                   <a:txBody>
                     <a:bodyPr/>
@@ -2843,7 +2843,7 @@
                         <a:buNone/>
                       </a:pPr>
                       <a:r>
-                        <a:rPr lang="en-US" sz="880" b="1" dirty="0">
+                        <a:rPr lang="en-US" sz="830" b="1" dirty="0">
                           <a:solidFill>
                             <a:srgbClr val="1F2A24"/>
                           </a:solidFill>
@@ -2860,7 +2860,7 @@
                       </a:endParaRPr>
                     </a:p>
                   </a:txBody>
-                  <a:tcPr marL="32004" marR="32004" marT="32004" marB="32004" anchor="ctr">
+                  <a:tcPr marL="22860" marR="22860" marT="22860" marB="22860" anchor="ctr">
                     <a:lnL w="6350" cap="flat" cmpd="sng" algn="ctr">
                       <a:solidFill>
                         <a:srgbClr val="C9D3CD"/>
@@ -2911,7 +2911,7 @@
                         <a:buNone/>
                       </a:pPr>
                       <a:r>
-                        <a:rPr lang="en-US" sz="880" b="1" dirty="0">
+                        <a:rPr lang="en-US" sz="830" b="1" dirty="0">
                           <a:solidFill>
                             <a:srgbClr val="1F2A24"/>
                           </a:solidFill>
@@ -2928,7 +2928,7 @@
                       </a:endParaRPr>
                     </a:p>
                   </a:txBody>
-                  <a:tcPr marL="32004" marR="32004" marT="32004" marB="32004" anchor="ctr">
+                  <a:tcPr marL="22860" marR="22860" marT="22860" marB="22860" anchor="ctr">
                     <a:lnL w="6350" cap="flat" cmpd="sng" algn="ctr">
                       <a:solidFill>
                         <a:srgbClr val="C9D3CD"/>
@@ -2979,7 +2979,7 @@
                         <a:buNone/>
                       </a:pPr>
                       <a:r>
-                        <a:rPr lang="en-US" sz="880" dirty="0">
+                        <a:rPr lang="en-US" sz="830" dirty="0">
                           <a:solidFill>
                             <a:srgbClr val="1F2A24"/>
                           </a:solidFill>
@@ -2996,7 +2996,7 @@
                       </a:endParaRPr>
                     </a:p>
                   </a:txBody>
-                  <a:tcPr marL="32004" marR="32004" marT="32004" marB="32004" anchor="ctr">
+                  <a:tcPr marL="22860" marR="22860" marT="22860" marB="22860" anchor="ctr">
                     <a:lnL w="6350" cap="flat" cmpd="sng" algn="ctr">
                       <a:solidFill>
                         <a:srgbClr val="C9D3CD"/>
@@ -3047,7 +3047,7 @@
                         <a:buNone/>
                       </a:pPr>
                       <a:r>
-                        <a:rPr lang="en-US" sz="880" dirty="0">
+                        <a:rPr lang="en-US" sz="830" dirty="0">
                           <a:solidFill>
                             <a:srgbClr val="1F2A24"/>
                           </a:solidFill>
@@ -3068,7 +3068,7 @@
                         <a:buNone/>
                       </a:pPr>
                       <a:r>
-                        <a:rPr lang="en-US" sz="800" b="1" dirty="0">
+                        <a:rPr lang="en-US" sz="750" b="1" dirty="0">
                           <a:solidFill>
                             <a:srgbClr val="5A6660"/>
                           </a:solidFill>
@@ -3085,7 +3085,7 @@
                       </a:endParaRPr>
                     </a:p>
                   </a:txBody>
-                  <a:tcPr marL="32004" marR="32004" marT="32004" marB="32004" anchor="ctr">
+                  <a:tcPr marL="22860" marR="22860" marT="22860" marB="22860" anchor="ctr">
                     <a:lnL w="6350" cap="flat" cmpd="sng" algn="ctr">
                       <a:solidFill>
                         <a:srgbClr val="C9D3CD"/>
@@ -3128,7 +3128,7 @@
                   </a:tcPr>
                 </a:tc>
               </a:tr>
-              <a:tr h="333756">
+              <a:tr h="278892">
                 <a:tc>
                   <a:txBody>
                     <a:bodyPr/>
@@ -3138,7 +3138,7 @@
                         <a:buNone/>
                       </a:pPr>
                       <a:r>
-                        <a:rPr lang="en-US" sz="880" b="1" dirty="0">
+                        <a:rPr lang="en-US" sz="830" b="1" dirty="0">
                           <a:solidFill>
                             <a:srgbClr val="1F2A24"/>
                           </a:solidFill>
@@ -3155,7 +3155,7 @@
                       </a:endParaRPr>
                     </a:p>
                   </a:txBody>
-                  <a:tcPr marL="32004" marR="32004" marT="32004" marB="32004" anchor="ctr">
+                  <a:tcPr marL="22860" marR="22860" marT="22860" marB="22860" anchor="ctr">
                     <a:lnL w="6350" cap="flat" cmpd="sng" algn="ctr">
                       <a:solidFill>
                         <a:srgbClr val="C9D3CD"/>
@@ -3206,7 +3206,7 @@
                         <a:buNone/>
                       </a:pPr>
                       <a:r>
-                        <a:rPr lang="en-US" sz="880" b="1" dirty="0">
+                        <a:rPr lang="en-US" sz="830" b="1" dirty="0">
                           <a:solidFill>
                             <a:srgbClr val="1F2A24"/>
                           </a:solidFill>
@@ -3223,7 +3223,7 @@
                       </a:endParaRPr>
                     </a:p>
                   </a:txBody>
-                  <a:tcPr marL="32004" marR="32004" marT="32004" marB="32004" anchor="ctr">
+                  <a:tcPr marL="22860" marR="22860" marT="22860" marB="22860" anchor="ctr">
                     <a:lnL w="6350" cap="flat" cmpd="sng" algn="ctr">
                       <a:solidFill>
                         <a:srgbClr val="C9D3CD"/>
@@ -3274,7 +3274,7 @@
                         <a:buNone/>
                       </a:pPr>
                       <a:r>
-                        <a:rPr lang="en-US" sz="880" dirty="0">
+                        <a:rPr lang="en-US" sz="830" dirty="0">
                           <a:solidFill>
                             <a:srgbClr val="1F2A24"/>
                           </a:solidFill>
@@ -3291,7 +3291,7 @@
                       </a:endParaRPr>
                     </a:p>
                   </a:txBody>
-                  <a:tcPr marL="32004" marR="32004" marT="32004" marB="32004" anchor="ctr">
+                  <a:tcPr marL="22860" marR="22860" marT="22860" marB="22860" anchor="ctr">
                     <a:lnL w="6350" cap="flat" cmpd="sng" algn="ctr">
                       <a:solidFill>
                         <a:srgbClr val="C9D3CD"/>
@@ -3342,7 +3342,7 @@
                         <a:buNone/>
                       </a:pPr>
                       <a:r>
-                        <a:rPr lang="en-US" sz="880" dirty="0">
+                        <a:rPr lang="en-US" sz="830" dirty="0">
                           <a:solidFill>
                             <a:srgbClr val="1F2A24"/>
                           </a:solidFill>
@@ -3363,7 +3363,7 @@
                         <a:buNone/>
                       </a:pPr>
                       <a:r>
-                        <a:rPr lang="en-US" sz="800" b="1" dirty="0">
+                        <a:rPr lang="en-US" sz="750" b="1" dirty="0">
                           <a:solidFill>
                             <a:srgbClr val="1F4E79"/>
                           </a:solidFill>
@@ -3380,7 +3380,7 @@
                       </a:endParaRPr>
                     </a:p>
                   </a:txBody>
-                  <a:tcPr marL="32004" marR="32004" marT="32004" marB="32004" anchor="ctr">
+                  <a:tcPr marL="22860" marR="22860" marT="22860" marB="22860" anchor="ctr">
                     <a:lnL w="6350" cap="flat" cmpd="sng" algn="ctr">
                       <a:solidFill>
                         <a:srgbClr val="C9D3CD"/>
@@ -3423,7 +3423,7 @@
                   </a:tcPr>
                 </a:tc>
               </a:tr>
-              <a:tr h="333756">
+              <a:tr h="278892">
                 <a:tc>
                   <a:txBody>
                     <a:bodyPr/>
@@ -3433,7 +3433,7 @@
                         <a:buNone/>
                       </a:pPr>
                       <a:r>
-                        <a:rPr lang="en-US" sz="880" b="1" dirty="0">
+                        <a:rPr lang="en-US" sz="830" b="1" dirty="0">
                           <a:solidFill>
                             <a:srgbClr val="1F2A24"/>
                           </a:solidFill>
@@ -3441,6 +3441,891 @@
                           <a:ea typeface="Meiryo UI" pitchFamily="34" charset="-122"/>
                           <a:cs typeface="Meiryo UI" pitchFamily="34" charset="-120"/>
                         </a:rPr>
+                        <a:t>品質・サービス（G3）</a:t>
+                      </a:r>
+                      <a:endParaRPr lang="en-US" sz="1200" dirty="0">
+                        <a:latin typeface="Meiryo UI" charset="0"/>
+                        <a:ea typeface="Meiryo UI" charset="0"/>
+                        <a:cs typeface="Meiryo UI" charset="0"/>
+                      </a:endParaRPr>
+                    </a:p>
+                  </a:txBody>
+                  <a:tcPr marL="22860" marR="22860" marT="22860" marB="22860" anchor="ctr">
+                    <a:lnL w="6350" cap="flat" cmpd="sng" algn="ctr">
+                      <a:solidFill>
+                        <a:srgbClr val="C9D3CD"/>
+                      </a:solidFill>
+                      <a:prstDash val="solid"/>
+                      <a:round/>
+                      <a:headEnd type="none" w="med" len="med"/>
+                      <a:tailEnd type="none" w="med" len="med"/>
+                    </a:lnL>
+                    <a:lnR w="6350" cap="flat" cmpd="sng" algn="ctr">
+                      <a:solidFill>
+                        <a:srgbClr val="C9D3CD"/>
+                      </a:solidFill>
+                      <a:prstDash val="solid"/>
+                      <a:round/>
+                      <a:headEnd type="none" w="med" len="med"/>
+                      <a:tailEnd type="none" w="med" len="med"/>
+                    </a:lnR>
+                    <a:lnT w="6350" cap="flat" cmpd="sng" algn="ctr">
+                      <a:solidFill>
+                        <a:srgbClr val="C9D3CD"/>
+                      </a:solidFill>
+                      <a:prstDash val="solid"/>
+                      <a:round/>
+                      <a:headEnd type="none" w="med" len="med"/>
+                      <a:tailEnd type="none" w="med" len="med"/>
+                    </a:lnT>
+                    <a:lnB w="6350" cap="flat" cmpd="sng" algn="ctr">
+                      <a:solidFill>
+                        <a:srgbClr val="C9D3CD"/>
+                      </a:solidFill>
+                      <a:prstDash val="solid"/>
+                      <a:round/>
+                      <a:headEnd type="none" w="med" len="med"/>
+                      <a:tailEnd type="none" w="med" len="med"/>
+                    </a:lnB>
+                    <a:solidFill>
+                      <a:srgbClr val="E8EEF5"/>
+                    </a:solidFill>
+                  </a:tcPr>
+                </a:tc>
+                <a:tc>
+                  <a:txBody>
+                    <a:bodyPr/>
+                    <a:lstStyle/>
+                    <a:p>
+                      <a:pPr algn="l" indent="0" marL="0">
+                        <a:buNone/>
+                      </a:pPr>
+                      <a:r>
+                        <a:rPr lang="en-US" sz="830" b="1" dirty="0">
+                          <a:solidFill>
+                            <a:srgbClr val="1F2A24"/>
+                          </a:solidFill>
+                          <a:latin typeface="Meiryo UI" pitchFamily="34" charset="0"/>
+                          <a:ea typeface="Meiryo UI" pitchFamily="34" charset="-122"/>
+                          <a:cs typeface="Meiryo UI" pitchFamily="34" charset="-120"/>
+                        </a:rPr>
+                        <a:t>重大セキュリティインシデント件数・検知/復旧時間（MTTD/MTTR）</a:t>
+                      </a:r>
+                      <a:endParaRPr lang="en-US" sz="1200" dirty="0">
+                        <a:latin typeface="Meiryo UI" charset="0"/>
+                        <a:ea typeface="Meiryo UI" charset="0"/>
+                        <a:cs typeface="Meiryo UI" charset="0"/>
+                      </a:endParaRPr>
+                    </a:p>
+                  </a:txBody>
+                  <a:tcPr marL="22860" marR="22860" marT="22860" marB="22860" anchor="ctr">
+                    <a:lnL w="6350" cap="flat" cmpd="sng" algn="ctr">
+                      <a:solidFill>
+                        <a:srgbClr val="C9D3CD"/>
+                      </a:solidFill>
+                      <a:prstDash val="solid"/>
+                      <a:round/>
+                      <a:headEnd type="none" w="med" len="med"/>
+                      <a:tailEnd type="none" w="med" len="med"/>
+                    </a:lnL>
+                    <a:lnR w="6350" cap="flat" cmpd="sng" algn="ctr">
+                      <a:solidFill>
+                        <a:srgbClr val="C9D3CD"/>
+                      </a:solidFill>
+                      <a:prstDash val="solid"/>
+                      <a:round/>
+                      <a:headEnd type="none" w="med" len="med"/>
+                      <a:tailEnd type="none" w="med" len="med"/>
+                    </a:lnR>
+                    <a:lnT w="6350" cap="flat" cmpd="sng" algn="ctr">
+                      <a:solidFill>
+                        <a:srgbClr val="C9D3CD"/>
+                      </a:solidFill>
+                      <a:prstDash val="solid"/>
+                      <a:round/>
+                      <a:headEnd type="none" w="med" len="med"/>
+                      <a:tailEnd type="none" w="med" len="med"/>
+                    </a:lnT>
+                    <a:lnB w="6350" cap="flat" cmpd="sng" algn="ctr">
+                      <a:solidFill>
+                        <a:srgbClr val="C9D3CD"/>
+                      </a:solidFill>
+                      <a:prstDash val="solid"/>
+                      <a:round/>
+                      <a:headEnd type="none" w="med" len="med"/>
+                      <a:tailEnd type="none" w="med" len="med"/>
+                    </a:lnB>
+                    <a:solidFill>
+                      <a:srgbClr val="FFFFFF"/>
+                    </a:solidFill>
+                  </a:tcPr>
+                </a:tc>
+                <a:tc>
+                  <a:txBody>
+                    <a:bodyPr/>
+                    <a:lstStyle/>
+                    <a:p>
+                      <a:pPr algn="l" indent="0" marL="0">
+                        <a:buNone/>
+                      </a:pPr>
+                      <a:r>
+                        <a:rPr lang="en-US" sz="830" dirty="0">
+                          <a:solidFill>
+                            <a:srgbClr val="1F2A24"/>
+                          </a:solidFill>
+                          <a:latin typeface="Meiryo UI" pitchFamily="34" charset="0"/>
+                          <a:ea typeface="Meiryo UI" pitchFamily="34" charset="-122"/>
+                          <a:cs typeface="Meiryo UI" pitchFamily="34" charset="-120"/>
+                        </a:rPr>
+                        <a:t>Phase 0で実測 → 重大インシデントゼロ・検知時間を短縮</a:t>
+                      </a:r>
+                      <a:endParaRPr lang="en-US" sz="1200" dirty="0">
+                        <a:latin typeface="Meiryo UI" charset="0"/>
+                        <a:ea typeface="Meiryo UI" charset="0"/>
+                        <a:cs typeface="Meiryo UI" charset="0"/>
+                      </a:endParaRPr>
+                    </a:p>
+                  </a:txBody>
+                  <a:tcPr marL="22860" marR="22860" marT="22860" marB="22860" anchor="ctr">
+                    <a:lnL w="6350" cap="flat" cmpd="sng" algn="ctr">
+                      <a:solidFill>
+                        <a:srgbClr val="C9D3CD"/>
+                      </a:solidFill>
+                      <a:prstDash val="solid"/>
+                      <a:round/>
+                      <a:headEnd type="none" w="med" len="med"/>
+                      <a:tailEnd type="none" w="med" len="med"/>
+                    </a:lnL>
+                    <a:lnR w="6350" cap="flat" cmpd="sng" algn="ctr">
+                      <a:solidFill>
+                        <a:srgbClr val="C9D3CD"/>
+                      </a:solidFill>
+                      <a:prstDash val="solid"/>
+                      <a:round/>
+                      <a:headEnd type="none" w="med" len="med"/>
+                      <a:tailEnd type="none" w="med" len="med"/>
+                    </a:lnR>
+                    <a:lnT w="6350" cap="flat" cmpd="sng" algn="ctr">
+                      <a:solidFill>
+                        <a:srgbClr val="C9D3CD"/>
+                      </a:solidFill>
+                      <a:prstDash val="solid"/>
+                      <a:round/>
+                      <a:headEnd type="none" w="med" len="med"/>
+                      <a:tailEnd type="none" w="med" len="med"/>
+                    </a:lnT>
+                    <a:lnB w="6350" cap="flat" cmpd="sng" algn="ctr">
+                      <a:solidFill>
+                        <a:srgbClr val="C9D3CD"/>
+                      </a:solidFill>
+                      <a:prstDash val="solid"/>
+                      <a:round/>
+                      <a:headEnd type="none" w="med" len="med"/>
+                      <a:tailEnd type="none" w="med" len="med"/>
+                    </a:lnB>
+                    <a:solidFill>
+                      <a:srgbClr val="FFFFFF"/>
+                    </a:solidFill>
+                  </a:tcPr>
+                </a:tc>
+                <a:tc>
+                  <a:txBody>
+                    <a:bodyPr/>
+                    <a:lstStyle/>
+                    <a:p>
+                      <a:pPr algn="l" indent="0" marL="0">
+                        <a:buNone/>
+                      </a:pPr>
+                      <a:r>
+                        <a:rPr lang="en-US" sz="830" dirty="0">
+                          <a:solidFill>
+                            <a:srgbClr val="1F2A24"/>
+                          </a:solidFill>
+                          <a:latin typeface="Meiryo UI" pitchFamily="34" charset="0"/>
+                          <a:ea typeface="Meiryo UI" pitchFamily="34" charset="-122"/>
+                          <a:cs typeface="Meiryo UI" pitchFamily="34" charset="-120"/>
+                        </a:rPr>
+                        <a:t>月次／</a:t>
+                      </a:r>
+                      <a:endParaRPr lang="en-US" sz="1200" dirty="0">
+                        <a:latin typeface="Meiryo UI" charset="0"/>
+                        <a:ea typeface="Meiryo UI" charset="0"/>
+                        <a:cs typeface="Meiryo UI" charset="0"/>
+                      </a:endParaRPr>
+                    </a:p>
+                    <a:p>
+                      <a:pPr algn="ctr" indent="0" marL="0">
+                        <a:buNone/>
+                      </a:pPr>
+                      <a:r>
+                        <a:rPr lang="en-US" sz="750" b="1" dirty="0">
+                          <a:solidFill>
+                            <a:srgbClr val="5A6660"/>
+                          </a:solidFill>
+                          <a:latin typeface="Meiryo UI" pitchFamily="34" charset="0"/>
+                          <a:ea typeface="Meiryo UI" pitchFamily="34" charset="-122"/>
+                          <a:cs typeface="Meiryo UI" pitchFamily="34" charset="-120"/>
+                        </a:rPr>
+                        <a:t>遅行</a:t>
+                      </a:r>
+                      <a:endParaRPr lang="en-US" sz="1200" dirty="0">
+                        <a:latin typeface="Meiryo UI" charset="0"/>
+                        <a:ea typeface="Meiryo UI" charset="0"/>
+                        <a:cs typeface="Meiryo UI" charset="0"/>
+                      </a:endParaRPr>
+                    </a:p>
+                  </a:txBody>
+                  <a:tcPr marL="22860" marR="22860" marT="22860" marB="22860" anchor="ctr">
+                    <a:lnL w="6350" cap="flat" cmpd="sng" algn="ctr">
+                      <a:solidFill>
+                        <a:srgbClr val="C9D3CD"/>
+                      </a:solidFill>
+                      <a:prstDash val="solid"/>
+                      <a:round/>
+                      <a:headEnd type="none" w="med" len="med"/>
+                      <a:tailEnd type="none" w="med" len="med"/>
+                    </a:lnL>
+                    <a:lnR w="6350" cap="flat" cmpd="sng" algn="ctr">
+                      <a:solidFill>
+                        <a:srgbClr val="C9D3CD"/>
+                      </a:solidFill>
+                      <a:prstDash val="solid"/>
+                      <a:round/>
+                      <a:headEnd type="none" w="med" len="med"/>
+                      <a:tailEnd type="none" w="med" len="med"/>
+                    </a:lnR>
+                    <a:lnT w="6350" cap="flat" cmpd="sng" algn="ctr">
+                      <a:solidFill>
+                        <a:srgbClr val="C9D3CD"/>
+                      </a:solidFill>
+                      <a:prstDash val="solid"/>
+                      <a:round/>
+                      <a:headEnd type="none" w="med" len="med"/>
+                      <a:tailEnd type="none" w="med" len="med"/>
+                    </a:lnT>
+                    <a:lnB w="6350" cap="flat" cmpd="sng" algn="ctr">
+                      <a:solidFill>
+                        <a:srgbClr val="C9D3CD"/>
+                      </a:solidFill>
+                      <a:prstDash val="solid"/>
+                      <a:round/>
+                      <a:headEnd type="none" w="med" len="med"/>
+                      <a:tailEnd type="none" w="med" len="med"/>
+                    </a:lnB>
+                    <a:solidFill>
+                      <a:srgbClr val="FFFFFF"/>
+                    </a:solidFill>
+                  </a:tcPr>
+                </a:tc>
+              </a:tr>
+              <a:tr h="278892">
+                <a:tc>
+                  <a:txBody>
+                    <a:bodyPr/>
+                    <a:lstStyle/>
+                    <a:p>
+                      <a:pPr algn="l" indent="0" marL="0">
+                        <a:buNone/>
+                      </a:pPr>
+                      <a:r>
+                        <a:rPr lang="en-US" sz="830" b="1" dirty="0">
+                          <a:solidFill>
+                            <a:srgbClr val="1F2A24"/>
+                          </a:solidFill>
+                          <a:latin typeface="Meiryo UI" pitchFamily="34" charset="0"/>
+                          <a:ea typeface="Meiryo UI" pitchFamily="34" charset="-122"/>
+                          <a:cs typeface="Meiryo UI" pitchFamily="34" charset="-120"/>
+                        </a:rPr>
+                        <a:t>品質・サービス（G3）</a:t>
+                      </a:r>
+                      <a:endParaRPr lang="en-US" sz="1200" dirty="0">
+                        <a:latin typeface="Meiryo UI" charset="0"/>
+                        <a:ea typeface="Meiryo UI" charset="0"/>
+                        <a:cs typeface="Meiryo UI" charset="0"/>
+                      </a:endParaRPr>
+                    </a:p>
+                  </a:txBody>
+                  <a:tcPr marL="22860" marR="22860" marT="22860" marB="22860" anchor="ctr">
+                    <a:lnL w="6350" cap="flat" cmpd="sng" algn="ctr">
+                      <a:solidFill>
+                        <a:srgbClr val="C9D3CD"/>
+                      </a:solidFill>
+                      <a:prstDash val="solid"/>
+                      <a:round/>
+                      <a:headEnd type="none" w="med" len="med"/>
+                      <a:tailEnd type="none" w="med" len="med"/>
+                    </a:lnL>
+                    <a:lnR w="6350" cap="flat" cmpd="sng" algn="ctr">
+                      <a:solidFill>
+                        <a:srgbClr val="C9D3CD"/>
+                      </a:solidFill>
+                      <a:prstDash val="solid"/>
+                      <a:round/>
+                      <a:headEnd type="none" w="med" len="med"/>
+                      <a:tailEnd type="none" w="med" len="med"/>
+                    </a:lnR>
+                    <a:lnT w="6350" cap="flat" cmpd="sng" algn="ctr">
+                      <a:solidFill>
+                        <a:srgbClr val="C9D3CD"/>
+                      </a:solidFill>
+                      <a:prstDash val="solid"/>
+                      <a:round/>
+                      <a:headEnd type="none" w="med" len="med"/>
+                      <a:tailEnd type="none" w="med" len="med"/>
+                    </a:lnT>
+                    <a:lnB w="6350" cap="flat" cmpd="sng" algn="ctr">
+                      <a:solidFill>
+                        <a:srgbClr val="C9D3CD"/>
+                      </a:solidFill>
+                      <a:prstDash val="solid"/>
+                      <a:round/>
+                      <a:headEnd type="none" w="med" len="med"/>
+                      <a:tailEnd type="none" w="med" len="med"/>
+                    </a:lnB>
+                    <a:solidFill>
+                      <a:srgbClr val="E8EEF5"/>
+                    </a:solidFill>
+                  </a:tcPr>
+                </a:tc>
+                <a:tc>
+                  <a:txBody>
+                    <a:bodyPr/>
+                    <a:lstStyle/>
+                    <a:p>
+                      <a:pPr algn="l" indent="0" marL="0">
+                        <a:buNone/>
+                      </a:pPr>
+                      <a:r>
+                        <a:rPr lang="en-US" sz="830" b="1" dirty="0">
+                          <a:solidFill>
+                            <a:srgbClr val="1F2A24"/>
+                          </a:solidFill>
+                          <a:latin typeface="Meiryo UI" pitchFamily="34" charset="0"/>
+                          <a:ea typeface="Meiryo UI" pitchFamily="34" charset="-122"/>
+                          <a:cs typeface="Meiryo UI" pitchFamily="34" charset="-120"/>
+                        </a:rPr>
+                        <a:t>脆弱性対応SLA遵守率（緊急・重要パッチの期限内対応率）</a:t>
+                      </a:r>
+                      <a:endParaRPr lang="en-US" sz="1200" dirty="0">
+                        <a:latin typeface="Meiryo UI" charset="0"/>
+                        <a:ea typeface="Meiryo UI" charset="0"/>
+                        <a:cs typeface="Meiryo UI" charset="0"/>
+                      </a:endParaRPr>
+                    </a:p>
+                  </a:txBody>
+                  <a:tcPr marL="22860" marR="22860" marT="22860" marB="22860" anchor="ctr">
+                    <a:lnL w="6350" cap="flat" cmpd="sng" algn="ctr">
+                      <a:solidFill>
+                        <a:srgbClr val="C9D3CD"/>
+                      </a:solidFill>
+                      <a:prstDash val="solid"/>
+                      <a:round/>
+                      <a:headEnd type="none" w="med" len="med"/>
+                      <a:tailEnd type="none" w="med" len="med"/>
+                    </a:lnL>
+                    <a:lnR w="6350" cap="flat" cmpd="sng" algn="ctr">
+                      <a:solidFill>
+                        <a:srgbClr val="C9D3CD"/>
+                      </a:solidFill>
+                      <a:prstDash val="solid"/>
+                      <a:round/>
+                      <a:headEnd type="none" w="med" len="med"/>
+                      <a:tailEnd type="none" w="med" len="med"/>
+                    </a:lnR>
+                    <a:lnT w="6350" cap="flat" cmpd="sng" algn="ctr">
+                      <a:solidFill>
+                        <a:srgbClr val="C9D3CD"/>
+                      </a:solidFill>
+                      <a:prstDash val="solid"/>
+                      <a:round/>
+                      <a:headEnd type="none" w="med" len="med"/>
+                      <a:tailEnd type="none" w="med" len="med"/>
+                    </a:lnT>
+                    <a:lnB w="6350" cap="flat" cmpd="sng" algn="ctr">
+                      <a:solidFill>
+                        <a:srgbClr val="C9D3CD"/>
+                      </a:solidFill>
+                      <a:prstDash val="solid"/>
+                      <a:round/>
+                      <a:headEnd type="none" w="med" len="med"/>
+                      <a:tailEnd type="none" w="med" len="med"/>
+                    </a:lnB>
+                    <a:solidFill>
+                      <a:srgbClr val="F2F4F3"/>
+                    </a:solidFill>
+                  </a:tcPr>
+                </a:tc>
+                <a:tc>
+                  <a:txBody>
+                    <a:bodyPr/>
+                    <a:lstStyle/>
+                    <a:p>
+                      <a:pPr algn="l" indent="0" marL="0">
+                        <a:buNone/>
+                      </a:pPr>
+                      <a:r>
+                        <a:rPr lang="en-US" sz="830" dirty="0">
+                          <a:solidFill>
+                            <a:srgbClr val="1F2A24"/>
+                          </a:solidFill>
+                          <a:latin typeface="Meiryo UI" pitchFamily="34" charset="0"/>
+                          <a:ea typeface="Meiryo UI" pitchFamily="34" charset="-122"/>
+                          <a:cs typeface="Meiryo UI" pitchFamily="34" charset="-120"/>
+                        </a:rPr>
+                        <a:t>未整備 → 契約SLAを設定し遵守率100%</a:t>
+                      </a:r>
+                      <a:endParaRPr lang="en-US" sz="1200" dirty="0">
+                        <a:latin typeface="Meiryo UI" charset="0"/>
+                        <a:ea typeface="Meiryo UI" charset="0"/>
+                        <a:cs typeface="Meiryo UI" charset="0"/>
+                      </a:endParaRPr>
+                    </a:p>
+                  </a:txBody>
+                  <a:tcPr marL="22860" marR="22860" marT="22860" marB="22860" anchor="ctr">
+                    <a:lnL w="6350" cap="flat" cmpd="sng" algn="ctr">
+                      <a:solidFill>
+                        <a:srgbClr val="C9D3CD"/>
+                      </a:solidFill>
+                      <a:prstDash val="solid"/>
+                      <a:round/>
+                      <a:headEnd type="none" w="med" len="med"/>
+                      <a:tailEnd type="none" w="med" len="med"/>
+                    </a:lnL>
+                    <a:lnR w="6350" cap="flat" cmpd="sng" algn="ctr">
+                      <a:solidFill>
+                        <a:srgbClr val="C9D3CD"/>
+                      </a:solidFill>
+                      <a:prstDash val="solid"/>
+                      <a:round/>
+                      <a:headEnd type="none" w="med" len="med"/>
+                      <a:tailEnd type="none" w="med" len="med"/>
+                    </a:lnR>
+                    <a:lnT w="6350" cap="flat" cmpd="sng" algn="ctr">
+                      <a:solidFill>
+                        <a:srgbClr val="C9D3CD"/>
+                      </a:solidFill>
+                      <a:prstDash val="solid"/>
+                      <a:round/>
+                      <a:headEnd type="none" w="med" len="med"/>
+                      <a:tailEnd type="none" w="med" len="med"/>
+                    </a:lnT>
+                    <a:lnB w="6350" cap="flat" cmpd="sng" algn="ctr">
+                      <a:solidFill>
+                        <a:srgbClr val="C9D3CD"/>
+                      </a:solidFill>
+                      <a:prstDash val="solid"/>
+                      <a:round/>
+                      <a:headEnd type="none" w="med" len="med"/>
+                      <a:tailEnd type="none" w="med" len="med"/>
+                    </a:lnB>
+                    <a:solidFill>
+                      <a:srgbClr val="F2F4F3"/>
+                    </a:solidFill>
+                  </a:tcPr>
+                </a:tc>
+                <a:tc>
+                  <a:txBody>
+                    <a:bodyPr/>
+                    <a:lstStyle/>
+                    <a:p>
+                      <a:pPr algn="l" indent="0" marL="0">
+                        <a:buNone/>
+                      </a:pPr>
+                      <a:r>
+                        <a:rPr lang="en-US" sz="830" dirty="0">
+                          <a:solidFill>
+                            <a:srgbClr val="1F2A24"/>
+                          </a:solidFill>
+                          <a:latin typeface="Meiryo UI" pitchFamily="34" charset="0"/>
+                          <a:ea typeface="Meiryo UI" pitchFamily="34" charset="-122"/>
+                          <a:cs typeface="Meiryo UI" pitchFamily="34" charset="-120"/>
+                        </a:rPr>
+                        <a:t>月次／</a:t>
+                      </a:r>
+                      <a:endParaRPr lang="en-US" sz="1200" dirty="0">
+                        <a:latin typeface="Meiryo UI" charset="0"/>
+                        <a:ea typeface="Meiryo UI" charset="0"/>
+                        <a:cs typeface="Meiryo UI" charset="0"/>
+                      </a:endParaRPr>
+                    </a:p>
+                    <a:p>
+                      <a:pPr algn="ctr" indent="0" marL="0">
+                        <a:buNone/>
+                      </a:pPr>
+                      <a:r>
+                        <a:rPr lang="en-US" sz="750" b="1" dirty="0">
+                          <a:solidFill>
+                            <a:srgbClr val="5A6660"/>
+                          </a:solidFill>
+                          <a:latin typeface="Meiryo UI" pitchFamily="34" charset="0"/>
+                          <a:ea typeface="Meiryo UI" pitchFamily="34" charset="-122"/>
+                          <a:cs typeface="Meiryo UI" pitchFamily="34" charset="-120"/>
+                        </a:rPr>
+                        <a:t>遅行</a:t>
+                      </a:r>
+                      <a:endParaRPr lang="en-US" sz="1200" dirty="0">
+                        <a:latin typeface="Meiryo UI" charset="0"/>
+                        <a:ea typeface="Meiryo UI" charset="0"/>
+                        <a:cs typeface="Meiryo UI" charset="0"/>
+                      </a:endParaRPr>
+                    </a:p>
+                  </a:txBody>
+                  <a:tcPr marL="22860" marR="22860" marT="22860" marB="22860" anchor="ctr">
+                    <a:lnL w="6350" cap="flat" cmpd="sng" algn="ctr">
+                      <a:solidFill>
+                        <a:srgbClr val="C9D3CD"/>
+                      </a:solidFill>
+                      <a:prstDash val="solid"/>
+                      <a:round/>
+                      <a:headEnd type="none" w="med" len="med"/>
+                      <a:tailEnd type="none" w="med" len="med"/>
+                    </a:lnL>
+                    <a:lnR w="6350" cap="flat" cmpd="sng" algn="ctr">
+                      <a:solidFill>
+                        <a:srgbClr val="C9D3CD"/>
+                      </a:solidFill>
+                      <a:prstDash val="solid"/>
+                      <a:round/>
+                      <a:headEnd type="none" w="med" len="med"/>
+                      <a:tailEnd type="none" w="med" len="med"/>
+                    </a:lnR>
+                    <a:lnT w="6350" cap="flat" cmpd="sng" algn="ctr">
+                      <a:solidFill>
+                        <a:srgbClr val="C9D3CD"/>
+                      </a:solidFill>
+                      <a:prstDash val="solid"/>
+                      <a:round/>
+                      <a:headEnd type="none" w="med" len="med"/>
+                      <a:tailEnd type="none" w="med" len="med"/>
+                    </a:lnT>
+                    <a:lnB w="6350" cap="flat" cmpd="sng" algn="ctr">
+                      <a:solidFill>
+                        <a:srgbClr val="C9D3CD"/>
+                      </a:solidFill>
+                      <a:prstDash val="solid"/>
+                      <a:round/>
+                      <a:headEnd type="none" w="med" len="med"/>
+                      <a:tailEnd type="none" w="med" len="med"/>
+                    </a:lnB>
+                    <a:solidFill>
+                      <a:srgbClr val="F2F4F3"/>
+                    </a:solidFill>
+                  </a:tcPr>
+                </a:tc>
+              </a:tr>
+              <a:tr h="278892">
+                <a:tc>
+                  <a:txBody>
+                    <a:bodyPr/>
+                    <a:lstStyle/>
+                    <a:p>
+                      <a:pPr algn="l" indent="0" marL="0">
+                        <a:buNone/>
+                      </a:pPr>
+                      <a:r>
+                        <a:rPr lang="en-US" sz="830" b="1" dirty="0">
+                          <a:solidFill>
+                            <a:srgbClr val="1F2A24"/>
+                          </a:solidFill>
+                          <a:latin typeface="Meiryo UI" pitchFamily="34" charset="0"/>
+                          <a:ea typeface="Meiryo UI" pitchFamily="34" charset="-122"/>
+                          <a:cs typeface="Meiryo UI" pitchFamily="34" charset="-120"/>
+                        </a:rPr>
+                        <a:t>品質・サービス（G3）</a:t>
+                      </a:r>
+                      <a:endParaRPr lang="en-US" sz="1200" dirty="0">
+                        <a:latin typeface="Meiryo UI" charset="0"/>
+                        <a:ea typeface="Meiryo UI" charset="0"/>
+                        <a:cs typeface="Meiryo UI" charset="0"/>
+                      </a:endParaRPr>
+                    </a:p>
+                  </a:txBody>
+                  <a:tcPr marL="22860" marR="22860" marT="22860" marB="22860" anchor="ctr">
+                    <a:lnL w="6350" cap="flat" cmpd="sng" algn="ctr">
+                      <a:solidFill>
+                        <a:srgbClr val="C9D3CD"/>
+                      </a:solidFill>
+                      <a:prstDash val="solid"/>
+                      <a:round/>
+                      <a:headEnd type="none" w="med" len="med"/>
+                      <a:tailEnd type="none" w="med" len="med"/>
+                    </a:lnL>
+                    <a:lnR w="6350" cap="flat" cmpd="sng" algn="ctr">
+                      <a:solidFill>
+                        <a:srgbClr val="C9D3CD"/>
+                      </a:solidFill>
+                      <a:prstDash val="solid"/>
+                      <a:round/>
+                      <a:headEnd type="none" w="med" len="med"/>
+                      <a:tailEnd type="none" w="med" len="med"/>
+                    </a:lnR>
+                    <a:lnT w="6350" cap="flat" cmpd="sng" algn="ctr">
+                      <a:solidFill>
+                        <a:srgbClr val="C9D3CD"/>
+                      </a:solidFill>
+                      <a:prstDash val="solid"/>
+                      <a:round/>
+                      <a:headEnd type="none" w="med" len="med"/>
+                      <a:tailEnd type="none" w="med" len="med"/>
+                    </a:lnT>
+                    <a:lnB w="6350" cap="flat" cmpd="sng" algn="ctr">
+                      <a:solidFill>
+                        <a:srgbClr val="C9D3CD"/>
+                      </a:solidFill>
+                      <a:prstDash val="solid"/>
+                      <a:round/>
+                      <a:headEnd type="none" w="med" len="med"/>
+                      <a:tailEnd type="none" w="med" len="med"/>
+                    </a:lnB>
+                    <a:solidFill>
+                      <a:srgbClr val="E8EEF5"/>
+                    </a:solidFill>
+                  </a:tcPr>
+                </a:tc>
+                <a:tc>
+                  <a:txBody>
+                    <a:bodyPr/>
+                    <a:lstStyle/>
+                    <a:p>
+                      <a:pPr algn="l" indent="0" marL="0">
+                        <a:buNone/>
+                      </a:pPr>
+                      <a:r>
+                        <a:rPr lang="en-US" sz="830" b="1" dirty="0">
+                          <a:solidFill>
+                            <a:srgbClr val="1F2A24"/>
+                          </a:solidFill>
+                          <a:latin typeface="Meiryo UI" pitchFamily="34" charset="0"/>
+                          <a:ea typeface="Meiryo UI" pitchFamily="34" charset="-122"/>
+                          <a:cs typeface="Meiryo UI" pitchFamily="34" charset="-120"/>
+                        </a:rPr>
+                        <a:t>24時間365日監視カバレッジ率（対象システムに占める常時監視の割合）</a:t>
+                      </a:r>
+                      <a:endParaRPr lang="en-US" sz="1200" dirty="0">
+                        <a:latin typeface="Meiryo UI" charset="0"/>
+                        <a:ea typeface="Meiryo UI" charset="0"/>
+                        <a:cs typeface="Meiryo UI" charset="0"/>
+                      </a:endParaRPr>
+                    </a:p>
+                  </a:txBody>
+                  <a:tcPr marL="22860" marR="22860" marT="22860" marB="22860" anchor="ctr">
+                    <a:lnL w="6350" cap="flat" cmpd="sng" algn="ctr">
+                      <a:solidFill>
+                        <a:srgbClr val="C9D3CD"/>
+                      </a:solidFill>
+                      <a:prstDash val="solid"/>
+                      <a:round/>
+                      <a:headEnd type="none" w="med" len="med"/>
+                      <a:tailEnd type="none" w="med" len="med"/>
+                    </a:lnL>
+                    <a:lnR w="6350" cap="flat" cmpd="sng" algn="ctr">
+                      <a:solidFill>
+                        <a:srgbClr val="C9D3CD"/>
+                      </a:solidFill>
+                      <a:prstDash val="solid"/>
+                      <a:round/>
+                      <a:headEnd type="none" w="med" len="med"/>
+                      <a:tailEnd type="none" w="med" len="med"/>
+                    </a:lnR>
+                    <a:lnT w="6350" cap="flat" cmpd="sng" algn="ctr">
+                      <a:solidFill>
+                        <a:srgbClr val="C9D3CD"/>
+                      </a:solidFill>
+                      <a:prstDash val="solid"/>
+                      <a:round/>
+                      <a:headEnd type="none" w="med" len="med"/>
+                      <a:tailEnd type="none" w="med" len="med"/>
+                    </a:lnT>
+                    <a:lnB w="6350" cap="flat" cmpd="sng" algn="ctr">
+                      <a:solidFill>
+                        <a:srgbClr val="C9D3CD"/>
+                      </a:solidFill>
+                      <a:prstDash val="solid"/>
+                      <a:round/>
+                      <a:headEnd type="none" w="med" len="med"/>
+                      <a:tailEnd type="none" w="med" len="med"/>
+                    </a:lnB>
+                    <a:solidFill>
+                      <a:srgbClr val="FFFFFF"/>
+                    </a:solidFill>
+                  </a:tcPr>
+                </a:tc>
+                <a:tc>
+                  <a:txBody>
+                    <a:bodyPr/>
+                    <a:lstStyle/>
+                    <a:p>
+                      <a:pPr algn="l" indent="0" marL="0">
+                        <a:buNone/>
+                      </a:pPr>
+                      <a:r>
+                        <a:rPr lang="en-US" sz="830" dirty="0">
+                          <a:solidFill>
+                            <a:srgbClr val="1F2A24"/>
+                          </a:solidFill>
+                          <a:latin typeface="Meiryo UI" pitchFamily="34" charset="0"/>
+                          <a:ea typeface="Meiryo UI" pitchFamily="34" charset="-122"/>
+                          <a:cs typeface="Meiryo UI" pitchFamily="34" charset="-120"/>
+                        </a:rPr>
+                        <a:t>一部のみ（大半は営業時間内対応）→ 100%</a:t>
+                      </a:r>
+                      <a:endParaRPr lang="en-US" sz="1200" dirty="0">
+                        <a:latin typeface="Meiryo UI" charset="0"/>
+                        <a:ea typeface="Meiryo UI" charset="0"/>
+                        <a:cs typeface="Meiryo UI" charset="0"/>
+                      </a:endParaRPr>
+                    </a:p>
+                  </a:txBody>
+                  <a:tcPr marL="22860" marR="22860" marT="22860" marB="22860" anchor="ctr">
+                    <a:lnL w="6350" cap="flat" cmpd="sng" algn="ctr">
+                      <a:solidFill>
+                        <a:srgbClr val="C9D3CD"/>
+                      </a:solidFill>
+                      <a:prstDash val="solid"/>
+                      <a:round/>
+                      <a:headEnd type="none" w="med" len="med"/>
+                      <a:tailEnd type="none" w="med" len="med"/>
+                    </a:lnL>
+                    <a:lnR w="6350" cap="flat" cmpd="sng" algn="ctr">
+                      <a:solidFill>
+                        <a:srgbClr val="C9D3CD"/>
+                      </a:solidFill>
+                      <a:prstDash val="solid"/>
+                      <a:round/>
+                      <a:headEnd type="none" w="med" len="med"/>
+                      <a:tailEnd type="none" w="med" len="med"/>
+                    </a:lnR>
+                    <a:lnT w="6350" cap="flat" cmpd="sng" algn="ctr">
+                      <a:solidFill>
+                        <a:srgbClr val="C9D3CD"/>
+                      </a:solidFill>
+                      <a:prstDash val="solid"/>
+                      <a:round/>
+                      <a:headEnd type="none" w="med" len="med"/>
+                      <a:tailEnd type="none" w="med" len="med"/>
+                    </a:lnT>
+                    <a:lnB w="6350" cap="flat" cmpd="sng" algn="ctr">
+                      <a:solidFill>
+                        <a:srgbClr val="C9D3CD"/>
+                      </a:solidFill>
+                      <a:prstDash val="solid"/>
+                      <a:round/>
+                      <a:headEnd type="none" w="med" len="med"/>
+                      <a:tailEnd type="none" w="med" len="med"/>
+                    </a:lnB>
+                    <a:solidFill>
+                      <a:srgbClr val="FFFFFF"/>
+                    </a:solidFill>
+                  </a:tcPr>
+                </a:tc>
+                <a:tc>
+                  <a:txBody>
+                    <a:bodyPr/>
+                    <a:lstStyle/>
+                    <a:p>
+                      <a:pPr algn="l" indent="0" marL="0">
+                        <a:buNone/>
+                      </a:pPr>
+                      <a:r>
+                        <a:rPr lang="en-US" sz="830" dirty="0">
+                          <a:solidFill>
+                            <a:srgbClr val="1F2A24"/>
+                          </a:solidFill>
+                          <a:latin typeface="Meiryo UI" pitchFamily="34" charset="0"/>
+                          <a:ea typeface="Meiryo UI" pitchFamily="34" charset="-122"/>
+                          <a:cs typeface="Meiryo UI" pitchFamily="34" charset="-120"/>
+                        </a:rPr>
+                        <a:t>四半期／</a:t>
+                      </a:r>
+                      <a:endParaRPr lang="en-US" sz="1200" dirty="0">
+                        <a:latin typeface="Meiryo UI" charset="0"/>
+                        <a:ea typeface="Meiryo UI" charset="0"/>
+                        <a:cs typeface="Meiryo UI" charset="0"/>
+                      </a:endParaRPr>
+                    </a:p>
+                    <a:p>
+                      <a:pPr algn="ctr" indent="0" marL="0">
+                        <a:buNone/>
+                      </a:pPr>
+                      <a:r>
+                        <a:rPr lang="en-US" sz="750" b="1" dirty="0">
+                          <a:solidFill>
+                            <a:srgbClr val="1F4E79"/>
+                          </a:solidFill>
+                          <a:latin typeface="Meiryo UI" pitchFamily="34" charset="0"/>
+                          <a:ea typeface="Meiryo UI" pitchFamily="34" charset="-122"/>
+                          <a:cs typeface="Meiryo UI" pitchFamily="34" charset="-120"/>
+                        </a:rPr>
+                        <a:t>先行</a:t>
+                      </a:r>
+                      <a:endParaRPr lang="en-US" sz="1200" dirty="0">
+                        <a:latin typeface="Meiryo UI" charset="0"/>
+                        <a:ea typeface="Meiryo UI" charset="0"/>
+                        <a:cs typeface="Meiryo UI" charset="0"/>
+                      </a:endParaRPr>
+                    </a:p>
+                  </a:txBody>
+                  <a:tcPr marL="22860" marR="22860" marT="22860" marB="22860" anchor="ctr">
+                    <a:lnL w="6350" cap="flat" cmpd="sng" algn="ctr">
+                      <a:solidFill>
+                        <a:srgbClr val="C9D3CD"/>
+                      </a:solidFill>
+                      <a:prstDash val="solid"/>
+                      <a:round/>
+                      <a:headEnd type="none" w="med" len="med"/>
+                      <a:tailEnd type="none" w="med" len="med"/>
+                    </a:lnL>
+                    <a:lnR w="6350" cap="flat" cmpd="sng" algn="ctr">
+                      <a:solidFill>
+                        <a:srgbClr val="C9D3CD"/>
+                      </a:solidFill>
+                      <a:prstDash val="solid"/>
+                      <a:round/>
+                      <a:headEnd type="none" w="med" len="med"/>
+                      <a:tailEnd type="none" w="med" len="med"/>
+                    </a:lnR>
+                    <a:lnT w="6350" cap="flat" cmpd="sng" algn="ctr">
+                      <a:solidFill>
+                        <a:srgbClr val="C9D3CD"/>
+                      </a:solidFill>
+                      <a:prstDash val="solid"/>
+                      <a:round/>
+                      <a:headEnd type="none" w="med" len="med"/>
+                      <a:tailEnd type="none" w="med" len="med"/>
+                    </a:lnT>
+                    <a:lnB w="6350" cap="flat" cmpd="sng" algn="ctr">
+                      <a:solidFill>
+                        <a:srgbClr val="C9D3CD"/>
+                      </a:solidFill>
+                      <a:prstDash val="solid"/>
+                      <a:round/>
+                      <a:headEnd type="none" w="med" len="med"/>
+                      <a:tailEnd type="none" w="med" len="med"/>
+                    </a:lnB>
+                    <a:solidFill>
+                      <a:srgbClr val="FFFFFF"/>
+                    </a:solidFill>
+                  </a:tcPr>
+                </a:tc>
+              </a:tr>
+              <a:tr h="278892">
+                <a:tc>
+                  <a:txBody>
+                    <a:bodyPr/>
+                    <a:lstStyle/>
+                    <a:p>
+                      <a:pPr algn="l" indent="0" marL="0">
+                        <a:buNone/>
+                      </a:pPr>
+                      <a:r>
+                        <a:rPr lang="en-US" sz="830" b="1" dirty="0">
+                          <a:solidFill>
+                            <a:srgbClr val="1F2A24"/>
+                          </a:solidFill>
+                          <a:latin typeface="Meiryo UI" pitchFamily="34" charset="0"/>
+                          <a:ea typeface="Meiryo UI" pitchFamily="34" charset="-122"/>
+                          <a:cs typeface="Meiryo UI" pitchFamily="34" charset="-120"/>
+                        </a:rPr>
                         <a:t>人材・組織（G4）</a:t>
                       </a:r>
                       <a:endParaRPr lang="en-US" sz="1200" dirty="0">
@@ -3450,7 +4335,7 @@
                       </a:endParaRPr>
                     </a:p>
                   </a:txBody>
-                  <a:tcPr marL="32004" marR="32004" marT="32004" marB="32004" anchor="ctr">
+                  <a:tcPr marL="22860" marR="22860" marT="22860" marB="22860" anchor="ctr">
                     <a:lnL w="6350" cap="flat" cmpd="sng" algn="ctr">
                       <a:solidFill>
                         <a:srgbClr val="C9D3CD"/>
@@ -3501,7 +4386,7 @@
                         <a:buNone/>
                       </a:pPr>
                       <a:r>
-                        <a:rPr lang="en-US" sz="880" b="1" dirty="0">
+                        <a:rPr lang="en-US" sz="830" b="1" dirty="0">
                           <a:solidFill>
                             <a:srgbClr val="1F2A24"/>
                           </a:solidFill>
@@ -3518,7 +4403,302 @@
                       </a:endParaRPr>
                     </a:p>
                   </a:txBody>
-                  <a:tcPr marL="32004" marR="32004" marT="32004" marB="32004" anchor="ctr">
+                  <a:tcPr marL="22860" marR="22860" marT="22860" marB="22860" anchor="ctr">
+                    <a:lnL w="6350" cap="flat" cmpd="sng" algn="ctr">
+                      <a:solidFill>
+                        <a:srgbClr val="C9D3CD"/>
+                      </a:solidFill>
+                      <a:prstDash val="solid"/>
+                      <a:round/>
+                      <a:headEnd type="none" w="med" len="med"/>
+                      <a:tailEnd type="none" w="med" len="med"/>
+                    </a:lnL>
+                    <a:lnR w="6350" cap="flat" cmpd="sng" algn="ctr">
+                      <a:solidFill>
+                        <a:srgbClr val="C9D3CD"/>
+                      </a:solidFill>
+                      <a:prstDash val="solid"/>
+                      <a:round/>
+                      <a:headEnd type="none" w="med" len="med"/>
+                      <a:tailEnd type="none" w="med" len="med"/>
+                    </a:lnR>
+                    <a:lnT w="6350" cap="flat" cmpd="sng" algn="ctr">
+                      <a:solidFill>
+                        <a:srgbClr val="C9D3CD"/>
+                      </a:solidFill>
+                      <a:prstDash val="solid"/>
+                      <a:round/>
+                      <a:headEnd type="none" w="med" len="med"/>
+                      <a:tailEnd type="none" w="med" len="med"/>
+                    </a:lnT>
+                    <a:lnB w="6350" cap="flat" cmpd="sng" algn="ctr">
+                      <a:solidFill>
+                        <a:srgbClr val="C9D3CD"/>
+                      </a:solidFill>
+                      <a:prstDash val="solid"/>
+                      <a:round/>
+                      <a:headEnd type="none" w="med" len="med"/>
+                      <a:tailEnd type="none" w="med" len="med"/>
+                    </a:lnB>
+                    <a:solidFill>
+                      <a:srgbClr val="F2F4F3"/>
+                    </a:solidFill>
+                  </a:tcPr>
+                </a:tc>
+                <a:tc>
+                  <a:txBody>
+                    <a:bodyPr/>
+                    <a:lstStyle/>
+                    <a:p>
+                      <a:pPr algn="l" indent="0" marL="0">
+                        <a:buNone/>
+                      </a:pPr>
+                      <a:r>
+                        <a:rPr lang="en-US" sz="830" dirty="0">
+                          <a:solidFill>
+                            <a:srgbClr val="1F2A24"/>
+                          </a:solidFill>
+                          <a:latin typeface="Meiryo UI" pitchFamily="34" charset="0"/>
+                          <a:ea typeface="Meiryo UI" pitchFamily="34" charset="-122"/>
+                          <a:cs typeface="Meiryo UI" pitchFamily="34" charset="-120"/>
+                        </a:rPr>
+                        <a:t>40%（実測で確定）→ 15%以下（3年）</a:t>
+                      </a:r>
+                      <a:endParaRPr lang="en-US" sz="1200" dirty="0">
+                        <a:latin typeface="Meiryo UI" charset="0"/>
+                        <a:ea typeface="Meiryo UI" charset="0"/>
+                        <a:cs typeface="Meiryo UI" charset="0"/>
+                      </a:endParaRPr>
+                    </a:p>
+                  </a:txBody>
+                  <a:tcPr marL="22860" marR="22860" marT="22860" marB="22860" anchor="ctr">
+                    <a:lnL w="6350" cap="flat" cmpd="sng" algn="ctr">
+                      <a:solidFill>
+                        <a:srgbClr val="C9D3CD"/>
+                      </a:solidFill>
+                      <a:prstDash val="solid"/>
+                      <a:round/>
+                      <a:headEnd type="none" w="med" len="med"/>
+                      <a:tailEnd type="none" w="med" len="med"/>
+                    </a:lnL>
+                    <a:lnR w="6350" cap="flat" cmpd="sng" algn="ctr">
+                      <a:solidFill>
+                        <a:srgbClr val="C9D3CD"/>
+                      </a:solidFill>
+                      <a:prstDash val="solid"/>
+                      <a:round/>
+                      <a:headEnd type="none" w="med" len="med"/>
+                      <a:tailEnd type="none" w="med" len="med"/>
+                    </a:lnR>
+                    <a:lnT w="6350" cap="flat" cmpd="sng" algn="ctr">
+                      <a:solidFill>
+                        <a:srgbClr val="C9D3CD"/>
+                      </a:solidFill>
+                      <a:prstDash val="solid"/>
+                      <a:round/>
+                      <a:headEnd type="none" w="med" len="med"/>
+                      <a:tailEnd type="none" w="med" len="med"/>
+                    </a:lnT>
+                    <a:lnB w="6350" cap="flat" cmpd="sng" algn="ctr">
+                      <a:solidFill>
+                        <a:srgbClr val="C9D3CD"/>
+                      </a:solidFill>
+                      <a:prstDash val="solid"/>
+                      <a:round/>
+                      <a:headEnd type="none" w="med" len="med"/>
+                      <a:tailEnd type="none" w="med" len="med"/>
+                    </a:lnB>
+                    <a:solidFill>
+                      <a:srgbClr val="F2F4F3"/>
+                    </a:solidFill>
+                  </a:tcPr>
+                </a:tc>
+                <a:tc>
+                  <a:txBody>
+                    <a:bodyPr/>
+                    <a:lstStyle/>
+                    <a:p>
+                      <a:pPr algn="l" indent="0" marL="0">
+                        <a:buNone/>
+                      </a:pPr>
+                      <a:r>
+                        <a:rPr lang="en-US" sz="830" dirty="0">
+                          <a:solidFill>
+                            <a:srgbClr val="1F2A24"/>
+                          </a:solidFill>
+                          <a:latin typeface="Meiryo UI" pitchFamily="34" charset="0"/>
+                          <a:ea typeface="Meiryo UI" pitchFamily="34" charset="-122"/>
+                          <a:cs typeface="Meiryo UI" pitchFamily="34" charset="-120"/>
+                        </a:rPr>
+                        <a:t>四半期／</a:t>
+                      </a:r>
+                      <a:endParaRPr lang="en-US" sz="1200" dirty="0">
+                        <a:latin typeface="Meiryo UI" charset="0"/>
+                        <a:ea typeface="Meiryo UI" charset="0"/>
+                        <a:cs typeface="Meiryo UI" charset="0"/>
+                      </a:endParaRPr>
+                    </a:p>
+                    <a:p>
+                      <a:pPr algn="ctr" indent="0" marL="0">
+                        <a:buNone/>
+                      </a:pPr>
+                      <a:r>
+                        <a:rPr lang="en-US" sz="750" b="1" dirty="0">
+                          <a:solidFill>
+                            <a:srgbClr val="5A6660"/>
+                          </a:solidFill>
+                          <a:latin typeface="Meiryo UI" pitchFamily="34" charset="0"/>
+                          <a:ea typeface="Meiryo UI" pitchFamily="34" charset="-122"/>
+                          <a:cs typeface="Meiryo UI" pitchFamily="34" charset="-120"/>
+                        </a:rPr>
+                        <a:t>遅行</a:t>
+                      </a:r>
+                      <a:endParaRPr lang="en-US" sz="1200" dirty="0">
+                        <a:latin typeface="Meiryo UI" charset="0"/>
+                        <a:ea typeface="Meiryo UI" charset="0"/>
+                        <a:cs typeface="Meiryo UI" charset="0"/>
+                      </a:endParaRPr>
+                    </a:p>
+                  </a:txBody>
+                  <a:tcPr marL="22860" marR="22860" marT="22860" marB="22860" anchor="ctr">
+                    <a:lnL w="6350" cap="flat" cmpd="sng" algn="ctr">
+                      <a:solidFill>
+                        <a:srgbClr val="C9D3CD"/>
+                      </a:solidFill>
+                      <a:prstDash val="solid"/>
+                      <a:round/>
+                      <a:headEnd type="none" w="med" len="med"/>
+                      <a:tailEnd type="none" w="med" len="med"/>
+                    </a:lnL>
+                    <a:lnR w="6350" cap="flat" cmpd="sng" algn="ctr">
+                      <a:solidFill>
+                        <a:srgbClr val="C9D3CD"/>
+                      </a:solidFill>
+                      <a:prstDash val="solid"/>
+                      <a:round/>
+                      <a:headEnd type="none" w="med" len="med"/>
+                      <a:tailEnd type="none" w="med" len="med"/>
+                    </a:lnR>
+                    <a:lnT w="6350" cap="flat" cmpd="sng" algn="ctr">
+                      <a:solidFill>
+                        <a:srgbClr val="C9D3CD"/>
+                      </a:solidFill>
+                      <a:prstDash val="solid"/>
+                      <a:round/>
+                      <a:headEnd type="none" w="med" len="med"/>
+                      <a:tailEnd type="none" w="med" len="med"/>
+                    </a:lnT>
+                    <a:lnB w="6350" cap="flat" cmpd="sng" algn="ctr">
+                      <a:solidFill>
+                        <a:srgbClr val="C9D3CD"/>
+                      </a:solidFill>
+                      <a:prstDash val="solid"/>
+                      <a:round/>
+                      <a:headEnd type="none" w="med" len="med"/>
+                      <a:tailEnd type="none" w="med" len="med"/>
+                    </a:lnB>
+                    <a:solidFill>
+                      <a:srgbClr val="F2F4F3"/>
+                    </a:solidFill>
+                  </a:tcPr>
+                </a:tc>
+              </a:tr>
+              <a:tr h="278892">
+                <a:tc>
+                  <a:txBody>
+                    <a:bodyPr/>
+                    <a:lstStyle/>
+                    <a:p>
+                      <a:pPr algn="l" indent="0" marL="0">
+                        <a:buNone/>
+                      </a:pPr>
+                      <a:r>
+                        <a:rPr lang="en-US" sz="830" b="1" dirty="0">
+                          <a:solidFill>
+                            <a:srgbClr val="1F2A24"/>
+                          </a:solidFill>
+                          <a:latin typeface="Meiryo UI" pitchFamily="34" charset="0"/>
+                          <a:ea typeface="Meiryo UI" pitchFamily="34" charset="-122"/>
+                          <a:cs typeface="Meiryo UI" pitchFamily="34" charset="-120"/>
+                        </a:rPr>
+                        <a:t>人材・組織（G4）</a:t>
+                      </a:r>
+                      <a:endParaRPr lang="en-US" sz="1200" dirty="0">
+                        <a:latin typeface="Meiryo UI" charset="0"/>
+                        <a:ea typeface="Meiryo UI" charset="0"/>
+                        <a:cs typeface="Meiryo UI" charset="0"/>
+                      </a:endParaRPr>
+                    </a:p>
+                  </a:txBody>
+                  <a:tcPr marL="22860" marR="22860" marT="22860" marB="22860" anchor="ctr">
+                    <a:lnL w="6350" cap="flat" cmpd="sng" algn="ctr">
+                      <a:solidFill>
+                        <a:srgbClr val="C9D3CD"/>
+                      </a:solidFill>
+                      <a:prstDash val="solid"/>
+                      <a:round/>
+                      <a:headEnd type="none" w="med" len="med"/>
+                      <a:tailEnd type="none" w="med" len="med"/>
+                    </a:lnL>
+                    <a:lnR w="6350" cap="flat" cmpd="sng" algn="ctr">
+                      <a:solidFill>
+                        <a:srgbClr val="C9D3CD"/>
+                      </a:solidFill>
+                      <a:prstDash val="solid"/>
+                      <a:round/>
+                      <a:headEnd type="none" w="med" len="med"/>
+                      <a:tailEnd type="none" w="med" len="med"/>
+                    </a:lnR>
+                    <a:lnT w="6350" cap="flat" cmpd="sng" algn="ctr">
+                      <a:solidFill>
+                        <a:srgbClr val="C9D3CD"/>
+                      </a:solidFill>
+                      <a:prstDash val="solid"/>
+                      <a:round/>
+                      <a:headEnd type="none" w="med" len="med"/>
+                      <a:tailEnd type="none" w="med" len="med"/>
+                    </a:lnT>
+                    <a:lnB w="6350" cap="flat" cmpd="sng" algn="ctr">
+                      <a:solidFill>
+                        <a:srgbClr val="C9D3CD"/>
+                      </a:solidFill>
+                      <a:prstDash val="solid"/>
+                      <a:round/>
+                      <a:headEnd type="none" w="med" len="med"/>
+                      <a:tailEnd type="none" w="med" len="med"/>
+                    </a:lnB>
+                    <a:solidFill>
+                      <a:srgbClr val="E9F5EE"/>
+                    </a:solidFill>
+                  </a:tcPr>
+                </a:tc>
+                <a:tc>
+                  <a:txBody>
+                    <a:bodyPr/>
+                    <a:lstStyle/>
+                    <a:p>
+                      <a:pPr algn="l" indent="0" marL="0">
+                        <a:buNone/>
+                      </a:pPr>
+                      <a:r>
+                        <a:rPr lang="en-US" sz="830" b="1" dirty="0">
+                          <a:solidFill>
+                            <a:srgbClr val="1F2A24"/>
+                          </a:solidFill>
+                          <a:latin typeface="Meiryo UI" pitchFamily="34" charset="0"/>
+                          <a:ea typeface="Meiryo UI" pitchFamily="34" charset="-122"/>
+                          <a:cs typeface="Meiryo UI" pitchFamily="34" charset="-120"/>
+                        </a:rPr>
+                        <a:t>企画業務への再配置FTE（削減はしない）</a:t>
+                      </a:r>
+                      <a:endParaRPr lang="en-US" sz="1200" dirty="0">
+                        <a:latin typeface="Meiryo UI" charset="0"/>
+                        <a:ea typeface="Meiryo UI" charset="0"/>
+                        <a:cs typeface="Meiryo UI" charset="0"/>
+                      </a:endParaRPr>
+                    </a:p>
+                  </a:txBody>
+                  <a:tcPr marL="22860" marR="22860" marT="22860" marB="22860" anchor="ctr">
                     <a:lnL w="6350" cap="flat" cmpd="sng" algn="ctr">
                       <a:solidFill>
                         <a:srgbClr val="C9D3CD"/>
@@ -3569,7 +4749,7 @@
                         <a:buNone/>
                       </a:pPr>
                       <a:r>
-                        <a:rPr lang="en-US" sz="880" dirty="0">
+                        <a:rPr lang="en-US" sz="830" dirty="0">
                           <a:solidFill>
                             <a:srgbClr val="1F2A24"/>
                           </a:solidFill>
@@ -3577,16 +4757,16 @@
                           <a:ea typeface="Meiryo UI" pitchFamily="34" charset="-122"/>
                           <a:cs typeface="Meiryo UI" pitchFamily="34" charset="-120"/>
                         </a:rPr>
-                        <a:t>40%（実測で確定）→ 15%以下（3年）</a:t>
-                      </a:r>
-                      <a:endParaRPr lang="en-US" sz="1200" dirty="0">
-                        <a:latin typeface="Meiryo UI" charset="0"/>
-                        <a:ea typeface="Meiryo UI" charset="0"/>
-                        <a:cs typeface="Meiryo UI" charset="0"/>
-                      </a:endParaRPr>
-                    </a:p>
-                  </a:txBody>
-                  <a:tcPr marL="32004" marR="32004" marT="32004" marB="32004" anchor="ctr">
+                        <a:t>0 → FY27：2FTE → FY29：12FTE</a:t>
+                      </a:r>
+                      <a:endParaRPr lang="en-US" sz="1200" dirty="0">
+                        <a:latin typeface="Meiryo UI" charset="0"/>
+                        <a:ea typeface="Meiryo UI" charset="0"/>
+                        <a:cs typeface="Meiryo UI" charset="0"/>
+                      </a:endParaRPr>
+                    </a:p>
+                  </a:txBody>
+                  <a:tcPr marL="22860" marR="22860" marT="22860" marB="22860" anchor="ctr">
                     <a:lnL w="6350" cap="flat" cmpd="sng" algn="ctr">
                       <a:solidFill>
                         <a:srgbClr val="C9D3CD"/>
@@ -3637,7 +4817,7 @@
                         <a:buNone/>
                       </a:pPr>
                       <a:r>
-                        <a:rPr lang="en-US" sz="880" dirty="0">
+                        <a:rPr lang="en-US" sz="830" dirty="0">
                           <a:solidFill>
                             <a:srgbClr val="1F2A24"/>
                           </a:solidFill>
@@ -3645,6 +4825,596 @@
                           <a:ea typeface="Meiryo UI" pitchFamily="34" charset="-122"/>
                           <a:cs typeface="Meiryo UI" pitchFamily="34" charset="-120"/>
                         </a:rPr>
+                        <a:t>半期／</a:t>
+                      </a:r>
+                      <a:endParaRPr lang="en-US" sz="1200" dirty="0">
+                        <a:latin typeface="Meiryo UI" charset="0"/>
+                        <a:ea typeface="Meiryo UI" charset="0"/>
+                        <a:cs typeface="Meiryo UI" charset="0"/>
+                      </a:endParaRPr>
+                    </a:p>
+                    <a:p>
+                      <a:pPr algn="ctr" indent="0" marL="0">
+                        <a:buNone/>
+                      </a:pPr>
+                      <a:r>
+                        <a:rPr lang="en-US" sz="750" b="1" dirty="0">
+                          <a:solidFill>
+                            <a:srgbClr val="5A6660"/>
+                          </a:solidFill>
+                          <a:latin typeface="Meiryo UI" pitchFamily="34" charset="0"/>
+                          <a:ea typeface="Meiryo UI" pitchFamily="34" charset="-122"/>
+                          <a:cs typeface="Meiryo UI" pitchFamily="34" charset="-120"/>
+                        </a:rPr>
+                        <a:t>遅行</a:t>
+                      </a:r>
+                      <a:endParaRPr lang="en-US" sz="1200" dirty="0">
+                        <a:latin typeface="Meiryo UI" charset="0"/>
+                        <a:ea typeface="Meiryo UI" charset="0"/>
+                        <a:cs typeface="Meiryo UI" charset="0"/>
+                      </a:endParaRPr>
+                    </a:p>
+                  </a:txBody>
+                  <a:tcPr marL="22860" marR="22860" marT="22860" marB="22860" anchor="ctr">
+                    <a:lnL w="6350" cap="flat" cmpd="sng" algn="ctr">
+                      <a:solidFill>
+                        <a:srgbClr val="C9D3CD"/>
+                      </a:solidFill>
+                      <a:prstDash val="solid"/>
+                      <a:round/>
+                      <a:headEnd type="none" w="med" len="med"/>
+                      <a:tailEnd type="none" w="med" len="med"/>
+                    </a:lnL>
+                    <a:lnR w="6350" cap="flat" cmpd="sng" algn="ctr">
+                      <a:solidFill>
+                        <a:srgbClr val="C9D3CD"/>
+                      </a:solidFill>
+                      <a:prstDash val="solid"/>
+                      <a:round/>
+                      <a:headEnd type="none" w="med" len="med"/>
+                      <a:tailEnd type="none" w="med" len="med"/>
+                    </a:lnR>
+                    <a:lnT w="6350" cap="flat" cmpd="sng" algn="ctr">
+                      <a:solidFill>
+                        <a:srgbClr val="C9D3CD"/>
+                      </a:solidFill>
+                      <a:prstDash val="solid"/>
+                      <a:round/>
+                      <a:headEnd type="none" w="med" len="med"/>
+                      <a:tailEnd type="none" w="med" len="med"/>
+                    </a:lnT>
+                    <a:lnB w="6350" cap="flat" cmpd="sng" algn="ctr">
+                      <a:solidFill>
+                        <a:srgbClr val="C9D3CD"/>
+                      </a:solidFill>
+                      <a:prstDash val="solid"/>
+                      <a:round/>
+                      <a:headEnd type="none" w="med" len="med"/>
+                      <a:tailEnd type="none" w="med" len="med"/>
+                    </a:lnB>
+                    <a:solidFill>
+                      <a:srgbClr val="FFFFFF"/>
+                    </a:solidFill>
+                  </a:tcPr>
+                </a:tc>
+              </a:tr>
+              <a:tr h="278892">
+                <a:tc>
+                  <a:txBody>
+                    <a:bodyPr/>
+                    <a:lstStyle/>
+                    <a:p>
+                      <a:pPr algn="l" indent="0" marL="0">
+                        <a:buNone/>
+                      </a:pPr>
+                      <a:r>
+                        <a:rPr lang="en-US" sz="830" b="1" dirty="0">
+                          <a:solidFill>
+                            <a:srgbClr val="1F2A24"/>
+                          </a:solidFill>
+                          <a:latin typeface="Meiryo UI" pitchFamily="34" charset="0"/>
+                          <a:ea typeface="Meiryo UI" pitchFamily="34" charset="-122"/>
+                          <a:cs typeface="Meiryo UI" pitchFamily="34" charset="-120"/>
+                        </a:rPr>
+                        <a:t>人材・組織（G4）</a:t>
+                      </a:r>
+                      <a:endParaRPr lang="en-US" sz="1200" dirty="0">
+                        <a:latin typeface="Meiryo UI" charset="0"/>
+                        <a:ea typeface="Meiryo UI" charset="0"/>
+                        <a:cs typeface="Meiryo UI" charset="0"/>
+                      </a:endParaRPr>
+                    </a:p>
+                  </a:txBody>
+                  <a:tcPr marL="22860" marR="22860" marT="22860" marB="22860" anchor="ctr">
+                    <a:lnL w="6350" cap="flat" cmpd="sng" algn="ctr">
+                      <a:solidFill>
+                        <a:srgbClr val="C9D3CD"/>
+                      </a:solidFill>
+                      <a:prstDash val="solid"/>
+                      <a:round/>
+                      <a:headEnd type="none" w="med" len="med"/>
+                      <a:tailEnd type="none" w="med" len="med"/>
+                    </a:lnL>
+                    <a:lnR w="6350" cap="flat" cmpd="sng" algn="ctr">
+                      <a:solidFill>
+                        <a:srgbClr val="C9D3CD"/>
+                      </a:solidFill>
+                      <a:prstDash val="solid"/>
+                      <a:round/>
+                      <a:headEnd type="none" w="med" len="med"/>
+                      <a:tailEnd type="none" w="med" len="med"/>
+                    </a:lnR>
+                    <a:lnT w="6350" cap="flat" cmpd="sng" algn="ctr">
+                      <a:solidFill>
+                        <a:srgbClr val="C9D3CD"/>
+                      </a:solidFill>
+                      <a:prstDash val="solid"/>
+                      <a:round/>
+                      <a:headEnd type="none" w="med" len="med"/>
+                      <a:tailEnd type="none" w="med" len="med"/>
+                    </a:lnT>
+                    <a:lnB w="6350" cap="flat" cmpd="sng" algn="ctr">
+                      <a:solidFill>
+                        <a:srgbClr val="C9D3CD"/>
+                      </a:solidFill>
+                      <a:prstDash val="solid"/>
+                      <a:round/>
+                      <a:headEnd type="none" w="med" len="med"/>
+                      <a:tailEnd type="none" w="med" len="med"/>
+                    </a:lnB>
+                    <a:solidFill>
+                      <a:srgbClr val="E9F5EE"/>
+                    </a:solidFill>
+                  </a:tcPr>
+                </a:tc>
+                <a:tc>
+                  <a:txBody>
+                    <a:bodyPr/>
+                    <a:lstStyle/>
+                    <a:p>
+                      <a:pPr algn="l" indent="0" marL="0">
+                        <a:buNone/>
+                      </a:pPr>
+                      <a:r>
+                        <a:rPr lang="en-US" sz="830" b="1" dirty="0">
+                          <a:solidFill>
+                            <a:srgbClr val="1F2A24"/>
+                          </a:solidFill>
+                          <a:latin typeface="Meiryo UI" pitchFamily="34" charset="0"/>
+                          <a:ea typeface="Meiryo UI" pitchFamily="34" charset="-122"/>
+                          <a:cs typeface="Meiryo UI" pitchFamily="34" charset="-120"/>
+                        </a:rPr>
+                        <a:t>運用起因の時間外労働</a:t>
+                      </a:r>
+                      <a:endParaRPr lang="en-US" sz="1200" dirty="0">
+                        <a:latin typeface="Meiryo UI" charset="0"/>
+                        <a:ea typeface="Meiryo UI" charset="0"/>
+                        <a:cs typeface="Meiryo UI" charset="0"/>
+                      </a:endParaRPr>
+                    </a:p>
+                  </a:txBody>
+                  <a:tcPr marL="22860" marR="22860" marT="22860" marB="22860" anchor="ctr">
+                    <a:lnL w="6350" cap="flat" cmpd="sng" algn="ctr">
+                      <a:solidFill>
+                        <a:srgbClr val="C9D3CD"/>
+                      </a:solidFill>
+                      <a:prstDash val="solid"/>
+                      <a:round/>
+                      <a:headEnd type="none" w="med" len="med"/>
+                      <a:tailEnd type="none" w="med" len="med"/>
+                    </a:lnL>
+                    <a:lnR w="6350" cap="flat" cmpd="sng" algn="ctr">
+                      <a:solidFill>
+                        <a:srgbClr val="C9D3CD"/>
+                      </a:solidFill>
+                      <a:prstDash val="solid"/>
+                      <a:round/>
+                      <a:headEnd type="none" w="med" len="med"/>
+                      <a:tailEnd type="none" w="med" len="med"/>
+                    </a:lnR>
+                    <a:lnT w="6350" cap="flat" cmpd="sng" algn="ctr">
+                      <a:solidFill>
+                        <a:srgbClr val="C9D3CD"/>
+                      </a:solidFill>
+                      <a:prstDash val="solid"/>
+                      <a:round/>
+                      <a:headEnd type="none" w="med" len="med"/>
+                      <a:tailEnd type="none" w="med" len="med"/>
+                    </a:lnT>
+                    <a:lnB w="6350" cap="flat" cmpd="sng" algn="ctr">
+                      <a:solidFill>
+                        <a:srgbClr val="C9D3CD"/>
+                      </a:solidFill>
+                      <a:prstDash val="solid"/>
+                      <a:round/>
+                      <a:headEnd type="none" w="med" len="med"/>
+                      <a:tailEnd type="none" w="med" len="med"/>
+                    </a:lnB>
+                    <a:solidFill>
+                      <a:srgbClr val="F2F4F3"/>
+                    </a:solidFill>
+                  </a:tcPr>
+                </a:tc>
+                <a:tc>
+                  <a:txBody>
+                    <a:bodyPr/>
+                    <a:lstStyle/>
+                    <a:p>
+                      <a:pPr algn="l" indent="0" marL="0">
+                        <a:buNone/>
+                      </a:pPr>
+                      <a:r>
+                        <a:rPr lang="en-US" sz="830" dirty="0">
+                          <a:solidFill>
+                            <a:srgbClr val="1F2A24"/>
+                          </a:solidFill>
+                          <a:latin typeface="Meiryo UI" pitchFamily="34" charset="0"/>
+                          <a:ea typeface="Meiryo UI" pitchFamily="34" charset="-122"/>
+                          <a:cs typeface="Meiryo UI" pitchFamily="34" charset="-120"/>
+                        </a:rPr>
+                        <a:t>Phase 0で実測 → 継続低減（毎月モニタリング）</a:t>
+                      </a:r>
+                      <a:endParaRPr lang="en-US" sz="1200" dirty="0">
+                        <a:latin typeface="Meiryo UI" charset="0"/>
+                        <a:ea typeface="Meiryo UI" charset="0"/>
+                        <a:cs typeface="Meiryo UI" charset="0"/>
+                      </a:endParaRPr>
+                    </a:p>
+                  </a:txBody>
+                  <a:tcPr marL="22860" marR="22860" marT="22860" marB="22860" anchor="ctr">
+                    <a:lnL w="6350" cap="flat" cmpd="sng" algn="ctr">
+                      <a:solidFill>
+                        <a:srgbClr val="C9D3CD"/>
+                      </a:solidFill>
+                      <a:prstDash val="solid"/>
+                      <a:round/>
+                      <a:headEnd type="none" w="med" len="med"/>
+                      <a:tailEnd type="none" w="med" len="med"/>
+                    </a:lnL>
+                    <a:lnR w="6350" cap="flat" cmpd="sng" algn="ctr">
+                      <a:solidFill>
+                        <a:srgbClr val="C9D3CD"/>
+                      </a:solidFill>
+                      <a:prstDash val="solid"/>
+                      <a:round/>
+                      <a:headEnd type="none" w="med" len="med"/>
+                      <a:tailEnd type="none" w="med" len="med"/>
+                    </a:lnR>
+                    <a:lnT w="6350" cap="flat" cmpd="sng" algn="ctr">
+                      <a:solidFill>
+                        <a:srgbClr val="C9D3CD"/>
+                      </a:solidFill>
+                      <a:prstDash val="solid"/>
+                      <a:round/>
+                      <a:headEnd type="none" w="med" len="med"/>
+                      <a:tailEnd type="none" w="med" len="med"/>
+                    </a:lnT>
+                    <a:lnB w="6350" cap="flat" cmpd="sng" algn="ctr">
+                      <a:solidFill>
+                        <a:srgbClr val="C9D3CD"/>
+                      </a:solidFill>
+                      <a:prstDash val="solid"/>
+                      <a:round/>
+                      <a:headEnd type="none" w="med" len="med"/>
+                      <a:tailEnd type="none" w="med" len="med"/>
+                    </a:lnB>
+                    <a:solidFill>
+                      <a:srgbClr val="F2F4F3"/>
+                    </a:solidFill>
+                  </a:tcPr>
+                </a:tc>
+                <a:tc>
+                  <a:txBody>
+                    <a:bodyPr/>
+                    <a:lstStyle/>
+                    <a:p>
+                      <a:pPr algn="l" indent="0" marL="0">
+                        <a:buNone/>
+                      </a:pPr>
+                      <a:r>
+                        <a:rPr lang="en-US" sz="830" dirty="0">
+                          <a:solidFill>
+                            <a:srgbClr val="1F2A24"/>
+                          </a:solidFill>
+                          <a:latin typeface="Meiryo UI" pitchFamily="34" charset="0"/>
+                          <a:ea typeface="Meiryo UI" pitchFamily="34" charset="-122"/>
+                          <a:cs typeface="Meiryo UI" pitchFamily="34" charset="-120"/>
+                        </a:rPr>
+                        <a:t>月次／</a:t>
+                      </a:r>
+                      <a:endParaRPr lang="en-US" sz="1200" dirty="0">
+                        <a:latin typeface="Meiryo UI" charset="0"/>
+                        <a:ea typeface="Meiryo UI" charset="0"/>
+                        <a:cs typeface="Meiryo UI" charset="0"/>
+                      </a:endParaRPr>
+                    </a:p>
+                    <a:p>
+                      <a:pPr algn="ctr" indent="0" marL="0">
+                        <a:buNone/>
+                      </a:pPr>
+                      <a:r>
+                        <a:rPr lang="en-US" sz="750" b="1" dirty="0">
+                          <a:solidFill>
+                            <a:srgbClr val="1F4E79"/>
+                          </a:solidFill>
+                          <a:latin typeface="Meiryo UI" pitchFamily="34" charset="0"/>
+                          <a:ea typeface="Meiryo UI" pitchFamily="34" charset="-122"/>
+                          <a:cs typeface="Meiryo UI" pitchFamily="34" charset="-120"/>
+                        </a:rPr>
+                        <a:t>先行</a:t>
+                      </a:r>
+                      <a:endParaRPr lang="en-US" sz="1200" dirty="0">
+                        <a:latin typeface="Meiryo UI" charset="0"/>
+                        <a:ea typeface="Meiryo UI" charset="0"/>
+                        <a:cs typeface="Meiryo UI" charset="0"/>
+                      </a:endParaRPr>
+                    </a:p>
+                  </a:txBody>
+                  <a:tcPr marL="22860" marR="22860" marT="22860" marB="22860" anchor="ctr">
+                    <a:lnL w="6350" cap="flat" cmpd="sng" algn="ctr">
+                      <a:solidFill>
+                        <a:srgbClr val="C9D3CD"/>
+                      </a:solidFill>
+                      <a:prstDash val="solid"/>
+                      <a:round/>
+                      <a:headEnd type="none" w="med" len="med"/>
+                      <a:tailEnd type="none" w="med" len="med"/>
+                    </a:lnL>
+                    <a:lnR w="6350" cap="flat" cmpd="sng" algn="ctr">
+                      <a:solidFill>
+                        <a:srgbClr val="C9D3CD"/>
+                      </a:solidFill>
+                      <a:prstDash val="solid"/>
+                      <a:round/>
+                      <a:headEnd type="none" w="med" len="med"/>
+                      <a:tailEnd type="none" w="med" len="med"/>
+                    </a:lnR>
+                    <a:lnT w="6350" cap="flat" cmpd="sng" algn="ctr">
+                      <a:solidFill>
+                        <a:srgbClr val="C9D3CD"/>
+                      </a:solidFill>
+                      <a:prstDash val="solid"/>
+                      <a:round/>
+                      <a:headEnd type="none" w="med" len="med"/>
+                      <a:tailEnd type="none" w="med" len="med"/>
+                    </a:lnT>
+                    <a:lnB w="6350" cap="flat" cmpd="sng" algn="ctr">
+                      <a:solidFill>
+                        <a:srgbClr val="C9D3CD"/>
+                      </a:solidFill>
+                      <a:prstDash val="solid"/>
+                      <a:round/>
+                      <a:headEnd type="none" w="med" len="med"/>
+                      <a:tailEnd type="none" w="med" len="med"/>
+                    </a:lnB>
+                    <a:solidFill>
+                      <a:srgbClr val="F2F4F3"/>
+                    </a:solidFill>
+                  </a:tcPr>
+                </a:tc>
+              </a:tr>
+              <a:tr h="278892">
+                <a:tc>
+                  <a:txBody>
+                    <a:bodyPr/>
+                    <a:lstStyle/>
+                    <a:p>
+                      <a:pPr algn="l" indent="0" marL="0">
+                        <a:buNone/>
+                      </a:pPr>
+                      <a:r>
+                        <a:rPr lang="en-US" sz="830" b="1" dirty="0">
+                          <a:solidFill>
+                            <a:srgbClr val="1F2A24"/>
+                          </a:solidFill>
+                          <a:latin typeface="Meiryo UI" pitchFamily="34" charset="0"/>
+                          <a:ea typeface="Meiryo UI" pitchFamily="34" charset="-122"/>
+                          <a:cs typeface="Meiryo UI" pitchFamily="34" charset="-120"/>
+                        </a:rPr>
+                        <a:t>リスク・ガバナンス（G1）</a:t>
+                      </a:r>
+                      <a:endParaRPr lang="en-US" sz="1200" dirty="0">
+                        <a:latin typeface="Meiryo UI" charset="0"/>
+                        <a:ea typeface="Meiryo UI" charset="0"/>
+                        <a:cs typeface="Meiryo UI" charset="0"/>
+                      </a:endParaRPr>
+                    </a:p>
+                  </a:txBody>
+                  <a:tcPr marL="22860" marR="22860" marT="22860" marB="22860" anchor="ctr">
+                    <a:lnL w="6350" cap="flat" cmpd="sng" algn="ctr">
+                      <a:solidFill>
+                        <a:srgbClr val="C9D3CD"/>
+                      </a:solidFill>
+                      <a:prstDash val="solid"/>
+                      <a:round/>
+                      <a:headEnd type="none" w="med" len="med"/>
+                      <a:tailEnd type="none" w="med" len="med"/>
+                    </a:lnL>
+                    <a:lnR w="6350" cap="flat" cmpd="sng" algn="ctr">
+                      <a:solidFill>
+                        <a:srgbClr val="C9D3CD"/>
+                      </a:solidFill>
+                      <a:prstDash val="solid"/>
+                      <a:round/>
+                      <a:headEnd type="none" w="med" len="med"/>
+                      <a:tailEnd type="none" w="med" len="med"/>
+                    </a:lnR>
+                    <a:lnT w="6350" cap="flat" cmpd="sng" algn="ctr">
+                      <a:solidFill>
+                        <a:srgbClr val="C9D3CD"/>
+                      </a:solidFill>
+                      <a:prstDash val="solid"/>
+                      <a:round/>
+                      <a:headEnd type="none" w="med" len="med"/>
+                      <a:tailEnd type="none" w="med" len="med"/>
+                    </a:lnT>
+                    <a:lnB w="6350" cap="flat" cmpd="sng" algn="ctr">
+                      <a:solidFill>
+                        <a:srgbClr val="C9D3CD"/>
+                      </a:solidFill>
+                      <a:prstDash val="solid"/>
+                      <a:round/>
+                      <a:headEnd type="none" w="med" len="med"/>
+                      <a:tailEnd type="none" w="med" len="med"/>
+                    </a:lnB>
+                    <a:solidFill>
+                      <a:srgbClr val="FBF1E9"/>
+                    </a:solidFill>
+                  </a:tcPr>
+                </a:tc>
+                <a:tc>
+                  <a:txBody>
+                    <a:bodyPr/>
+                    <a:lstStyle/>
+                    <a:p>
+                      <a:pPr algn="l" indent="0" marL="0">
+                        <a:buNone/>
+                      </a:pPr>
+                      <a:r>
+                        <a:rPr lang="en-US" sz="830" b="1" dirty="0">
+                          <a:solidFill>
+                            <a:srgbClr val="1F2A24"/>
+                          </a:solidFill>
+                          <a:latin typeface="Meiryo UI" pitchFamily="34" charset="0"/>
+                          <a:ea typeface="Meiryo UI" pitchFamily="34" charset="-122"/>
+                          <a:cs typeface="Meiryo UI" pitchFamily="34" charset="-120"/>
+                        </a:rPr>
+                        <a:t>特定個人依存業務（引継ぎ試験パス率）</a:t>
+                      </a:r>
+                      <a:endParaRPr lang="en-US" sz="1200" dirty="0">
+                        <a:latin typeface="Meiryo UI" charset="0"/>
+                        <a:ea typeface="Meiryo UI" charset="0"/>
+                        <a:cs typeface="Meiryo UI" charset="0"/>
+                      </a:endParaRPr>
+                    </a:p>
+                  </a:txBody>
+                  <a:tcPr marL="22860" marR="22860" marT="22860" marB="22860" anchor="ctr">
+                    <a:lnL w="6350" cap="flat" cmpd="sng" algn="ctr">
+                      <a:solidFill>
+                        <a:srgbClr val="C9D3CD"/>
+                      </a:solidFill>
+                      <a:prstDash val="solid"/>
+                      <a:round/>
+                      <a:headEnd type="none" w="med" len="med"/>
+                      <a:tailEnd type="none" w="med" len="med"/>
+                    </a:lnL>
+                    <a:lnR w="6350" cap="flat" cmpd="sng" algn="ctr">
+                      <a:solidFill>
+                        <a:srgbClr val="C9D3CD"/>
+                      </a:solidFill>
+                      <a:prstDash val="solid"/>
+                      <a:round/>
+                      <a:headEnd type="none" w="med" len="med"/>
+                      <a:tailEnd type="none" w="med" len="med"/>
+                    </a:lnR>
+                    <a:lnT w="6350" cap="flat" cmpd="sng" algn="ctr">
+                      <a:solidFill>
+                        <a:srgbClr val="C9D3CD"/>
+                      </a:solidFill>
+                      <a:prstDash val="solid"/>
+                      <a:round/>
+                      <a:headEnd type="none" w="med" len="med"/>
+                      <a:tailEnd type="none" w="med" len="med"/>
+                    </a:lnT>
+                    <a:lnB w="6350" cap="flat" cmpd="sng" algn="ctr">
+                      <a:solidFill>
+                        <a:srgbClr val="C9D3CD"/>
+                      </a:solidFill>
+                      <a:prstDash val="solid"/>
+                      <a:round/>
+                      <a:headEnd type="none" w="med" len="med"/>
+                      <a:tailEnd type="none" w="med" len="med"/>
+                    </a:lnB>
+                    <a:solidFill>
+                      <a:srgbClr val="FFFFFF"/>
+                    </a:solidFill>
+                  </a:tcPr>
+                </a:tc>
+                <a:tc>
+                  <a:txBody>
+                    <a:bodyPr/>
+                    <a:lstStyle/>
+                    <a:p>
+                      <a:pPr algn="l" indent="0" marL="0">
+                        <a:buNone/>
+                      </a:pPr>
+                      <a:r>
+                        <a:rPr lang="en-US" sz="830" dirty="0">
+                          <a:solidFill>
+                            <a:srgbClr val="1F2A24"/>
+                          </a:solidFill>
+                          <a:latin typeface="Meiryo UI" pitchFamily="34" charset="0"/>
+                          <a:ea typeface="Meiryo UI" pitchFamily="34" charset="-122"/>
+                          <a:cs typeface="Meiryo UI" pitchFamily="34" charset="-120"/>
+                        </a:rPr>
+                        <a:t>依存あり → ゼロ（パス率100%）</a:t>
+                      </a:r>
+                      <a:endParaRPr lang="en-US" sz="1200" dirty="0">
+                        <a:latin typeface="Meiryo UI" charset="0"/>
+                        <a:ea typeface="Meiryo UI" charset="0"/>
+                        <a:cs typeface="Meiryo UI" charset="0"/>
+                      </a:endParaRPr>
+                    </a:p>
+                  </a:txBody>
+                  <a:tcPr marL="22860" marR="22860" marT="22860" marB="22860" anchor="ctr">
+                    <a:lnL w="6350" cap="flat" cmpd="sng" algn="ctr">
+                      <a:solidFill>
+                        <a:srgbClr val="C9D3CD"/>
+                      </a:solidFill>
+                      <a:prstDash val="solid"/>
+                      <a:round/>
+                      <a:headEnd type="none" w="med" len="med"/>
+                      <a:tailEnd type="none" w="med" len="med"/>
+                    </a:lnL>
+                    <a:lnR w="6350" cap="flat" cmpd="sng" algn="ctr">
+                      <a:solidFill>
+                        <a:srgbClr val="C9D3CD"/>
+                      </a:solidFill>
+                      <a:prstDash val="solid"/>
+                      <a:round/>
+                      <a:headEnd type="none" w="med" len="med"/>
+                      <a:tailEnd type="none" w="med" len="med"/>
+                    </a:lnR>
+                    <a:lnT w="6350" cap="flat" cmpd="sng" algn="ctr">
+                      <a:solidFill>
+                        <a:srgbClr val="C9D3CD"/>
+                      </a:solidFill>
+                      <a:prstDash val="solid"/>
+                      <a:round/>
+                      <a:headEnd type="none" w="med" len="med"/>
+                      <a:tailEnd type="none" w="med" len="med"/>
+                    </a:lnT>
+                    <a:lnB w="6350" cap="flat" cmpd="sng" algn="ctr">
+                      <a:solidFill>
+                        <a:srgbClr val="C9D3CD"/>
+                      </a:solidFill>
+                      <a:prstDash val="solid"/>
+                      <a:round/>
+                      <a:headEnd type="none" w="med" len="med"/>
+                      <a:tailEnd type="none" w="med" len="med"/>
+                    </a:lnB>
+                    <a:solidFill>
+                      <a:srgbClr val="FFFFFF"/>
+                    </a:solidFill>
+                  </a:tcPr>
+                </a:tc>
+                <a:tc>
+                  <a:txBody>
+                    <a:bodyPr/>
+                    <a:lstStyle/>
+                    <a:p>
+                      <a:pPr algn="l" indent="0" marL="0">
+                        <a:buNone/>
+                      </a:pPr>
+                      <a:r>
+                        <a:rPr lang="en-US" sz="830" dirty="0">
+                          <a:solidFill>
+                            <a:srgbClr val="1F2A24"/>
+                          </a:solidFill>
+                          <a:latin typeface="Meiryo UI" pitchFamily="34" charset="0"/>
+                          <a:ea typeface="Meiryo UI" pitchFamily="34" charset="-122"/>
+                          <a:cs typeface="Meiryo UI" pitchFamily="34" charset="-120"/>
+                        </a:rPr>
                         <a:t>四半期／</a:t>
                       </a:r>
                       <a:endParaRPr lang="en-US" sz="1200" dirty="0">
@@ -3658,7 +5428,597 @@
                         <a:buNone/>
                       </a:pPr>
                       <a:r>
-                        <a:rPr lang="en-US" sz="800" b="1" dirty="0">
+                        <a:rPr lang="en-US" sz="750" b="1" dirty="0">
+                          <a:solidFill>
+                            <a:srgbClr val="1F4E79"/>
+                          </a:solidFill>
+                          <a:latin typeface="Meiryo UI" pitchFamily="34" charset="0"/>
+                          <a:ea typeface="Meiryo UI" pitchFamily="34" charset="-122"/>
+                          <a:cs typeface="Meiryo UI" pitchFamily="34" charset="-120"/>
+                        </a:rPr>
+                        <a:t>先行</a:t>
+                      </a:r>
+                      <a:endParaRPr lang="en-US" sz="1200" dirty="0">
+                        <a:latin typeface="Meiryo UI" charset="0"/>
+                        <a:ea typeface="Meiryo UI" charset="0"/>
+                        <a:cs typeface="Meiryo UI" charset="0"/>
+                      </a:endParaRPr>
+                    </a:p>
+                  </a:txBody>
+                  <a:tcPr marL="22860" marR="22860" marT="22860" marB="22860" anchor="ctr">
+                    <a:lnL w="6350" cap="flat" cmpd="sng" algn="ctr">
+                      <a:solidFill>
+                        <a:srgbClr val="C9D3CD"/>
+                      </a:solidFill>
+                      <a:prstDash val="solid"/>
+                      <a:round/>
+                      <a:headEnd type="none" w="med" len="med"/>
+                      <a:tailEnd type="none" w="med" len="med"/>
+                    </a:lnL>
+                    <a:lnR w="6350" cap="flat" cmpd="sng" algn="ctr">
+                      <a:solidFill>
+                        <a:srgbClr val="C9D3CD"/>
+                      </a:solidFill>
+                      <a:prstDash val="solid"/>
+                      <a:round/>
+                      <a:headEnd type="none" w="med" len="med"/>
+                      <a:tailEnd type="none" w="med" len="med"/>
+                    </a:lnR>
+                    <a:lnT w="6350" cap="flat" cmpd="sng" algn="ctr">
+                      <a:solidFill>
+                        <a:srgbClr val="C9D3CD"/>
+                      </a:solidFill>
+                      <a:prstDash val="solid"/>
+                      <a:round/>
+                      <a:headEnd type="none" w="med" len="med"/>
+                      <a:tailEnd type="none" w="med" len="med"/>
+                    </a:lnT>
+                    <a:lnB w="6350" cap="flat" cmpd="sng" algn="ctr">
+                      <a:solidFill>
+                        <a:srgbClr val="C9D3CD"/>
+                      </a:solidFill>
+                      <a:prstDash val="solid"/>
+                      <a:round/>
+                      <a:headEnd type="none" w="med" len="med"/>
+                      <a:tailEnd type="none" w="med" len="med"/>
+                    </a:lnB>
+                    <a:solidFill>
+                      <a:srgbClr val="FFFFFF"/>
+                    </a:solidFill>
+                  </a:tcPr>
+                </a:tc>
+              </a:tr>
+              <a:tr h="278892">
+                <a:tc>
+                  <a:txBody>
+                    <a:bodyPr/>
+                    <a:lstStyle/>
+                    <a:p>
+                      <a:pPr algn="l" indent="0" marL="0">
+                        <a:buNone/>
+                      </a:pPr>
+                      <a:r>
+                        <a:rPr lang="en-US" sz="830" b="1" dirty="0">
+                          <a:solidFill>
+                            <a:srgbClr val="1F2A24"/>
+                          </a:solidFill>
+                          <a:latin typeface="Meiryo UI" pitchFamily="34" charset="0"/>
+                          <a:ea typeface="Meiryo UI" pitchFamily="34" charset="-122"/>
+                          <a:cs typeface="Meiryo UI" pitchFamily="34" charset="-120"/>
+                        </a:rPr>
+                        <a:t>リスク・ガバナンス（G1）</a:t>
+                      </a:r>
+                      <a:endParaRPr lang="en-US" sz="1200" dirty="0">
+                        <a:latin typeface="Meiryo UI" charset="0"/>
+                        <a:ea typeface="Meiryo UI" charset="0"/>
+                        <a:cs typeface="Meiryo UI" charset="0"/>
+                      </a:endParaRPr>
+                    </a:p>
+                  </a:txBody>
+                  <a:tcPr marL="22860" marR="22860" marT="22860" marB="22860" anchor="ctr">
+                    <a:lnL w="6350" cap="flat" cmpd="sng" algn="ctr">
+                      <a:solidFill>
+                        <a:srgbClr val="C9D3CD"/>
+                      </a:solidFill>
+                      <a:prstDash val="solid"/>
+                      <a:round/>
+                      <a:headEnd type="none" w="med" len="med"/>
+                      <a:tailEnd type="none" w="med" len="med"/>
+                    </a:lnL>
+                    <a:lnR w="6350" cap="flat" cmpd="sng" algn="ctr">
+                      <a:solidFill>
+                        <a:srgbClr val="C9D3CD"/>
+                      </a:solidFill>
+                      <a:prstDash val="solid"/>
+                      <a:round/>
+                      <a:headEnd type="none" w="med" len="med"/>
+                      <a:tailEnd type="none" w="med" len="med"/>
+                    </a:lnR>
+                    <a:lnT w="6350" cap="flat" cmpd="sng" algn="ctr">
+                      <a:solidFill>
+                        <a:srgbClr val="C9D3CD"/>
+                      </a:solidFill>
+                      <a:prstDash val="solid"/>
+                      <a:round/>
+                      <a:headEnd type="none" w="med" len="med"/>
+                      <a:tailEnd type="none" w="med" len="med"/>
+                    </a:lnT>
+                    <a:lnB w="6350" cap="flat" cmpd="sng" algn="ctr">
+                      <a:solidFill>
+                        <a:srgbClr val="C9D3CD"/>
+                      </a:solidFill>
+                      <a:prstDash val="solid"/>
+                      <a:round/>
+                      <a:headEnd type="none" w="med" len="med"/>
+                      <a:tailEnd type="none" w="med" len="med"/>
+                    </a:lnB>
+                    <a:solidFill>
+                      <a:srgbClr val="FBF1E9"/>
+                    </a:solidFill>
+                  </a:tcPr>
+                </a:tc>
+                <a:tc>
+                  <a:txBody>
+                    <a:bodyPr/>
+                    <a:lstStyle/>
+                    <a:p>
+                      <a:pPr algn="l" indent="0" marL="0">
+                        <a:buNone/>
+                      </a:pPr>
+                      <a:r>
+                        <a:rPr lang="en-US" sz="830" b="1" dirty="0">
+                          <a:solidFill>
+                            <a:srgbClr val="1F2A24"/>
+                          </a:solidFill>
+                          <a:latin typeface="Meiryo UI" pitchFamily="34" charset="0"/>
+                          <a:ea typeface="Meiryo UI" pitchFamily="34" charset="-122"/>
+                          <a:cs typeface="Meiryo UI" pitchFamily="34" charset="-120"/>
+                        </a:rPr>
+                        <a:t>手順書化率（未文書化業務の解消）</a:t>
+                      </a:r>
+                      <a:endParaRPr lang="en-US" sz="1200" dirty="0">
+                        <a:latin typeface="Meiryo UI" charset="0"/>
+                        <a:ea typeface="Meiryo UI" charset="0"/>
+                        <a:cs typeface="Meiryo UI" charset="0"/>
+                      </a:endParaRPr>
+                    </a:p>
+                  </a:txBody>
+                  <a:tcPr marL="22860" marR="22860" marT="22860" marB="22860" anchor="ctr">
+                    <a:lnL w="6350" cap="flat" cmpd="sng" algn="ctr">
+                      <a:solidFill>
+                        <a:srgbClr val="C9D3CD"/>
+                      </a:solidFill>
+                      <a:prstDash val="solid"/>
+                      <a:round/>
+                      <a:headEnd type="none" w="med" len="med"/>
+                      <a:tailEnd type="none" w="med" len="med"/>
+                    </a:lnL>
+                    <a:lnR w="6350" cap="flat" cmpd="sng" algn="ctr">
+                      <a:solidFill>
+                        <a:srgbClr val="C9D3CD"/>
+                      </a:solidFill>
+                      <a:prstDash val="solid"/>
+                      <a:round/>
+                      <a:headEnd type="none" w="med" len="med"/>
+                      <a:tailEnd type="none" w="med" len="med"/>
+                    </a:lnR>
+                    <a:lnT w="6350" cap="flat" cmpd="sng" algn="ctr">
+                      <a:solidFill>
+                        <a:srgbClr val="C9D3CD"/>
+                      </a:solidFill>
+                      <a:prstDash val="solid"/>
+                      <a:round/>
+                      <a:headEnd type="none" w="med" len="med"/>
+                      <a:tailEnd type="none" w="med" len="med"/>
+                    </a:lnT>
+                    <a:lnB w="6350" cap="flat" cmpd="sng" algn="ctr">
+                      <a:solidFill>
+                        <a:srgbClr val="C9D3CD"/>
+                      </a:solidFill>
+                      <a:prstDash val="solid"/>
+                      <a:round/>
+                      <a:headEnd type="none" w="med" len="med"/>
+                      <a:tailEnd type="none" w="med" len="med"/>
+                    </a:lnB>
+                    <a:solidFill>
+                      <a:srgbClr val="F2F4F3"/>
+                    </a:solidFill>
+                  </a:tcPr>
+                </a:tc>
+                <a:tc>
+                  <a:txBody>
+                    <a:bodyPr/>
+                    <a:lstStyle/>
+                    <a:p>
+                      <a:pPr algn="l" indent="0" marL="0">
+                        <a:buNone/>
+                      </a:pPr>
+                      <a:r>
+                        <a:rPr lang="en-US" sz="830" dirty="0">
+                          <a:solidFill>
+                            <a:srgbClr val="1F2A24"/>
+                          </a:solidFill>
+                          <a:latin typeface="Meiryo UI" pitchFamily="34" charset="0"/>
+                          <a:ea typeface="Meiryo UI" pitchFamily="34" charset="-122"/>
+                          <a:cs typeface="Meiryo UI" pitchFamily="34" charset="-120"/>
+                        </a:rPr>
+                        <a:t>未把握 → 100%（IPは当社帰属）</a:t>
+                      </a:r>
+                      <a:endParaRPr lang="en-US" sz="1200" dirty="0">
+                        <a:latin typeface="Meiryo UI" charset="0"/>
+                        <a:ea typeface="Meiryo UI" charset="0"/>
+                        <a:cs typeface="Meiryo UI" charset="0"/>
+                      </a:endParaRPr>
+                    </a:p>
+                  </a:txBody>
+                  <a:tcPr marL="22860" marR="22860" marT="22860" marB="22860" anchor="ctr">
+                    <a:lnL w="6350" cap="flat" cmpd="sng" algn="ctr">
+                      <a:solidFill>
+                        <a:srgbClr val="C9D3CD"/>
+                      </a:solidFill>
+                      <a:prstDash val="solid"/>
+                      <a:round/>
+                      <a:headEnd type="none" w="med" len="med"/>
+                      <a:tailEnd type="none" w="med" len="med"/>
+                    </a:lnL>
+                    <a:lnR w="6350" cap="flat" cmpd="sng" algn="ctr">
+                      <a:solidFill>
+                        <a:srgbClr val="C9D3CD"/>
+                      </a:solidFill>
+                      <a:prstDash val="solid"/>
+                      <a:round/>
+                      <a:headEnd type="none" w="med" len="med"/>
+                      <a:tailEnd type="none" w="med" len="med"/>
+                    </a:lnR>
+                    <a:lnT w="6350" cap="flat" cmpd="sng" algn="ctr">
+                      <a:solidFill>
+                        <a:srgbClr val="C9D3CD"/>
+                      </a:solidFill>
+                      <a:prstDash val="solid"/>
+                      <a:round/>
+                      <a:headEnd type="none" w="med" len="med"/>
+                      <a:tailEnd type="none" w="med" len="med"/>
+                    </a:lnT>
+                    <a:lnB w="6350" cap="flat" cmpd="sng" algn="ctr">
+                      <a:solidFill>
+                        <a:srgbClr val="C9D3CD"/>
+                      </a:solidFill>
+                      <a:prstDash val="solid"/>
+                      <a:round/>
+                      <a:headEnd type="none" w="med" len="med"/>
+                      <a:tailEnd type="none" w="med" len="med"/>
+                    </a:lnB>
+                    <a:solidFill>
+                      <a:srgbClr val="F2F4F3"/>
+                    </a:solidFill>
+                  </a:tcPr>
+                </a:tc>
+                <a:tc>
+                  <a:txBody>
+                    <a:bodyPr/>
+                    <a:lstStyle/>
+                    <a:p>
+                      <a:pPr algn="l" indent="0" marL="0">
+                        <a:buNone/>
+                      </a:pPr>
+                      <a:r>
+                        <a:rPr lang="en-US" sz="830" dirty="0">
+                          <a:solidFill>
+                            <a:srgbClr val="1F2A24"/>
+                          </a:solidFill>
+                          <a:latin typeface="Meiryo UI" pitchFamily="34" charset="0"/>
+                          <a:ea typeface="Meiryo UI" pitchFamily="34" charset="-122"/>
+                          <a:cs typeface="Meiryo UI" pitchFamily="34" charset="-120"/>
+                        </a:rPr>
+                        <a:t>四半期／</a:t>
+                      </a:r>
+                      <a:endParaRPr lang="en-US" sz="1200" dirty="0">
+                        <a:latin typeface="Meiryo UI" charset="0"/>
+                        <a:ea typeface="Meiryo UI" charset="0"/>
+                        <a:cs typeface="Meiryo UI" charset="0"/>
+                      </a:endParaRPr>
+                    </a:p>
+                    <a:p>
+                      <a:pPr algn="ctr" indent="0" marL="0">
+                        <a:buNone/>
+                      </a:pPr>
+                      <a:r>
+                        <a:rPr lang="en-US" sz="750" b="1" dirty="0">
+                          <a:solidFill>
+                            <a:srgbClr val="1F4E79"/>
+                          </a:solidFill>
+                          <a:latin typeface="Meiryo UI" pitchFamily="34" charset="0"/>
+                          <a:ea typeface="Meiryo UI" pitchFamily="34" charset="-122"/>
+                          <a:cs typeface="Meiryo UI" pitchFamily="34" charset="-120"/>
+                        </a:rPr>
+                        <a:t>先行</a:t>
+                      </a:r>
+                      <a:endParaRPr lang="en-US" sz="1200" dirty="0">
+                        <a:latin typeface="Meiryo UI" charset="0"/>
+                        <a:ea typeface="Meiryo UI" charset="0"/>
+                        <a:cs typeface="Meiryo UI" charset="0"/>
+                      </a:endParaRPr>
+                    </a:p>
+                  </a:txBody>
+                  <a:tcPr marL="22860" marR="22860" marT="22860" marB="22860" anchor="ctr">
+                    <a:lnL w="6350" cap="flat" cmpd="sng" algn="ctr">
+                      <a:solidFill>
+                        <a:srgbClr val="C9D3CD"/>
+                      </a:solidFill>
+                      <a:prstDash val="solid"/>
+                      <a:round/>
+                      <a:headEnd type="none" w="med" len="med"/>
+                      <a:tailEnd type="none" w="med" len="med"/>
+                    </a:lnL>
+                    <a:lnR w="6350" cap="flat" cmpd="sng" algn="ctr">
+                      <a:solidFill>
+                        <a:srgbClr val="C9D3CD"/>
+                      </a:solidFill>
+                      <a:prstDash val="solid"/>
+                      <a:round/>
+                      <a:headEnd type="none" w="med" len="med"/>
+                      <a:tailEnd type="none" w="med" len="med"/>
+                    </a:lnR>
+                    <a:lnT w="6350" cap="flat" cmpd="sng" algn="ctr">
+                      <a:solidFill>
+                        <a:srgbClr val="C9D3CD"/>
+                      </a:solidFill>
+                      <a:prstDash val="solid"/>
+                      <a:round/>
+                      <a:headEnd type="none" w="med" len="med"/>
+                      <a:tailEnd type="none" w="med" len="med"/>
+                    </a:lnT>
+                    <a:lnB w="6350" cap="flat" cmpd="sng" algn="ctr">
+                      <a:solidFill>
+                        <a:srgbClr val="C9D3CD"/>
+                      </a:solidFill>
+                      <a:prstDash val="solid"/>
+                      <a:round/>
+                      <a:headEnd type="none" w="med" len="med"/>
+                      <a:tailEnd type="none" w="med" len="med"/>
+                    </a:lnB>
+                    <a:solidFill>
+                      <a:srgbClr val="F2F4F3"/>
+                    </a:solidFill>
+                  </a:tcPr>
+                </a:tc>
+              </a:tr>
+              <a:tr h="278892">
+                <a:tc>
+                  <a:txBody>
+                    <a:bodyPr/>
+                    <a:lstStyle/>
+                    <a:p>
+                      <a:pPr algn="l" indent="0" marL="0">
+                        <a:buNone/>
+                      </a:pPr>
+                      <a:r>
+                        <a:rPr lang="en-US" sz="830" b="1" dirty="0">
+                          <a:solidFill>
+                            <a:srgbClr val="1F2A24"/>
+                          </a:solidFill>
+                          <a:latin typeface="Meiryo UI" pitchFamily="34" charset="0"/>
+                          <a:ea typeface="Meiryo UI" pitchFamily="34" charset="-122"/>
+                          <a:cs typeface="Meiryo UI" pitchFamily="34" charset="-120"/>
+                        </a:rPr>
+                        <a:t>リスク・ガバナンス（G1）</a:t>
+                      </a:r>
+                      <a:endParaRPr lang="en-US" sz="1200" dirty="0">
+                        <a:latin typeface="Meiryo UI" charset="0"/>
+                        <a:ea typeface="Meiryo UI" charset="0"/>
+                        <a:cs typeface="Meiryo UI" charset="0"/>
+                      </a:endParaRPr>
+                    </a:p>
+                  </a:txBody>
+                  <a:tcPr marL="22860" marR="22860" marT="22860" marB="22860" anchor="ctr">
+                    <a:lnL w="6350" cap="flat" cmpd="sng" algn="ctr">
+                      <a:solidFill>
+                        <a:srgbClr val="C9D3CD"/>
+                      </a:solidFill>
+                      <a:prstDash val="solid"/>
+                      <a:round/>
+                      <a:headEnd type="none" w="med" len="med"/>
+                      <a:tailEnd type="none" w="med" len="med"/>
+                    </a:lnL>
+                    <a:lnR w="6350" cap="flat" cmpd="sng" algn="ctr">
+                      <a:solidFill>
+                        <a:srgbClr val="C9D3CD"/>
+                      </a:solidFill>
+                      <a:prstDash val="solid"/>
+                      <a:round/>
+                      <a:headEnd type="none" w="med" len="med"/>
+                      <a:tailEnd type="none" w="med" len="med"/>
+                    </a:lnR>
+                    <a:lnT w="6350" cap="flat" cmpd="sng" algn="ctr">
+                      <a:solidFill>
+                        <a:srgbClr val="C9D3CD"/>
+                      </a:solidFill>
+                      <a:prstDash val="solid"/>
+                      <a:round/>
+                      <a:headEnd type="none" w="med" len="med"/>
+                      <a:tailEnd type="none" w="med" len="med"/>
+                    </a:lnT>
+                    <a:lnB w="6350" cap="flat" cmpd="sng" algn="ctr">
+                      <a:solidFill>
+                        <a:srgbClr val="C9D3CD"/>
+                      </a:solidFill>
+                      <a:prstDash val="solid"/>
+                      <a:round/>
+                      <a:headEnd type="none" w="med" len="med"/>
+                      <a:tailEnd type="none" w="med" len="med"/>
+                    </a:lnB>
+                    <a:solidFill>
+                      <a:srgbClr val="FBF1E9"/>
+                    </a:solidFill>
+                  </a:tcPr>
+                </a:tc>
+                <a:tc>
+                  <a:txBody>
+                    <a:bodyPr/>
+                    <a:lstStyle/>
+                    <a:p>
+                      <a:pPr algn="l" indent="0" marL="0">
+                        <a:buNone/>
+                      </a:pPr>
+                      <a:r>
+                        <a:rPr lang="en-US" sz="830" b="1" dirty="0">
+                          <a:solidFill>
+                            <a:srgbClr val="1F2A24"/>
+                          </a:solidFill>
+                          <a:latin typeface="Meiryo UI" pitchFamily="34" charset="0"/>
+                          <a:ea typeface="Meiryo UI" pitchFamily="34" charset="-122"/>
+                          <a:cs typeface="Meiryo UI" pitchFamily="34" charset="-120"/>
+                        </a:rPr>
+                        <a:t>IT統制関連の監査指摘件数</a:t>
+                      </a:r>
+                      <a:endParaRPr lang="en-US" sz="1200" dirty="0">
+                        <a:latin typeface="Meiryo UI" charset="0"/>
+                        <a:ea typeface="Meiryo UI" charset="0"/>
+                        <a:cs typeface="Meiryo UI" charset="0"/>
+                      </a:endParaRPr>
+                    </a:p>
+                  </a:txBody>
+                  <a:tcPr marL="22860" marR="22860" marT="22860" marB="22860" anchor="ctr">
+                    <a:lnL w="6350" cap="flat" cmpd="sng" algn="ctr">
+                      <a:solidFill>
+                        <a:srgbClr val="C9D3CD"/>
+                      </a:solidFill>
+                      <a:prstDash val="solid"/>
+                      <a:round/>
+                      <a:headEnd type="none" w="med" len="med"/>
+                      <a:tailEnd type="none" w="med" len="med"/>
+                    </a:lnL>
+                    <a:lnR w="6350" cap="flat" cmpd="sng" algn="ctr">
+                      <a:solidFill>
+                        <a:srgbClr val="C9D3CD"/>
+                      </a:solidFill>
+                      <a:prstDash val="solid"/>
+                      <a:round/>
+                      <a:headEnd type="none" w="med" len="med"/>
+                      <a:tailEnd type="none" w="med" len="med"/>
+                    </a:lnR>
+                    <a:lnT w="6350" cap="flat" cmpd="sng" algn="ctr">
+                      <a:solidFill>
+                        <a:srgbClr val="C9D3CD"/>
+                      </a:solidFill>
+                      <a:prstDash val="solid"/>
+                      <a:round/>
+                      <a:headEnd type="none" w="med" len="med"/>
+                      <a:tailEnd type="none" w="med" len="med"/>
+                    </a:lnT>
+                    <a:lnB w="6350" cap="flat" cmpd="sng" algn="ctr">
+                      <a:solidFill>
+                        <a:srgbClr val="C9D3CD"/>
+                      </a:solidFill>
+                      <a:prstDash val="solid"/>
+                      <a:round/>
+                      <a:headEnd type="none" w="med" len="med"/>
+                      <a:tailEnd type="none" w="med" len="med"/>
+                    </a:lnB>
+                    <a:solidFill>
+                      <a:srgbClr val="FFFFFF"/>
+                    </a:solidFill>
+                  </a:tcPr>
+                </a:tc>
+                <a:tc>
+                  <a:txBody>
+                    <a:bodyPr/>
+                    <a:lstStyle/>
+                    <a:p>
+                      <a:pPr algn="l" indent="0" marL="0">
+                        <a:buNone/>
+                      </a:pPr>
+                      <a:r>
+                        <a:rPr lang="en-US" sz="830" dirty="0">
+                          <a:solidFill>
+                            <a:srgbClr val="1F2A24"/>
+                          </a:solidFill>
+                          <a:latin typeface="Meiryo UI" pitchFamily="34" charset="0"/>
+                          <a:ea typeface="Meiryo UI" pitchFamily="34" charset="-122"/>
+                          <a:cs typeface="Meiryo UI" pitchFamily="34" charset="-120"/>
+                        </a:rPr>
+                        <a:t>Phase 0で棚卸し → ゼロを維持</a:t>
+                      </a:r>
+                      <a:endParaRPr lang="en-US" sz="1200" dirty="0">
+                        <a:latin typeface="Meiryo UI" charset="0"/>
+                        <a:ea typeface="Meiryo UI" charset="0"/>
+                        <a:cs typeface="Meiryo UI" charset="0"/>
+                      </a:endParaRPr>
+                    </a:p>
+                  </a:txBody>
+                  <a:tcPr marL="22860" marR="22860" marT="22860" marB="22860" anchor="ctr">
+                    <a:lnL w="6350" cap="flat" cmpd="sng" algn="ctr">
+                      <a:solidFill>
+                        <a:srgbClr val="C9D3CD"/>
+                      </a:solidFill>
+                      <a:prstDash val="solid"/>
+                      <a:round/>
+                      <a:headEnd type="none" w="med" len="med"/>
+                      <a:tailEnd type="none" w="med" len="med"/>
+                    </a:lnL>
+                    <a:lnR w="6350" cap="flat" cmpd="sng" algn="ctr">
+                      <a:solidFill>
+                        <a:srgbClr val="C9D3CD"/>
+                      </a:solidFill>
+                      <a:prstDash val="solid"/>
+                      <a:round/>
+                      <a:headEnd type="none" w="med" len="med"/>
+                      <a:tailEnd type="none" w="med" len="med"/>
+                    </a:lnR>
+                    <a:lnT w="6350" cap="flat" cmpd="sng" algn="ctr">
+                      <a:solidFill>
+                        <a:srgbClr val="C9D3CD"/>
+                      </a:solidFill>
+                      <a:prstDash val="solid"/>
+                      <a:round/>
+                      <a:headEnd type="none" w="med" len="med"/>
+                      <a:tailEnd type="none" w="med" len="med"/>
+                    </a:lnT>
+                    <a:lnB w="6350" cap="flat" cmpd="sng" algn="ctr">
+                      <a:solidFill>
+                        <a:srgbClr val="C9D3CD"/>
+                      </a:solidFill>
+                      <a:prstDash val="solid"/>
+                      <a:round/>
+                      <a:headEnd type="none" w="med" len="med"/>
+                      <a:tailEnd type="none" w="med" len="med"/>
+                    </a:lnB>
+                    <a:solidFill>
+                      <a:srgbClr val="FFFFFF"/>
+                    </a:solidFill>
+                  </a:tcPr>
+                </a:tc>
+                <a:tc>
+                  <a:txBody>
+                    <a:bodyPr/>
+                    <a:lstStyle/>
+                    <a:p>
+                      <a:pPr algn="l" indent="0" marL="0">
+                        <a:buNone/>
+                      </a:pPr>
+                      <a:r>
+                        <a:rPr lang="en-US" sz="830" dirty="0">
+                          <a:solidFill>
+                            <a:srgbClr val="1F2A24"/>
+                          </a:solidFill>
+                          <a:latin typeface="Meiryo UI" pitchFamily="34" charset="0"/>
+                          <a:ea typeface="Meiryo UI" pitchFamily="34" charset="-122"/>
+                          <a:cs typeface="Meiryo UI" pitchFamily="34" charset="-120"/>
+                        </a:rPr>
+                        <a:t>年次／</a:t>
+                      </a:r>
+                      <a:endParaRPr lang="en-US" sz="1200" dirty="0">
+                        <a:latin typeface="Meiryo UI" charset="0"/>
+                        <a:ea typeface="Meiryo UI" charset="0"/>
+                        <a:cs typeface="Meiryo UI" charset="0"/>
+                      </a:endParaRPr>
+                    </a:p>
+                    <a:p>
+                      <a:pPr algn="ctr" indent="0" marL="0">
+                        <a:buNone/>
+                      </a:pPr>
+                      <a:r>
+                        <a:rPr lang="en-US" sz="750" b="1" dirty="0">
                           <a:solidFill>
                             <a:srgbClr val="5A6660"/>
                           </a:solidFill>
@@ -3675,7 +6035,7 @@
                       </a:endParaRPr>
                     </a:p>
                   </a:txBody>
-                  <a:tcPr marL="32004" marR="32004" marT="32004" marB="32004" anchor="ctr">
+                  <a:tcPr marL="22860" marR="22860" marT="22860" marB="22860" anchor="ctr">
                     <a:lnL w="6350" cap="flat" cmpd="sng" algn="ctr">
                       <a:solidFill>
                         <a:srgbClr val="C9D3CD"/>
@@ -3714,1481 +6074,6 @@
                     </a:lnB>
                     <a:solidFill>
                       <a:srgbClr val="FFFFFF"/>
-                    </a:solidFill>
-                  </a:tcPr>
-                </a:tc>
-              </a:tr>
-              <a:tr h="333756">
-                <a:tc>
-                  <a:txBody>
-                    <a:bodyPr/>
-                    <a:lstStyle/>
-                    <a:p>
-                      <a:pPr algn="l" indent="0" marL="0">
-                        <a:buNone/>
-                      </a:pPr>
-                      <a:r>
-                        <a:rPr lang="en-US" sz="880" b="1" dirty="0">
-                          <a:solidFill>
-                            <a:srgbClr val="1F2A24"/>
-                          </a:solidFill>
-                          <a:latin typeface="Meiryo UI" pitchFamily="34" charset="0"/>
-                          <a:ea typeface="Meiryo UI" pitchFamily="34" charset="-122"/>
-                          <a:cs typeface="Meiryo UI" pitchFamily="34" charset="-120"/>
-                        </a:rPr>
-                        <a:t>人材・組織（G4）</a:t>
-                      </a:r>
-                      <a:endParaRPr lang="en-US" sz="1200" dirty="0">
-                        <a:latin typeface="Meiryo UI" charset="0"/>
-                        <a:ea typeface="Meiryo UI" charset="0"/>
-                        <a:cs typeface="Meiryo UI" charset="0"/>
-                      </a:endParaRPr>
-                    </a:p>
-                  </a:txBody>
-                  <a:tcPr marL="32004" marR="32004" marT="32004" marB="32004" anchor="ctr">
-                    <a:lnL w="6350" cap="flat" cmpd="sng" algn="ctr">
-                      <a:solidFill>
-                        <a:srgbClr val="C9D3CD"/>
-                      </a:solidFill>
-                      <a:prstDash val="solid"/>
-                      <a:round/>
-                      <a:headEnd type="none" w="med" len="med"/>
-                      <a:tailEnd type="none" w="med" len="med"/>
-                    </a:lnL>
-                    <a:lnR w="6350" cap="flat" cmpd="sng" algn="ctr">
-                      <a:solidFill>
-                        <a:srgbClr val="C9D3CD"/>
-                      </a:solidFill>
-                      <a:prstDash val="solid"/>
-                      <a:round/>
-                      <a:headEnd type="none" w="med" len="med"/>
-                      <a:tailEnd type="none" w="med" len="med"/>
-                    </a:lnR>
-                    <a:lnT w="6350" cap="flat" cmpd="sng" algn="ctr">
-                      <a:solidFill>
-                        <a:srgbClr val="C9D3CD"/>
-                      </a:solidFill>
-                      <a:prstDash val="solid"/>
-                      <a:round/>
-                      <a:headEnd type="none" w="med" len="med"/>
-                      <a:tailEnd type="none" w="med" len="med"/>
-                    </a:lnT>
-                    <a:lnB w="6350" cap="flat" cmpd="sng" algn="ctr">
-                      <a:solidFill>
-                        <a:srgbClr val="C9D3CD"/>
-                      </a:solidFill>
-                      <a:prstDash val="solid"/>
-                      <a:round/>
-                      <a:headEnd type="none" w="med" len="med"/>
-                      <a:tailEnd type="none" w="med" len="med"/>
-                    </a:lnB>
-                    <a:solidFill>
-                      <a:srgbClr val="E9F5EE"/>
-                    </a:solidFill>
-                  </a:tcPr>
-                </a:tc>
-                <a:tc>
-                  <a:txBody>
-                    <a:bodyPr/>
-                    <a:lstStyle/>
-                    <a:p>
-                      <a:pPr algn="l" indent="0" marL="0">
-                        <a:buNone/>
-                      </a:pPr>
-                      <a:r>
-                        <a:rPr lang="en-US" sz="880" b="1" dirty="0">
-                          <a:solidFill>
-                            <a:srgbClr val="1F2A24"/>
-                          </a:solidFill>
-                          <a:latin typeface="Meiryo UI" pitchFamily="34" charset="0"/>
-                          <a:ea typeface="Meiryo UI" pitchFamily="34" charset="-122"/>
-                          <a:cs typeface="Meiryo UI" pitchFamily="34" charset="-120"/>
-                        </a:rPr>
-                        <a:t>企画業務への再配置FTE（削減はしない）</a:t>
-                      </a:r>
-                      <a:endParaRPr lang="en-US" sz="1200" dirty="0">
-                        <a:latin typeface="Meiryo UI" charset="0"/>
-                        <a:ea typeface="Meiryo UI" charset="0"/>
-                        <a:cs typeface="Meiryo UI" charset="0"/>
-                      </a:endParaRPr>
-                    </a:p>
-                  </a:txBody>
-                  <a:tcPr marL="32004" marR="32004" marT="32004" marB="32004" anchor="ctr">
-                    <a:lnL w="6350" cap="flat" cmpd="sng" algn="ctr">
-                      <a:solidFill>
-                        <a:srgbClr val="C9D3CD"/>
-                      </a:solidFill>
-                      <a:prstDash val="solid"/>
-                      <a:round/>
-                      <a:headEnd type="none" w="med" len="med"/>
-                      <a:tailEnd type="none" w="med" len="med"/>
-                    </a:lnL>
-                    <a:lnR w="6350" cap="flat" cmpd="sng" algn="ctr">
-                      <a:solidFill>
-                        <a:srgbClr val="C9D3CD"/>
-                      </a:solidFill>
-                      <a:prstDash val="solid"/>
-                      <a:round/>
-                      <a:headEnd type="none" w="med" len="med"/>
-                      <a:tailEnd type="none" w="med" len="med"/>
-                    </a:lnR>
-                    <a:lnT w="6350" cap="flat" cmpd="sng" algn="ctr">
-                      <a:solidFill>
-                        <a:srgbClr val="C9D3CD"/>
-                      </a:solidFill>
-                      <a:prstDash val="solid"/>
-                      <a:round/>
-                      <a:headEnd type="none" w="med" len="med"/>
-                      <a:tailEnd type="none" w="med" len="med"/>
-                    </a:lnT>
-                    <a:lnB w="6350" cap="flat" cmpd="sng" algn="ctr">
-                      <a:solidFill>
-                        <a:srgbClr val="C9D3CD"/>
-                      </a:solidFill>
-                      <a:prstDash val="solid"/>
-                      <a:round/>
-                      <a:headEnd type="none" w="med" len="med"/>
-                      <a:tailEnd type="none" w="med" len="med"/>
-                    </a:lnB>
-                    <a:solidFill>
-                      <a:srgbClr val="F2F4F3"/>
-                    </a:solidFill>
-                  </a:tcPr>
-                </a:tc>
-                <a:tc>
-                  <a:txBody>
-                    <a:bodyPr/>
-                    <a:lstStyle/>
-                    <a:p>
-                      <a:pPr algn="l" indent="0" marL="0">
-                        <a:buNone/>
-                      </a:pPr>
-                      <a:r>
-                        <a:rPr lang="en-US" sz="880" dirty="0">
-                          <a:solidFill>
-                            <a:srgbClr val="1F2A24"/>
-                          </a:solidFill>
-                          <a:latin typeface="Meiryo UI" pitchFamily="34" charset="0"/>
-                          <a:ea typeface="Meiryo UI" pitchFamily="34" charset="-122"/>
-                          <a:cs typeface="Meiryo UI" pitchFamily="34" charset="-120"/>
-                        </a:rPr>
-                        <a:t>0 → FY27：2FTE → FY29：12FTE</a:t>
-                      </a:r>
-                      <a:endParaRPr lang="en-US" sz="1200" dirty="0">
-                        <a:latin typeface="Meiryo UI" charset="0"/>
-                        <a:ea typeface="Meiryo UI" charset="0"/>
-                        <a:cs typeface="Meiryo UI" charset="0"/>
-                      </a:endParaRPr>
-                    </a:p>
-                  </a:txBody>
-                  <a:tcPr marL="32004" marR="32004" marT="32004" marB="32004" anchor="ctr">
-                    <a:lnL w="6350" cap="flat" cmpd="sng" algn="ctr">
-                      <a:solidFill>
-                        <a:srgbClr val="C9D3CD"/>
-                      </a:solidFill>
-                      <a:prstDash val="solid"/>
-                      <a:round/>
-                      <a:headEnd type="none" w="med" len="med"/>
-                      <a:tailEnd type="none" w="med" len="med"/>
-                    </a:lnL>
-                    <a:lnR w="6350" cap="flat" cmpd="sng" algn="ctr">
-                      <a:solidFill>
-                        <a:srgbClr val="C9D3CD"/>
-                      </a:solidFill>
-                      <a:prstDash val="solid"/>
-                      <a:round/>
-                      <a:headEnd type="none" w="med" len="med"/>
-                      <a:tailEnd type="none" w="med" len="med"/>
-                    </a:lnR>
-                    <a:lnT w="6350" cap="flat" cmpd="sng" algn="ctr">
-                      <a:solidFill>
-                        <a:srgbClr val="C9D3CD"/>
-                      </a:solidFill>
-                      <a:prstDash val="solid"/>
-                      <a:round/>
-                      <a:headEnd type="none" w="med" len="med"/>
-                      <a:tailEnd type="none" w="med" len="med"/>
-                    </a:lnT>
-                    <a:lnB w="6350" cap="flat" cmpd="sng" algn="ctr">
-                      <a:solidFill>
-                        <a:srgbClr val="C9D3CD"/>
-                      </a:solidFill>
-                      <a:prstDash val="solid"/>
-                      <a:round/>
-                      <a:headEnd type="none" w="med" len="med"/>
-                      <a:tailEnd type="none" w="med" len="med"/>
-                    </a:lnB>
-                    <a:solidFill>
-                      <a:srgbClr val="F2F4F3"/>
-                    </a:solidFill>
-                  </a:tcPr>
-                </a:tc>
-                <a:tc>
-                  <a:txBody>
-                    <a:bodyPr/>
-                    <a:lstStyle/>
-                    <a:p>
-                      <a:pPr algn="l" indent="0" marL="0">
-                        <a:buNone/>
-                      </a:pPr>
-                      <a:r>
-                        <a:rPr lang="en-US" sz="880" dirty="0">
-                          <a:solidFill>
-                            <a:srgbClr val="1F2A24"/>
-                          </a:solidFill>
-                          <a:latin typeface="Meiryo UI" pitchFamily="34" charset="0"/>
-                          <a:ea typeface="Meiryo UI" pitchFamily="34" charset="-122"/>
-                          <a:cs typeface="Meiryo UI" pitchFamily="34" charset="-120"/>
-                        </a:rPr>
-                        <a:t>半期／</a:t>
-                      </a:r>
-                      <a:endParaRPr lang="en-US" sz="1200" dirty="0">
-                        <a:latin typeface="Meiryo UI" charset="0"/>
-                        <a:ea typeface="Meiryo UI" charset="0"/>
-                        <a:cs typeface="Meiryo UI" charset="0"/>
-                      </a:endParaRPr>
-                    </a:p>
-                    <a:p>
-                      <a:pPr algn="ctr" indent="0" marL="0">
-                        <a:buNone/>
-                      </a:pPr>
-                      <a:r>
-                        <a:rPr lang="en-US" sz="800" b="1" dirty="0">
-                          <a:solidFill>
-                            <a:srgbClr val="5A6660"/>
-                          </a:solidFill>
-                          <a:latin typeface="Meiryo UI" pitchFamily="34" charset="0"/>
-                          <a:ea typeface="Meiryo UI" pitchFamily="34" charset="-122"/>
-                          <a:cs typeface="Meiryo UI" pitchFamily="34" charset="-120"/>
-                        </a:rPr>
-                        <a:t>遅行</a:t>
-                      </a:r>
-                      <a:endParaRPr lang="en-US" sz="1200" dirty="0">
-                        <a:latin typeface="Meiryo UI" charset="0"/>
-                        <a:ea typeface="Meiryo UI" charset="0"/>
-                        <a:cs typeface="Meiryo UI" charset="0"/>
-                      </a:endParaRPr>
-                    </a:p>
-                  </a:txBody>
-                  <a:tcPr marL="32004" marR="32004" marT="32004" marB="32004" anchor="ctr">
-                    <a:lnL w="6350" cap="flat" cmpd="sng" algn="ctr">
-                      <a:solidFill>
-                        <a:srgbClr val="C9D3CD"/>
-                      </a:solidFill>
-                      <a:prstDash val="solid"/>
-                      <a:round/>
-                      <a:headEnd type="none" w="med" len="med"/>
-                      <a:tailEnd type="none" w="med" len="med"/>
-                    </a:lnL>
-                    <a:lnR w="6350" cap="flat" cmpd="sng" algn="ctr">
-                      <a:solidFill>
-                        <a:srgbClr val="C9D3CD"/>
-                      </a:solidFill>
-                      <a:prstDash val="solid"/>
-                      <a:round/>
-                      <a:headEnd type="none" w="med" len="med"/>
-                      <a:tailEnd type="none" w="med" len="med"/>
-                    </a:lnR>
-                    <a:lnT w="6350" cap="flat" cmpd="sng" algn="ctr">
-                      <a:solidFill>
-                        <a:srgbClr val="C9D3CD"/>
-                      </a:solidFill>
-                      <a:prstDash val="solid"/>
-                      <a:round/>
-                      <a:headEnd type="none" w="med" len="med"/>
-                      <a:tailEnd type="none" w="med" len="med"/>
-                    </a:lnT>
-                    <a:lnB w="6350" cap="flat" cmpd="sng" algn="ctr">
-                      <a:solidFill>
-                        <a:srgbClr val="C9D3CD"/>
-                      </a:solidFill>
-                      <a:prstDash val="solid"/>
-                      <a:round/>
-                      <a:headEnd type="none" w="med" len="med"/>
-                      <a:tailEnd type="none" w="med" len="med"/>
-                    </a:lnB>
-                    <a:solidFill>
-                      <a:srgbClr val="F2F4F3"/>
-                    </a:solidFill>
-                  </a:tcPr>
-                </a:tc>
-              </a:tr>
-              <a:tr h="333756">
-                <a:tc>
-                  <a:txBody>
-                    <a:bodyPr/>
-                    <a:lstStyle/>
-                    <a:p>
-                      <a:pPr algn="l" indent="0" marL="0">
-                        <a:buNone/>
-                      </a:pPr>
-                      <a:r>
-                        <a:rPr lang="en-US" sz="880" b="1" dirty="0">
-                          <a:solidFill>
-                            <a:srgbClr val="1F2A24"/>
-                          </a:solidFill>
-                          <a:latin typeface="Meiryo UI" pitchFamily="34" charset="0"/>
-                          <a:ea typeface="Meiryo UI" pitchFamily="34" charset="-122"/>
-                          <a:cs typeface="Meiryo UI" pitchFamily="34" charset="-120"/>
-                        </a:rPr>
-                        <a:t>人材・組織（G4）</a:t>
-                      </a:r>
-                      <a:endParaRPr lang="en-US" sz="1200" dirty="0">
-                        <a:latin typeface="Meiryo UI" charset="0"/>
-                        <a:ea typeface="Meiryo UI" charset="0"/>
-                        <a:cs typeface="Meiryo UI" charset="0"/>
-                      </a:endParaRPr>
-                    </a:p>
-                  </a:txBody>
-                  <a:tcPr marL="32004" marR="32004" marT="32004" marB="32004" anchor="ctr">
-                    <a:lnL w="6350" cap="flat" cmpd="sng" algn="ctr">
-                      <a:solidFill>
-                        <a:srgbClr val="C9D3CD"/>
-                      </a:solidFill>
-                      <a:prstDash val="solid"/>
-                      <a:round/>
-                      <a:headEnd type="none" w="med" len="med"/>
-                      <a:tailEnd type="none" w="med" len="med"/>
-                    </a:lnL>
-                    <a:lnR w="6350" cap="flat" cmpd="sng" algn="ctr">
-                      <a:solidFill>
-                        <a:srgbClr val="C9D3CD"/>
-                      </a:solidFill>
-                      <a:prstDash val="solid"/>
-                      <a:round/>
-                      <a:headEnd type="none" w="med" len="med"/>
-                      <a:tailEnd type="none" w="med" len="med"/>
-                    </a:lnR>
-                    <a:lnT w="6350" cap="flat" cmpd="sng" algn="ctr">
-                      <a:solidFill>
-                        <a:srgbClr val="C9D3CD"/>
-                      </a:solidFill>
-                      <a:prstDash val="solid"/>
-                      <a:round/>
-                      <a:headEnd type="none" w="med" len="med"/>
-                      <a:tailEnd type="none" w="med" len="med"/>
-                    </a:lnT>
-                    <a:lnB w="6350" cap="flat" cmpd="sng" algn="ctr">
-                      <a:solidFill>
-                        <a:srgbClr val="C9D3CD"/>
-                      </a:solidFill>
-                      <a:prstDash val="solid"/>
-                      <a:round/>
-                      <a:headEnd type="none" w="med" len="med"/>
-                      <a:tailEnd type="none" w="med" len="med"/>
-                    </a:lnB>
-                    <a:solidFill>
-                      <a:srgbClr val="E9F5EE"/>
-                    </a:solidFill>
-                  </a:tcPr>
-                </a:tc>
-                <a:tc>
-                  <a:txBody>
-                    <a:bodyPr/>
-                    <a:lstStyle/>
-                    <a:p>
-                      <a:pPr algn="l" indent="0" marL="0">
-                        <a:buNone/>
-                      </a:pPr>
-                      <a:r>
-                        <a:rPr lang="en-US" sz="880" b="1" dirty="0">
-                          <a:solidFill>
-                            <a:srgbClr val="1F2A24"/>
-                          </a:solidFill>
-                          <a:latin typeface="Meiryo UI" pitchFamily="34" charset="0"/>
-                          <a:ea typeface="Meiryo UI" pitchFamily="34" charset="-122"/>
-                          <a:cs typeface="Meiryo UI" pitchFamily="34" charset="-120"/>
-                        </a:rPr>
-                        <a:t>運用起因の時間外労働</a:t>
-                      </a:r>
-                      <a:endParaRPr lang="en-US" sz="1200" dirty="0">
-                        <a:latin typeface="Meiryo UI" charset="0"/>
-                        <a:ea typeface="Meiryo UI" charset="0"/>
-                        <a:cs typeface="Meiryo UI" charset="0"/>
-                      </a:endParaRPr>
-                    </a:p>
-                  </a:txBody>
-                  <a:tcPr marL="32004" marR="32004" marT="32004" marB="32004" anchor="ctr">
-                    <a:lnL w="6350" cap="flat" cmpd="sng" algn="ctr">
-                      <a:solidFill>
-                        <a:srgbClr val="C9D3CD"/>
-                      </a:solidFill>
-                      <a:prstDash val="solid"/>
-                      <a:round/>
-                      <a:headEnd type="none" w="med" len="med"/>
-                      <a:tailEnd type="none" w="med" len="med"/>
-                    </a:lnL>
-                    <a:lnR w="6350" cap="flat" cmpd="sng" algn="ctr">
-                      <a:solidFill>
-                        <a:srgbClr val="C9D3CD"/>
-                      </a:solidFill>
-                      <a:prstDash val="solid"/>
-                      <a:round/>
-                      <a:headEnd type="none" w="med" len="med"/>
-                      <a:tailEnd type="none" w="med" len="med"/>
-                    </a:lnR>
-                    <a:lnT w="6350" cap="flat" cmpd="sng" algn="ctr">
-                      <a:solidFill>
-                        <a:srgbClr val="C9D3CD"/>
-                      </a:solidFill>
-                      <a:prstDash val="solid"/>
-                      <a:round/>
-                      <a:headEnd type="none" w="med" len="med"/>
-                      <a:tailEnd type="none" w="med" len="med"/>
-                    </a:lnT>
-                    <a:lnB w="6350" cap="flat" cmpd="sng" algn="ctr">
-                      <a:solidFill>
-                        <a:srgbClr val="C9D3CD"/>
-                      </a:solidFill>
-                      <a:prstDash val="solid"/>
-                      <a:round/>
-                      <a:headEnd type="none" w="med" len="med"/>
-                      <a:tailEnd type="none" w="med" len="med"/>
-                    </a:lnB>
-                    <a:solidFill>
-                      <a:srgbClr val="FFFFFF"/>
-                    </a:solidFill>
-                  </a:tcPr>
-                </a:tc>
-                <a:tc>
-                  <a:txBody>
-                    <a:bodyPr/>
-                    <a:lstStyle/>
-                    <a:p>
-                      <a:pPr algn="l" indent="0" marL="0">
-                        <a:buNone/>
-                      </a:pPr>
-                      <a:r>
-                        <a:rPr lang="en-US" sz="880" dirty="0">
-                          <a:solidFill>
-                            <a:srgbClr val="1F2A24"/>
-                          </a:solidFill>
-                          <a:latin typeface="Meiryo UI" pitchFamily="34" charset="0"/>
-                          <a:ea typeface="Meiryo UI" pitchFamily="34" charset="-122"/>
-                          <a:cs typeface="Meiryo UI" pitchFamily="34" charset="-120"/>
-                        </a:rPr>
-                        <a:t>Phase 0で実測 → 継続低減（毎月モニタリング）</a:t>
-                      </a:r>
-                      <a:endParaRPr lang="en-US" sz="1200" dirty="0">
-                        <a:latin typeface="Meiryo UI" charset="0"/>
-                        <a:ea typeface="Meiryo UI" charset="0"/>
-                        <a:cs typeface="Meiryo UI" charset="0"/>
-                      </a:endParaRPr>
-                    </a:p>
-                  </a:txBody>
-                  <a:tcPr marL="32004" marR="32004" marT="32004" marB="32004" anchor="ctr">
-                    <a:lnL w="6350" cap="flat" cmpd="sng" algn="ctr">
-                      <a:solidFill>
-                        <a:srgbClr val="C9D3CD"/>
-                      </a:solidFill>
-                      <a:prstDash val="solid"/>
-                      <a:round/>
-                      <a:headEnd type="none" w="med" len="med"/>
-                      <a:tailEnd type="none" w="med" len="med"/>
-                    </a:lnL>
-                    <a:lnR w="6350" cap="flat" cmpd="sng" algn="ctr">
-                      <a:solidFill>
-                        <a:srgbClr val="C9D3CD"/>
-                      </a:solidFill>
-                      <a:prstDash val="solid"/>
-                      <a:round/>
-                      <a:headEnd type="none" w="med" len="med"/>
-                      <a:tailEnd type="none" w="med" len="med"/>
-                    </a:lnR>
-                    <a:lnT w="6350" cap="flat" cmpd="sng" algn="ctr">
-                      <a:solidFill>
-                        <a:srgbClr val="C9D3CD"/>
-                      </a:solidFill>
-                      <a:prstDash val="solid"/>
-                      <a:round/>
-                      <a:headEnd type="none" w="med" len="med"/>
-                      <a:tailEnd type="none" w="med" len="med"/>
-                    </a:lnT>
-                    <a:lnB w="6350" cap="flat" cmpd="sng" algn="ctr">
-                      <a:solidFill>
-                        <a:srgbClr val="C9D3CD"/>
-                      </a:solidFill>
-                      <a:prstDash val="solid"/>
-                      <a:round/>
-                      <a:headEnd type="none" w="med" len="med"/>
-                      <a:tailEnd type="none" w="med" len="med"/>
-                    </a:lnB>
-                    <a:solidFill>
-                      <a:srgbClr val="FFFFFF"/>
-                    </a:solidFill>
-                  </a:tcPr>
-                </a:tc>
-                <a:tc>
-                  <a:txBody>
-                    <a:bodyPr/>
-                    <a:lstStyle/>
-                    <a:p>
-                      <a:pPr algn="l" indent="0" marL="0">
-                        <a:buNone/>
-                      </a:pPr>
-                      <a:r>
-                        <a:rPr lang="en-US" sz="880" dirty="0">
-                          <a:solidFill>
-                            <a:srgbClr val="1F2A24"/>
-                          </a:solidFill>
-                          <a:latin typeface="Meiryo UI" pitchFamily="34" charset="0"/>
-                          <a:ea typeface="Meiryo UI" pitchFamily="34" charset="-122"/>
-                          <a:cs typeface="Meiryo UI" pitchFamily="34" charset="-120"/>
-                        </a:rPr>
-                        <a:t>月次／</a:t>
-                      </a:r>
-                      <a:endParaRPr lang="en-US" sz="1200" dirty="0">
-                        <a:latin typeface="Meiryo UI" charset="0"/>
-                        <a:ea typeface="Meiryo UI" charset="0"/>
-                        <a:cs typeface="Meiryo UI" charset="0"/>
-                      </a:endParaRPr>
-                    </a:p>
-                    <a:p>
-                      <a:pPr algn="ctr" indent="0" marL="0">
-                        <a:buNone/>
-                      </a:pPr>
-                      <a:r>
-                        <a:rPr lang="en-US" sz="800" b="1" dirty="0">
-                          <a:solidFill>
-                            <a:srgbClr val="1F4E79"/>
-                          </a:solidFill>
-                          <a:latin typeface="Meiryo UI" pitchFamily="34" charset="0"/>
-                          <a:ea typeface="Meiryo UI" pitchFamily="34" charset="-122"/>
-                          <a:cs typeface="Meiryo UI" pitchFamily="34" charset="-120"/>
-                        </a:rPr>
-                        <a:t>先行</a:t>
-                      </a:r>
-                      <a:endParaRPr lang="en-US" sz="1200" dirty="0">
-                        <a:latin typeface="Meiryo UI" charset="0"/>
-                        <a:ea typeface="Meiryo UI" charset="0"/>
-                        <a:cs typeface="Meiryo UI" charset="0"/>
-                      </a:endParaRPr>
-                    </a:p>
-                  </a:txBody>
-                  <a:tcPr marL="32004" marR="32004" marT="32004" marB="32004" anchor="ctr">
-                    <a:lnL w="6350" cap="flat" cmpd="sng" algn="ctr">
-                      <a:solidFill>
-                        <a:srgbClr val="C9D3CD"/>
-                      </a:solidFill>
-                      <a:prstDash val="solid"/>
-                      <a:round/>
-                      <a:headEnd type="none" w="med" len="med"/>
-                      <a:tailEnd type="none" w="med" len="med"/>
-                    </a:lnL>
-                    <a:lnR w="6350" cap="flat" cmpd="sng" algn="ctr">
-                      <a:solidFill>
-                        <a:srgbClr val="C9D3CD"/>
-                      </a:solidFill>
-                      <a:prstDash val="solid"/>
-                      <a:round/>
-                      <a:headEnd type="none" w="med" len="med"/>
-                      <a:tailEnd type="none" w="med" len="med"/>
-                    </a:lnR>
-                    <a:lnT w="6350" cap="flat" cmpd="sng" algn="ctr">
-                      <a:solidFill>
-                        <a:srgbClr val="C9D3CD"/>
-                      </a:solidFill>
-                      <a:prstDash val="solid"/>
-                      <a:round/>
-                      <a:headEnd type="none" w="med" len="med"/>
-                      <a:tailEnd type="none" w="med" len="med"/>
-                    </a:lnT>
-                    <a:lnB w="6350" cap="flat" cmpd="sng" algn="ctr">
-                      <a:solidFill>
-                        <a:srgbClr val="C9D3CD"/>
-                      </a:solidFill>
-                      <a:prstDash val="solid"/>
-                      <a:round/>
-                      <a:headEnd type="none" w="med" len="med"/>
-                      <a:tailEnd type="none" w="med" len="med"/>
-                    </a:lnB>
-                    <a:solidFill>
-                      <a:srgbClr val="FFFFFF"/>
-                    </a:solidFill>
-                  </a:tcPr>
-                </a:tc>
-              </a:tr>
-              <a:tr h="333756">
-                <a:tc>
-                  <a:txBody>
-                    <a:bodyPr/>
-                    <a:lstStyle/>
-                    <a:p>
-                      <a:pPr algn="l" indent="0" marL="0">
-                        <a:buNone/>
-                      </a:pPr>
-                      <a:r>
-                        <a:rPr lang="en-US" sz="880" b="1" dirty="0">
-                          <a:solidFill>
-                            <a:srgbClr val="1F2A24"/>
-                          </a:solidFill>
-                          <a:latin typeface="Meiryo UI" pitchFamily="34" charset="0"/>
-                          <a:ea typeface="Meiryo UI" pitchFamily="34" charset="-122"/>
-                          <a:cs typeface="Meiryo UI" pitchFamily="34" charset="-120"/>
-                        </a:rPr>
-                        <a:t>リスク・ガバナンス（G1）</a:t>
-                      </a:r>
-                      <a:endParaRPr lang="en-US" sz="1200" dirty="0">
-                        <a:latin typeface="Meiryo UI" charset="0"/>
-                        <a:ea typeface="Meiryo UI" charset="0"/>
-                        <a:cs typeface="Meiryo UI" charset="0"/>
-                      </a:endParaRPr>
-                    </a:p>
-                  </a:txBody>
-                  <a:tcPr marL="32004" marR="32004" marT="32004" marB="32004" anchor="ctr">
-                    <a:lnL w="6350" cap="flat" cmpd="sng" algn="ctr">
-                      <a:solidFill>
-                        <a:srgbClr val="C9D3CD"/>
-                      </a:solidFill>
-                      <a:prstDash val="solid"/>
-                      <a:round/>
-                      <a:headEnd type="none" w="med" len="med"/>
-                      <a:tailEnd type="none" w="med" len="med"/>
-                    </a:lnL>
-                    <a:lnR w="6350" cap="flat" cmpd="sng" algn="ctr">
-                      <a:solidFill>
-                        <a:srgbClr val="C9D3CD"/>
-                      </a:solidFill>
-                      <a:prstDash val="solid"/>
-                      <a:round/>
-                      <a:headEnd type="none" w="med" len="med"/>
-                      <a:tailEnd type="none" w="med" len="med"/>
-                    </a:lnR>
-                    <a:lnT w="6350" cap="flat" cmpd="sng" algn="ctr">
-                      <a:solidFill>
-                        <a:srgbClr val="C9D3CD"/>
-                      </a:solidFill>
-                      <a:prstDash val="solid"/>
-                      <a:round/>
-                      <a:headEnd type="none" w="med" len="med"/>
-                      <a:tailEnd type="none" w="med" len="med"/>
-                    </a:lnT>
-                    <a:lnB w="6350" cap="flat" cmpd="sng" algn="ctr">
-                      <a:solidFill>
-                        <a:srgbClr val="C9D3CD"/>
-                      </a:solidFill>
-                      <a:prstDash val="solid"/>
-                      <a:round/>
-                      <a:headEnd type="none" w="med" len="med"/>
-                      <a:tailEnd type="none" w="med" len="med"/>
-                    </a:lnB>
-                    <a:solidFill>
-                      <a:srgbClr val="FBF1E9"/>
-                    </a:solidFill>
-                  </a:tcPr>
-                </a:tc>
-                <a:tc>
-                  <a:txBody>
-                    <a:bodyPr/>
-                    <a:lstStyle/>
-                    <a:p>
-                      <a:pPr algn="l" indent="0" marL="0">
-                        <a:buNone/>
-                      </a:pPr>
-                      <a:r>
-                        <a:rPr lang="en-US" sz="880" b="1" dirty="0">
-                          <a:solidFill>
-                            <a:srgbClr val="1F2A24"/>
-                          </a:solidFill>
-                          <a:latin typeface="Meiryo UI" pitchFamily="34" charset="0"/>
-                          <a:ea typeface="Meiryo UI" pitchFamily="34" charset="-122"/>
-                          <a:cs typeface="Meiryo UI" pitchFamily="34" charset="-120"/>
-                        </a:rPr>
-                        <a:t>特定個人依存業務（引継ぎ試験パス率）</a:t>
-                      </a:r>
-                      <a:endParaRPr lang="en-US" sz="1200" dirty="0">
-                        <a:latin typeface="Meiryo UI" charset="0"/>
-                        <a:ea typeface="Meiryo UI" charset="0"/>
-                        <a:cs typeface="Meiryo UI" charset="0"/>
-                      </a:endParaRPr>
-                    </a:p>
-                  </a:txBody>
-                  <a:tcPr marL="32004" marR="32004" marT="32004" marB="32004" anchor="ctr">
-                    <a:lnL w="6350" cap="flat" cmpd="sng" algn="ctr">
-                      <a:solidFill>
-                        <a:srgbClr val="C9D3CD"/>
-                      </a:solidFill>
-                      <a:prstDash val="solid"/>
-                      <a:round/>
-                      <a:headEnd type="none" w="med" len="med"/>
-                      <a:tailEnd type="none" w="med" len="med"/>
-                    </a:lnL>
-                    <a:lnR w="6350" cap="flat" cmpd="sng" algn="ctr">
-                      <a:solidFill>
-                        <a:srgbClr val="C9D3CD"/>
-                      </a:solidFill>
-                      <a:prstDash val="solid"/>
-                      <a:round/>
-                      <a:headEnd type="none" w="med" len="med"/>
-                      <a:tailEnd type="none" w="med" len="med"/>
-                    </a:lnR>
-                    <a:lnT w="6350" cap="flat" cmpd="sng" algn="ctr">
-                      <a:solidFill>
-                        <a:srgbClr val="C9D3CD"/>
-                      </a:solidFill>
-                      <a:prstDash val="solid"/>
-                      <a:round/>
-                      <a:headEnd type="none" w="med" len="med"/>
-                      <a:tailEnd type="none" w="med" len="med"/>
-                    </a:lnT>
-                    <a:lnB w="6350" cap="flat" cmpd="sng" algn="ctr">
-                      <a:solidFill>
-                        <a:srgbClr val="C9D3CD"/>
-                      </a:solidFill>
-                      <a:prstDash val="solid"/>
-                      <a:round/>
-                      <a:headEnd type="none" w="med" len="med"/>
-                      <a:tailEnd type="none" w="med" len="med"/>
-                    </a:lnB>
-                    <a:solidFill>
-                      <a:srgbClr val="F2F4F3"/>
-                    </a:solidFill>
-                  </a:tcPr>
-                </a:tc>
-                <a:tc>
-                  <a:txBody>
-                    <a:bodyPr/>
-                    <a:lstStyle/>
-                    <a:p>
-                      <a:pPr algn="l" indent="0" marL="0">
-                        <a:buNone/>
-                      </a:pPr>
-                      <a:r>
-                        <a:rPr lang="en-US" sz="880" dirty="0">
-                          <a:solidFill>
-                            <a:srgbClr val="1F2A24"/>
-                          </a:solidFill>
-                          <a:latin typeface="Meiryo UI" pitchFamily="34" charset="0"/>
-                          <a:ea typeface="Meiryo UI" pitchFamily="34" charset="-122"/>
-                          <a:cs typeface="Meiryo UI" pitchFamily="34" charset="-120"/>
-                        </a:rPr>
-                        <a:t>依存あり → ゼロ（パス率100%）</a:t>
-                      </a:r>
-                      <a:endParaRPr lang="en-US" sz="1200" dirty="0">
-                        <a:latin typeface="Meiryo UI" charset="0"/>
-                        <a:ea typeface="Meiryo UI" charset="0"/>
-                        <a:cs typeface="Meiryo UI" charset="0"/>
-                      </a:endParaRPr>
-                    </a:p>
-                  </a:txBody>
-                  <a:tcPr marL="32004" marR="32004" marT="32004" marB="32004" anchor="ctr">
-                    <a:lnL w="6350" cap="flat" cmpd="sng" algn="ctr">
-                      <a:solidFill>
-                        <a:srgbClr val="C9D3CD"/>
-                      </a:solidFill>
-                      <a:prstDash val="solid"/>
-                      <a:round/>
-                      <a:headEnd type="none" w="med" len="med"/>
-                      <a:tailEnd type="none" w="med" len="med"/>
-                    </a:lnL>
-                    <a:lnR w="6350" cap="flat" cmpd="sng" algn="ctr">
-                      <a:solidFill>
-                        <a:srgbClr val="C9D3CD"/>
-                      </a:solidFill>
-                      <a:prstDash val="solid"/>
-                      <a:round/>
-                      <a:headEnd type="none" w="med" len="med"/>
-                      <a:tailEnd type="none" w="med" len="med"/>
-                    </a:lnR>
-                    <a:lnT w="6350" cap="flat" cmpd="sng" algn="ctr">
-                      <a:solidFill>
-                        <a:srgbClr val="C9D3CD"/>
-                      </a:solidFill>
-                      <a:prstDash val="solid"/>
-                      <a:round/>
-                      <a:headEnd type="none" w="med" len="med"/>
-                      <a:tailEnd type="none" w="med" len="med"/>
-                    </a:lnT>
-                    <a:lnB w="6350" cap="flat" cmpd="sng" algn="ctr">
-                      <a:solidFill>
-                        <a:srgbClr val="C9D3CD"/>
-                      </a:solidFill>
-                      <a:prstDash val="solid"/>
-                      <a:round/>
-                      <a:headEnd type="none" w="med" len="med"/>
-                      <a:tailEnd type="none" w="med" len="med"/>
-                    </a:lnB>
-                    <a:solidFill>
-                      <a:srgbClr val="F2F4F3"/>
-                    </a:solidFill>
-                  </a:tcPr>
-                </a:tc>
-                <a:tc>
-                  <a:txBody>
-                    <a:bodyPr/>
-                    <a:lstStyle/>
-                    <a:p>
-                      <a:pPr algn="l" indent="0" marL="0">
-                        <a:buNone/>
-                      </a:pPr>
-                      <a:r>
-                        <a:rPr lang="en-US" sz="880" dirty="0">
-                          <a:solidFill>
-                            <a:srgbClr val="1F2A24"/>
-                          </a:solidFill>
-                          <a:latin typeface="Meiryo UI" pitchFamily="34" charset="0"/>
-                          <a:ea typeface="Meiryo UI" pitchFamily="34" charset="-122"/>
-                          <a:cs typeface="Meiryo UI" pitchFamily="34" charset="-120"/>
-                        </a:rPr>
-                        <a:t>四半期／</a:t>
-                      </a:r>
-                      <a:endParaRPr lang="en-US" sz="1200" dirty="0">
-                        <a:latin typeface="Meiryo UI" charset="0"/>
-                        <a:ea typeface="Meiryo UI" charset="0"/>
-                        <a:cs typeface="Meiryo UI" charset="0"/>
-                      </a:endParaRPr>
-                    </a:p>
-                    <a:p>
-                      <a:pPr algn="ctr" indent="0" marL="0">
-                        <a:buNone/>
-                      </a:pPr>
-                      <a:r>
-                        <a:rPr lang="en-US" sz="800" b="1" dirty="0">
-                          <a:solidFill>
-                            <a:srgbClr val="1F4E79"/>
-                          </a:solidFill>
-                          <a:latin typeface="Meiryo UI" pitchFamily="34" charset="0"/>
-                          <a:ea typeface="Meiryo UI" pitchFamily="34" charset="-122"/>
-                          <a:cs typeface="Meiryo UI" pitchFamily="34" charset="-120"/>
-                        </a:rPr>
-                        <a:t>先行</a:t>
-                      </a:r>
-                      <a:endParaRPr lang="en-US" sz="1200" dirty="0">
-                        <a:latin typeface="Meiryo UI" charset="0"/>
-                        <a:ea typeface="Meiryo UI" charset="0"/>
-                        <a:cs typeface="Meiryo UI" charset="0"/>
-                      </a:endParaRPr>
-                    </a:p>
-                  </a:txBody>
-                  <a:tcPr marL="32004" marR="32004" marT="32004" marB="32004" anchor="ctr">
-                    <a:lnL w="6350" cap="flat" cmpd="sng" algn="ctr">
-                      <a:solidFill>
-                        <a:srgbClr val="C9D3CD"/>
-                      </a:solidFill>
-                      <a:prstDash val="solid"/>
-                      <a:round/>
-                      <a:headEnd type="none" w="med" len="med"/>
-                      <a:tailEnd type="none" w="med" len="med"/>
-                    </a:lnL>
-                    <a:lnR w="6350" cap="flat" cmpd="sng" algn="ctr">
-                      <a:solidFill>
-                        <a:srgbClr val="C9D3CD"/>
-                      </a:solidFill>
-                      <a:prstDash val="solid"/>
-                      <a:round/>
-                      <a:headEnd type="none" w="med" len="med"/>
-                      <a:tailEnd type="none" w="med" len="med"/>
-                    </a:lnR>
-                    <a:lnT w="6350" cap="flat" cmpd="sng" algn="ctr">
-                      <a:solidFill>
-                        <a:srgbClr val="C9D3CD"/>
-                      </a:solidFill>
-                      <a:prstDash val="solid"/>
-                      <a:round/>
-                      <a:headEnd type="none" w="med" len="med"/>
-                      <a:tailEnd type="none" w="med" len="med"/>
-                    </a:lnT>
-                    <a:lnB w="6350" cap="flat" cmpd="sng" algn="ctr">
-                      <a:solidFill>
-                        <a:srgbClr val="C9D3CD"/>
-                      </a:solidFill>
-                      <a:prstDash val="solid"/>
-                      <a:round/>
-                      <a:headEnd type="none" w="med" len="med"/>
-                      <a:tailEnd type="none" w="med" len="med"/>
-                    </a:lnB>
-                    <a:solidFill>
-                      <a:srgbClr val="F2F4F3"/>
-                    </a:solidFill>
-                  </a:tcPr>
-                </a:tc>
-              </a:tr>
-              <a:tr h="333756">
-                <a:tc>
-                  <a:txBody>
-                    <a:bodyPr/>
-                    <a:lstStyle/>
-                    <a:p>
-                      <a:pPr algn="l" indent="0" marL="0">
-                        <a:buNone/>
-                      </a:pPr>
-                      <a:r>
-                        <a:rPr lang="en-US" sz="880" b="1" dirty="0">
-                          <a:solidFill>
-                            <a:srgbClr val="1F2A24"/>
-                          </a:solidFill>
-                          <a:latin typeface="Meiryo UI" pitchFamily="34" charset="0"/>
-                          <a:ea typeface="Meiryo UI" pitchFamily="34" charset="-122"/>
-                          <a:cs typeface="Meiryo UI" pitchFamily="34" charset="-120"/>
-                        </a:rPr>
-                        <a:t>リスク・ガバナンス（G1）</a:t>
-                      </a:r>
-                      <a:endParaRPr lang="en-US" sz="1200" dirty="0">
-                        <a:latin typeface="Meiryo UI" charset="0"/>
-                        <a:ea typeface="Meiryo UI" charset="0"/>
-                        <a:cs typeface="Meiryo UI" charset="0"/>
-                      </a:endParaRPr>
-                    </a:p>
-                  </a:txBody>
-                  <a:tcPr marL="32004" marR="32004" marT="32004" marB="32004" anchor="ctr">
-                    <a:lnL w="6350" cap="flat" cmpd="sng" algn="ctr">
-                      <a:solidFill>
-                        <a:srgbClr val="C9D3CD"/>
-                      </a:solidFill>
-                      <a:prstDash val="solid"/>
-                      <a:round/>
-                      <a:headEnd type="none" w="med" len="med"/>
-                      <a:tailEnd type="none" w="med" len="med"/>
-                    </a:lnL>
-                    <a:lnR w="6350" cap="flat" cmpd="sng" algn="ctr">
-                      <a:solidFill>
-                        <a:srgbClr val="C9D3CD"/>
-                      </a:solidFill>
-                      <a:prstDash val="solid"/>
-                      <a:round/>
-                      <a:headEnd type="none" w="med" len="med"/>
-                      <a:tailEnd type="none" w="med" len="med"/>
-                    </a:lnR>
-                    <a:lnT w="6350" cap="flat" cmpd="sng" algn="ctr">
-                      <a:solidFill>
-                        <a:srgbClr val="C9D3CD"/>
-                      </a:solidFill>
-                      <a:prstDash val="solid"/>
-                      <a:round/>
-                      <a:headEnd type="none" w="med" len="med"/>
-                      <a:tailEnd type="none" w="med" len="med"/>
-                    </a:lnT>
-                    <a:lnB w="6350" cap="flat" cmpd="sng" algn="ctr">
-                      <a:solidFill>
-                        <a:srgbClr val="C9D3CD"/>
-                      </a:solidFill>
-                      <a:prstDash val="solid"/>
-                      <a:round/>
-                      <a:headEnd type="none" w="med" len="med"/>
-                      <a:tailEnd type="none" w="med" len="med"/>
-                    </a:lnB>
-                    <a:solidFill>
-                      <a:srgbClr val="FBF1E9"/>
-                    </a:solidFill>
-                  </a:tcPr>
-                </a:tc>
-                <a:tc>
-                  <a:txBody>
-                    <a:bodyPr/>
-                    <a:lstStyle/>
-                    <a:p>
-                      <a:pPr algn="l" indent="0" marL="0">
-                        <a:buNone/>
-                      </a:pPr>
-                      <a:r>
-                        <a:rPr lang="en-US" sz="880" b="1" dirty="0">
-                          <a:solidFill>
-                            <a:srgbClr val="1F2A24"/>
-                          </a:solidFill>
-                          <a:latin typeface="Meiryo UI" pitchFamily="34" charset="0"/>
-                          <a:ea typeface="Meiryo UI" pitchFamily="34" charset="-122"/>
-                          <a:cs typeface="Meiryo UI" pitchFamily="34" charset="-120"/>
-                        </a:rPr>
-                        <a:t>手順書化率（未文書化業務の解消）</a:t>
-                      </a:r>
-                      <a:endParaRPr lang="en-US" sz="1200" dirty="0">
-                        <a:latin typeface="Meiryo UI" charset="0"/>
-                        <a:ea typeface="Meiryo UI" charset="0"/>
-                        <a:cs typeface="Meiryo UI" charset="0"/>
-                      </a:endParaRPr>
-                    </a:p>
-                  </a:txBody>
-                  <a:tcPr marL="32004" marR="32004" marT="32004" marB="32004" anchor="ctr">
-                    <a:lnL w="6350" cap="flat" cmpd="sng" algn="ctr">
-                      <a:solidFill>
-                        <a:srgbClr val="C9D3CD"/>
-                      </a:solidFill>
-                      <a:prstDash val="solid"/>
-                      <a:round/>
-                      <a:headEnd type="none" w="med" len="med"/>
-                      <a:tailEnd type="none" w="med" len="med"/>
-                    </a:lnL>
-                    <a:lnR w="6350" cap="flat" cmpd="sng" algn="ctr">
-                      <a:solidFill>
-                        <a:srgbClr val="C9D3CD"/>
-                      </a:solidFill>
-                      <a:prstDash val="solid"/>
-                      <a:round/>
-                      <a:headEnd type="none" w="med" len="med"/>
-                      <a:tailEnd type="none" w="med" len="med"/>
-                    </a:lnR>
-                    <a:lnT w="6350" cap="flat" cmpd="sng" algn="ctr">
-                      <a:solidFill>
-                        <a:srgbClr val="C9D3CD"/>
-                      </a:solidFill>
-                      <a:prstDash val="solid"/>
-                      <a:round/>
-                      <a:headEnd type="none" w="med" len="med"/>
-                      <a:tailEnd type="none" w="med" len="med"/>
-                    </a:lnT>
-                    <a:lnB w="6350" cap="flat" cmpd="sng" algn="ctr">
-                      <a:solidFill>
-                        <a:srgbClr val="C9D3CD"/>
-                      </a:solidFill>
-                      <a:prstDash val="solid"/>
-                      <a:round/>
-                      <a:headEnd type="none" w="med" len="med"/>
-                      <a:tailEnd type="none" w="med" len="med"/>
-                    </a:lnB>
-                    <a:solidFill>
-                      <a:srgbClr val="FFFFFF"/>
-                    </a:solidFill>
-                  </a:tcPr>
-                </a:tc>
-                <a:tc>
-                  <a:txBody>
-                    <a:bodyPr/>
-                    <a:lstStyle/>
-                    <a:p>
-                      <a:pPr algn="l" indent="0" marL="0">
-                        <a:buNone/>
-                      </a:pPr>
-                      <a:r>
-                        <a:rPr lang="en-US" sz="880" dirty="0">
-                          <a:solidFill>
-                            <a:srgbClr val="1F2A24"/>
-                          </a:solidFill>
-                          <a:latin typeface="Meiryo UI" pitchFamily="34" charset="0"/>
-                          <a:ea typeface="Meiryo UI" pitchFamily="34" charset="-122"/>
-                          <a:cs typeface="Meiryo UI" pitchFamily="34" charset="-120"/>
-                        </a:rPr>
-                        <a:t>未把握 → 100%（IPは当社帰属）</a:t>
-                      </a:r>
-                      <a:endParaRPr lang="en-US" sz="1200" dirty="0">
-                        <a:latin typeface="Meiryo UI" charset="0"/>
-                        <a:ea typeface="Meiryo UI" charset="0"/>
-                        <a:cs typeface="Meiryo UI" charset="0"/>
-                      </a:endParaRPr>
-                    </a:p>
-                  </a:txBody>
-                  <a:tcPr marL="32004" marR="32004" marT="32004" marB="32004" anchor="ctr">
-                    <a:lnL w="6350" cap="flat" cmpd="sng" algn="ctr">
-                      <a:solidFill>
-                        <a:srgbClr val="C9D3CD"/>
-                      </a:solidFill>
-                      <a:prstDash val="solid"/>
-                      <a:round/>
-                      <a:headEnd type="none" w="med" len="med"/>
-                      <a:tailEnd type="none" w="med" len="med"/>
-                    </a:lnL>
-                    <a:lnR w="6350" cap="flat" cmpd="sng" algn="ctr">
-                      <a:solidFill>
-                        <a:srgbClr val="C9D3CD"/>
-                      </a:solidFill>
-                      <a:prstDash val="solid"/>
-                      <a:round/>
-                      <a:headEnd type="none" w="med" len="med"/>
-                      <a:tailEnd type="none" w="med" len="med"/>
-                    </a:lnR>
-                    <a:lnT w="6350" cap="flat" cmpd="sng" algn="ctr">
-                      <a:solidFill>
-                        <a:srgbClr val="C9D3CD"/>
-                      </a:solidFill>
-                      <a:prstDash val="solid"/>
-                      <a:round/>
-                      <a:headEnd type="none" w="med" len="med"/>
-                      <a:tailEnd type="none" w="med" len="med"/>
-                    </a:lnT>
-                    <a:lnB w="6350" cap="flat" cmpd="sng" algn="ctr">
-                      <a:solidFill>
-                        <a:srgbClr val="C9D3CD"/>
-                      </a:solidFill>
-                      <a:prstDash val="solid"/>
-                      <a:round/>
-                      <a:headEnd type="none" w="med" len="med"/>
-                      <a:tailEnd type="none" w="med" len="med"/>
-                    </a:lnB>
-                    <a:solidFill>
-                      <a:srgbClr val="FFFFFF"/>
-                    </a:solidFill>
-                  </a:tcPr>
-                </a:tc>
-                <a:tc>
-                  <a:txBody>
-                    <a:bodyPr/>
-                    <a:lstStyle/>
-                    <a:p>
-                      <a:pPr algn="l" indent="0" marL="0">
-                        <a:buNone/>
-                      </a:pPr>
-                      <a:r>
-                        <a:rPr lang="en-US" sz="880" dirty="0">
-                          <a:solidFill>
-                            <a:srgbClr val="1F2A24"/>
-                          </a:solidFill>
-                          <a:latin typeface="Meiryo UI" pitchFamily="34" charset="0"/>
-                          <a:ea typeface="Meiryo UI" pitchFamily="34" charset="-122"/>
-                          <a:cs typeface="Meiryo UI" pitchFamily="34" charset="-120"/>
-                        </a:rPr>
-                        <a:t>四半期／</a:t>
-                      </a:r>
-                      <a:endParaRPr lang="en-US" sz="1200" dirty="0">
-                        <a:latin typeface="Meiryo UI" charset="0"/>
-                        <a:ea typeface="Meiryo UI" charset="0"/>
-                        <a:cs typeface="Meiryo UI" charset="0"/>
-                      </a:endParaRPr>
-                    </a:p>
-                    <a:p>
-                      <a:pPr algn="ctr" indent="0" marL="0">
-                        <a:buNone/>
-                      </a:pPr>
-                      <a:r>
-                        <a:rPr lang="en-US" sz="800" b="1" dirty="0">
-                          <a:solidFill>
-                            <a:srgbClr val="1F4E79"/>
-                          </a:solidFill>
-                          <a:latin typeface="Meiryo UI" pitchFamily="34" charset="0"/>
-                          <a:ea typeface="Meiryo UI" pitchFamily="34" charset="-122"/>
-                          <a:cs typeface="Meiryo UI" pitchFamily="34" charset="-120"/>
-                        </a:rPr>
-                        <a:t>先行</a:t>
-                      </a:r>
-                      <a:endParaRPr lang="en-US" sz="1200" dirty="0">
-                        <a:latin typeface="Meiryo UI" charset="0"/>
-                        <a:ea typeface="Meiryo UI" charset="0"/>
-                        <a:cs typeface="Meiryo UI" charset="0"/>
-                      </a:endParaRPr>
-                    </a:p>
-                  </a:txBody>
-                  <a:tcPr marL="32004" marR="32004" marT="32004" marB="32004" anchor="ctr">
-                    <a:lnL w="6350" cap="flat" cmpd="sng" algn="ctr">
-                      <a:solidFill>
-                        <a:srgbClr val="C9D3CD"/>
-                      </a:solidFill>
-                      <a:prstDash val="solid"/>
-                      <a:round/>
-                      <a:headEnd type="none" w="med" len="med"/>
-                      <a:tailEnd type="none" w="med" len="med"/>
-                    </a:lnL>
-                    <a:lnR w="6350" cap="flat" cmpd="sng" algn="ctr">
-                      <a:solidFill>
-                        <a:srgbClr val="C9D3CD"/>
-                      </a:solidFill>
-                      <a:prstDash val="solid"/>
-                      <a:round/>
-                      <a:headEnd type="none" w="med" len="med"/>
-                      <a:tailEnd type="none" w="med" len="med"/>
-                    </a:lnR>
-                    <a:lnT w="6350" cap="flat" cmpd="sng" algn="ctr">
-                      <a:solidFill>
-                        <a:srgbClr val="C9D3CD"/>
-                      </a:solidFill>
-                      <a:prstDash val="solid"/>
-                      <a:round/>
-                      <a:headEnd type="none" w="med" len="med"/>
-                      <a:tailEnd type="none" w="med" len="med"/>
-                    </a:lnT>
-                    <a:lnB w="6350" cap="flat" cmpd="sng" algn="ctr">
-                      <a:solidFill>
-                        <a:srgbClr val="C9D3CD"/>
-                      </a:solidFill>
-                      <a:prstDash val="solid"/>
-                      <a:round/>
-                      <a:headEnd type="none" w="med" len="med"/>
-                      <a:tailEnd type="none" w="med" len="med"/>
-                    </a:lnB>
-                    <a:solidFill>
-                      <a:srgbClr val="FFFFFF"/>
-                    </a:solidFill>
-                  </a:tcPr>
-                </a:tc>
-              </a:tr>
-              <a:tr h="333756">
-                <a:tc>
-                  <a:txBody>
-                    <a:bodyPr/>
-                    <a:lstStyle/>
-                    <a:p>
-                      <a:pPr algn="l" indent="0" marL="0">
-                        <a:buNone/>
-                      </a:pPr>
-                      <a:r>
-                        <a:rPr lang="en-US" sz="880" b="1" dirty="0">
-                          <a:solidFill>
-                            <a:srgbClr val="1F2A24"/>
-                          </a:solidFill>
-                          <a:latin typeface="Meiryo UI" pitchFamily="34" charset="0"/>
-                          <a:ea typeface="Meiryo UI" pitchFamily="34" charset="-122"/>
-                          <a:cs typeface="Meiryo UI" pitchFamily="34" charset="-120"/>
-                        </a:rPr>
-                        <a:t>リスク・ガバナンス（G1）</a:t>
-                      </a:r>
-                      <a:endParaRPr lang="en-US" sz="1200" dirty="0">
-                        <a:latin typeface="Meiryo UI" charset="0"/>
-                        <a:ea typeface="Meiryo UI" charset="0"/>
-                        <a:cs typeface="Meiryo UI" charset="0"/>
-                      </a:endParaRPr>
-                    </a:p>
-                  </a:txBody>
-                  <a:tcPr marL="32004" marR="32004" marT="32004" marB="32004" anchor="ctr">
-                    <a:lnL w="6350" cap="flat" cmpd="sng" algn="ctr">
-                      <a:solidFill>
-                        <a:srgbClr val="C9D3CD"/>
-                      </a:solidFill>
-                      <a:prstDash val="solid"/>
-                      <a:round/>
-                      <a:headEnd type="none" w="med" len="med"/>
-                      <a:tailEnd type="none" w="med" len="med"/>
-                    </a:lnL>
-                    <a:lnR w="6350" cap="flat" cmpd="sng" algn="ctr">
-                      <a:solidFill>
-                        <a:srgbClr val="C9D3CD"/>
-                      </a:solidFill>
-                      <a:prstDash val="solid"/>
-                      <a:round/>
-                      <a:headEnd type="none" w="med" len="med"/>
-                      <a:tailEnd type="none" w="med" len="med"/>
-                    </a:lnR>
-                    <a:lnT w="6350" cap="flat" cmpd="sng" algn="ctr">
-                      <a:solidFill>
-                        <a:srgbClr val="C9D3CD"/>
-                      </a:solidFill>
-                      <a:prstDash val="solid"/>
-                      <a:round/>
-                      <a:headEnd type="none" w="med" len="med"/>
-                      <a:tailEnd type="none" w="med" len="med"/>
-                    </a:lnT>
-                    <a:lnB w="6350" cap="flat" cmpd="sng" algn="ctr">
-                      <a:solidFill>
-                        <a:srgbClr val="C9D3CD"/>
-                      </a:solidFill>
-                      <a:prstDash val="solid"/>
-                      <a:round/>
-                      <a:headEnd type="none" w="med" len="med"/>
-                      <a:tailEnd type="none" w="med" len="med"/>
-                    </a:lnB>
-                    <a:solidFill>
-                      <a:srgbClr val="FBF1E9"/>
-                    </a:solidFill>
-                  </a:tcPr>
-                </a:tc>
-                <a:tc>
-                  <a:txBody>
-                    <a:bodyPr/>
-                    <a:lstStyle/>
-                    <a:p>
-                      <a:pPr algn="l" indent="0" marL="0">
-                        <a:buNone/>
-                      </a:pPr>
-                      <a:r>
-                        <a:rPr lang="en-US" sz="880" b="1" dirty="0">
-                          <a:solidFill>
-                            <a:srgbClr val="1F2A24"/>
-                          </a:solidFill>
-                          <a:latin typeface="Meiryo UI" pitchFamily="34" charset="0"/>
-                          <a:ea typeface="Meiryo UI" pitchFamily="34" charset="-122"/>
-                          <a:cs typeface="Meiryo UI" pitchFamily="34" charset="-120"/>
-                        </a:rPr>
-                        <a:t>IT統制関連の監査指摘件数</a:t>
-                      </a:r>
-                      <a:endParaRPr lang="en-US" sz="1200" dirty="0">
-                        <a:latin typeface="Meiryo UI" charset="0"/>
-                        <a:ea typeface="Meiryo UI" charset="0"/>
-                        <a:cs typeface="Meiryo UI" charset="0"/>
-                      </a:endParaRPr>
-                    </a:p>
-                  </a:txBody>
-                  <a:tcPr marL="32004" marR="32004" marT="32004" marB="32004" anchor="ctr">
-                    <a:lnL w="6350" cap="flat" cmpd="sng" algn="ctr">
-                      <a:solidFill>
-                        <a:srgbClr val="C9D3CD"/>
-                      </a:solidFill>
-                      <a:prstDash val="solid"/>
-                      <a:round/>
-                      <a:headEnd type="none" w="med" len="med"/>
-                      <a:tailEnd type="none" w="med" len="med"/>
-                    </a:lnL>
-                    <a:lnR w="6350" cap="flat" cmpd="sng" algn="ctr">
-                      <a:solidFill>
-                        <a:srgbClr val="C9D3CD"/>
-                      </a:solidFill>
-                      <a:prstDash val="solid"/>
-                      <a:round/>
-                      <a:headEnd type="none" w="med" len="med"/>
-                      <a:tailEnd type="none" w="med" len="med"/>
-                    </a:lnR>
-                    <a:lnT w="6350" cap="flat" cmpd="sng" algn="ctr">
-                      <a:solidFill>
-                        <a:srgbClr val="C9D3CD"/>
-                      </a:solidFill>
-                      <a:prstDash val="solid"/>
-                      <a:round/>
-                      <a:headEnd type="none" w="med" len="med"/>
-                      <a:tailEnd type="none" w="med" len="med"/>
-                    </a:lnT>
-                    <a:lnB w="6350" cap="flat" cmpd="sng" algn="ctr">
-                      <a:solidFill>
-                        <a:srgbClr val="C9D3CD"/>
-                      </a:solidFill>
-                      <a:prstDash val="solid"/>
-                      <a:round/>
-                      <a:headEnd type="none" w="med" len="med"/>
-                      <a:tailEnd type="none" w="med" len="med"/>
-                    </a:lnB>
-                    <a:solidFill>
-                      <a:srgbClr val="F2F4F3"/>
-                    </a:solidFill>
-                  </a:tcPr>
-                </a:tc>
-                <a:tc>
-                  <a:txBody>
-                    <a:bodyPr/>
-                    <a:lstStyle/>
-                    <a:p>
-                      <a:pPr algn="l" indent="0" marL="0">
-                        <a:buNone/>
-                      </a:pPr>
-                      <a:r>
-                        <a:rPr lang="en-US" sz="880" dirty="0">
-                          <a:solidFill>
-                            <a:srgbClr val="1F2A24"/>
-                          </a:solidFill>
-                          <a:latin typeface="Meiryo UI" pitchFamily="34" charset="0"/>
-                          <a:ea typeface="Meiryo UI" pitchFamily="34" charset="-122"/>
-                          <a:cs typeface="Meiryo UI" pitchFamily="34" charset="-120"/>
-                        </a:rPr>
-                        <a:t>Phase 0で棚卸し → ゼロを維持</a:t>
-                      </a:r>
-                      <a:endParaRPr lang="en-US" sz="1200" dirty="0">
-                        <a:latin typeface="Meiryo UI" charset="0"/>
-                        <a:ea typeface="Meiryo UI" charset="0"/>
-                        <a:cs typeface="Meiryo UI" charset="0"/>
-                      </a:endParaRPr>
-                    </a:p>
-                  </a:txBody>
-                  <a:tcPr marL="32004" marR="32004" marT="32004" marB="32004" anchor="ctr">
-                    <a:lnL w="6350" cap="flat" cmpd="sng" algn="ctr">
-                      <a:solidFill>
-                        <a:srgbClr val="C9D3CD"/>
-                      </a:solidFill>
-                      <a:prstDash val="solid"/>
-                      <a:round/>
-                      <a:headEnd type="none" w="med" len="med"/>
-                      <a:tailEnd type="none" w="med" len="med"/>
-                    </a:lnL>
-                    <a:lnR w="6350" cap="flat" cmpd="sng" algn="ctr">
-                      <a:solidFill>
-                        <a:srgbClr val="C9D3CD"/>
-                      </a:solidFill>
-                      <a:prstDash val="solid"/>
-                      <a:round/>
-                      <a:headEnd type="none" w="med" len="med"/>
-                      <a:tailEnd type="none" w="med" len="med"/>
-                    </a:lnR>
-                    <a:lnT w="6350" cap="flat" cmpd="sng" algn="ctr">
-                      <a:solidFill>
-                        <a:srgbClr val="C9D3CD"/>
-                      </a:solidFill>
-                      <a:prstDash val="solid"/>
-                      <a:round/>
-                      <a:headEnd type="none" w="med" len="med"/>
-                      <a:tailEnd type="none" w="med" len="med"/>
-                    </a:lnT>
-                    <a:lnB w="6350" cap="flat" cmpd="sng" algn="ctr">
-                      <a:solidFill>
-                        <a:srgbClr val="C9D3CD"/>
-                      </a:solidFill>
-                      <a:prstDash val="solid"/>
-                      <a:round/>
-                      <a:headEnd type="none" w="med" len="med"/>
-                      <a:tailEnd type="none" w="med" len="med"/>
-                    </a:lnB>
-                    <a:solidFill>
-                      <a:srgbClr val="F2F4F3"/>
-                    </a:solidFill>
-                  </a:tcPr>
-                </a:tc>
-                <a:tc>
-                  <a:txBody>
-                    <a:bodyPr/>
-                    <a:lstStyle/>
-                    <a:p>
-                      <a:pPr algn="l" indent="0" marL="0">
-                        <a:buNone/>
-                      </a:pPr>
-                      <a:r>
-                        <a:rPr lang="en-US" sz="880" dirty="0">
-                          <a:solidFill>
-                            <a:srgbClr val="1F2A24"/>
-                          </a:solidFill>
-                          <a:latin typeface="Meiryo UI" pitchFamily="34" charset="0"/>
-                          <a:ea typeface="Meiryo UI" pitchFamily="34" charset="-122"/>
-                          <a:cs typeface="Meiryo UI" pitchFamily="34" charset="-120"/>
-                        </a:rPr>
-                        <a:t>年次／</a:t>
-                      </a:r>
-                      <a:endParaRPr lang="en-US" sz="1200" dirty="0">
-                        <a:latin typeface="Meiryo UI" charset="0"/>
-                        <a:ea typeface="Meiryo UI" charset="0"/>
-                        <a:cs typeface="Meiryo UI" charset="0"/>
-                      </a:endParaRPr>
-                    </a:p>
-                    <a:p>
-                      <a:pPr algn="ctr" indent="0" marL="0">
-                        <a:buNone/>
-                      </a:pPr>
-                      <a:r>
-                        <a:rPr lang="en-US" sz="800" b="1" dirty="0">
-                          <a:solidFill>
-                            <a:srgbClr val="5A6660"/>
-                          </a:solidFill>
-                          <a:latin typeface="Meiryo UI" pitchFamily="34" charset="0"/>
-                          <a:ea typeface="Meiryo UI" pitchFamily="34" charset="-122"/>
-                          <a:cs typeface="Meiryo UI" pitchFamily="34" charset="-120"/>
-                        </a:rPr>
-                        <a:t>遅行</a:t>
-                      </a:r>
-                      <a:endParaRPr lang="en-US" sz="1200" dirty="0">
-                        <a:latin typeface="Meiryo UI" charset="0"/>
-                        <a:ea typeface="Meiryo UI" charset="0"/>
-                        <a:cs typeface="Meiryo UI" charset="0"/>
-                      </a:endParaRPr>
-                    </a:p>
-                  </a:txBody>
-                  <a:tcPr marL="32004" marR="32004" marT="32004" marB="32004" anchor="ctr">
-                    <a:lnL w="6350" cap="flat" cmpd="sng" algn="ctr">
-                      <a:solidFill>
-                        <a:srgbClr val="C9D3CD"/>
-                      </a:solidFill>
-                      <a:prstDash val="solid"/>
-                      <a:round/>
-                      <a:headEnd type="none" w="med" len="med"/>
-                      <a:tailEnd type="none" w="med" len="med"/>
-                    </a:lnL>
-                    <a:lnR w="6350" cap="flat" cmpd="sng" algn="ctr">
-                      <a:solidFill>
-                        <a:srgbClr val="C9D3CD"/>
-                      </a:solidFill>
-                      <a:prstDash val="solid"/>
-                      <a:round/>
-                      <a:headEnd type="none" w="med" len="med"/>
-                      <a:tailEnd type="none" w="med" len="med"/>
-                    </a:lnR>
-                    <a:lnT w="6350" cap="flat" cmpd="sng" algn="ctr">
-                      <a:solidFill>
-                        <a:srgbClr val="C9D3CD"/>
-                      </a:solidFill>
-                      <a:prstDash val="solid"/>
-                      <a:round/>
-                      <a:headEnd type="none" w="med" len="med"/>
-                      <a:tailEnd type="none" w="med" len="med"/>
-                    </a:lnT>
-                    <a:lnB w="6350" cap="flat" cmpd="sng" algn="ctr">
-                      <a:solidFill>
-                        <a:srgbClr val="C9D3CD"/>
-                      </a:solidFill>
-                      <a:prstDash val="solid"/>
-                      <a:round/>
-                      <a:headEnd type="none" w="med" len="med"/>
-                      <a:tailEnd type="none" w="med" len="med"/>
-                    </a:lnB>
-                    <a:solidFill>
-                      <a:srgbClr val="F2F4F3"/>
                     </a:solidFill>
                   </a:tcPr>
                 </a:tc>
@@ -5205,12 +6090,12 @@
         </p:nvSpPr>
         <p:spPr>
           <a:xfrm>
-            <a:off x="457200" y="6035040"/>
-            <a:ext cx="11274552" cy="566928"/>
+            <a:off x="457200" y="6053328"/>
+            <a:ext cx="11274552" cy="512064"/>
           </a:xfrm>
           <a:prstGeom prst="roundRect">
             <a:avLst>
-              <a:gd name="adj" fmla="val 9677"/>
+              <a:gd name="adj" fmla="val 10714"/>
             </a:avLst>
           </a:prstGeom>
           <a:solidFill>
@@ -5227,8 +6112,8 @@
         </p:nvSpPr>
         <p:spPr>
           <a:xfrm>
-            <a:off x="731520" y="6035040"/>
-            <a:ext cx="10789920" cy="566928"/>
+            <a:off x="731520" y="6053328"/>
+            <a:ext cx="10789920" cy="512064"/>
           </a:xfrm>
           <a:prstGeom prst="rect">
             <a:avLst/>
@@ -5244,7 +6129,7 @@
               <a:buNone/>
             </a:pPr>
             <a:r>
-              <a:rPr lang="en-US" sz="1100" b="1" dirty="0">
+              <a:rPr lang="en-US" sz="1000" b="1" dirty="0">
                 <a:solidFill>
                   <a:srgbClr val="FFFFFF"/>
                 </a:solidFill>
@@ -5254,7 +6139,7 @@
               </a:rPr>
               <a:t>先行KPI（可視化率・自動化率・手順書化率・時間外労働）が動けば、遅行KPI（コスト・品質・従事率）は後からついてくる ― 経営報告は先行指標の進捗から確認する</a:t>
             </a:r>
-            <a:endParaRPr lang="en-US" sz="1100" dirty="0"/>
+            <a:endParaRPr lang="en-US" sz="1000" dirty="0"/>
           </a:p>
         </p:txBody>
       </p:sp>

--- a/docs/KPI_ROI_経営報告.pptx
+++ b/docs/KPI_ROI_経営報告.pptx
@@ -1071,7 +1071,7 @@
           </p:nvPr>
         </p:nvGraphicFramePr>
         <p:xfrm>
-          <a:off x="457200" y="822960"/>
+          <a:off x="457200" y="786384"/>
           <a:ext cx="11274552" cy="914400"/>
         </p:xfrm>
         <a:graphic>
@@ -1080,11 +1080,11 @@
               <a:tblPr/>
               <a:tblGrid>
                 <a:gridCol w="1965960"/>
-                <a:gridCol w="3429000"/>
-                <a:gridCol w="4416552"/>
+                <a:gridCol w="3977640"/>
+                <a:gridCol w="3867912"/>
                 <a:gridCol w="1463040"/>
               </a:tblGrid>
-              <a:tr h="278892">
+              <a:tr h="324612">
                 <a:tc>
                   <a:txBody>
                     <a:bodyPr/>
@@ -1094,7 +1094,7 @@
                         <a:buNone/>
                       </a:pPr>
                       <a:r>
-                        <a:rPr lang="en-US" sz="900" b="1" dirty="0">
+                        <a:rPr lang="en-US" sz="950" b="1" dirty="0">
                           <a:solidFill>
                             <a:srgbClr val="FFFFFF"/>
                           </a:solidFill>
@@ -1111,7 +1111,7 @@
                       </a:endParaRPr>
                     </a:p>
                   </a:txBody>
-                  <a:tcPr marL="22860" marR="22860" marT="22860" marB="22860" anchor="ctr">
+                  <a:tcPr marL="25603" marR="25603" marT="25603" marB="25603" anchor="ctr">
                     <a:lnL w="6350" cap="flat" cmpd="sng" algn="ctr">
                       <a:solidFill>
                         <a:srgbClr val="C9D3CD"/>
@@ -1162,7 +1162,7 @@
                         <a:buNone/>
                       </a:pPr>
                       <a:r>
-                        <a:rPr lang="en-US" sz="900" b="1" dirty="0">
+                        <a:rPr lang="en-US" sz="950" b="1" dirty="0">
                           <a:solidFill>
                             <a:srgbClr val="FFFFFF"/>
                           </a:solidFill>
@@ -1179,7 +1179,7 @@
                       </a:endParaRPr>
                     </a:p>
                   </a:txBody>
-                  <a:tcPr marL="22860" marR="22860" marT="22860" marB="22860" anchor="ctr">
+                  <a:tcPr marL="25603" marR="25603" marT="25603" marB="25603" anchor="ctr">
                     <a:lnL w="6350" cap="flat" cmpd="sng" algn="ctr">
                       <a:solidFill>
                         <a:srgbClr val="C9D3CD"/>
@@ -1230,7 +1230,7 @@
                         <a:buNone/>
                       </a:pPr>
                       <a:r>
-                        <a:rPr lang="en-US" sz="900" b="1" dirty="0">
+                        <a:rPr lang="en-US" sz="950" b="1" dirty="0">
                           <a:solidFill>
                             <a:srgbClr val="FFFFFF"/>
                           </a:solidFill>
@@ -1247,7 +1247,7 @@
                       </a:endParaRPr>
                     </a:p>
                   </a:txBody>
-                  <a:tcPr marL="22860" marR="22860" marT="22860" marB="22860" anchor="ctr">
+                  <a:tcPr marL="25603" marR="25603" marT="25603" marB="25603" anchor="ctr">
                     <a:lnL w="6350" cap="flat" cmpd="sng" algn="ctr">
                       <a:solidFill>
                         <a:srgbClr val="C9D3CD"/>
@@ -1298,7 +1298,7 @@
                         <a:buNone/>
                       </a:pPr>
                       <a:r>
-                        <a:rPr lang="en-US" sz="900" b="1" dirty="0">
+                        <a:rPr lang="en-US" sz="950" b="1" dirty="0">
                           <a:solidFill>
                             <a:srgbClr val="FFFFFF"/>
                           </a:solidFill>
@@ -1315,7 +1315,7 @@
                       </a:endParaRPr>
                     </a:p>
                   </a:txBody>
-                  <a:tcPr marL="22860" marR="22860" marT="22860" marB="22860" anchor="ctr">
+                  <a:tcPr marL="25603" marR="25603" marT="25603" marB="25603" anchor="ctr">
                     <a:lnL w="6350" cap="flat" cmpd="sng" algn="ctr">
                       <a:solidFill>
                         <a:srgbClr val="C9D3CD"/>
@@ -1358,7 +1358,7 @@
                   </a:tcPr>
                 </a:tc>
               </a:tr>
-              <a:tr h="278892">
+              <a:tr h="324612">
                 <a:tc>
                   <a:txBody>
                     <a:bodyPr/>
@@ -1368,7 +1368,7 @@
                         <a:buNone/>
                       </a:pPr>
                       <a:r>
-                        <a:rPr lang="en-US" sz="830" b="1" dirty="0">
+                        <a:rPr lang="en-US" sz="870" b="1" dirty="0">
                           <a:solidFill>
                             <a:srgbClr val="1F2A24"/>
                           </a:solidFill>
@@ -1385,7 +1385,7 @@
                       </a:endParaRPr>
                     </a:p>
                   </a:txBody>
-                  <a:tcPr marL="22860" marR="22860" marT="22860" marB="22860" anchor="ctr">
+                  <a:tcPr marL="25603" marR="25603" marT="25603" marB="25603" anchor="ctr">
                     <a:lnL w="6350" cap="flat" cmpd="sng" algn="ctr">
                       <a:solidFill>
                         <a:srgbClr val="C9D3CD"/>
@@ -1436,7 +1436,7 @@
                         <a:buNone/>
                       </a:pPr>
                       <a:r>
-                        <a:rPr lang="en-US" sz="830" b="1" dirty="0">
+                        <a:rPr lang="en-US" sz="870" b="1" dirty="0">
                           <a:solidFill>
                             <a:srgbClr val="1F2A24"/>
                           </a:solidFill>
@@ -1453,7 +1453,7 @@
                       </a:endParaRPr>
                     </a:p>
                   </a:txBody>
-                  <a:tcPr marL="22860" marR="22860" marT="22860" marB="22860" anchor="ctr">
+                  <a:tcPr marL="25603" marR="25603" marT="25603" marB="25603" anchor="ctr">
                     <a:lnL w="6350" cap="flat" cmpd="sng" algn="ctr">
                       <a:solidFill>
                         <a:srgbClr val="C9D3CD"/>
@@ -1504,7 +1504,7 @@
                         <a:buNone/>
                       </a:pPr>
                       <a:r>
-                        <a:rPr lang="en-US" sz="830" dirty="0">
+                        <a:rPr lang="en-US" sz="870" dirty="0">
                           <a:solidFill>
                             <a:srgbClr val="1F2A24"/>
                           </a:solidFill>
@@ -1521,7 +1521,7 @@
                       </a:endParaRPr>
                     </a:p>
                   </a:txBody>
-                  <a:tcPr marL="22860" marR="22860" marT="22860" marB="22860" anchor="ctr">
+                  <a:tcPr marL="25603" marR="25603" marT="25603" marB="25603" anchor="ctr">
                     <a:lnL w="6350" cap="flat" cmpd="sng" algn="ctr">
                       <a:solidFill>
                         <a:srgbClr val="C9D3CD"/>
@@ -1572,7 +1572,7 @@
                         <a:buNone/>
                       </a:pPr>
                       <a:r>
-                        <a:rPr lang="en-US" sz="830" dirty="0">
+                        <a:rPr lang="en-US" sz="870" dirty="0">
                           <a:solidFill>
                             <a:srgbClr val="1F2A24"/>
                           </a:solidFill>
@@ -1593,7 +1593,7 @@
                         <a:buNone/>
                       </a:pPr>
                       <a:r>
-                        <a:rPr lang="en-US" sz="750" b="1" dirty="0">
+                        <a:rPr lang="en-US" sz="800" b="1" dirty="0">
                           <a:solidFill>
                             <a:srgbClr val="1F4E79"/>
                           </a:solidFill>
@@ -1610,7 +1610,7 @@
                       </a:endParaRPr>
                     </a:p>
                   </a:txBody>
-                  <a:tcPr marL="22860" marR="22860" marT="22860" marB="22860" anchor="ctr">
+                  <a:tcPr marL="25603" marR="25603" marT="25603" marB="25603" anchor="ctr">
                     <a:lnL w="6350" cap="flat" cmpd="sng" algn="ctr">
                       <a:solidFill>
                         <a:srgbClr val="C9D3CD"/>
@@ -1653,7 +1653,7 @@
                   </a:tcPr>
                 </a:tc>
               </a:tr>
-              <a:tr h="278892">
+              <a:tr h="324612">
                 <a:tc>
                   <a:txBody>
                     <a:bodyPr/>
@@ -1663,7 +1663,7 @@
                         <a:buNone/>
                       </a:pPr>
                       <a:r>
-                        <a:rPr lang="en-US" sz="830" b="1" dirty="0">
+                        <a:rPr lang="en-US" sz="870" b="1" dirty="0">
                           <a:solidFill>
                             <a:srgbClr val="1F2A24"/>
                           </a:solidFill>
@@ -1680,7 +1680,7 @@
                       </a:endParaRPr>
                     </a:p>
                   </a:txBody>
-                  <a:tcPr marL="22860" marR="22860" marT="22860" marB="22860" anchor="ctr">
+                  <a:tcPr marL="25603" marR="25603" marT="25603" marB="25603" anchor="ctr">
                     <a:lnL w="6350" cap="flat" cmpd="sng" algn="ctr">
                       <a:solidFill>
                         <a:srgbClr val="C9D3CD"/>
@@ -1731,7 +1731,7 @@
                         <a:buNone/>
                       </a:pPr>
                       <a:r>
-                        <a:rPr lang="en-US" sz="830" b="1" dirty="0">
+                        <a:rPr lang="en-US" sz="870" b="1" dirty="0">
                           <a:solidFill>
                             <a:srgbClr val="1F2A24"/>
                           </a:solidFill>
@@ -1748,7 +1748,7 @@
                       </a:endParaRPr>
                     </a:p>
                   </a:txBody>
-                  <a:tcPr marL="22860" marR="22860" marT="22860" marB="22860" anchor="ctr">
+                  <a:tcPr marL="25603" marR="25603" marT="25603" marB="25603" anchor="ctr">
                     <a:lnL w="6350" cap="flat" cmpd="sng" algn="ctr">
                       <a:solidFill>
                         <a:srgbClr val="C9D3CD"/>
@@ -1799,7 +1799,7 @@
                         <a:buNone/>
                       </a:pPr>
                       <a:r>
-                        <a:rPr lang="en-US" sz="830" dirty="0">
+                        <a:rPr lang="en-US" sz="870" dirty="0">
                           <a:solidFill>
                             <a:srgbClr val="1F2A24"/>
                           </a:solidFill>
@@ -1816,7 +1816,7 @@
                       </a:endParaRPr>
                     </a:p>
                   </a:txBody>
-                  <a:tcPr marL="22860" marR="22860" marT="22860" marB="22860" anchor="ctr">
+                  <a:tcPr marL="25603" marR="25603" marT="25603" marB="25603" anchor="ctr">
                     <a:lnL w="6350" cap="flat" cmpd="sng" algn="ctr">
                       <a:solidFill>
                         <a:srgbClr val="C9D3CD"/>
@@ -1867,7 +1867,7 @@
                         <a:buNone/>
                       </a:pPr>
                       <a:r>
-                        <a:rPr lang="en-US" sz="830" dirty="0">
+                        <a:rPr lang="en-US" sz="870" dirty="0">
                           <a:solidFill>
                             <a:srgbClr val="1F2A24"/>
                           </a:solidFill>
@@ -1888,7 +1888,7 @@
                         <a:buNone/>
                       </a:pPr>
                       <a:r>
-                        <a:rPr lang="en-US" sz="750" b="1" dirty="0">
+                        <a:rPr lang="en-US" sz="800" b="1" dirty="0">
                           <a:solidFill>
                             <a:srgbClr val="5A6660"/>
                           </a:solidFill>
@@ -1905,7 +1905,7 @@
                       </a:endParaRPr>
                     </a:p>
                   </a:txBody>
-                  <a:tcPr marL="22860" marR="22860" marT="22860" marB="22860" anchor="ctr">
+                  <a:tcPr marL="25603" marR="25603" marT="25603" marB="25603" anchor="ctr">
                     <a:lnL w="6350" cap="flat" cmpd="sng" algn="ctr">
                       <a:solidFill>
                         <a:srgbClr val="C9D3CD"/>
@@ -1948,7 +1948,7 @@
                   </a:tcPr>
                 </a:tc>
               </a:tr>
-              <a:tr h="278892">
+              <a:tr h="324612">
                 <a:tc>
                   <a:txBody>
                     <a:bodyPr/>
@@ -1958,7 +1958,7 @@
                         <a:buNone/>
                       </a:pPr>
                       <a:r>
-                        <a:rPr lang="en-US" sz="830" b="1" dirty="0">
+                        <a:rPr lang="en-US" sz="870" b="1" dirty="0">
                           <a:solidFill>
                             <a:srgbClr val="1F2A24"/>
                           </a:solidFill>
@@ -1975,7 +1975,7 @@
                       </a:endParaRPr>
                     </a:p>
                   </a:txBody>
-                  <a:tcPr marL="22860" marR="22860" marT="22860" marB="22860" anchor="ctr">
+                  <a:tcPr marL="25603" marR="25603" marT="25603" marB="25603" anchor="ctr">
                     <a:lnL w="6350" cap="flat" cmpd="sng" algn="ctr">
                       <a:solidFill>
                         <a:srgbClr val="C9D3CD"/>
@@ -2026,7 +2026,7 @@
                         <a:buNone/>
                       </a:pPr>
                       <a:r>
-                        <a:rPr lang="en-US" sz="830" b="1" dirty="0">
+                        <a:rPr lang="en-US" sz="870" b="1" dirty="0">
                           <a:solidFill>
                             <a:srgbClr val="1F2A24"/>
                           </a:solidFill>
@@ -2043,7 +2043,7 @@
                       </a:endParaRPr>
                     </a:p>
                   </a:txBody>
-                  <a:tcPr marL="22860" marR="22860" marT="22860" marB="22860" anchor="ctr">
+                  <a:tcPr marL="25603" marR="25603" marT="25603" marB="25603" anchor="ctr">
                     <a:lnL w="6350" cap="flat" cmpd="sng" algn="ctr">
                       <a:solidFill>
                         <a:srgbClr val="C9D3CD"/>
@@ -2094,7 +2094,7 @@
                         <a:buNone/>
                       </a:pPr>
                       <a:r>
-                        <a:rPr lang="en-US" sz="830" dirty="0">
+                        <a:rPr lang="en-US" sz="870" dirty="0">
                           <a:solidFill>
                             <a:srgbClr val="1F2A24"/>
                           </a:solidFill>
@@ -2111,7 +2111,7 @@
                       </a:endParaRPr>
                     </a:p>
                   </a:txBody>
-                  <a:tcPr marL="22860" marR="22860" marT="22860" marB="22860" anchor="ctr">
+                  <a:tcPr marL="25603" marR="25603" marT="25603" marB="25603" anchor="ctr">
                     <a:lnL w="6350" cap="flat" cmpd="sng" algn="ctr">
                       <a:solidFill>
                         <a:srgbClr val="C9D3CD"/>
@@ -2162,7 +2162,7 @@
                         <a:buNone/>
                       </a:pPr>
                       <a:r>
-                        <a:rPr lang="en-US" sz="830" dirty="0">
+                        <a:rPr lang="en-US" sz="870" dirty="0">
                           <a:solidFill>
                             <a:srgbClr val="1F2A24"/>
                           </a:solidFill>
@@ -2183,7 +2183,7 @@
                         <a:buNone/>
                       </a:pPr>
                       <a:r>
-                        <a:rPr lang="en-US" sz="750" b="1" dirty="0">
+                        <a:rPr lang="en-US" sz="800" b="1" dirty="0">
                           <a:solidFill>
                             <a:srgbClr val="5A6660"/>
                           </a:solidFill>
@@ -2200,7 +2200,7 @@
                       </a:endParaRPr>
                     </a:p>
                   </a:txBody>
-                  <a:tcPr marL="22860" marR="22860" marT="22860" marB="22860" anchor="ctr">
+                  <a:tcPr marL="25603" marR="25603" marT="25603" marB="25603" anchor="ctr">
                     <a:lnL w="6350" cap="flat" cmpd="sng" algn="ctr">
                       <a:solidFill>
                         <a:srgbClr val="C9D3CD"/>
@@ -2243,7 +2243,7 @@
                   </a:tcPr>
                 </a:tc>
               </a:tr>
-              <a:tr h="278892">
+              <a:tr h="324612">
                 <a:tc>
                   <a:txBody>
                     <a:bodyPr/>
@@ -2253,7 +2253,7 @@
                         <a:buNone/>
                       </a:pPr>
                       <a:r>
-                        <a:rPr lang="en-US" sz="830" b="1" dirty="0">
+                        <a:rPr lang="en-US" sz="870" b="1" dirty="0">
                           <a:solidFill>
                             <a:srgbClr val="1F2A24"/>
                           </a:solidFill>
@@ -2270,7 +2270,7 @@
                       </a:endParaRPr>
                     </a:p>
                   </a:txBody>
-                  <a:tcPr marL="22860" marR="22860" marT="22860" marB="22860" anchor="ctr">
+                  <a:tcPr marL="25603" marR="25603" marT="25603" marB="25603" anchor="ctr">
                     <a:lnL w="6350" cap="flat" cmpd="sng" algn="ctr">
                       <a:solidFill>
                         <a:srgbClr val="C9D3CD"/>
@@ -2321,7 +2321,7 @@
                         <a:buNone/>
                       </a:pPr>
                       <a:r>
-                        <a:rPr lang="en-US" sz="830" b="1" dirty="0">
+                        <a:rPr lang="en-US" sz="870" b="1" dirty="0">
                           <a:solidFill>
                             <a:srgbClr val="1F2A24"/>
                           </a:solidFill>
@@ -2338,7 +2338,7 @@
                       </a:endParaRPr>
                     </a:p>
                   </a:txBody>
-                  <a:tcPr marL="22860" marR="22860" marT="22860" marB="22860" anchor="ctr">
+                  <a:tcPr marL="25603" marR="25603" marT="25603" marB="25603" anchor="ctr">
                     <a:lnL w="6350" cap="flat" cmpd="sng" algn="ctr">
                       <a:solidFill>
                         <a:srgbClr val="C9D3CD"/>
@@ -2389,7 +2389,7 @@
                         <a:buNone/>
                       </a:pPr>
                       <a:r>
-                        <a:rPr lang="en-US" sz="830" dirty="0">
+                        <a:rPr lang="en-US" sz="870" dirty="0">
                           <a:solidFill>
                             <a:srgbClr val="1F2A24"/>
                           </a:solidFill>
@@ -2406,7 +2406,7 @@
                       </a:endParaRPr>
                     </a:p>
                   </a:txBody>
-                  <a:tcPr marL="22860" marR="22860" marT="22860" marB="22860" anchor="ctr">
+                  <a:tcPr marL="25603" marR="25603" marT="25603" marB="25603" anchor="ctr">
                     <a:lnL w="6350" cap="flat" cmpd="sng" algn="ctr">
                       <a:solidFill>
                         <a:srgbClr val="C9D3CD"/>
@@ -2457,7 +2457,7 @@
                         <a:buNone/>
                       </a:pPr>
                       <a:r>
-                        <a:rPr lang="en-US" sz="830" dirty="0">
+                        <a:rPr lang="en-US" sz="870" dirty="0">
                           <a:solidFill>
                             <a:srgbClr val="1F2A24"/>
                           </a:solidFill>
@@ -2478,7 +2478,7 @@
                         <a:buNone/>
                       </a:pPr>
                       <a:r>
-                        <a:rPr lang="en-US" sz="750" b="1" dirty="0">
+                        <a:rPr lang="en-US" sz="800" b="1" dirty="0">
                           <a:solidFill>
                             <a:srgbClr val="5A6660"/>
                           </a:solidFill>
@@ -2495,7 +2495,7 @@
                       </a:endParaRPr>
                     </a:p>
                   </a:txBody>
-                  <a:tcPr marL="22860" marR="22860" marT="22860" marB="22860" anchor="ctr">
+                  <a:tcPr marL="25603" marR="25603" marT="25603" marB="25603" anchor="ctr">
                     <a:lnL w="6350" cap="flat" cmpd="sng" algn="ctr">
                       <a:solidFill>
                         <a:srgbClr val="C9D3CD"/>
@@ -2538,7 +2538,7 @@
                   </a:tcPr>
                 </a:tc>
               </a:tr>
-              <a:tr h="278892">
+              <a:tr h="324612">
                 <a:tc>
                   <a:txBody>
                     <a:bodyPr/>
@@ -2548,7 +2548,7 @@
                         <a:buNone/>
                       </a:pPr>
                       <a:r>
-                        <a:rPr lang="en-US" sz="830" b="1" dirty="0">
+                        <a:rPr lang="en-US" sz="870" b="1" dirty="0">
                           <a:solidFill>
                             <a:srgbClr val="1F2A24"/>
                           </a:solidFill>
@@ -2565,7 +2565,7 @@
                       </a:endParaRPr>
                     </a:p>
                   </a:txBody>
-                  <a:tcPr marL="22860" marR="22860" marT="22860" marB="22860" anchor="ctr">
+                  <a:tcPr marL="25603" marR="25603" marT="25603" marB="25603" anchor="ctr">
                     <a:lnL w="6350" cap="flat" cmpd="sng" algn="ctr">
                       <a:solidFill>
                         <a:srgbClr val="C9D3CD"/>
@@ -2616,7 +2616,7 @@
                         <a:buNone/>
                       </a:pPr>
                       <a:r>
-                        <a:rPr lang="en-US" sz="830" b="1" dirty="0">
+                        <a:rPr lang="en-US" sz="870" b="1" dirty="0">
                           <a:solidFill>
                             <a:srgbClr val="1F2A24"/>
                           </a:solidFill>
@@ -2633,7 +2633,7 @@
                       </a:endParaRPr>
                     </a:p>
                   </a:txBody>
-                  <a:tcPr marL="22860" marR="22860" marT="22860" marB="22860" anchor="ctr">
+                  <a:tcPr marL="25603" marR="25603" marT="25603" marB="25603" anchor="ctr">
                     <a:lnL w="6350" cap="flat" cmpd="sng" algn="ctr">
                       <a:solidFill>
                         <a:srgbClr val="C9D3CD"/>
@@ -2684,7 +2684,7 @@
                         <a:buNone/>
                       </a:pPr>
                       <a:r>
-                        <a:rPr lang="en-US" sz="830" dirty="0">
+                        <a:rPr lang="en-US" sz="870" dirty="0">
                           <a:solidFill>
                             <a:srgbClr val="1F2A24"/>
                           </a:solidFill>
@@ -2701,7 +2701,7 @@
                       </a:endParaRPr>
                     </a:p>
                   </a:txBody>
-                  <a:tcPr marL="22860" marR="22860" marT="22860" marB="22860" anchor="ctr">
+                  <a:tcPr marL="25603" marR="25603" marT="25603" marB="25603" anchor="ctr">
                     <a:lnL w="6350" cap="flat" cmpd="sng" algn="ctr">
                       <a:solidFill>
                         <a:srgbClr val="C9D3CD"/>
@@ -2752,7 +2752,7 @@
                         <a:buNone/>
                       </a:pPr>
                       <a:r>
-                        <a:rPr lang="en-US" sz="830" dirty="0">
+                        <a:rPr lang="en-US" sz="870" dirty="0">
                           <a:solidFill>
                             <a:srgbClr val="1F2A24"/>
                           </a:solidFill>
@@ -2773,7 +2773,7 @@
                         <a:buNone/>
                       </a:pPr>
                       <a:r>
-                        <a:rPr lang="en-US" sz="750" b="1" dirty="0">
+                        <a:rPr lang="en-US" sz="800" b="1" dirty="0">
                           <a:solidFill>
                             <a:srgbClr val="5A6660"/>
                           </a:solidFill>
@@ -2790,7 +2790,7 @@
                       </a:endParaRPr>
                     </a:p>
                   </a:txBody>
-                  <a:tcPr marL="22860" marR="22860" marT="22860" marB="22860" anchor="ctr">
+                  <a:tcPr marL="25603" marR="25603" marT="25603" marB="25603" anchor="ctr">
                     <a:lnL w="6350" cap="flat" cmpd="sng" algn="ctr">
                       <a:solidFill>
                         <a:srgbClr val="C9D3CD"/>
@@ -2833,7 +2833,7 @@
                   </a:tcPr>
                 </a:tc>
               </a:tr>
-              <a:tr h="278892">
+              <a:tr h="324612">
                 <a:tc>
                   <a:txBody>
                     <a:bodyPr/>
@@ -2843,7 +2843,7 @@
                         <a:buNone/>
                       </a:pPr>
                       <a:r>
-                        <a:rPr lang="en-US" sz="830" b="1" dirty="0">
+                        <a:rPr lang="en-US" sz="870" b="1" dirty="0">
                           <a:solidFill>
                             <a:srgbClr val="1F2A24"/>
                           </a:solidFill>
@@ -2860,7 +2860,7 @@
                       </a:endParaRPr>
                     </a:p>
                   </a:txBody>
-                  <a:tcPr marL="22860" marR="22860" marT="22860" marB="22860" anchor="ctr">
+                  <a:tcPr marL="25603" marR="25603" marT="25603" marB="25603" anchor="ctr">
                     <a:lnL w="6350" cap="flat" cmpd="sng" algn="ctr">
                       <a:solidFill>
                         <a:srgbClr val="C9D3CD"/>
@@ -2911,7 +2911,7 @@
                         <a:buNone/>
                       </a:pPr>
                       <a:r>
-                        <a:rPr lang="en-US" sz="830" b="1" dirty="0">
+                        <a:rPr lang="en-US" sz="870" b="1" dirty="0">
                           <a:solidFill>
                             <a:srgbClr val="1F2A24"/>
                           </a:solidFill>
@@ -2928,7 +2928,7 @@
                       </a:endParaRPr>
                     </a:p>
                   </a:txBody>
-                  <a:tcPr marL="22860" marR="22860" marT="22860" marB="22860" anchor="ctr">
+                  <a:tcPr marL="25603" marR="25603" marT="25603" marB="25603" anchor="ctr">
                     <a:lnL w="6350" cap="flat" cmpd="sng" algn="ctr">
                       <a:solidFill>
                         <a:srgbClr val="C9D3CD"/>
@@ -2979,7 +2979,7 @@
                         <a:buNone/>
                       </a:pPr>
                       <a:r>
-                        <a:rPr lang="en-US" sz="830" dirty="0">
+                        <a:rPr lang="en-US" sz="870" dirty="0">
                           <a:solidFill>
                             <a:srgbClr val="1F2A24"/>
                           </a:solidFill>
@@ -2996,7 +2996,7 @@
                       </a:endParaRPr>
                     </a:p>
                   </a:txBody>
-                  <a:tcPr marL="22860" marR="22860" marT="22860" marB="22860" anchor="ctr">
+                  <a:tcPr marL="25603" marR="25603" marT="25603" marB="25603" anchor="ctr">
                     <a:lnL w="6350" cap="flat" cmpd="sng" algn="ctr">
                       <a:solidFill>
                         <a:srgbClr val="C9D3CD"/>
@@ -3047,7 +3047,7 @@
                         <a:buNone/>
                       </a:pPr>
                       <a:r>
-                        <a:rPr lang="en-US" sz="830" dirty="0">
+                        <a:rPr lang="en-US" sz="870" dirty="0">
                           <a:solidFill>
                             <a:srgbClr val="1F2A24"/>
                           </a:solidFill>
@@ -3068,7 +3068,7 @@
                         <a:buNone/>
                       </a:pPr>
                       <a:r>
-                        <a:rPr lang="en-US" sz="750" b="1" dirty="0">
+                        <a:rPr lang="en-US" sz="800" b="1" dirty="0">
                           <a:solidFill>
                             <a:srgbClr val="5A6660"/>
                           </a:solidFill>
@@ -3085,7 +3085,7 @@
                       </a:endParaRPr>
                     </a:p>
                   </a:txBody>
-                  <a:tcPr marL="22860" marR="22860" marT="22860" marB="22860" anchor="ctr">
+                  <a:tcPr marL="25603" marR="25603" marT="25603" marB="25603" anchor="ctr">
                     <a:lnL w="6350" cap="flat" cmpd="sng" algn="ctr">
                       <a:solidFill>
                         <a:srgbClr val="C9D3CD"/>
@@ -3128,7 +3128,7 @@
                   </a:tcPr>
                 </a:tc>
               </a:tr>
-              <a:tr h="278892">
+              <a:tr h="324612">
                 <a:tc>
                   <a:txBody>
                     <a:bodyPr/>
@@ -3138,7 +3138,7 @@
                         <a:buNone/>
                       </a:pPr>
                       <a:r>
-                        <a:rPr lang="en-US" sz="830" b="1" dirty="0">
+                        <a:rPr lang="en-US" sz="870" b="1" dirty="0">
                           <a:solidFill>
                             <a:srgbClr val="1F2A24"/>
                           </a:solidFill>
@@ -3155,7 +3155,7 @@
                       </a:endParaRPr>
                     </a:p>
                   </a:txBody>
-                  <a:tcPr marL="22860" marR="22860" marT="22860" marB="22860" anchor="ctr">
+                  <a:tcPr marL="25603" marR="25603" marT="25603" marB="25603" anchor="ctr">
                     <a:lnL w="6350" cap="flat" cmpd="sng" algn="ctr">
                       <a:solidFill>
                         <a:srgbClr val="C9D3CD"/>
@@ -3206,7 +3206,7 @@
                         <a:buNone/>
                       </a:pPr>
                       <a:r>
-                        <a:rPr lang="en-US" sz="830" b="1" dirty="0">
+                        <a:rPr lang="en-US" sz="870" b="1" dirty="0">
                           <a:solidFill>
                             <a:srgbClr val="1F2A24"/>
                           </a:solidFill>
@@ -3223,7 +3223,7 @@
                       </a:endParaRPr>
                     </a:p>
                   </a:txBody>
-                  <a:tcPr marL="22860" marR="22860" marT="22860" marB="22860" anchor="ctr">
+                  <a:tcPr marL="25603" marR="25603" marT="25603" marB="25603" anchor="ctr">
                     <a:lnL w="6350" cap="flat" cmpd="sng" algn="ctr">
                       <a:solidFill>
                         <a:srgbClr val="C9D3CD"/>
@@ -3274,7 +3274,7 @@
                         <a:buNone/>
                       </a:pPr>
                       <a:r>
-                        <a:rPr lang="en-US" sz="830" dirty="0">
+                        <a:rPr lang="en-US" sz="870" dirty="0">
                           <a:solidFill>
                             <a:srgbClr val="1F2A24"/>
                           </a:solidFill>
@@ -3291,7 +3291,7 @@
                       </a:endParaRPr>
                     </a:p>
                   </a:txBody>
-                  <a:tcPr marL="22860" marR="22860" marT="22860" marB="22860" anchor="ctr">
+                  <a:tcPr marL="25603" marR="25603" marT="25603" marB="25603" anchor="ctr">
                     <a:lnL w="6350" cap="flat" cmpd="sng" algn="ctr">
                       <a:solidFill>
                         <a:srgbClr val="C9D3CD"/>
@@ -3342,7 +3342,7 @@
                         <a:buNone/>
                       </a:pPr>
                       <a:r>
-                        <a:rPr lang="en-US" sz="830" dirty="0">
+                        <a:rPr lang="en-US" sz="870" dirty="0">
                           <a:solidFill>
                             <a:srgbClr val="1F2A24"/>
                           </a:solidFill>
@@ -3363,7 +3363,7 @@
                         <a:buNone/>
                       </a:pPr>
                       <a:r>
-                        <a:rPr lang="en-US" sz="750" b="1" dirty="0">
+                        <a:rPr lang="en-US" sz="800" b="1" dirty="0">
                           <a:solidFill>
                             <a:srgbClr val="1F4E79"/>
                           </a:solidFill>
@@ -3380,7 +3380,7 @@
                       </a:endParaRPr>
                     </a:p>
                   </a:txBody>
-                  <a:tcPr marL="22860" marR="22860" marT="22860" marB="22860" anchor="ctr">
+                  <a:tcPr marL="25603" marR="25603" marT="25603" marB="25603" anchor="ctr">
                     <a:lnL w="6350" cap="flat" cmpd="sng" algn="ctr">
                       <a:solidFill>
                         <a:srgbClr val="C9D3CD"/>
@@ -3423,7 +3423,7 @@
                   </a:tcPr>
                 </a:tc>
               </a:tr>
-              <a:tr h="278892">
+              <a:tr h="324612">
                 <a:tc>
                   <a:txBody>
                     <a:bodyPr/>
@@ -3433,7 +3433,7 @@
                         <a:buNone/>
                       </a:pPr>
                       <a:r>
-                        <a:rPr lang="en-US" sz="830" b="1" dirty="0">
+                        <a:rPr lang="en-US" sz="870" b="1" dirty="0">
                           <a:solidFill>
                             <a:srgbClr val="1F2A24"/>
                           </a:solidFill>
@@ -3450,7 +3450,7 @@
                       </a:endParaRPr>
                     </a:p>
                   </a:txBody>
-                  <a:tcPr marL="22860" marR="22860" marT="22860" marB="22860" anchor="ctr">
+                  <a:tcPr marL="25603" marR="25603" marT="25603" marB="25603" anchor="ctr">
                     <a:lnL w="6350" cap="flat" cmpd="sng" algn="ctr">
                       <a:solidFill>
                         <a:srgbClr val="C9D3CD"/>
@@ -3501,7 +3501,7 @@
                         <a:buNone/>
                       </a:pPr>
                       <a:r>
-                        <a:rPr lang="en-US" sz="830" b="1" dirty="0">
+                        <a:rPr lang="en-US" sz="870" b="1" dirty="0">
                           <a:solidFill>
                             <a:srgbClr val="1F2A24"/>
                           </a:solidFill>
@@ -3509,16 +3509,16 @@
                           <a:ea typeface="Meiryo UI" pitchFamily="34" charset="-122"/>
                           <a:cs typeface="Meiryo UI" pitchFamily="34" charset="-120"/>
                         </a:rPr>
-                        <a:t>重大セキュリティインシデント件数・検知/復旧時間（MTTD/MTTR）</a:t>
-                      </a:r>
-                      <a:endParaRPr lang="en-US" sz="1200" dirty="0">
-                        <a:latin typeface="Meiryo UI" charset="0"/>
-                        <a:ea typeface="Meiryo UI" charset="0"/>
-                        <a:cs typeface="Meiryo UI" charset="0"/>
-                      </a:endParaRPr>
-                    </a:p>
-                  </a:txBody>
-                  <a:tcPr marL="22860" marR="22860" marT="22860" marB="22860" anchor="ctr">
+                        <a:t>セキュリティ統制スコア（① 重大インシデント対応力40%＝件数・MTTD/MTTR ② 脆弱性対応SLA遵守率35% ③ 24/365監視カバレッジ率25%の加重平均）</a:t>
+                      </a:r>
+                      <a:endParaRPr lang="en-US" sz="1200" dirty="0">
+                        <a:latin typeface="Meiryo UI" charset="0"/>
+                        <a:ea typeface="Meiryo UI" charset="0"/>
+                        <a:cs typeface="Meiryo UI" charset="0"/>
+                      </a:endParaRPr>
+                    </a:p>
+                  </a:txBody>
+                  <a:tcPr marL="25603" marR="25603" marT="25603" marB="25603" anchor="ctr">
                     <a:lnL w="6350" cap="flat" cmpd="sng" algn="ctr">
                       <a:solidFill>
                         <a:srgbClr val="C9D3CD"/>
@@ -3569,7 +3569,7 @@
                         <a:buNone/>
                       </a:pPr>
                       <a:r>
-                        <a:rPr lang="en-US" sz="830" dirty="0">
+                        <a:rPr lang="en-US" sz="870" dirty="0">
                           <a:solidFill>
                             <a:srgbClr val="1F2A24"/>
                           </a:solidFill>
@@ -3577,16 +3577,16 @@
                           <a:ea typeface="Meiryo UI" pitchFamily="34" charset="-122"/>
                           <a:cs typeface="Meiryo UI" pitchFamily="34" charset="-120"/>
                         </a:rPr>
-                        <a:t>Phase 0で実測 → 重大インシデントゼロ・検知時間を短縮</a:t>
-                      </a:r>
-                      <a:endParaRPr lang="en-US" sz="1200" dirty="0">
-                        <a:latin typeface="Meiryo UI" charset="0"/>
-                        <a:ea typeface="Meiryo UI" charset="0"/>
-                        <a:cs typeface="Meiryo UI" charset="0"/>
-                      </a:endParaRPr>
-                    </a:p>
-                  </a:txBody>
-                  <a:tcPr marL="22860" marR="22860" marT="22860" marB="22860" anchor="ctr">
+                        <a:t>Phase 0で初回スコアリング → 80点以上を維持（契約更新時に重み見直し）</a:t>
+                      </a:r>
+                      <a:endParaRPr lang="en-US" sz="1200" dirty="0">
+                        <a:latin typeface="Meiryo UI" charset="0"/>
+                        <a:ea typeface="Meiryo UI" charset="0"/>
+                        <a:cs typeface="Meiryo UI" charset="0"/>
+                      </a:endParaRPr>
+                    </a:p>
+                  </a:txBody>
+                  <a:tcPr marL="25603" marR="25603" marT="25603" marB="25603" anchor="ctr">
                     <a:lnL w="6350" cap="flat" cmpd="sng" algn="ctr">
                       <a:solidFill>
                         <a:srgbClr val="C9D3CD"/>
@@ -3637,7 +3637,7 @@
                         <a:buNone/>
                       </a:pPr>
                       <a:r>
-                        <a:rPr lang="en-US" sz="830" dirty="0">
+                        <a:rPr lang="en-US" sz="870" dirty="0">
                           <a:solidFill>
                             <a:srgbClr val="1F2A24"/>
                           </a:solidFill>
@@ -3645,6 +3645,891 @@
                           <a:ea typeface="Meiryo UI" pitchFamily="34" charset="-122"/>
                           <a:cs typeface="Meiryo UI" pitchFamily="34" charset="-120"/>
                         </a:rPr>
+                        <a:t>四半期／</a:t>
+                      </a:r>
+                      <a:endParaRPr lang="en-US" sz="1200" dirty="0">
+                        <a:latin typeface="Meiryo UI" charset="0"/>
+                        <a:ea typeface="Meiryo UI" charset="0"/>
+                        <a:cs typeface="Meiryo UI" charset="0"/>
+                      </a:endParaRPr>
+                    </a:p>
+                    <a:p>
+                      <a:pPr algn="ctr" indent="0" marL="0">
+                        <a:buNone/>
+                      </a:pPr>
+                      <a:r>
+                        <a:rPr lang="en-US" sz="800" b="1" dirty="0">
+                          <a:solidFill>
+                            <a:srgbClr val="1F4E79"/>
+                          </a:solidFill>
+                          <a:latin typeface="Meiryo UI" pitchFamily="34" charset="0"/>
+                          <a:ea typeface="Meiryo UI" pitchFamily="34" charset="-122"/>
+                          <a:cs typeface="Meiryo UI" pitchFamily="34" charset="-120"/>
+                        </a:rPr>
+                        <a:t>先行</a:t>
+                      </a:r>
+                      <a:endParaRPr lang="en-US" sz="1200" dirty="0">
+                        <a:latin typeface="Meiryo UI" charset="0"/>
+                        <a:ea typeface="Meiryo UI" charset="0"/>
+                        <a:cs typeface="Meiryo UI" charset="0"/>
+                      </a:endParaRPr>
+                    </a:p>
+                  </a:txBody>
+                  <a:tcPr marL="25603" marR="25603" marT="25603" marB="25603" anchor="ctr">
+                    <a:lnL w="6350" cap="flat" cmpd="sng" algn="ctr">
+                      <a:solidFill>
+                        <a:srgbClr val="C9D3CD"/>
+                      </a:solidFill>
+                      <a:prstDash val="solid"/>
+                      <a:round/>
+                      <a:headEnd type="none" w="med" len="med"/>
+                      <a:tailEnd type="none" w="med" len="med"/>
+                    </a:lnL>
+                    <a:lnR w="6350" cap="flat" cmpd="sng" algn="ctr">
+                      <a:solidFill>
+                        <a:srgbClr val="C9D3CD"/>
+                      </a:solidFill>
+                      <a:prstDash val="solid"/>
+                      <a:round/>
+                      <a:headEnd type="none" w="med" len="med"/>
+                      <a:tailEnd type="none" w="med" len="med"/>
+                    </a:lnR>
+                    <a:lnT w="6350" cap="flat" cmpd="sng" algn="ctr">
+                      <a:solidFill>
+                        <a:srgbClr val="C9D3CD"/>
+                      </a:solidFill>
+                      <a:prstDash val="solid"/>
+                      <a:round/>
+                      <a:headEnd type="none" w="med" len="med"/>
+                      <a:tailEnd type="none" w="med" len="med"/>
+                    </a:lnT>
+                    <a:lnB w="6350" cap="flat" cmpd="sng" algn="ctr">
+                      <a:solidFill>
+                        <a:srgbClr val="C9D3CD"/>
+                      </a:solidFill>
+                      <a:prstDash val="solid"/>
+                      <a:round/>
+                      <a:headEnd type="none" w="med" len="med"/>
+                      <a:tailEnd type="none" w="med" len="med"/>
+                    </a:lnB>
+                    <a:solidFill>
+                      <a:srgbClr val="FFFFFF"/>
+                    </a:solidFill>
+                  </a:tcPr>
+                </a:tc>
+              </a:tr>
+              <a:tr h="324612">
+                <a:tc>
+                  <a:txBody>
+                    <a:bodyPr/>
+                    <a:lstStyle/>
+                    <a:p>
+                      <a:pPr algn="l" indent="0" marL="0">
+                        <a:buNone/>
+                      </a:pPr>
+                      <a:r>
+                        <a:rPr lang="en-US" sz="870" b="1" dirty="0">
+                          <a:solidFill>
+                            <a:srgbClr val="1F2A24"/>
+                          </a:solidFill>
+                          <a:latin typeface="Meiryo UI" pitchFamily="34" charset="0"/>
+                          <a:ea typeface="Meiryo UI" pitchFamily="34" charset="-122"/>
+                          <a:cs typeface="Meiryo UI" pitchFamily="34" charset="-120"/>
+                        </a:rPr>
+                        <a:t>人材・組織（G4）</a:t>
+                      </a:r>
+                      <a:endParaRPr lang="en-US" sz="1200" dirty="0">
+                        <a:latin typeface="Meiryo UI" charset="0"/>
+                        <a:ea typeface="Meiryo UI" charset="0"/>
+                        <a:cs typeface="Meiryo UI" charset="0"/>
+                      </a:endParaRPr>
+                    </a:p>
+                  </a:txBody>
+                  <a:tcPr marL="25603" marR="25603" marT="25603" marB="25603" anchor="ctr">
+                    <a:lnL w="6350" cap="flat" cmpd="sng" algn="ctr">
+                      <a:solidFill>
+                        <a:srgbClr val="C9D3CD"/>
+                      </a:solidFill>
+                      <a:prstDash val="solid"/>
+                      <a:round/>
+                      <a:headEnd type="none" w="med" len="med"/>
+                      <a:tailEnd type="none" w="med" len="med"/>
+                    </a:lnL>
+                    <a:lnR w="6350" cap="flat" cmpd="sng" algn="ctr">
+                      <a:solidFill>
+                        <a:srgbClr val="C9D3CD"/>
+                      </a:solidFill>
+                      <a:prstDash val="solid"/>
+                      <a:round/>
+                      <a:headEnd type="none" w="med" len="med"/>
+                      <a:tailEnd type="none" w="med" len="med"/>
+                    </a:lnR>
+                    <a:lnT w="6350" cap="flat" cmpd="sng" algn="ctr">
+                      <a:solidFill>
+                        <a:srgbClr val="C9D3CD"/>
+                      </a:solidFill>
+                      <a:prstDash val="solid"/>
+                      <a:round/>
+                      <a:headEnd type="none" w="med" len="med"/>
+                      <a:tailEnd type="none" w="med" len="med"/>
+                    </a:lnT>
+                    <a:lnB w="6350" cap="flat" cmpd="sng" algn="ctr">
+                      <a:solidFill>
+                        <a:srgbClr val="C9D3CD"/>
+                      </a:solidFill>
+                      <a:prstDash val="solid"/>
+                      <a:round/>
+                      <a:headEnd type="none" w="med" len="med"/>
+                      <a:tailEnd type="none" w="med" len="med"/>
+                    </a:lnB>
+                    <a:solidFill>
+                      <a:srgbClr val="E9F5EE"/>
+                    </a:solidFill>
+                  </a:tcPr>
+                </a:tc>
+                <a:tc>
+                  <a:txBody>
+                    <a:bodyPr/>
+                    <a:lstStyle/>
+                    <a:p>
+                      <a:pPr algn="l" indent="0" marL="0">
+                        <a:buNone/>
+                      </a:pPr>
+                      <a:r>
+                        <a:rPr lang="en-US" sz="870" b="1" dirty="0">
+                          <a:solidFill>
+                            <a:srgbClr val="1F2A24"/>
+                          </a:solidFill>
+                          <a:latin typeface="Meiryo UI" pitchFamily="34" charset="0"/>
+                          <a:ea typeface="Meiryo UI" pitchFamily="34" charset="-122"/>
+                          <a:cs typeface="Meiryo UI" pitchFamily="34" charset="-120"/>
+                        </a:rPr>
+                        <a:t>運用従事率（社員工数に占める運用の割合）</a:t>
+                      </a:r>
+                      <a:endParaRPr lang="en-US" sz="1200" dirty="0">
+                        <a:latin typeface="Meiryo UI" charset="0"/>
+                        <a:ea typeface="Meiryo UI" charset="0"/>
+                        <a:cs typeface="Meiryo UI" charset="0"/>
+                      </a:endParaRPr>
+                    </a:p>
+                  </a:txBody>
+                  <a:tcPr marL="25603" marR="25603" marT="25603" marB="25603" anchor="ctr">
+                    <a:lnL w="6350" cap="flat" cmpd="sng" algn="ctr">
+                      <a:solidFill>
+                        <a:srgbClr val="C9D3CD"/>
+                      </a:solidFill>
+                      <a:prstDash val="solid"/>
+                      <a:round/>
+                      <a:headEnd type="none" w="med" len="med"/>
+                      <a:tailEnd type="none" w="med" len="med"/>
+                    </a:lnL>
+                    <a:lnR w="6350" cap="flat" cmpd="sng" algn="ctr">
+                      <a:solidFill>
+                        <a:srgbClr val="C9D3CD"/>
+                      </a:solidFill>
+                      <a:prstDash val="solid"/>
+                      <a:round/>
+                      <a:headEnd type="none" w="med" len="med"/>
+                      <a:tailEnd type="none" w="med" len="med"/>
+                    </a:lnR>
+                    <a:lnT w="6350" cap="flat" cmpd="sng" algn="ctr">
+                      <a:solidFill>
+                        <a:srgbClr val="C9D3CD"/>
+                      </a:solidFill>
+                      <a:prstDash val="solid"/>
+                      <a:round/>
+                      <a:headEnd type="none" w="med" len="med"/>
+                      <a:tailEnd type="none" w="med" len="med"/>
+                    </a:lnT>
+                    <a:lnB w="6350" cap="flat" cmpd="sng" algn="ctr">
+                      <a:solidFill>
+                        <a:srgbClr val="C9D3CD"/>
+                      </a:solidFill>
+                      <a:prstDash val="solid"/>
+                      <a:round/>
+                      <a:headEnd type="none" w="med" len="med"/>
+                      <a:tailEnd type="none" w="med" len="med"/>
+                    </a:lnB>
+                    <a:solidFill>
+                      <a:srgbClr val="F2F4F3"/>
+                    </a:solidFill>
+                  </a:tcPr>
+                </a:tc>
+                <a:tc>
+                  <a:txBody>
+                    <a:bodyPr/>
+                    <a:lstStyle/>
+                    <a:p>
+                      <a:pPr algn="l" indent="0" marL="0">
+                        <a:buNone/>
+                      </a:pPr>
+                      <a:r>
+                        <a:rPr lang="en-US" sz="870" dirty="0">
+                          <a:solidFill>
+                            <a:srgbClr val="1F2A24"/>
+                          </a:solidFill>
+                          <a:latin typeface="Meiryo UI" pitchFamily="34" charset="0"/>
+                          <a:ea typeface="Meiryo UI" pitchFamily="34" charset="-122"/>
+                          <a:cs typeface="Meiryo UI" pitchFamily="34" charset="-120"/>
+                        </a:rPr>
+                        <a:t>40%（実測で確定）→ 15%以下（3年）</a:t>
+                      </a:r>
+                      <a:endParaRPr lang="en-US" sz="1200" dirty="0">
+                        <a:latin typeface="Meiryo UI" charset="0"/>
+                        <a:ea typeface="Meiryo UI" charset="0"/>
+                        <a:cs typeface="Meiryo UI" charset="0"/>
+                      </a:endParaRPr>
+                    </a:p>
+                  </a:txBody>
+                  <a:tcPr marL="25603" marR="25603" marT="25603" marB="25603" anchor="ctr">
+                    <a:lnL w="6350" cap="flat" cmpd="sng" algn="ctr">
+                      <a:solidFill>
+                        <a:srgbClr val="C9D3CD"/>
+                      </a:solidFill>
+                      <a:prstDash val="solid"/>
+                      <a:round/>
+                      <a:headEnd type="none" w="med" len="med"/>
+                      <a:tailEnd type="none" w="med" len="med"/>
+                    </a:lnL>
+                    <a:lnR w="6350" cap="flat" cmpd="sng" algn="ctr">
+                      <a:solidFill>
+                        <a:srgbClr val="C9D3CD"/>
+                      </a:solidFill>
+                      <a:prstDash val="solid"/>
+                      <a:round/>
+                      <a:headEnd type="none" w="med" len="med"/>
+                      <a:tailEnd type="none" w="med" len="med"/>
+                    </a:lnR>
+                    <a:lnT w="6350" cap="flat" cmpd="sng" algn="ctr">
+                      <a:solidFill>
+                        <a:srgbClr val="C9D3CD"/>
+                      </a:solidFill>
+                      <a:prstDash val="solid"/>
+                      <a:round/>
+                      <a:headEnd type="none" w="med" len="med"/>
+                      <a:tailEnd type="none" w="med" len="med"/>
+                    </a:lnT>
+                    <a:lnB w="6350" cap="flat" cmpd="sng" algn="ctr">
+                      <a:solidFill>
+                        <a:srgbClr val="C9D3CD"/>
+                      </a:solidFill>
+                      <a:prstDash val="solid"/>
+                      <a:round/>
+                      <a:headEnd type="none" w="med" len="med"/>
+                      <a:tailEnd type="none" w="med" len="med"/>
+                    </a:lnB>
+                    <a:solidFill>
+                      <a:srgbClr val="F2F4F3"/>
+                    </a:solidFill>
+                  </a:tcPr>
+                </a:tc>
+                <a:tc>
+                  <a:txBody>
+                    <a:bodyPr/>
+                    <a:lstStyle/>
+                    <a:p>
+                      <a:pPr algn="l" indent="0" marL="0">
+                        <a:buNone/>
+                      </a:pPr>
+                      <a:r>
+                        <a:rPr lang="en-US" sz="870" dirty="0">
+                          <a:solidFill>
+                            <a:srgbClr val="1F2A24"/>
+                          </a:solidFill>
+                          <a:latin typeface="Meiryo UI" pitchFamily="34" charset="0"/>
+                          <a:ea typeface="Meiryo UI" pitchFamily="34" charset="-122"/>
+                          <a:cs typeface="Meiryo UI" pitchFamily="34" charset="-120"/>
+                        </a:rPr>
+                        <a:t>四半期／</a:t>
+                      </a:r>
+                      <a:endParaRPr lang="en-US" sz="1200" dirty="0">
+                        <a:latin typeface="Meiryo UI" charset="0"/>
+                        <a:ea typeface="Meiryo UI" charset="0"/>
+                        <a:cs typeface="Meiryo UI" charset="0"/>
+                      </a:endParaRPr>
+                    </a:p>
+                    <a:p>
+                      <a:pPr algn="ctr" indent="0" marL="0">
+                        <a:buNone/>
+                      </a:pPr>
+                      <a:r>
+                        <a:rPr lang="en-US" sz="800" b="1" dirty="0">
+                          <a:solidFill>
+                            <a:srgbClr val="5A6660"/>
+                          </a:solidFill>
+                          <a:latin typeface="Meiryo UI" pitchFamily="34" charset="0"/>
+                          <a:ea typeface="Meiryo UI" pitchFamily="34" charset="-122"/>
+                          <a:cs typeface="Meiryo UI" pitchFamily="34" charset="-120"/>
+                        </a:rPr>
+                        <a:t>遅行</a:t>
+                      </a:r>
+                      <a:endParaRPr lang="en-US" sz="1200" dirty="0">
+                        <a:latin typeface="Meiryo UI" charset="0"/>
+                        <a:ea typeface="Meiryo UI" charset="0"/>
+                        <a:cs typeface="Meiryo UI" charset="0"/>
+                      </a:endParaRPr>
+                    </a:p>
+                  </a:txBody>
+                  <a:tcPr marL="25603" marR="25603" marT="25603" marB="25603" anchor="ctr">
+                    <a:lnL w="6350" cap="flat" cmpd="sng" algn="ctr">
+                      <a:solidFill>
+                        <a:srgbClr val="C9D3CD"/>
+                      </a:solidFill>
+                      <a:prstDash val="solid"/>
+                      <a:round/>
+                      <a:headEnd type="none" w="med" len="med"/>
+                      <a:tailEnd type="none" w="med" len="med"/>
+                    </a:lnL>
+                    <a:lnR w="6350" cap="flat" cmpd="sng" algn="ctr">
+                      <a:solidFill>
+                        <a:srgbClr val="C9D3CD"/>
+                      </a:solidFill>
+                      <a:prstDash val="solid"/>
+                      <a:round/>
+                      <a:headEnd type="none" w="med" len="med"/>
+                      <a:tailEnd type="none" w="med" len="med"/>
+                    </a:lnR>
+                    <a:lnT w="6350" cap="flat" cmpd="sng" algn="ctr">
+                      <a:solidFill>
+                        <a:srgbClr val="C9D3CD"/>
+                      </a:solidFill>
+                      <a:prstDash val="solid"/>
+                      <a:round/>
+                      <a:headEnd type="none" w="med" len="med"/>
+                      <a:tailEnd type="none" w="med" len="med"/>
+                    </a:lnT>
+                    <a:lnB w="6350" cap="flat" cmpd="sng" algn="ctr">
+                      <a:solidFill>
+                        <a:srgbClr val="C9D3CD"/>
+                      </a:solidFill>
+                      <a:prstDash val="solid"/>
+                      <a:round/>
+                      <a:headEnd type="none" w="med" len="med"/>
+                      <a:tailEnd type="none" w="med" len="med"/>
+                    </a:lnB>
+                    <a:solidFill>
+                      <a:srgbClr val="F2F4F3"/>
+                    </a:solidFill>
+                  </a:tcPr>
+                </a:tc>
+              </a:tr>
+              <a:tr h="324612">
+                <a:tc>
+                  <a:txBody>
+                    <a:bodyPr/>
+                    <a:lstStyle/>
+                    <a:p>
+                      <a:pPr algn="l" indent="0" marL="0">
+                        <a:buNone/>
+                      </a:pPr>
+                      <a:r>
+                        <a:rPr lang="en-US" sz="870" b="1" dirty="0">
+                          <a:solidFill>
+                            <a:srgbClr val="1F2A24"/>
+                          </a:solidFill>
+                          <a:latin typeface="Meiryo UI" pitchFamily="34" charset="0"/>
+                          <a:ea typeface="Meiryo UI" pitchFamily="34" charset="-122"/>
+                          <a:cs typeface="Meiryo UI" pitchFamily="34" charset="-120"/>
+                        </a:rPr>
+                        <a:t>人材・組織（G4）</a:t>
+                      </a:r>
+                      <a:endParaRPr lang="en-US" sz="1200" dirty="0">
+                        <a:latin typeface="Meiryo UI" charset="0"/>
+                        <a:ea typeface="Meiryo UI" charset="0"/>
+                        <a:cs typeface="Meiryo UI" charset="0"/>
+                      </a:endParaRPr>
+                    </a:p>
+                  </a:txBody>
+                  <a:tcPr marL="25603" marR="25603" marT="25603" marB="25603" anchor="ctr">
+                    <a:lnL w="6350" cap="flat" cmpd="sng" algn="ctr">
+                      <a:solidFill>
+                        <a:srgbClr val="C9D3CD"/>
+                      </a:solidFill>
+                      <a:prstDash val="solid"/>
+                      <a:round/>
+                      <a:headEnd type="none" w="med" len="med"/>
+                      <a:tailEnd type="none" w="med" len="med"/>
+                    </a:lnL>
+                    <a:lnR w="6350" cap="flat" cmpd="sng" algn="ctr">
+                      <a:solidFill>
+                        <a:srgbClr val="C9D3CD"/>
+                      </a:solidFill>
+                      <a:prstDash val="solid"/>
+                      <a:round/>
+                      <a:headEnd type="none" w="med" len="med"/>
+                      <a:tailEnd type="none" w="med" len="med"/>
+                    </a:lnR>
+                    <a:lnT w="6350" cap="flat" cmpd="sng" algn="ctr">
+                      <a:solidFill>
+                        <a:srgbClr val="C9D3CD"/>
+                      </a:solidFill>
+                      <a:prstDash val="solid"/>
+                      <a:round/>
+                      <a:headEnd type="none" w="med" len="med"/>
+                      <a:tailEnd type="none" w="med" len="med"/>
+                    </a:lnT>
+                    <a:lnB w="6350" cap="flat" cmpd="sng" algn="ctr">
+                      <a:solidFill>
+                        <a:srgbClr val="C9D3CD"/>
+                      </a:solidFill>
+                      <a:prstDash val="solid"/>
+                      <a:round/>
+                      <a:headEnd type="none" w="med" len="med"/>
+                      <a:tailEnd type="none" w="med" len="med"/>
+                    </a:lnB>
+                    <a:solidFill>
+                      <a:srgbClr val="E9F5EE"/>
+                    </a:solidFill>
+                  </a:tcPr>
+                </a:tc>
+                <a:tc>
+                  <a:txBody>
+                    <a:bodyPr/>
+                    <a:lstStyle/>
+                    <a:p>
+                      <a:pPr algn="l" indent="0" marL="0">
+                        <a:buNone/>
+                      </a:pPr>
+                      <a:r>
+                        <a:rPr lang="en-US" sz="870" b="1" dirty="0">
+                          <a:solidFill>
+                            <a:srgbClr val="1F2A24"/>
+                          </a:solidFill>
+                          <a:latin typeface="Meiryo UI" pitchFamily="34" charset="0"/>
+                          <a:ea typeface="Meiryo UI" pitchFamily="34" charset="-122"/>
+                          <a:cs typeface="Meiryo UI" pitchFamily="34" charset="-120"/>
+                        </a:rPr>
+                        <a:t>企画業務への再配置FTE（削減はしない）</a:t>
+                      </a:r>
+                      <a:endParaRPr lang="en-US" sz="1200" dirty="0">
+                        <a:latin typeface="Meiryo UI" charset="0"/>
+                        <a:ea typeface="Meiryo UI" charset="0"/>
+                        <a:cs typeface="Meiryo UI" charset="0"/>
+                      </a:endParaRPr>
+                    </a:p>
+                  </a:txBody>
+                  <a:tcPr marL="25603" marR="25603" marT="25603" marB="25603" anchor="ctr">
+                    <a:lnL w="6350" cap="flat" cmpd="sng" algn="ctr">
+                      <a:solidFill>
+                        <a:srgbClr val="C9D3CD"/>
+                      </a:solidFill>
+                      <a:prstDash val="solid"/>
+                      <a:round/>
+                      <a:headEnd type="none" w="med" len="med"/>
+                      <a:tailEnd type="none" w="med" len="med"/>
+                    </a:lnL>
+                    <a:lnR w="6350" cap="flat" cmpd="sng" algn="ctr">
+                      <a:solidFill>
+                        <a:srgbClr val="C9D3CD"/>
+                      </a:solidFill>
+                      <a:prstDash val="solid"/>
+                      <a:round/>
+                      <a:headEnd type="none" w="med" len="med"/>
+                      <a:tailEnd type="none" w="med" len="med"/>
+                    </a:lnR>
+                    <a:lnT w="6350" cap="flat" cmpd="sng" algn="ctr">
+                      <a:solidFill>
+                        <a:srgbClr val="C9D3CD"/>
+                      </a:solidFill>
+                      <a:prstDash val="solid"/>
+                      <a:round/>
+                      <a:headEnd type="none" w="med" len="med"/>
+                      <a:tailEnd type="none" w="med" len="med"/>
+                    </a:lnT>
+                    <a:lnB w="6350" cap="flat" cmpd="sng" algn="ctr">
+                      <a:solidFill>
+                        <a:srgbClr val="C9D3CD"/>
+                      </a:solidFill>
+                      <a:prstDash val="solid"/>
+                      <a:round/>
+                      <a:headEnd type="none" w="med" len="med"/>
+                      <a:tailEnd type="none" w="med" len="med"/>
+                    </a:lnB>
+                    <a:solidFill>
+                      <a:srgbClr val="FFFFFF"/>
+                    </a:solidFill>
+                  </a:tcPr>
+                </a:tc>
+                <a:tc>
+                  <a:txBody>
+                    <a:bodyPr/>
+                    <a:lstStyle/>
+                    <a:p>
+                      <a:pPr algn="l" indent="0" marL="0">
+                        <a:buNone/>
+                      </a:pPr>
+                      <a:r>
+                        <a:rPr lang="en-US" sz="870" dirty="0">
+                          <a:solidFill>
+                            <a:srgbClr val="1F2A24"/>
+                          </a:solidFill>
+                          <a:latin typeface="Meiryo UI" pitchFamily="34" charset="0"/>
+                          <a:ea typeface="Meiryo UI" pitchFamily="34" charset="-122"/>
+                          <a:cs typeface="Meiryo UI" pitchFamily="34" charset="-120"/>
+                        </a:rPr>
+                        <a:t>0 → FY27：2FTE → FY29：12FTE</a:t>
+                      </a:r>
+                      <a:endParaRPr lang="en-US" sz="1200" dirty="0">
+                        <a:latin typeface="Meiryo UI" charset="0"/>
+                        <a:ea typeface="Meiryo UI" charset="0"/>
+                        <a:cs typeface="Meiryo UI" charset="0"/>
+                      </a:endParaRPr>
+                    </a:p>
+                  </a:txBody>
+                  <a:tcPr marL="25603" marR="25603" marT="25603" marB="25603" anchor="ctr">
+                    <a:lnL w="6350" cap="flat" cmpd="sng" algn="ctr">
+                      <a:solidFill>
+                        <a:srgbClr val="C9D3CD"/>
+                      </a:solidFill>
+                      <a:prstDash val="solid"/>
+                      <a:round/>
+                      <a:headEnd type="none" w="med" len="med"/>
+                      <a:tailEnd type="none" w="med" len="med"/>
+                    </a:lnL>
+                    <a:lnR w="6350" cap="flat" cmpd="sng" algn="ctr">
+                      <a:solidFill>
+                        <a:srgbClr val="C9D3CD"/>
+                      </a:solidFill>
+                      <a:prstDash val="solid"/>
+                      <a:round/>
+                      <a:headEnd type="none" w="med" len="med"/>
+                      <a:tailEnd type="none" w="med" len="med"/>
+                    </a:lnR>
+                    <a:lnT w="6350" cap="flat" cmpd="sng" algn="ctr">
+                      <a:solidFill>
+                        <a:srgbClr val="C9D3CD"/>
+                      </a:solidFill>
+                      <a:prstDash val="solid"/>
+                      <a:round/>
+                      <a:headEnd type="none" w="med" len="med"/>
+                      <a:tailEnd type="none" w="med" len="med"/>
+                    </a:lnT>
+                    <a:lnB w="6350" cap="flat" cmpd="sng" algn="ctr">
+                      <a:solidFill>
+                        <a:srgbClr val="C9D3CD"/>
+                      </a:solidFill>
+                      <a:prstDash val="solid"/>
+                      <a:round/>
+                      <a:headEnd type="none" w="med" len="med"/>
+                      <a:tailEnd type="none" w="med" len="med"/>
+                    </a:lnB>
+                    <a:solidFill>
+                      <a:srgbClr val="FFFFFF"/>
+                    </a:solidFill>
+                  </a:tcPr>
+                </a:tc>
+                <a:tc>
+                  <a:txBody>
+                    <a:bodyPr/>
+                    <a:lstStyle/>
+                    <a:p>
+                      <a:pPr algn="l" indent="0" marL="0">
+                        <a:buNone/>
+                      </a:pPr>
+                      <a:r>
+                        <a:rPr lang="en-US" sz="870" dirty="0">
+                          <a:solidFill>
+                            <a:srgbClr val="1F2A24"/>
+                          </a:solidFill>
+                          <a:latin typeface="Meiryo UI" pitchFamily="34" charset="0"/>
+                          <a:ea typeface="Meiryo UI" pitchFamily="34" charset="-122"/>
+                          <a:cs typeface="Meiryo UI" pitchFamily="34" charset="-120"/>
+                        </a:rPr>
+                        <a:t>半期／</a:t>
+                      </a:r>
+                      <a:endParaRPr lang="en-US" sz="1200" dirty="0">
+                        <a:latin typeface="Meiryo UI" charset="0"/>
+                        <a:ea typeface="Meiryo UI" charset="0"/>
+                        <a:cs typeface="Meiryo UI" charset="0"/>
+                      </a:endParaRPr>
+                    </a:p>
+                    <a:p>
+                      <a:pPr algn="ctr" indent="0" marL="0">
+                        <a:buNone/>
+                      </a:pPr>
+                      <a:r>
+                        <a:rPr lang="en-US" sz="800" b="1" dirty="0">
+                          <a:solidFill>
+                            <a:srgbClr val="5A6660"/>
+                          </a:solidFill>
+                          <a:latin typeface="Meiryo UI" pitchFamily="34" charset="0"/>
+                          <a:ea typeface="Meiryo UI" pitchFamily="34" charset="-122"/>
+                          <a:cs typeface="Meiryo UI" pitchFamily="34" charset="-120"/>
+                        </a:rPr>
+                        <a:t>遅行</a:t>
+                      </a:r>
+                      <a:endParaRPr lang="en-US" sz="1200" dirty="0">
+                        <a:latin typeface="Meiryo UI" charset="0"/>
+                        <a:ea typeface="Meiryo UI" charset="0"/>
+                        <a:cs typeface="Meiryo UI" charset="0"/>
+                      </a:endParaRPr>
+                    </a:p>
+                  </a:txBody>
+                  <a:tcPr marL="25603" marR="25603" marT="25603" marB="25603" anchor="ctr">
+                    <a:lnL w="6350" cap="flat" cmpd="sng" algn="ctr">
+                      <a:solidFill>
+                        <a:srgbClr val="C9D3CD"/>
+                      </a:solidFill>
+                      <a:prstDash val="solid"/>
+                      <a:round/>
+                      <a:headEnd type="none" w="med" len="med"/>
+                      <a:tailEnd type="none" w="med" len="med"/>
+                    </a:lnL>
+                    <a:lnR w="6350" cap="flat" cmpd="sng" algn="ctr">
+                      <a:solidFill>
+                        <a:srgbClr val="C9D3CD"/>
+                      </a:solidFill>
+                      <a:prstDash val="solid"/>
+                      <a:round/>
+                      <a:headEnd type="none" w="med" len="med"/>
+                      <a:tailEnd type="none" w="med" len="med"/>
+                    </a:lnR>
+                    <a:lnT w="6350" cap="flat" cmpd="sng" algn="ctr">
+                      <a:solidFill>
+                        <a:srgbClr val="C9D3CD"/>
+                      </a:solidFill>
+                      <a:prstDash val="solid"/>
+                      <a:round/>
+                      <a:headEnd type="none" w="med" len="med"/>
+                      <a:tailEnd type="none" w="med" len="med"/>
+                    </a:lnT>
+                    <a:lnB w="6350" cap="flat" cmpd="sng" algn="ctr">
+                      <a:solidFill>
+                        <a:srgbClr val="C9D3CD"/>
+                      </a:solidFill>
+                      <a:prstDash val="solid"/>
+                      <a:round/>
+                      <a:headEnd type="none" w="med" len="med"/>
+                      <a:tailEnd type="none" w="med" len="med"/>
+                    </a:lnB>
+                    <a:solidFill>
+                      <a:srgbClr val="FFFFFF"/>
+                    </a:solidFill>
+                  </a:tcPr>
+                </a:tc>
+              </a:tr>
+              <a:tr h="324612">
+                <a:tc>
+                  <a:txBody>
+                    <a:bodyPr/>
+                    <a:lstStyle/>
+                    <a:p>
+                      <a:pPr algn="l" indent="0" marL="0">
+                        <a:buNone/>
+                      </a:pPr>
+                      <a:r>
+                        <a:rPr lang="en-US" sz="870" b="1" dirty="0">
+                          <a:solidFill>
+                            <a:srgbClr val="1F2A24"/>
+                          </a:solidFill>
+                          <a:latin typeface="Meiryo UI" pitchFamily="34" charset="0"/>
+                          <a:ea typeface="Meiryo UI" pitchFamily="34" charset="-122"/>
+                          <a:cs typeface="Meiryo UI" pitchFamily="34" charset="-120"/>
+                        </a:rPr>
+                        <a:t>人材・組織（G4）</a:t>
+                      </a:r>
+                      <a:endParaRPr lang="en-US" sz="1200" dirty="0">
+                        <a:latin typeface="Meiryo UI" charset="0"/>
+                        <a:ea typeface="Meiryo UI" charset="0"/>
+                        <a:cs typeface="Meiryo UI" charset="0"/>
+                      </a:endParaRPr>
+                    </a:p>
+                  </a:txBody>
+                  <a:tcPr marL="25603" marR="25603" marT="25603" marB="25603" anchor="ctr">
+                    <a:lnL w="6350" cap="flat" cmpd="sng" algn="ctr">
+                      <a:solidFill>
+                        <a:srgbClr val="C9D3CD"/>
+                      </a:solidFill>
+                      <a:prstDash val="solid"/>
+                      <a:round/>
+                      <a:headEnd type="none" w="med" len="med"/>
+                      <a:tailEnd type="none" w="med" len="med"/>
+                    </a:lnL>
+                    <a:lnR w="6350" cap="flat" cmpd="sng" algn="ctr">
+                      <a:solidFill>
+                        <a:srgbClr val="C9D3CD"/>
+                      </a:solidFill>
+                      <a:prstDash val="solid"/>
+                      <a:round/>
+                      <a:headEnd type="none" w="med" len="med"/>
+                      <a:tailEnd type="none" w="med" len="med"/>
+                    </a:lnR>
+                    <a:lnT w="6350" cap="flat" cmpd="sng" algn="ctr">
+                      <a:solidFill>
+                        <a:srgbClr val="C9D3CD"/>
+                      </a:solidFill>
+                      <a:prstDash val="solid"/>
+                      <a:round/>
+                      <a:headEnd type="none" w="med" len="med"/>
+                      <a:tailEnd type="none" w="med" len="med"/>
+                    </a:lnT>
+                    <a:lnB w="6350" cap="flat" cmpd="sng" algn="ctr">
+                      <a:solidFill>
+                        <a:srgbClr val="C9D3CD"/>
+                      </a:solidFill>
+                      <a:prstDash val="solid"/>
+                      <a:round/>
+                      <a:headEnd type="none" w="med" len="med"/>
+                      <a:tailEnd type="none" w="med" len="med"/>
+                    </a:lnB>
+                    <a:solidFill>
+                      <a:srgbClr val="E9F5EE"/>
+                    </a:solidFill>
+                  </a:tcPr>
+                </a:tc>
+                <a:tc>
+                  <a:txBody>
+                    <a:bodyPr/>
+                    <a:lstStyle/>
+                    <a:p>
+                      <a:pPr algn="l" indent="0" marL="0">
+                        <a:buNone/>
+                      </a:pPr>
+                      <a:r>
+                        <a:rPr lang="en-US" sz="870" b="1" dirty="0">
+                          <a:solidFill>
+                            <a:srgbClr val="1F2A24"/>
+                          </a:solidFill>
+                          <a:latin typeface="Meiryo UI" pitchFamily="34" charset="0"/>
+                          <a:ea typeface="Meiryo UI" pitchFamily="34" charset="-122"/>
+                          <a:cs typeface="Meiryo UI" pitchFamily="34" charset="-120"/>
+                        </a:rPr>
+                        <a:t>運用起因の時間外労働</a:t>
+                      </a:r>
+                      <a:endParaRPr lang="en-US" sz="1200" dirty="0">
+                        <a:latin typeface="Meiryo UI" charset="0"/>
+                        <a:ea typeface="Meiryo UI" charset="0"/>
+                        <a:cs typeface="Meiryo UI" charset="0"/>
+                      </a:endParaRPr>
+                    </a:p>
+                  </a:txBody>
+                  <a:tcPr marL="25603" marR="25603" marT="25603" marB="25603" anchor="ctr">
+                    <a:lnL w="6350" cap="flat" cmpd="sng" algn="ctr">
+                      <a:solidFill>
+                        <a:srgbClr val="C9D3CD"/>
+                      </a:solidFill>
+                      <a:prstDash val="solid"/>
+                      <a:round/>
+                      <a:headEnd type="none" w="med" len="med"/>
+                      <a:tailEnd type="none" w="med" len="med"/>
+                    </a:lnL>
+                    <a:lnR w="6350" cap="flat" cmpd="sng" algn="ctr">
+                      <a:solidFill>
+                        <a:srgbClr val="C9D3CD"/>
+                      </a:solidFill>
+                      <a:prstDash val="solid"/>
+                      <a:round/>
+                      <a:headEnd type="none" w="med" len="med"/>
+                      <a:tailEnd type="none" w="med" len="med"/>
+                    </a:lnR>
+                    <a:lnT w="6350" cap="flat" cmpd="sng" algn="ctr">
+                      <a:solidFill>
+                        <a:srgbClr val="C9D3CD"/>
+                      </a:solidFill>
+                      <a:prstDash val="solid"/>
+                      <a:round/>
+                      <a:headEnd type="none" w="med" len="med"/>
+                      <a:tailEnd type="none" w="med" len="med"/>
+                    </a:lnT>
+                    <a:lnB w="6350" cap="flat" cmpd="sng" algn="ctr">
+                      <a:solidFill>
+                        <a:srgbClr val="C9D3CD"/>
+                      </a:solidFill>
+                      <a:prstDash val="solid"/>
+                      <a:round/>
+                      <a:headEnd type="none" w="med" len="med"/>
+                      <a:tailEnd type="none" w="med" len="med"/>
+                    </a:lnB>
+                    <a:solidFill>
+                      <a:srgbClr val="F2F4F3"/>
+                    </a:solidFill>
+                  </a:tcPr>
+                </a:tc>
+                <a:tc>
+                  <a:txBody>
+                    <a:bodyPr/>
+                    <a:lstStyle/>
+                    <a:p>
+                      <a:pPr algn="l" indent="0" marL="0">
+                        <a:buNone/>
+                      </a:pPr>
+                      <a:r>
+                        <a:rPr lang="en-US" sz="870" dirty="0">
+                          <a:solidFill>
+                            <a:srgbClr val="1F2A24"/>
+                          </a:solidFill>
+                          <a:latin typeface="Meiryo UI" pitchFamily="34" charset="0"/>
+                          <a:ea typeface="Meiryo UI" pitchFamily="34" charset="-122"/>
+                          <a:cs typeface="Meiryo UI" pitchFamily="34" charset="-120"/>
+                        </a:rPr>
+                        <a:t>Phase 0で実測 → 継続低減（毎月モニタリング）</a:t>
+                      </a:r>
+                      <a:endParaRPr lang="en-US" sz="1200" dirty="0">
+                        <a:latin typeface="Meiryo UI" charset="0"/>
+                        <a:ea typeface="Meiryo UI" charset="0"/>
+                        <a:cs typeface="Meiryo UI" charset="0"/>
+                      </a:endParaRPr>
+                    </a:p>
+                  </a:txBody>
+                  <a:tcPr marL="25603" marR="25603" marT="25603" marB="25603" anchor="ctr">
+                    <a:lnL w="6350" cap="flat" cmpd="sng" algn="ctr">
+                      <a:solidFill>
+                        <a:srgbClr val="C9D3CD"/>
+                      </a:solidFill>
+                      <a:prstDash val="solid"/>
+                      <a:round/>
+                      <a:headEnd type="none" w="med" len="med"/>
+                      <a:tailEnd type="none" w="med" len="med"/>
+                    </a:lnL>
+                    <a:lnR w="6350" cap="flat" cmpd="sng" algn="ctr">
+                      <a:solidFill>
+                        <a:srgbClr val="C9D3CD"/>
+                      </a:solidFill>
+                      <a:prstDash val="solid"/>
+                      <a:round/>
+                      <a:headEnd type="none" w="med" len="med"/>
+                      <a:tailEnd type="none" w="med" len="med"/>
+                    </a:lnR>
+                    <a:lnT w="6350" cap="flat" cmpd="sng" algn="ctr">
+                      <a:solidFill>
+                        <a:srgbClr val="C9D3CD"/>
+                      </a:solidFill>
+                      <a:prstDash val="solid"/>
+                      <a:round/>
+                      <a:headEnd type="none" w="med" len="med"/>
+                      <a:tailEnd type="none" w="med" len="med"/>
+                    </a:lnT>
+                    <a:lnB w="6350" cap="flat" cmpd="sng" algn="ctr">
+                      <a:solidFill>
+                        <a:srgbClr val="C9D3CD"/>
+                      </a:solidFill>
+                      <a:prstDash val="solid"/>
+                      <a:round/>
+                      <a:headEnd type="none" w="med" len="med"/>
+                      <a:tailEnd type="none" w="med" len="med"/>
+                    </a:lnB>
+                    <a:solidFill>
+                      <a:srgbClr val="F2F4F3"/>
+                    </a:solidFill>
+                  </a:tcPr>
+                </a:tc>
+                <a:tc>
+                  <a:txBody>
+                    <a:bodyPr/>
+                    <a:lstStyle/>
+                    <a:p>
+                      <a:pPr algn="l" indent="0" marL="0">
+                        <a:buNone/>
+                      </a:pPr>
+                      <a:r>
+                        <a:rPr lang="en-US" sz="870" dirty="0">
+                          <a:solidFill>
+                            <a:srgbClr val="1F2A24"/>
+                          </a:solidFill>
+                          <a:latin typeface="Meiryo UI" pitchFamily="34" charset="0"/>
+                          <a:ea typeface="Meiryo UI" pitchFamily="34" charset="-122"/>
+                          <a:cs typeface="Meiryo UI" pitchFamily="34" charset="-120"/>
+                        </a:rPr>
                         <a:t>月次／</a:t>
                       </a:r>
                       <a:endParaRPr lang="en-US" sz="1200" dirty="0">
@@ -3658,7 +4543,892 @@
                         <a:buNone/>
                       </a:pPr>
                       <a:r>
-                        <a:rPr lang="en-US" sz="750" b="1" dirty="0">
+                        <a:rPr lang="en-US" sz="800" b="1" dirty="0">
+                          <a:solidFill>
+                            <a:srgbClr val="1F4E79"/>
+                          </a:solidFill>
+                          <a:latin typeface="Meiryo UI" pitchFamily="34" charset="0"/>
+                          <a:ea typeface="Meiryo UI" pitchFamily="34" charset="-122"/>
+                          <a:cs typeface="Meiryo UI" pitchFamily="34" charset="-120"/>
+                        </a:rPr>
+                        <a:t>先行</a:t>
+                      </a:r>
+                      <a:endParaRPr lang="en-US" sz="1200" dirty="0">
+                        <a:latin typeface="Meiryo UI" charset="0"/>
+                        <a:ea typeface="Meiryo UI" charset="0"/>
+                        <a:cs typeface="Meiryo UI" charset="0"/>
+                      </a:endParaRPr>
+                    </a:p>
+                  </a:txBody>
+                  <a:tcPr marL="25603" marR="25603" marT="25603" marB="25603" anchor="ctr">
+                    <a:lnL w="6350" cap="flat" cmpd="sng" algn="ctr">
+                      <a:solidFill>
+                        <a:srgbClr val="C9D3CD"/>
+                      </a:solidFill>
+                      <a:prstDash val="solid"/>
+                      <a:round/>
+                      <a:headEnd type="none" w="med" len="med"/>
+                      <a:tailEnd type="none" w="med" len="med"/>
+                    </a:lnL>
+                    <a:lnR w="6350" cap="flat" cmpd="sng" algn="ctr">
+                      <a:solidFill>
+                        <a:srgbClr val="C9D3CD"/>
+                      </a:solidFill>
+                      <a:prstDash val="solid"/>
+                      <a:round/>
+                      <a:headEnd type="none" w="med" len="med"/>
+                      <a:tailEnd type="none" w="med" len="med"/>
+                    </a:lnR>
+                    <a:lnT w="6350" cap="flat" cmpd="sng" algn="ctr">
+                      <a:solidFill>
+                        <a:srgbClr val="C9D3CD"/>
+                      </a:solidFill>
+                      <a:prstDash val="solid"/>
+                      <a:round/>
+                      <a:headEnd type="none" w="med" len="med"/>
+                      <a:tailEnd type="none" w="med" len="med"/>
+                    </a:lnT>
+                    <a:lnB w="6350" cap="flat" cmpd="sng" algn="ctr">
+                      <a:solidFill>
+                        <a:srgbClr val="C9D3CD"/>
+                      </a:solidFill>
+                      <a:prstDash val="solid"/>
+                      <a:round/>
+                      <a:headEnd type="none" w="med" len="med"/>
+                      <a:tailEnd type="none" w="med" len="med"/>
+                    </a:lnB>
+                    <a:solidFill>
+                      <a:srgbClr val="F2F4F3"/>
+                    </a:solidFill>
+                  </a:tcPr>
+                </a:tc>
+              </a:tr>
+              <a:tr h="324612">
+                <a:tc>
+                  <a:txBody>
+                    <a:bodyPr/>
+                    <a:lstStyle/>
+                    <a:p>
+                      <a:pPr algn="l" indent="0" marL="0">
+                        <a:buNone/>
+                      </a:pPr>
+                      <a:r>
+                        <a:rPr lang="en-US" sz="870" b="1" dirty="0">
+                          <a:solidFill>
+                            <a:srgbClr val="1F2A24"/>
+                          </a:solidFill>
+                          <a:latin typeface="Meiryo UI" pitchFamily="34" charset="0"/>
+                          <a:ea typeface="Meiryo UI" pitchFamily="34" charset="-122"/>
+                          <a:cs typeface="Meiryo UI" pitchFamily="34" charset="-120"/>
+                        </a:rPr>
+                        <a:t>リスク・ガバナンス（G1）</a:t>
+                      </a:r>
+                      <a:endParaRPr lang="en-US" sz="1200" dirty="0">
+                        <a:latin typeface="Meiryo UI" charset="0"/>
+                        <a:ea typeface="Meiryo UI" charset="0"/>
+                        <a:cs typeface="Meiryo UI" charset="0"/>
+                      </a:endParaRPr>
+                    </a:p>
+                  </a:txBody>
+                  <a:tcPr marL="25603" marR="25603" marT="25603" marB="25603" anchor="ctr">
+                    <a:lnL w="6350" cap="flat" cmpd="sng" algn="ctr">
+                      <a:solidFill>
+                        <a:srgbClr val="C9D3CD"/>
+                      </a:solidFill>
+                      <a:prstDash val="solid"/>
+                      <a:round/>
+                      <a:headEnd type="none" w="med" len="med"/>
+                      <a:tailEnd type="none" w="med" len="med"/>
+                    </a:lnL>
+                    <a:lnR w="6350" cap="flat" cmpd="sng" algn="ctr">
+                      <a:solidFill>
+                        <a:srgbClr val="C9D3CD"/>
+                      </a:solidFill>
+                      <a:prstDash val="solid"/>
+                      <a:round/>
+                      <a:headEnd type="none" w="med" len="med"/>
+                      <a:tailEnd type="none" w="med" len="med"/>
+                    </a:lnR>
+                    <a:lnT w="6350" cap="flat" cmpd="sng" algn="ctr">
+                      <a:solidFill>
+                        <a:srgbClr val="C9D3CD"/>
+                      </a:solidFill>
+                      <a:prstDash val="solid"/>
+                      <a:round/>
+                      <a:headEnd type="none" w="med" len="med"/>
+                      <a:tailEnd type="none" w="med" len="med"/>
+                    </a:lnT>
+                    <a:lnB w="6350" cap="flat" cmpd="sng" algn="ctr">
+                      <a:solidFill>
+                        <a:srgbClr val="C9D3CD"/>
+                      </a:solidFill>
+                      <a:prstDash val="solid"/>
+                      <a:round/>
+                      <a:headEnd type="none" w="med" len="med"/>
+                      <a:tailEnd type="none" w="med" len="med"/>
+                    </a:lnB>
+                    <a:solidFill>
+                      <a:srgbClr val="FBF1E9"/>
+                    </a:solidFill>
+                  </a:tcPr>
+                </a:tc>
+                <a:tc>
+                  <a:txBody>
+                    <a:bodyPr/>
+                    <a:lstStyle/>
+                    <a:p>
+                      <a:pPr algn="l" indent="0" marL="0">
+                        <a:buNone/>
+                      </a:pPr>
+                      <a:r>
+                        <a:rPr lang="en-US" sz="870" b="1" dirty="0">
+                          <a:solidFill>
+                            <a:srgbClr val="1F2A24"/>
+                          </a:solidFill>
+                          <a:latin typeface="Meiryo UI" pitchFamily="34" charset="0"/>
+                          <a:ea typeface="Meiryo UI" pitchFamily="34" charset="-122"/>
+                          <a:cs typeface="Meiryo UI" pitchFamily="34" charset="-120"/>
+                        </a:rPr>
+                        <a:t>特定個人依存業務（引継ぎ試験パス率）</a:t>
+                      </a:r>
+                      <a:endParaRPr lang="en-US" sz="1200" dirty="0">
+                        <a:latin typeface="Meiryo UI" charset="0"/>
+                        <a:ea typeface="Meiryo UI" charset="0"/>
+                        <a:cs typeface="Meiryo UI" charset="0"/>
+                      </a:endParaRPr>
+                    </a:p>
+                  </a:txBody>
+                  <a:tcPr marL="25603" marR="25603" marT="25603" marB="25603" anchor="ctr">
+                    <a:lnL w="6350" cap="flat" cmpd="sng" algn="ctr">
+                      <a:solidFill>
+                        <a:srgbClr val="C9D3CD"/>
+                      </a:solidFill>
+                      <a:prstDash val="solid"/>
+                      <a:round/>
+                      <a:headEnd type="none" w="med" len="med"/>
+                      <a:tailEnd type="none" w="med" len="med"/>
+                    </a:lnL>
+                    <a:lnR w="6350" cap="flat" cmpd="sng" algn="ctr">
+                      <a:solidFill>
+                        <a:srgbClr val="C9D3CD"/>
+                      </a:solidFill>
+                      <a:prstDash val="solid"/>
+                      <a:round/>
+                      <a:headEnd type="none" w="med" len="med"/>
+                      <a:tailEnd type="none" w="med" len="med"/>
+                    </a:lnR>
+                    <a:lnT w="6350" cap="flat" cmpd="sng" algn="ctr">
+                      <a:solidFill>
+                        <a:srgbClr val="C9D3CD"/>
+                      </a:solidFill>
+                      <a:prstDash val="solid"/>
+                      <a:round/>
+                      <a:headEnd type="none" w="med" len="med"/>
+                      <a:tailEnd type="none" w="med" len="med"/>
+                    </a:lnT>
+                    <a:lnB w="6350" cap="flat" cmpd="sng" algn="ctr">
+                      <a:solidFill>
+                        <a:srgbClr val="C9D3CD"/>
+                      </a:solidFill>
+                      <a:prstDash val="solid"/>
+                      <a:round/>
+                      <a:headEnd type="none" w="med" len="med"/>
+                      <a:tailEnd type="none" w="med" len="med"/>
+                    </a:lnB>
+                    <a:solidFill>
+                      <a:srgbClr val="FFFFFF"/>
+                    </a:solidFill>
+                  </a:tcPr>
+                </a:tc>
+                <a:tc>
+                  <a:txBody>
+                    <a:bodyPr/>
+                    <a:lstStyle/>
+                    <a:p>
+                      <a:pPr algn="l" indent="0" marL="0">
+                        <a:buNone/>
+                      </a:pPr>
+                      <a:r>
+                        <a:rPr lang="en-US" sz="870" dirty="0">
+                          <a:solidFill>
+                            <a:srgbClr val="1F2A24"/>
+                          </a:solidFill>
+                          <a:latin typeface="Meiryo UI" pitchFamily="34" charset="0"/>
+                          <a:ea typeface="Meiryo UI" pitchFamily="34" charset="-122"/>
+                          <a:cs typeface="Meiryo UI" pitchFamily="34" charset="-120"/>
+                        </a:rPr>
+                        <a:t>依存あり → ゼロ（パス率100%）</a:t>
+                      </a:r>
+                      <a:endParaRPr lang="en-US" sz="1200" dirty="0">
+                        <a:latin typeface="Meiryo UI" charset="0"/>
+                        <a:ea typeface="Meiryo UI" charset="0"/>
+                        <a:cs typeface="Meiryo UI" charset="0"/>
+                      </a:endParaRPr>
+                    </a:p>
+                  </a:txBody>
+                  <a:tcPr marL="25603" marR="25603" marT="25603" marB="25603" anchor="ctr">
+                    <a:lnL w="6350" cap="flat" cmpd="sng" algn="ctr">
+                      <a:solidFill>
+                        <a:srgbClr val="C9D3CD"/>
+                      </a:solidFill>
+                      <a:prstDash val="solid"/>
+                      <a:round/>
+                      <a:headEnd type="none" w="med" len="med"/>
+                      <a:tailEnd type="none" w="med" len="med"/>
+                    </a:lnL>
+                    <a:lnR w="6350" cap="flat" cmpd="sng" algn="ctr">
+                      <a:solidFill>
+                        <a:srgbClr val="C9D3CD"/>
+                      </a:solidFill>
+                      <a:prstDash val="solid"/>
+                      <a:round/>
+                      <a:headEnd type="none" w="med" len="med"/>
+                      <a:tailEnd type="none" w="med" len="med"/>
+                    </a:lnR>
+                    <a:lnT w="6350" cap="flat" cmpd="sng" algn="ctr">
+                      <a:solidFill>
+                        <a:srgbClr val="C9D3CD"/>
+                      </a:solidFill>
+                      <a:prstDash val="solid"/>
+                      <a:round/>
+                      <a:headEnd type="none" w="med" len="med"/>
+                      <a:tailEnd type="none" w="med" len="med"/>
+                    </a:lnT>
+                    <a:lnB w="6350" cap="flat" cmpd="sng" algn="ctr">
+                      <a:solidFill>
+                        <a:srgbClr val="C9D3CD"/>
+                      </a:solidFill>
+                      <a:prstDash val="solid"/>
+                      <a:round/>
+                      <a:headEnd type="none" w="med" len="med"/>
+                      <a:tailEnd type="none" w="med" len="med"/>
+                    </a:lnB>
+                    <a:solidFill>
+                      <a:srgbClr val="FFFFFF"/>
+                    </a:solidFill>
+                  </a:tcPr>
+                </a:tc>
+                <a:tc>
+                  <a:txBody>
+                    <a:bodyPr/>
+                    <a:lstStyle/>
+                    <a:p>
+                      <a:pPr algn="l" indent="0" marL="0">
+                        <a:buNone/>
+                      </a:pPr>
+                      <a:r>
+                        <a:rPr lang="en-US" sz="870" dirty="0">
+                          <a:solidFill>
+                            <a:srgbClr val="1F2A24"/>
+                          </a:solidFill>
+                          <a:latin typeface="Meiryo UI" pitchFamily="34" charset="0"/>
+                          <a:ea typeface="Meiryo UI" pitchFamily="34" charset="-122"/>
+                          <a:cs typeface="Meiryo UI" pitchFamily="34" charset="-120"/>
+                        </a:rPr>
+                        <a:t>四半期／</a:t>
+                      </a:r>
+                      <a:endParaRPr lang="en-US" sz="1200" dirty="0">
+                        <a:latin typeface="Meiryo UI" charset="0"/>
+                        <a:ea typeface="Meiryo UI" charset="0"/>
+                        <a:cs typeface="Meiryo UI" charset="0"/>
+                      </a:endParaRPr>
+                    </a:p>
+                    <a:p>
+                      <a:pPr algn="ctr" indent="0" marL="0">
+                        <a:buNone/>
+                      </a:pPr>
+                      <a:r>
+                        <a:rPr lang="en-US" sz="800" b="1" dirty="0">
+                          <a:solidFill>
+                            <a:srgbClr val="1F4E79"/>
+                          </a:solidFill>
+                          <a:latin typeface="Meiryo UI" pitchFamily="34" charset="0"/>
+                          <a:ea typeface="Meiryo UI" pitchFamily="34" charset="-122"/>
+                          <a:cs typeface="Meiryo UI" pitchFamily="34" charset="-120"/>
+                        </a:rPr>
+                        <a:t>先行</a:t>
+                      </a:r>
+                      <a:endParaRPr lang="en-US" sz="1200" dirty="0">
+                        <a:latin typeface="Meiryo UI" charset="0"/>
+                        <a:ea typeface="Meiryo UI" charset="0"/>
+                        <a:cs typeface="Meiryo UI" charset="0"/>
+                      </a:endParaRPr>
+                    </a:p>
+                  </a:txBody>
+                  <a:tcPr marL="25603" marR="25603" marT="25603" marB="25603" anchor="ctr">
+                    <a:lnL w="6350" cap="flat" cmpd="sng" algn="ctr">
+                      <a:solidFill>
+                        <a:srgbClr val="C9D3CD"/>
+                      </a:solidFill>
+                      <a:prstDash val="solid"/>
+                      <a:round/>
+                      <a:headEnd type="none" w="med" len="med"/>
+                      <a:tailEnd type="none" w="med" len="med"/>
+                    </a:lnL>
+                    <a:lnR w="6350" cap="flat" cmpd="sng" algn="ctr">
+                      <a:solidFill>
+                        <a:srgbClr val="C9D3CD"/>
+                      </a:solidFill>
+                      <a:prstDash val="solid"/>
+                      <a:round/>
+                      <a:headEnd type="none" w="med" len="med"/>
+                      <a:tailEnd type="none" w="med" len="med"/>
+                    </a:lnR>
+                    <a:lnT w="6350" cap="flat" cmpd="sng" algn="ctr">
+                      <a:solidFill>
+                        <a:srgbClr val="C9D3CD"/>
+                      </a:solidFill>
+                      <a:prstDash val="solid"/>
+                      <a:round/>
+                      <a:headEnd type="none" w="med" len="med"/>
+                      <a:tailEnd type="none" w="med" len="med"/>
+                    </a:lnT>
+                    <a:lnB w="6350" cap="flat" cmpd="sng" algn="ctr">
+                      <a:solidFill>
+                        <a:srgbClr val="C9D3CD"/>
+                      </a:solidFill>
+                      <a:prstDash val="solid"/>
+                      <a:round/>
+                      <a:headEnd type="none" w="med" len="med"/>
+                      <a:tailEnd type="none" w="med" len="med"/>
+                    </a:lnB>
+                    <a:solidFill>
+                      <a:srgbClr val="FFFFFF"/>
+                    </a:solidFill>
+                  </a:tcPr>
+                </a:tc>
+              </a:tr>
+              <a:tr h="324612">
+                <a:tc>
+                  <a:txBody>
+                    <a:bodyPr/>
+                    <a:lstStyle/>
+                    <a:p>
+                      <a:pPr algn="l" indent="0" marL="0">
+                        <a:buNone/>
+                      </a:pPr>
+                      <a:r>
+                        <a:rPr lang="en-US" sz="870" b="1" dirty="0">
+                          <a:solidFill>
+                            <a:srgbClr val="1F2A24"/>
+                          </a:solidFill>
+                          <a:latin typeface="Meiryo UI" pitchFamily="34" charset="0"/>
+                          <a:ea typeface="Meiryo UI" pitchFamily="34" charset="-122"/>
+                          <a:cs typeface="Meiryo UI" pitchFamily="34" charset="-120"/>
+                        </a:rPr>
+                        <a:t>リスク・ガバナンス（G1）</a:t>
+                      </a:r>
+                      <a:endParaRPr lang="en-US" sz="1200" dirty="0">
+                        <a:latin typeface="Meiryo UI" charset="0"/>
+                        <a:ea typeface="Meiryo UI" charset="0"/>
+                        <a:cs typeface="Meiryo UI" charset="0"/>
+                      </a:endParaRPr>
+                    </a:p>
+                  </a:txBody>
+                  <a:tcPr marL="25603" marR="25603" marT="25603" marB="25603" anchor="ctr">
+                    <a:lnL w="6350" cap="flat" cmpd="sng" algn="ctr">
+                      <a:solidFill>
+                        <a:srgbClr val="C9D3CD"/>
+                      </a:solidFill>
+                      <a:prstDash val="solid"/>
+                      <a:round/>
+                      <a:headEnd type="none" w="med" len="med"/>
+                      <a:tailEnd type="none" w="med" len="med"/>
+                    </a:lnL>
+                    <a:lnR w="6350" cap="flat" cmpd="sng" algn="ctr">
+                      <a:solidFill>
+                        <a:srgbClr val="C9D3CD"/>
+                      </a:solidFill>
+                      <a:prstDash val="solid"/>
+                      <a:round/>
+                      <a:headEnd type="none" w="med" len="med"/>
+                      <a:tailEnd type="none" w="med" len="med"/>
+                    </a:lnR>
+                    <a:lnT w="6350" cap="flat" cmpd="sng" algn="ctr">
+                      <a:solidFill>
+                        <a:srgbClr val="C9D3CD"/>
+                      </a:solidFill>
+                      <a:prstDash val="solid"/>
+                      <a:round/>
+                      <a:headEnd type="none" w="med" len="med"/>
+                      <a:tailEnd type="none" w="med" len="med"/>
+                    </a:lnT>
+                    <a:lnB w="6350" cap="flat" cmpd="sng" algn="ctr">
+                      <a:solidFill>
+                        <a:srgbClr val="C9D3CD"/>
+                      </a:solidFill>
+                      <a:prstDash val="solid"/>
+                      <a:round/>
+                      <a:headEnd type="none" w="med" len="med"/>
+                      <a:tailEnd type="none" w="med" len="med"/>
+                    </a:lnB>
+                    <a:solidFill>
+                      <a:srgbClr val="FBF1E9"/>
+                    </a:solidFill>
+                  </a:tcPr>
+                </a:tc>
+                <a:tc>
+                  <a:txBody>
+                    <a:bodyPr/>
+                    <a:lstStyle/>
+                    <a:p>
+                      <a:pPr algn="l" indent="0" marL="0">
+                        <a:buNone/>
+                      </a:pPr>
+                      <a:r>
+                        <a:rPr lang="en-US" sz="870" b="1" dirty="0">
+                          <a:solidFill>
+                            <a:srgbClr val="1F2A24"/>
+                          </a:solidFill>
+                          <a:latin typeface="Meiryo UI" pitchFamily="34" charset="0"/>
+                          <a:ea typeface="Meiryo UI" pitchFamily="34" charset="-122"/>
+                          <a:cs typeface="Meiryo UI" pitchFamily="34" charset="-120"/>
+                        </a:rPr>
+                        <a:t>手順書化率（未文書化業務の解消）</a:t>
+                      </a:r>
+                      <a:endParaRPr lang="en-US" sz="1200" dirty="0">
+                        <a:latin typeface="Meiryo UI" charset="0"/>
+                        <a:ea typeface="Meiryo UI" charset="0"/>
+                        <a:cs typeface="Meiryo UI" charset="0"/>
+                      </a:endParaRPr>
+                    </a:p>
+                  </a:txBody>
+                  <a:tcPr marL="25603" marR="25603" marT="25603" marB="25603" anchor="ctr">
+                    <a:lnL w="6350" cap="flat" cmpd="sng" algn="ctr">
+                      <a:solidFill>
+                        <a:srgbClr val="C9D3CD"/>
+                      </a:solidFill>
+                      <a:prstDash val="solid"/>
+                      <a:round/>
+                      <a:headEnd type="none" w="med" len="med"/>
+                      <a:tailEnd type="none" w="med" len="med"/>
+                    </a:lnL>
+                    <a:lnR w="6350" cap="flat" cmpd="sng" algn="ctr">
+                      <a:solidFill>
+                        <a:srgbClr val="C9D3CD"/>
+                      </a:solidFill>
+                      <a:prstDash val="solid"/>
+                      <a:round/>
+                      <a:headEnd type="none" w="med" len="med"/>
+                      <a:tailEnd type="none" w="med" len="med"/>
+                    </a:lnR>
+                    <a:lnT w="6350" cap="flat" cmpd="sng" algn="ctr">
+                      <a:solidFill>
+                        <a:srgbClr val="C9D3CD"/>
+                      </a:solidFill>
+                      <a:prstDash val="solid"/>
+                      <a:round/>
+                      <a:headEnd type="none" w="med" len="med"/>
+                      <a:tailEnd type="none" w="med" len="med"/>
+                    </a:lnT>
+                    <a:lnB w="6350" cap="flat" cmpd="sng" algn="ctr">
+                      <a:solidFill>
+                        <a:srgbClr val="C9D3CD"/>
+                      </a:solidFill>
+                      <a:prstDash val="solid"/>
+                      <a:round/>
+                      <a:headEnd type="none" w="med" len="med"/>
+                      <a:tailEnd type="none" w="med" len="med"/>
+                    </a:lnB>
+                    <a:solidFill>
+                      <a:srgbClr val="F2F4F3"/>
+                    </a:solidFill>
+                  </a:tcPr>
+                </a:tc>
+                <a:tc>
+                  <a:txBody>
+                    <a:bodyPr/>
+                    <a:lstStyle/>
+                    <a:p>
+                      <a:pPr algn="l" indent="0" marL="0">
+                        <a:buNone/>
+                      </a:pPr>
+                      <a:r>
+                        <a:rPr lang="en-US" sz="870" dirty="0">
+                          <a:solidFill>
+                            <a:srgbClr val="1F2A24"/>
+                          </a:solidFill>
+                          <a:latin typeface="Meiryo UI" pitchFamily="34" charset="0"/>
+                          <a:ea typeface="Meiryo UI" pitchFamily="34" charset="-122"/>
+                          <a:cs typeface="Meiryo UI" pitchFamily="34" charset="-120"/>
+                        </a:rPr>
+                        <a:t>未把握 → 100%（IPは当社帰属）</a:t>
+                      </a:r>
+                      <a:endParaRPr lang="en-US" sz="1200" dirty="0">
+                        <a:latin typeface="Meiryo UI" charset="0"/>
+                        <a:ea typeface="Meiryo UI" charset="0"/>
+                        <a:cs typeface="Meiryo UI" charset="0"/>
+                      </a:endParaRPr>
+                    </a:p>
+                  </a:txBody>
+                  <a:tcPr marL="25603" marR="25603" marT="25603" marB="25603" anchor="ctr">
+                    <a:lnL w="6350" cap="flat" cmpd="sng" algn="ctr">
+                      <a:solidFill>
+                        <a:srgbClr val="C9D3CD"/>
+                      </a:solidFill>
+                      <a:prstDash val="solid"/>
+                      <a:round/>
+                      <a:headEnd type="none" w="med" len="med"/>
+                      <a:tailEnd type="none" w="med" len="med"/>
+                    </a:lnL>
+                    <a:lnR w="6350" cap="flat" cmpd="sng" algn="ctr">
+                      <a:solidFill>
+                        <a:srgbClr val="C9D3CD"/>
+                      </a:solidFill>
+                      <a:prstDash val="solid"/>
+                      <a:round/>
+                      <a:headEnd type="none" w="med" len="med"/>
+                      <a:tailEnd type="none" w="med" len="med"/>
+                    </a:lnR>
+                    <a:lnT w="6350" cap="flat" cmpd="sng" algn="ctr">
+                      <a:solidFill>
+                        <a:srgbClr val="C9D3CD"/>
+                      </a:solidFill>
+                      <a:prstDash val="solid"/>
+                      <a:round/>
+                      <a:headEnd type="none" w="med" len="med"/>
+                      <a:tailEnd type="none" w="med" len="med"/>
+                    </a:lnT>
+                    <a:lnB w="6350" cap="flat" cmpd="sng" algn="ctr">
+                      <a:solidFill>
+                        <a:srgbClr val="C9D3CD"/>
+                      </a:solidFill>
+                      <a:prstDash val="solid"/>
+                      <a:round/>
+                      <a:headEnd type="none" w="med" len="med"/>
+                      <a:tailEnd type="none" w="med" len="med"/>
+                    </a:lnB>
+                    <a:solidFill>
+                      <a:srgbClr val="F2F4F3"/>
+                    </a:solidFill>
+                  </a:tcPr>
+                </a:tc>
+                <a:tc>
+                  <a:txBody>
+                    <a:bodyPr/>
+                    <a:lstStyle/>
+                    <a:p>
+                      <a:pPr algn="l" indent="0" marL="0">
+                        <a:buNone/>
+                      </a:pPr>
+                      <a:r>
+                        <a:rPr lang="en-US" sz="870" dirty="0">
+                          <a:solidFill>
+                            <a:srgbClr val="1F2A24"/>
+                          </a:solidFill>
+                          <a:latin typeface="Meiryo UI" pitchFamily="34" charset="0"/>
+                          <a:ea typeface="Meiryo UI" pitchFamily="34" charset="-122"/>
+                          <a:cs typeface="Meiryo UI" pitchFamily="34" charset="-120"/>
+                        </a:rPr>
+                        <a:t>四半期／</a:t>
+                      </a:r>
+                      <a:endParaRPr lang="en-US" sz="1200" dirty="0">
+                        <a:latin typeface="Meiryo UI" charset="0"/>
+                        <a:ea typeface="Meiryo UI" charset="0"/>
+                        <a:cs typeface="Meiryo UI" charset="0"/>
+                      </a:endParaRPr>
+                    </a:p>
+                    <a:p>
+                      <a:pPr algn="ctr" indent="0" marL="0">
+                        <a:buNone/>
+                      </a:pPr>
+                      <a:r>
+                        <a:rPr lang="en-US" sz="800" b="1" dirty="0">
+                          <a:solidFill>
+                            <a:srgbClr val="1F4E79"/>
+                          </a:solidFill>
+                          <a:latin typeface="Meiryo UI" pitchFamily="34" charset="0"/>
+                          <a:ea typeface="Meiryo UI" pitchFamily="34" charset="-122"/>
+                          <a:cs typeface="Meiryo UI" pitchFamily="34" charset="-120"/>
+                        </a:rPr>
+                        <a:t>先行</a:t>
+                      </a:r>
+                      <a:endParaRPr lang="en-US" sz="1200" dirty="0">
+                        <a:latin typeface="Meiryo UI" charset="0"/>
+                        <a:ea typeface="Meiryo UI" charset="0"/>
+                        <a:cs typeface="Meiryo UI" charset="0"/>
+                      </a:endParaRPr>
+                    </a:p>
+                  </a:txBody>
+                  <a:tcPr marL="25603" marR="25603" marT="25603" marB="25603" anchor="ctr">
+                    <a:lnL w="6350" cap="flat" cmpd="sng" algn="ctr">
+                      <a:solidFill>
+                        <a:srgbClr val="C9D3CD"/>
+                      </a:solidFill>
+                      <a:prstDash val="solid"/>
+                      <a:round/>
+                      <a:headEnd type="none" w="med" len="med"/>
+                      <a:tailEnd type="none" w="med" len="med"/>
+                    </a:lnL>
+                    <a:lnR w="6350" cap="flat" cmpd="sng" algn="ctr">
+                      <a:solidFill>
+                        <a:srgbClr val="C9D3CD"/>
+                      </a:solidFill>
+                      <a:prstDash val="solid"/>
+                      <a:round/>
+                      <a:headEnd type="none" w="med" len="med"/>
+                      <a:tailEnd type="none" w="med" len="med"/>
+                    </a:lnR>
+                    <a:lnT w="6350" cap="flat" cmpd="sng" algn="ctr">
+                      <a:solidFill>
+                        <a:srgbClr val="C9D3CD"/>
+                      </a:solidFill>
+                      <a:prstDash val="solid"/>
+                      <a:round/>
+                      <a:headEnd type="none" w="med" len="med"/>
+                      <a:tailEnd type="none" w="med" len="med"/>
+                    </a:lnT>
+                    <a:lnB w="6350" cap="flat" cmpd="sng" algn="ctr">
+                      <a:solidFill>
+                        <a:srgbClr val="C9D3CD"/>
+                      </a:solidFill>
+                      <a:prstDash val="solid"/>
+                      <a:round/>
+                      <a:headEnd type="none" w="med" len="med"/>
+                      <a:tailEnd type="none" w="med" len="med"/>
+                    </a:lnB>
+                    <a:solidFill>
+                      <a:srgbClr val="F2F4F3"/>
+                    </a:solidFill>
+                  </a:tcPr>
+                </a:tc>
+              </a:tr>
+              <a:tr h="324612">
+                <a:tc>
+                  <a:txBody>
+                    <a:bodyPr/>
+                    <a:lstStyle/>
+                    <a:p>
+                      <a:pPr algn="l" indent="0" marL="0">
+                        <a:buNone/>
+                      </a:pPr>
+                      <a:r>
+                        <a:rPr lang="en-US" sz="870" b="1" dirty="0">
+                          <a:solidFill>
+                            <a:srgbClr val="1F2A24"/>
+                          </a:solidFill>
+                          <a:latin typeface="Meiryo UI" pitchFamily="34" charset="0"/>
+                          <a:ea typeface="Meiryo UI" pitchFamily="34" charset="-122"/>
+                          <a:cs typeface="Meiryo UI" pitchFamily="34" charset="-120"/>
+                        </a:rPr>
+                        <a:t>リスク・ガバナンス（G1）</a:t>
+                      </a:r>
+                      <a:endParaRPr lang="en-US" sz="1200" dirty="0">
+                        <a:latin typeface="Meiryo UI" charset="0"/>
+                        <a:ea typeface="Meiryo UI" charset="0"/>
+                        <a:cs typeface="Meiryo UI" charset="0"/>
+                      </a:endParaRPr>
+                    </a:p>
+                  </a:txBody>
+                  <a:tcPr marL="25603" marR="25603" marT="25603" marB="25603" anchor="ctr">
+                    <a:lnL w="6350" cap="flat" cmpd="sng" algn="ctr">
+                      <a:solidFill>
+                        <a:srgbClr val="C9D3CD"/>
+                      </a:solidFill>
+                      <a:prstDash val="solid"/>
+                      <a:round/>
+                      <a:headEnd type="none" w="med" len="med"/>
+                      <a:tailEnd type="none" w="med" len="med"/>
+                    </a:lnL>
+                    <a:lnR w="6350" cap="flat" cmpd="sng" algn="ctr">
+                      <a:solidFill>
+                        <a:srgbClr val="C9D3CD"/>
+                      </a:solidFill>
+                      <a:prstDash val="solid"/>
+                      <a:round/>
+                      <a:headEnd type="none" w="med" len="med"/>
+                      <a:tailEnd type="none" w="med" len="med"/>
+                    </a:lnR>
+                    <a:lnT w="6350" cap="flat" cmpd="sng" algn="ctr">
+                      <a:solidFill>
+                        <a:srgbClr val="C9D3CD"/>
+                      </a:solidFill>
+                      <a:prstDash val="solid"/>
+                      <a:round/>
+                      <a:headEnd type="none" w="med" len="med"/>
+                      <a:tailEnd type="none" w="med" len="med"/>
+                    </a:lnT>
+                    <a:lnB w="6350" cap="flat" cmpd="sng" algn="ctr">
+                      <a:solidFill>
+                        <a:srgbClr val="C9D3CD"/>
+                      </a:solidFill>
+                      <a:prstDash val="solid"/>
+                      <a:round/>
+                      <a:headEnd type="none" w="med" len="med"/>
+                      <a:tailEnd type="none" w="med" len="med"/>
+                    </a:lnB>
+                    <a:solidFill>
+                      <a:srgbClr val="FBF1E9"/>
+                    </a:solidFill>
+                  </a:tcPr>
+                </a:tc>
+                <a:tc>
+                  <a:txBody>
+                    <a:bodyPr/>
+                    <a:lstStyle/>
+                    <a:p>
+                      <a:pPr algn="l" indent="0" marL="0">
+                        <a:buNone/>
+                      </a:pPr>
+                      <a:r>
+                        <a:rPr lang="en-US" sz="870" b="1" dirty="0">
+                          <a:solidFill>
+                            <a:srgbClr val="1F2A24"/>
+                          </a:solidFill>
+                          <a:latin typeface="Meiryo UI" pitchFamily="34" charset="0"/>
+                          <a:ea typeface="Meiryo UI" pitchFamily="34" charset="-122"/>
+                          <a:cs typeface="Meiryo UI" pitchFamily="34" charset="-120"/>
+                        </a:rPr>
+                        <a:t>IT統制関連の監査指摘件数</a:t>
+                      </a:r>
+                      <a:endParaRPr lang="en-US" sz="1200" dirty="0">
+                        <a:latin typeface="Meiryo UI" charset="0"/>
+                        <a:ea typeface="Meiryo UI" charset="0"/>
+                        <a:cs typeface="Meiryo UI" charset="0"/>
+                      </a:endParaRPr>
+                    </a:p>
+                  </a:txBody>
+                  <a:tcPr marL="25603" marR="25603" marT="25603" marB="25603" anchor="ctr">
+                    <a:lnL w="6350" cap="flat" cmpd="sng" algn="ctr">
+                      <a:solidFill>
+                        <a:srgbClr val="C9D3CD"/>
+                      </a:solidFill>
+                      <a:prstDash val="solid"/>
+                      <a:round/>
+                      <a:headEnd type="none" w="med" len="med"/>
+                      <a:tailEnd type="none" w="med" len="med"/>
+                    </a:lnL>
+                    <a:lnR w="6350" cap="flat" cmpd="sng" algn="ctr">
+                      <a:solidFill>
+                        <a:srgbClr val="C9D3CD"/>
+                      </a:solidFill>
+                      <a:prstDash val="solid"/>
+                      <a:round/>
+                      <a:headEnd type="none" w="med" len="med"/>
+                      <a:tailEnd type="none" w="med" len="med"/>
+                    </a:lnR>
+                    <a:lnT w="6350" cap="flat" cmpd="sng" algn="ctr">
+                      <a:solidFill>
+                        <a:srgbClr val="C9D3CD"/>
+                      </a:solidFill>
+                      <a:prstDash val="solid"/>
+                      <a:round/>
+                      <a:headEnd type="none" w="med" len="med"/>
+                      <a:tailEnd type="none" w="med" len="med"/>
+                    </a:lnT>
+                    <a:lnB w="6350" cap="flat" cmpd="sng" algn="ctr">
+                      <a:solidFill>
+                        <a:srgbClr val="C9D3CD"/>
+                      </a:solidFill>
+                      <a:prstDash val="solid"/>
+                      <a:round/>
+                      <a:headEnd type="none" w="med" len="med"/>
+                      <a:tailEnd type="none" w="med" len="med"/>
+                    </a:lnB>
+                    <a:solidFill>
+                      <a:srgbClr val="FFFFFF"/>
+                    </a:solidFill>
+                  </a:tcPr>
+                </a:tc>
+                <a:tc>
+                  <a:txBody>
+                    <a:bodyPr/>
+                    <a:lstStyle/>
+                    <a:p>
+                      <a:pPr algn="l" indent="0" marL="0">
+                        <a:buNone/>
+                      </a:pPr>
+                      <a:r>
+                        <a:rPr lang="en-US" sz="870" dirty="0">
+                          <a:solidFill>
+                            <a:srgbClr val="1F2A24"/>
+                          </a:solidFill>
+                          <a:latin typeface="Meiryo UI" pitchFamily="34" charset="0"/>
+                          <a:ea typeface="Meiryo UI" pitchFamily="34" charset="-122"/>
+                          <a:cs typeface="Meiryo UI" pitchFamily="34" charset="-120"/>
+                        </a:rPr>
+                        <a:t>Phase 0で棚卸し → ゼロを維持</a:t>
+                      </a:r>
+                      <a:endParaRPr lang="en-US" sz="1200" dirty="0">
+                        <a:latin typeface="Meiryo UI" charset="0"/>
+                        <a:ea typeface="Meiryo UI" charset="0"/>
+                        <a:cs typeface="Meiryo UI" charset="0"/>
+                      </a:endParaRPr>
+                    </a:p>
+                  </a:txBody>
+                  <a:tcPr marL="25603" marR="25603" marT="25603" marB="25603" anchor="ctr">
+                    <a:lnL w="6350" cap="flat" cmpd="sng" algn="ctr">
+                      <a:solidFill>
+                        <a:srgbClr val="C9D3CD"/>
+                      </a:solidFill>
+                      <a:prstDash val="solid"/>
+                      <a:round/>
+                      <a:headEnd type="none" w="med" len="med"/>
+                      <a:tailEnd type="none" w="med" len="med"/>
+                    </a:lnL>
+                    <a:lnR w="6350" cap="flat" cmpd="sng" algn="ctr">
+                      <a:solidFill>
+                        <a:srgbClr val="C9D3CD"/>
+                      </a:solidFill>
+                      <a:prstDash val="solid"/>
+                      <a:round/>
+                      <a:headEnd type="none" w="med" len="med"/>
+                      <a:tailEnd type="none" w="med" len="med"/>
+                    </a:lnR>
+                    <a:lnT w="6350" cap="flat" cmpd="sng" algn="ctr">
+                      <a:solidFill>
+                        <a:srgbClr val="C9D3CD"/>
+                      </a:solidFill>
+                      <a:prstDash val="solid"/>
+                      <a:round/>
+                      <a:headEnd type="none" w="med" len="med"/>
+                      <a:tailEnd type="none" w="med" len="med"/>
+                    </a:lnT>
+                    <a:lnB w="6350" cap="flat" cmpd="sng" algn="ctr">
+                      <a:solidFill>
+                        <a:srgbClr val="C9D3CD"/>
+                      </a:solidFill>
+                      <a:prstDash val="solid"/>
+                      <a:round/>
+                      <a:headEnd type="none" w="med" len="med"/>
+                      <a:tailEnd type="none" w="med" len="med"/>
+                    </a:lnB>
+                    <a:solidFill>
+                      <a:srgbClr val="FFFFFF"/>
+                    </a:solidFill>
+                  </a:tcPr>
+                </a:tc>
+                <a:tc>
+                  <a:txBody>
+                    <a:bodyPr/>
+                    <a:lstStyle/>
+                    <a:p>
+                      <a:pPr algn="l" indent="0" marL="0">
+                        <a:buNone/>
+                      </a:pPr>
+                      <a:r>
+                        <a:rPr lang="en-US" sz="870" dirty="0">
+                          <a:solidFill>
+                            <a:srgbClr val="1F2A24"/>
+                          </a:solidFill>
+                          <a:latin typeface="Meiryo UI" pitchFamily="34" charset="0"/>
+                          <a:ea typeface="Meiryo UI" pitchFamily="34" charset="-122"/>
+                          <a:cs typeface="Meiryo UI" pitchFamily="34" charset="-120"/>
+                        </a:rPr>
+                        <a:t>年次／</a:t>
+                      </a:r>
+                      <a:endParaRPr lang="en-US" sz="1200" dirty="0">
+                        <a:latin typeface="Meiryo UI" charset="0"/>
+                        <a:ea typeface="Meiryo UI" charset="0"/>
+                        <a:cs typeface="Meiryo UI" charset="0"/>
+                      </a:endParaRPr>
+                    </a:p>
+                    <a:p>
+                      <a:pPr algn="ctr" indent="0" marL="0">
+                        <a:buNone/>
+                      </a:pPr>
+                      <a:r>
+                        <a:rPr lang="en-US" sz="800" b="1" dirty="0">
                           <a:solidFill>
                             <a:srgbClr val="5A6660"/>
                           </a:solidFill>
@@ -3675,2367 +5445,7 @@
                       </a:endParaRPr>
                     </a:p>
                   </a:txBody>
-                  <a:tcPr marL="22860" marR="22860" marT="22860" marB="22860" anchor="ctr">
-                    <a:lnL w="6350" cap="flat" cmpd="sng" algn="ctr">
-                      <a:solidFill>
-                        <a:srgbClr val="C9D3CD"/>
-                      </a:solidFill>
-                      <a:prstDash val="solid"/>
-                      <a:round/>
-                      <a:headEnd type="none" w="med" len="med"/>
-                      <a:tailEnd type="none" w="med" len="med"/>
-                    </a:lnL>
-                    <a:lnR w="6350" cap="flat" cmpd="sng" algn="ctr">
-                      <a:solidFill>
-                        <a:srgbClr val="C9D3CD"/>
-                      </a:solidFill>
-                      <a:prstDash val="solid"/>
-                      <a:round/>
-                      <a:headEnd type="none" w="med" len="med"/>
-                      <a:tailEnd type="none" w="med" len="med"/>
-                    </a:lnR>
-                    <a:lnT w="6350" cap="flat" cmpd="sng" algn="ctr">
-                      <a:solidFill>
-                        <a:srgbClr val="C9D3CD"/>
-                      </a:solidFill>
-                      <a:prstDash val="solid"/>
-                      <a:round/>
-                      <a:headEnd type="none" w="med" len="med"/>
-                      <a:tailEnd type="none" w="med" len="med"/>
-                    </a:lnT>
-                    <a:lnB w="6350" cap="flat" cmpd="sng" algn="ctr">
-                      <a:solidFill>
-                        <a:srgbClr val="C9D3CD"/>
-                      </a:solidFill>
-                      <a:prstDash val="solid"/>
-                      <a:round/>
-                      <a:headEnd type="none" w="med" len="med"/>
-                      <a:tailEnd type="none" w="med" len="med"/>
-                    </a:lnB>
-                    <a:solidFill>
-                      <a:srgbClr val="FFFFFF"/>
-                    </a:solidFill>
-                  </a:tcPr>
-                </a:tc>
-              </a:tr>
-              <a:tr h="278892">
-                <a:tc>
-                  <a:txBody>
-                    <a:bodyPr/>
-                    <a:lstStyle/>
-                    <a:p>
-                      <a:pPr algn="l" indent="0" marL="0">
-                        <a:buNone/>
-                      </a:pPr>
-                      <a:r>
-                        <a:rPr lang="en-US" sz="830" b="1" dirty="0">
-                          <a:solidFill>
-                            <a:srgbClr val="1F2A24"/>
-                          </a:solidFill>
-                          <a:latin typeface="Meiryo UI" pitchFamily="34" charset="0"/>
-                          <a:ea typeface="Meiryo UI" pitchFamily="34" charset="-122"/>
-                          <a:cs typeface="Meiryo UI" pitchFamily="34" charset="-120"/>
-                        </a:rPr>
-                        <a:t>品質・サービス（G3）</a:t>
-                      </a:r>
-                      <a:endParaRPr lang="en-US" sz="1200" dirty="0">
-                        <a:latin typeface="Meiryo UI" charset="0"/>
-                        <a:ea typeface="Meiryo UI" charset="0"/>
-                        <a:cs typeface="Meiryo UI" charset="0"/>
-                      </a:endParaRPr>
-                    </a:p>
-                  </a:txBody>
-                  <a:tcPr marL="22860" marR="22860" marT="22860" marB="22860" anchor="ctr">
-                    <a:lnL w="6350" cap="flat" cmpd="sng" algn="ctr">
-                      <a:solidFill>
-                        <a:srgbClr val="C9D3CD"/>
-                      </a:solidFill>
-                      <a:prstDash val="solid"/>
-                      <a:round/>
-                      <a:headEnd type="none" w="med" len="med"/>
-                      <a:tailEnd type="none" w="med" len="med"/>
-                    </a:lnL>
-                    <a:lnR w="6350" cap="flat" cmpd="sng" algn="ctr">
-                      <a:solidFill>
-                        <a:srgbClr val="C9D3CD"/>
-                      </a:solidFill>
-                      <a:prstDash val="solid"/>
-                      <a:round/>
-                      <a:headEnd type="none" w="med" len="med"/>
-                      <a:tailEnd type="none" w="med" len="med"/>
-                    </a:lnR>
-                    <a:lnT w="6350" cap="flat" cmpd="sng" algn="ctr">
-                      <a:solidFill>
-                        <a:srgbClr val="C9D3CD"/>
-                      </a:solidFill>
-                      <a:prstDash val="solid"/>
-                      <a:round/>
-                      <a:headEnd type="none" w="med" len="med"/>
-                      <a:tailEnd type="none" w="med" len="med"/>
-                    </a:lnT>
-                    <a:lnB w="6350" cap="flat" cmpd="sng" algn="ctr">
-                      <a:solidFill>
-                        <a:srgbClr val="C9D3CD"/>
-                      </a:solidFill>
-                      <a:prstDash val="solid"/>
-                      <a:round/>
-                      <a:headEnd type="none" w="med" len="med"/>
-                      <a:tailEnd type="none" w="med" len="med"/>
-                    </a:lnB>
-                    <a:solidFill>
-                      <a:srgbClr val="E8EEF5"/>
-                    </a:solidFill>
-                  </a:tcPr>
-                </a:tc>
-                <a:tc>
-                  <a:txBody>
-                    <a:bodyPr/>
-                    <a:lstStyle/>
-                    <a:p>
-                      <a:pPr algn="l" indent="0" marL="0">
-                        <a:buNone/>
-                      </a:pPr>
-                      <a:r>
-                        <a:rPr lang="en-US" sz="830" b="1" dirty="0">
-                          <a:solidFill>
-                            <a:srgbClr val="1F2A24"/>
-                          </a:solidFill>
-                          <a:latin typeface="Meiryo UI" pitchFamily="34" charset="0"/>
-                          <a:ea typeface="Meiryo UI" pitchFamily="34" charset="-122"/>
-                          <a:cs typeface="Meiryo UI" pitchFamily="34" charset="-120"/>
-                        </a:rPr>
-                        <a:t>脆弱性対応SLA遵守率（緊急・重要パッチの期限内対応率）</a:t>
-                      </a:r>
-                      <a:endParaRPr lang="en-US" sz="1200" dirty="0">
-                        <a:latin typeface="Meiryo UI" charset="0"/>
-                        <a:ea typeface="Meiryo UI" charset="0"/>
-                        <a:cs typeface="Meiryo UI" charset="0"/>
-                      </a:endParaRPr>
-                    </a:p>
-                  </a:txBody>
-                  <a:tcPr marL="22860" marR="22860" marT="22860" marB="22860" anchor="ctr">
-                    <a:lnL w="6350" cap="flat" cmpd="sng" algn="ctr">
-                      <a:solidFill>
-                        <a:srgbClr val="C9D3CD"/>
-                      </a:solidFill>
-                      <a:prstDash val="solid"/>
-                      <a:round/>
-                      <a:headEnd type="none" w="med" len="med"/>
-                      <a:tailEnd type="none" w="med" len="med"/>
-                    </a:lnL>
-                    <a:lnR w="6350" cap="flat" cmpd="sng" algn="ctr">
-                      <a:solidFill>
-                        <a:srgbClr val="C9D3CD"/>
-                      </a:solidFill>
-                      <a:prstDash val="solid"/>
-                      <a:round/>
-                      <a:headEnd type="none" w="med" len="med"/>
-                      <a:tailEnd type="none" w="med" len="med"/>
-                    </a:lnR>
-                    <a:lnT w="6350" cap="flat" cmpd="sng" algn="ctr">
-                      <a:solidFill>
-                        <a:srgbClr val="C9D3CD"/>
-                      </a:solidFill>
-                      <a:prstDash val="solid"/>
-                      <a:round/>
-                      <a:headEnd type="none" w="med" len="med"/>
-                      <a:tailEnd type="none" w="med" len="med"/>
-                    </a:lnT>
-                    <a:lnB w="6350" cap="flat" cmpd="sng" algn="ctr">
-                      <a:solidFill>
-                        <a:srgbClr val="C9D3CD"/>
-                      </a:solidFill>
-                      <a:prstDash val="solid"/>
-                      <a:round/>
-                      <a:headEnd type="none" w="med" len="med"/>
-                      <a:tailEnd type="none" w="med" len="med"/>
-                    </a:lnB>
-                    <a:solidFill>
-                      <a:srgbClr val="F2F4F3"/>
-                    </a:solidFill>
-                  </a:tcPr>
-                </a:tc>
-                <a:tc>
-                  <a:txBody>
-                    <a:bodyPr/>
-                    <a:lstStyle/>
-                    <a:p>
-                      <a:pPr algn="l" indent="0" marL="0">
-                        <a:buNone/>
-                      </a:pPr>
-                      <a:r>
-                        <a:rPr lang="en-US" sz="830" dirty="0">
-                          <a:solidFill>
-                            <a:srgbClr val="1F2A24"/>
-                          </a:solidFill>
-                          <a:latin typeface="Meiryo UI" pitchFamily="34" charset="0"/>
-                          <a:ea typeface="Meiryo UI" pitchFamily="34" charset="-122"/>
-                          <a:cs typeface="Meiryo UI" pitchFamily="34" charset="-120"/>
-                        </a:rPr>
-                        <a:t>未整備 → 契約SLAを設定し遵守率100%</a:t>
-                      </a:r>
-                      <a:endParaRPr lang="en-US" sz="1200" dirty="0">
-                        <a:latin typeface="Meiryo UI" charset="0"/>
-                        <a:ea typeface="Meiryo UI" charset="0"/>
-                        <a:cs typeface="Meiryo UI" charset="0"/>
-                      </a:endParaRPr>
-                    </a:p>
-                  </a:txBody>
-                  <a:tcPr marL="22860" marR="22860" marT="22860" marB="22860" anchor="ctr">
-                    <a:lnL w="6350" cap="flat" cmpd="sng" algn="ctr">
-                      <a:solidFill>
-                        <a:srgbClr val="C9D3CD"/>
-                      </a:solidFill>
-                      <a:prstDash val="solid"/>
-                      <a:round/>
-                      <a:headEnd type="none" w="med" len="med"/>
-                      <a:tailEnd type="none" w="med" len="med"/>
-                    </a:lnL>
-                    <a:lnR w="6350" cap="flat" cmpd="sng" algn="ctr">
-                      <a:solidFill>
-                        <a:srgbClr val="C9D3CD"/>
-                      </a:solidFill>
-                      <a:prstDash val="solid"/>
-                      <a:round/>
-                      <a:headEnd type="none" w="med" len="med"/>
-                      <a:tailEnd type="none" w="med" len="med"/>
-                    </a:lnR>
-                    <a:lnT w="6350" cap="flat" cmpd="sng" algn="ctr">
-                      <a:solidFill>
-                        <a:srgbClr val="C9D3CD"/>
-                      </a:solidFill>
-                      <a:prstDash val="solid"/>
-                      <a:round/>
-                      <a:headEnd type="none" w="med" len="med"/>
-                      <a:tailEnd type="none" w="med" len="med"/>
-                    </a:lnT>
-                    <a:lnB w="6350" cap="flat" cmpd="sng" algn="ctr">
-                      <a:solidFill>
-                        <a:srgbClr val="C9D3CD"/>
-                      </a:solidFill>
-                      <a:prstDash val="solid"/>
-                      <a:round/>
-                      <a:headEnd type="none" w="med" len="med"/>
-                      <a:tailEnd type="none" w="med" len="med"/>
-                    </a:lnB>
-                    <a:solidFill>
-                      <a:srgbClr val="F2F4F3"/>
-                    </a:solidFill>
-                  </a:tcPr>
-                </a:tc>
-                <a:tc>
-                  <a:txBody>
-                    <a:bodyPr/>
-                    <a:lstStyle/>
-                    <a:p>
-                      <a:pPr algn="l" indent="0" marL="0">
-                        <a:buNone/>
-                      </a:pPr>
-                      <a:r>
-                        <a:rPr lang="en-US" sz="830" dirty="0">
-                          <a:solidFill>
-                            <a:srgbClr val="1F2A24"/>
-                          </a:solidFill>
-                          <a:latin typeface="Meiryo UI" pitchFamily="34" charset="0"/>
-                          <a:ea typeface="Meiryo UI" pitchFamily="34" charset="-122"/>
-                          <a:cs typeface="Meiryo UI" pitchFamily="34" charset="-120"/>
-                        </a:rPr>
-                        <a:t>月次／</a:t>
-                      </a:r>
-                      <a:endParaRPr lang="en-US" sz="1200" dirty="0">
-                        <a:latin typeface="Meiryo UI" charset="0"/>
-                        <a:ea typeface="Meiryo UI" charset="0"/>
-                        <a:cs typeface="Meiryo UI" charset="0"/>
-                      </a:endParaRPr>
-                    </a:p>
-                    <a:p>
-                      <a:pPr algn="ctr" indent="0" marL="0">
-                        <a:buNone/>
-                      </a:pPr>
-                      <a:r>
-                        <a:rPr lang="en-US" sz="750" b="1" dirty="0">
-                          <a:solidFill>
-                            <a:srgbClr val="5A6660"/>
-                          </a:solidFill>
-                          <a:latin typeface="Meiryo UI" pitchFamily="34" charset="0"/>
-                          <a:ea typeface="Meiryo UI" pitchFamily="34" charset="-122"/>
-                          <a:cs typeface="Meiryo UI" pitchFamily="34" charset="-120"/>
-                        </a:rPr>
-                        <a:t>遅行</a:t>
-                      </a:r>
-                      <a:endParaRPr lang="en-US" sz="1200" dirty="0">
-                        <a:latin typeface="Meiryo UI" charset="0"/>
-                        <a:ea typeface="Meiryo UI" charset="0"/>
-                        <a:cs typeface="Meiryo UI" charset="0"/>
-                      </a:endParaRPr>
-                    </a:p>
-                  </a:txBody>
-                  <a:tcPr marL="22860" marR="22860" marT="22860" marB="22860" anchor="ctr">
-                    <a:lnL w="6350" cap="flat" cmpd="sng" algn="ctr">
-                      <a:solidFill>
-                        <a:srgbClr val="C9D3CD"/>
-                      </a:solidFill>
-                      <a:prstDash val="solid"/>
-                      <a:round/>
-                      <a:headEnd type="none" w="med" len="med"/>
-                      <a:tailEnd type="none" w="med" len="med"/>
-                    </a:lnL>
-                    <a:lnR w="6350" cap="flat" cmpd="sng" algn="ctr">
-                      <a:solidFill>
-                        <a:srgbClr val="C9D3CD"/>
-                      </a:solidFill>
-                      <a:prstDash val="solid"/>
-                      <a:round/>
-                      <a:headEnd type="none" w="med" len="med"/>
-                      <a:tailEnd type="none" w="med" len="med"/>
-                    </a:lnR>
-                    <a:lnT w="6350" cap="flat" cmpd="sng" algn="ctr">
-                      <a:solidFill>
-                        <a:srgbClr val="C9D3CD"/>
-                      </a:solidFill>
-                      <a:prstDash val="solid"/>
-                      <a:round/>
-                      <a:headEnd type="none" w="med" len="med"/>
-                      <a:tailEnd type="none" w="med" len="med"/>
-                    </a:lnT>
-                    <a:lnB w="6350" cap="flat" cmpd="sng" algn="ctr">
-                      <a:solidFill>
-                        <a:srgbClr val="C9D3CD"/>
-                      </a:solidFill>
-                      <a:prstDash val="solid"/>
-                      <a:round/>
-                      <a:headEnd type="none" w="med" len="med"/>
-                      <a:tailEnd type="none" w="med" len="med"/>
-                    </a:lnB>
-                    <a:solidFill>
-                      <a:srgbClr val="F2F4F3"/>
-                    </a:solidFill>
-                  </a:tcPr>
-                </a:tc>
-              </a:tr>
-              <a:tr h="278892">
-                <a:tc>
-                  <a:txBody>
-                    <a:bodyPr/>
-                    <a:lstStyle/>
-                    <a:p>
-                      <a:pPr algn="l" indent="0" marL="0">
-                        <a:buNone/>
-                      </a:pPr>
-                      <a:r>
-                        <a:rPr lang="en-US" sz="830" b="1" dirty="0">
-                          <a:solidFill>
-                            <a:srgbClr val="1F2A24"/>
-                          </a:solidFill>
-                          <a:latin typeface="Meiryo UI" pitchFamily="34" charset="0"/>
-                          <a:ea typeface="Meiryo UI" pitchFamily="34" charset="-122"/>
-                          <a:cs typeface="Meiryo UI" pitchFamily="34" charset="-120"/>
-                        </a:rPr>
-                        <a:t>品質・サービス（G3）</a:t>
-                      </a:r>
-                      <a:endParaRPr lang="en-US" sz="1200" dirty="0">
-                        <a:latin typeface="Meiryo UI" charset="0"/>
-                        <a:ea typeface="Meiryo UI" charset="0"/>
-                        <a:cs typeface="Meiryo UI" charset="0"/>
-                      </a:endParaRPr>
-                    </a:p>
-                  </a:txBody>
-                  <a:tcPr marL="22860" marR="22860" marT="22860" marB="22860" anchor="ctr">
-                    <a:lnL w="6350" cap="flat" cmpd="sng" algn="ctr">
-                      <a:solidFill>
-                        <a:srgbClr val="C9D3CD"/>
-                      </a:solidFill>
-                      <a:prstDash val="solid"/>
-                      <a:round/>
-                      <a:headEnd type="none" w="med" len="med"/>
-                      <a:tailEnd type="none" w="med" len="med"/>
-                    </a:lnL>
-                    <a:lnR w="6350" cap="flat" cmpd="sng" algn="ctr">
-                      <a:solidFill>
-                        <a:srgbClr val="C9D3CD"/>
-                      </a:solidFill>
-                      <a:prstDash val="solid"/>
-                      <a:round/>
-                      <a:headEnd type="none" w="med" len="med"/>
-                      <a:tailEnd type="none" w="med" len="med"/>
-                    </a:lnR>
-                    <a:lnT w="6350" cap="flat" cmpd="sng" algn="ctr">
-                      <a:solidFill>
-                        <a:srgbClr val="C9D3CD"/>
-                      </a:solidFill>
-                      <a:prstDash val="solid"/>
-                      <a:round/>
-                      <a:headEnd type="none" w="med" len="med"/>
-                      <a:tailEnd type="none" w="med" len="med"/>
-                    </a:lnT>
-                    <a:lnB w="6350" cap="flat" cmpd="sng" algn="ctr">
-                      <a:solidFill>
-                        <a:srgbClr val="C9D3CD"/>
-                      </a:solidFill>
-                      <a:prstDash val="solid"/>
-                      <a:round/>
-                      <a:headEnd type="none" w="med" len="med"/>
-                      <a:tailEnd type="none" w="med" len="med"/>
-                    </a:lnB>
-                    <a:solidFill>
-                      <a:srgbClr val="E8EEF5"/>
-                    </a:solidFill>
-                  </a:tcPr>
-                </a:tc>
-                <a:tc>
-                  <a:txBody>
-                    <a:bodyPr/>
-                    <a:lstStyle/>
-                    <a:p>
-                      <a:pPr algn="l" indent="0" marL="0">
-                        <a:buNone/>
-                      </a:pPr>
-                      <a:r>
-                        <a:rPr lang="en-US" sz="830" b="1" dirty="0">
-                          <a:solidFill>
-                            <a:srgbClr val="1F2A24"/>
-                          </a:solidFill>
-                          <a:latin typeface="Meiryo UI" pitchFamily="34" charset="0"/>
-                          <a:ea typeface="Meiryo UI" pitchFamily="34" charset="-122"/>
-                          <a:cs typeface="Meiryo UI" pitchFamily="34" charset="-120"/>
-                        </a:rPr>
-                        <a:t>24時間365日監視カバレッジ率（対象システムに占める常時監視の割合）</a:t>
-                      </a:r>
-                      <a:endParaRPr lang="en-US" sz="1200" dirty="0">
-                        <a:latin typeface="Meiryo UI" charset="0"/>
-                        <a:ea typeface="Meiryo UI" charset="0"/>
-                        <a:cs typeface="Meiryo UI" charset="0"/>
-                      </a:endParaRPr>
-                    </a:p>
-                  </a:txBody>
-                  <a:tcPr marL="22860" marR="22860" marT="22860" marB="22860" anchor="ctr">
-                    <a:lnL w="6350" cap="flat" cmpd="sng" algn="ctr">
-                      <a:solidFill>
-                        <a:srgbClr val="C9D3CD"/>
-                      </a:solidFill>
-                      <a:prstDash val="solid"/>
-                      <a:round/>
-                      <a:headEnd type="none" w="med" len="med"/>
-                      <a:tailEnd type="none" w="med" len="med"/>
-                    </a:lnL>
-                    <a:lnR w="6350" cap="flat" cmpd="sng" algn="ctr">
-                      <a:solidFill>
-                        <a:srgbClr val="C9D3CD"/>
-                      </a:solidFill>
-                      <a:prstDash val="solid"/>
-                      <a:round/>
-                      <a:headEnd type="none" w="med" len="med"/>
-                      <a:tailEnd type="none" w="med" len="med"/>
-                    </a:lnR>
-                    <a:lnT w="6350" cap="flat" cmpd="sng" algn="ctr">
-                      <a:solidFill>
-                        <a:srgbClr val="C9D3CD"/>
-                      </a:solidFill>
-                      <a:prstDash val="solid"/>
-                      <a:round/>
-                      <a:headEnd type="none" w="med" len="med"/>
-                      <a:tailEnd type="none" w="med" len="med"/>
-                    </a:lnT>
-                    <a:lnB w="6350" cap="flat" cmpd="sng" algn="ctr">
-                      <a:solidFill>
-                        <a:srgbClr val="C9D3CD"/>
-                      </a:solidFill>
-                      <a:prstDash val="solid"/>
-                      <a:round/>
-                      <a:headEnd type="none" w="med" len="med"/>
-                      <a:tailEnd type="none" w="med" len="med"/>
-                    </a:lnB>
-                    <a:solidFill>
-                      <a:srgbClr val="FFFFFF"/>
-                    </a:solidFill>
-                  </a:tcPr>
-                </a:tc>
-                <a:tc>
-                  <a:txBody>
-                    <a:bodyPr/>
-                    <a:lstStyle/>
-                    <a:p>
-                      <a:pPr algn="l" indent="0" marL="0">
-                        <a:buNone/>
-                      </a:pPr>
-                      <a:r>
-                        <a:rPr lang="en-US" sz="830" dirty="0">
-                          <a:solidFill>
-                            <a:srgbClr val="1F2A24"/>
-                          </a:solidFill>
-                          <a:latin typeface="Meiryo UI" pitchFamily="34" charset="0"/>
-                          <a:ea typeface="Meiryo UI" pitchFamily="34" charset="-122"/>
-                          <a:cs typeface="Meiryo UI" pitchFamily="34" charset="-120"/>
-                        </a:rPr>
-                        <a:t>一部のみ（大半は営業時間内対応）→ 100%</a:t>
-                      </a:r>
-                      <a:endParaRPr lang="en-US" sz="1200" dirty="0">
-                        <a:latin typeface="Meiryo UI" charset="0"/>
-                        <a:ea typeface="Meiryo UI" charset="0"/>
-                        <a:cs typeface="Meiryo UI" charset="0"/>
-                      </a:endParaRPr>
-                    </a:p>
-                  </a:txBody>
-                  <a:tcPr marL="22860" marR="22860" marT="22860" marB="22860" anchor="ctr">
-                    <a:lnL w="6350" cap="flat" cmpd="sng" algn="ctr">
-                      <a:solidFill>
-                        <a:srgbClr val="C9D3CD"/>
-                      </a:solidFill>
-                      <a:prstDash val="solid"/>
-                      <a:round/>
-                      <a:headEnd type="none" w="med" len="med"/>
-                      <a:tailEnd type="none" w="med" len="med"/>
-                    </a:lnL>
-                    <a:lnR w="6350" cap="flat" cmpd="sng" algn="ctr">
-                      <a:solidFill>
-                        <a:srgbClr val="C9D3CD"/>
-                      </a:solidFill>
-                      <a:prstDash val="solid"/>
-                      <a:round/>
-                      <a:headEnd type="none" w="med" len="med"/>
-                      <a:tailEnd type="none" w="med" len="med"/>
-                    </a:lnR>
-                    <a:lnT w="6350" cap="flat" cmpd="sng" algn="ctr">
-                      <a:solidFill>
-                        <a:srgbClr val="C9D3CD"/>
-                      </a:solidFill>
-                      <a:prstDash val="solid"/>
-                      <a:round/>
-                      <a:headEnd type="none" w="med" len="med"/>
-                      <a:tailEnd type="none" w="med" len="med"/>
-                    </a:lnT>
-                    <a:lnB w="6350" cap="flat" cmpd="sng" algn="ctr">
-                      <a:solidFill>
-                        <a:srgbClr val="C9D3CD"/>
-                      </a:solidFill>
-                      <a:prstDash val="solid"/>
-                      <a:round/>
-                      <a:headEnd type="none" w="med" len="med"/>
-                      <a:tailEnd type="none" w="med" len="med"/>
-                    </a:lnB>
-                    <a:solidFill>
-                      <a:srgbClr val="FFFFFF"/>
-                    </a:solidFill>
-                  </a:tcPr>
-                </a:tc>
-                <a:tc>
-                  <a:txBody>
-                    <a:bodyPr/>
-                    <a:lstStyle/>
-                    <a:p>
-                      <a:pPr algn="l" indent="0" marL="0">
-                        <a:buNone/>
-                      </a:pPr>
-                      <a:r>
-                        <a:rPr lang="en-US" sz="830" dirty="0">
-                          <a:solidFill>
-                            <a:srgbClr val="1F2A24"/>
-                          </a:solidFill>
-                          <a:latin typeface="Meiryo UI" pitchFamily="34" charset="0"/>
-                          <a:ea typeface="Meiryo UI" pitchFamily="34" charset="-122"/>
-                          <a:cs typeface="Meiryo UI" pitchFamily="34" charset="-120"/>
-                        </a:rPr>
-                        <a:t>四半期／</a:t>
-                      </a:r>
-                      <a:endParaRPr lang="en-US" sz="1200" dirty="0">
-                        <a:latin typeface="Meiryo UI" charset="0"/>
-                        <a:ea typeface="Meiryo UI" charset="0"/>
-                        <a:cs typeface="Meiryo UI" charset="0"/>
-                      </a:endParaRPr>
-                    </a:p>
-                    <a:p>
-                      <a:pPr algn="ctr" indent="0" marL="0">
-                        <a:buNone/>
-                      </a:pPr>
-                      <a:r>
-                        <a:rPr lang="en-US" sz="750" b="1" dirty="0">
-                          <a:solidFill>
-                            <a:srgbClr val="1F4E79"/>
-                          </a:solidFill>
-                          <a:latin typeface="Meiryo UI" pitchFamily="34" charset="0"/>
-                          <a:ea typeface="Meiryo UI" pitchFamily="34" charset="-122"/>
-                          <a:cs typeface="Meiryo UI" pitchFamily="34" charset="-120"/>
-                        </a:rPr>
-                        <a:t>先行</a:t>
-                      </a:r>
-                      <a:endParaRPr lang="en-US" sz="1200" dirty="0">
-                        <a:latin typeface="Meiryo UI" charset="0"/>
-                        <a:ea typeface="Meiryo UI" charset="0"/>
-                        <a:cs typeface="Meiryo UI" charset="0"/>
-                      </a:endParaRPr>
-                    </a:p>
-                  </a:txBody>
-                  <a:tcPr marL="22860" marR="22860" marT="22860" marB="22860" anchor="ctr">
-                    <a:lnL w="6350" cap="flat" cmpd="sng" algn="ctr">
-                      <a:solidFill>
-                        <a:srgbClr val="C9D3CD"/>
-                      </a:solidFill>
-                      <a:prstDash val="solid"/>
-                      <a:round/>
-                      <a:headEnd type="none" w="med" len="med"/>
-                      <a:tailEnd type="none" w="med" len="med"/>
-                    </a:lnL>
-                    <a:lnR w="6350" cap="flat" cmpd="sng" algn="ctr">
-                      <a:solidFill>
-                        <a:srgbClr val="C9D3CD"/>
-                      </a:solidFill>
-                      <a:prstDash val="solid"/>
-                      <a:round/>
-                      <a:headEnd type="none" w="med" len="med"/>
-                      <a:tailEnd type="none" w="med" len="med"/>
-                    </a:lnR>
-                    <a:lnT w="6350" cap="flat" cmpd="sng" algn="ctr">
-                      <a:solidFill>
-                        <a:srgbClr val="C9D3CD"/>
-                      </a:solidFill>
-                      <a:prstDash val="solid"/>
-                      <a:round/>
-                      <a:headEnd type="none" w="med" len="med"/>
-                      <a:tailEnd type="none" w="med" len="med"/>
-                    </a:lnT>
-                    <a:lnB w="6350" cap="flat" cmpd="sng" algn="ctr">
-                      <a:solidFill>
-                        <a:srgbClr val="C9D3CD"/>
-                      </a:solidFill>
-                      <a:prstDash val="solid"/>
-                      <a:round/>
-                      <a:headEnd type="none" w="med" len="med"/>
-                      <a:tailEnd type="none" w="med" len="med"/>
-                    </a:lnB>
-                    <a:solidFill>
-                      <a:srgbClr val="FFFFFF"/>
-                    </a:solidFill>
-                  </a:tcPr>
-                </a:tc>
-              </a:tr>
-              <a:tr h="278892">
-                <a:tc>
-                  <a:txBody>
-                    <a:bodyPr/>
-                    <a:lstStyle/>
-                    <a:p>
-                      <a:pPr algn="l" indent="0" marL="0">
-                        <a:buNone/>
-                      </a:pPr>
-                      <a:r>
-                        <a:rPr lang="en-US" sz="830" b="1" dirty="0">
-                          <a:solidFill>
-                            <a:srgbClr val="1F2A24"/>
-                          </a:solidFill>
-                          <a:latin typeface="Meiryo UI" pitchFamily="34" charset="0"/>
-                          <a:ea typeface="Meiryo UI" pitchFamily="34" charset="-122"/>
-                          <a:cs typeface="Meiryo UI" pitchFamily="34" charset="-120"/>
-                        </a:rPr>
-                        <a:t>人材・組織（G4）</a:t>
-                      </a:r>
-                      <a:endParaRPr lang="en-US" sz="1200" dirty="0">
-                        <a:latin typeface="Meiryo UI" charset="0"/>
-                        <a:ea typeface="Meiryo UI" charset="0"/>
-                        <a:cs typeface="Meiryo UI" charset="0"/>
-                      </a:endParaRPr>
-                    </a:p>
-                  </a:txBody>
-                  <a:tcPr marL="22860" marR="22860" marT="22860" marB="22860" anchor="ctr">
-                    <a:lnL w="6350" cap="flat" cmpd="sng" algn="ctr">
-                      <a:solidFill>
-                        <a:srgbClr val="C9D3CD"/>
-                      </a:solidFill>
-                      <a:prstDash val="solid"/>
-                      <a:round/>
-                      <a:headEnd type="none" w="med" len="med"/>
-                      <a:tailEnd type="none" w="med" len="med"/>
-                    </a:lnL>
-                    <a:lnR w="6350" cap="flat" cmpd="sng" algn="ctr">
-                      <a:solidFill>
-                        <a:srgbClr val="C9D3CD"/>
-                      </a:solidFill>
-                      <a:prstDash val="solid"/>
-                      <a:round/>
-                      <a:headEnd type="none" w="med" len="med"/>
-                      <a:tailEnd type="none" w="med" len="med"/>
-                    </a:lnR>
-                    <a:lnT w="6350" cap="flat" cmpd="sng" algn="ctr">
-                      <a:solidFill>
-                        <a:srgbClr val="C9D3CD"/>
-                      </a:solidFill>
-                      <a:prstDash val="solid"/>
-                      <a:round/>
-                      <a:headEnd type="none" w="med" len="med"/>
-                      <a:tailEnd type="none" w="med" len="med"/>
-                    </a:lnT>
-                    <a:lnB w="6350" cap="flat" cmpd="sng" algn="ctr">
-                      <a:solidFill>
-                        <a:srgbClr val="C9D3CD"/>
-                      </a:solidFill>
-                      <a:prstDash val="solid"/>
-                      <a:round/>
-                      <a:headEnd type="none" w="med" len="med"/>
-                      <a:tailEnd type="none" w="med" len="med"/>
-                    </a:lnB>
-                    <a:solidFill>
-                      <a:srgbClr val="E9F5EE"/>
-                    </a:solidFill>
-                  </a:tcPr>
-                </a:tc>
-                <a:tc>
-                  <a:txBody>
-                    <a:bodyPr/>
-                    <a:lstStyle/>
-                    <a:p>
-                      <a:pPr algn="l" indent="0" marL="0">
-                        <a:buNone/>
-                      </a:pPr>
-                      <a:r>
-                        <a:rPr lang="en-US" sz="830" b="1" dirty="0">
-                          <a:solidFill>
-                            <a:srgbClr val="1F2A24"/>
-                          </a:solidFill>
-                          <a:latin typeface="Meiryo UI" pitchFamily="34" charset="0"/>
-                          <a:ea typeface="Meiryo UI" pitchFamily="34" charset="-122"/>
-                          <a:cs typeface="Meiryo UI" pitchFamily="34" charset="-120"/>
-                        </a:rPr>
-                        <a:t>運用従事率（社員工数に占める運用の割合）</a:t>
-                      </a:r>
-                      <a:endParaRPr lang="en-US" sz="1200" dirty="0">
-                        <a:latin typeface="Meiryo UI" charset="0"/>
-                        <a:ea typeface="Meiryo UI" charset="0"/>
-                        <a:cs typeface="Meiryo UI" charset="0"/>
-                      </a:endParaRPr>
-                    </a:p>
-                  </a:txBody>
-                  <a:tcPr marL="22860" marR="22860" marT="22860" marB="22860" anchor="ctr">
-                    <a:lnL w="6350" cap="flat" cmpd="sng" algn="ctr">
-                      <a:solidFill>
-                        <a:srgbClr val="C9D3CD"/>
-                      </a:solidFill>
-                      <a:prstDash val="solid"/>
-                      <a:round/>
-                      <a:headEnd type="none" w="med" len="med"/>
-                      <a:tailEnd type="none" w="med" len="med"/>
-                    </a:lnL>
-                    <a:lnR w="6350" cap="flat" cmpd="sng" algn="ctr">
-                      <a:solidFill>
-                        <a:srgbClr val="C9D3CD"/>
-                      </a:solidFill>
-                      <a:prstDash val="solid"/>
-                      <a:round/>
-                      <a:headEnd type="none" w="med" len="med"/>
-                      <a:tailEnd type="none" w="med" len="med"/>
-                    </a:lnR>
-                    <a:lnT w="6350" cap="flat" cmpd="sng" algn="ctr">
-                      <a:solidFill>
-                        <a:srgbClr val="C9D3CD"/>
-                      </a:solidFill>
-                      <a:prstDash val="solid"/>
-                      <a:round/>
-                      <a:headEnd type="none" w="med" len="med"/>
-                      <a:tailEnd type="none" w="med" len="med"/>
-                    </a:lnT>
-                    <a:lnB w="6350" cap="flat" cmpd="sng" algn="ctr">
-                      <a:solidFill>
-                        <a:srgbClr val="C9D3CD"/>
-                      </a:solidFill>
-                      <a:prstDash val="solid"/>
-                      <a:round/>
-                      <a:headEnd type="none" w="med" len="med"/>
-                      <a:tailEnd type="none" w="med" len="med"/>
-                    </a:lnB>
-                    <a:solidFill>
-                      <a:srgbClr val="F2F4F3"/>
-                    </a:solidFill>
-                  </a:tcPr>
-                </a:tc>
-                <a:tc>
-                  <a:txBody>
-                    <a:bodyPr/>
-                    <a:lstStyle/>
-                    <a:p>
-                      <a:pPr algn="l" indent="0" marL="0">
-                        <a:buNone/>
-                      </a:pPr>
-                      <a:r>
-                        <a:rPr lang="en-US" sz="830" dirty="0">
-                          <a:solidFill>
-                            <a:srgbClr val="1F2A24"/>
-                          </a:solidFill>
-                          <a:latin typeface="Meiryo UI" pitchFamily="34" charset="0"/>
-                          <a:ea typeface="Meiryo UI" pitchFamily="34" charset="-122"/>
-                          <a:cs typeface="Meiryo UI" pitchFamily="34" charset="-120"/>
-                        </a:rPr>
-                        <a:t>40%（実測で確定）→ 15%以下（3年）</a:t>
-                      </a:r>
-                      <a:endParaRPr lang="en-US" sz="1200" dirty="0">
-                        <a:latin typeface="Meiryo UI" charset="0"/>
-                        <a:ea typeface="Meiryo UI" charset="0"/>
-                        <a:cs typeface="Meiryo UI" charset="0"/>
-                      </a:endParaRPr>
-                    </a:p>
-                  </a:txBody>
-                  <a:tcPr marL="22860" marR="22860" marT="22860" marB="22860" anchor="ctr">
-                    <a:lnL w="6350" cap="flat" cmpd="sng" algn="ctr">
-                      <a:solidFill>
-                        <a:srgbClr val="C9D3CD"/>
-                      </a:solidFill>
-                      <a:prstDash val="solid"/>
-                      <a:round/>
-                      <a:headEnd type="none" w="med" len="med"/>
-                      <a:tailEnd type="none" w="med" len="med"/>
-                    </a:lnL>
-                    <a:lnR w="6350" cap="flat" cmpd="sng" algn="ctr">
-                      <a:solidFill>
-                        <a:srgbClr val="C9D3CD"/>
-                      </a:solidFill>
-                      <a:prstDash val="solid"/>
-                      <a:round/>
-                      <a:headEnd type="none" w="med" len="med"/>
-                      <a:tailEnd type="none" w="med" len="med"/>
-                    </a:lnR>
-                    <a:lnT w="6350" cap="flat" cmpd="sng" algn="ctr">
-                      <a:solidFill>
-                        <a:srgbClr val="C9D3CD"/>
-                      </a:solidFill>
-                      <a:prstDash val="solid"/>
-                      <a:round/>
-                      <a:headEnd type="none" w="med" len="med"/>
-                      <a:tailEnd type="none" w="med" len="med"/>
-                    </a:lnT>
-                    <a:lnB w="6350" cap="flat" cmpd="sng" algn="ctr">
-                      <a:solidFill>
-                        <a:srgbClr val="C9D3CD"/>
-                      </a:solidFill>
-                      <a:prstDash val="solid"/>
-                      <a:round/>
-                      <a:headEnd type="none" w="med" len="med"/>
-                      <a:tailEnd type="none" w="med" len="med"/>
-                    </a:lnB>
-                    <a:solidFill>
-                      <a:srgbClr val="F2F4F3"/>
-                    </a:solidFill>
-                  </a:tcPr>
-                </a:tc>
-                <a:tc>
-                  <a:txBody>
-                    <a:bodyPr/>
-                    <a:lstStyle/>
-                    <a:p>
-                      <a:pPr algn="l" indent="0" marL="0">
-                        <a:buNone/>
-                      </a:pPr>
-                      <a:r>
-                        <a:rPr lang="en-US" sz="830" dirty="0">
-                          <a:solidFill>
-                            <a:srgbClr val="1F2A24"/>
-                          </a:solidFill>
-                          <a:latin typeface="Meiryo UI" pitchFamily="34" charset="0"/>
-                          <a:ea typeface="Meiryo UI" pitchFamily="34" charset="-122"/>
-                          <a:cs typeface="Meiryo UI" pitchFamily="34" charset="-120"/>
-                        </a:rPr>
-                        <a:t>四半期／</a:t>
-                      </a:r>
-                      <a:endParaRPr lang="en-US" sz="1200" dirty="0">
-                        <a:latin typeface="Meiryo UI" charset="0"/>
-                        <a:ea typeface="Meiryo UI" charset="0"/>
-                        <a:cs typeface="Meiryo UI" charset="0"/>
-                      </a:endParaRPr>
-                    </a:p>
-                    <a:p>
-                      <a:pPr algn="ctr" indent="0" marL="0">
-                        <a:buNone/>
-                      </a:pPr>
-                      <a:r>
-                        <a:rPr lang="en-US" sz="750" b="1" dirty="0">
-                          <a:solidFill>
-                            <a:srgbClr val="5A6660"/>
-                          </a:solidFill>
-                          <a:latin typeface="Meiryo UI" pitchFamily="34" charset="0"/>
-                          <a:ea typeface="Meiryo UI" pitchFamily="34" charset="-122"/>
-                          <a:cs typeface="Meiryo UI" pitchFamily="34" charset="-120"/>
-                        </a:rPr>
-                        <a:t>遅行</a:t>
-                      </a:r>
-                      <a:endParaRPr lang="en-US" sz="1200" dirty="0">
-                        <a:latin typeface="Meiryo UI" charset="0"/>
-                        <a:ea typeface="Meiryo UI" charset="0"/>
-                        <a:cs typeface="Meiryo UI" charset="0"/>
-                      </a:endParaRPr>
-                    </a:p>
-                  </a:txBody>
-                  <a:tcPr marL="22860" marR="22860" marT="22860" marB="22860" anchor="ctr">
-                    <a:lnL w="6350" cap="flat" cmpd="sng" algn="ctr">
-                      <a:solidFill>
-                        <a:srgbClr val="C9D3CD"/>
-                      </a:solidFill>
-                      <a:prstDash val="solid"/>
-                      <a:round/>
-                      <a:headEnd type="none" w="med" len="med"/>
-                      <a:tailEnd type="none" w="med" len="med"/>
-                    </a:lnL>
-                    <a:lnR w="6350" cap="flat" cmpd="sng" algn="ctr">
-                      <a:solidFill>
-                        <a:srgbClr val="C9D3CD"/>
-                      </a:solidFill>
-                      <a:prstDash val="solid"/>
-                      <a:round/>
-                      <a:headEnd type="none" w="med" len="med"/>
-                      <a:tailEnd type="none" w="med" len="med"/>
-                    </a:lnR>
-                    <a:lnT w="6350" cap="flat" cmpd="sng" algn="ctr">
-                      <a:solidFill>
-                        <a:srgbClr val="C9D3CD"/>
-                      </a:solidFill>
-                      <a:prstDash val="solid"/>
-                      <a:round/>
-                      <a:headEnd type="none" w="med" len="med"/>
-                      <a:tailEnd type="none" w="med" len="med"/>
-                    </a:lnT>
-                    <a:lnB w="6350" cap="flat" cmpd="sng" algn="ctr">
-                      <a:solidFill>
-                        <a:srgbClr val="C9D3CD"/>
-                      </a:solidFill>
-                      <a:prstDash val="solid"/>
-                      <a:round/>
-                      <a:headEnd type="none" w="med" len="med"/>
-                      <a:tailEnd type="none" w="med" len="med"/>
-                    </a:lnB>
-                    <a:solidFill>
-                      <a:srgbClr val="F2F4F3"/>
-                    </a:solidFill>
-                  </a:tcPr>
-                </a:tc>
-              </a:tr>
-              <a:tr h="278892">
-                <a:tc>
-                  <a:txBody>
-                    <a:bodyPr/>
-                    <a:lstStyle/>
-                    <a:p>
-                      <a:pPr algn="l" indent="0" marL="0">
-                        <a:buNone/>
-                      </a:pPr>
-                      <a:r>
-                        <a:rPr lang="en-US" sz="830" b="1" dirty="0">
-                          <a:solidFill>
-                            <a:srgbClr val="1F2A24"/>
-                          </a:solidFill>
-                          <a:latin typeface="Meiryo UI" pitchFamily="34" charset="0"/>
-                          <a:ea typeface="Meiryo UI" pitchFamily="34" charset="-122"/>
-                          <a:cs typeface="Meiryo UI" pitchFamily="34" charset="-120"/>
-                        </a:rPr>
-                        <a:t>人材・組織（G4）</a:t>
-                      </a:r>
-                      <a:endParaRPr lang="en-US" sz="1200" dirty="0">
-                        <a:latin typeface="Meiryo UI" charset="0"/>
-                        <a:ea typeface="Meiryo UI" charset="0"/>
-                        <a:cs typeface="Meiryo UI" charset="0"/>
-                      </a:endParaRPr>
-                    </a:p>
-                  </a:txBody>
-                  <a:tcPr marL="22860" marR="22860" marT="22860" marB="22860" anchor="ctr">
-                    <a:lnL w="6350" cap="flat" cmpd="sng" algn="ctr">
-                      <a:solidFill>
-                        <a:srgbClr val="C9D3CD"/>
-                      </a:solidFill>
-                      <a:prstDash val="solid"/>
-                      <a:round/>
-                      <a:headEnd type="none" w="med" len="med"/>
-                      <a:tailEnd type="none" w="med" len="med"/>
-                    </a:lnL>
-                    <a:lnR w="6350" cap="flat" cmpd="sng" algn="ctr">
-                      <a:solidFill>
-                        <a:srgbClr val="C9D3CD"/>
-                      </a:solidFill>
-                      <a:prstDash val="solid"/>
-                      <a:round/>
-                      <a:headEnd type="none" w="med" len="med"/>
-                      <a:tailEnd type="none" w="med" len="med"/>
-                    </a:lnR>
-                    <a:lnT w="6350" cap="flat" cmpd="sng" algn="ctr">
-                      <a:solidFill>
-                        <a:srgbClr val="C9D3CD"/>
-                      </a:solidFill>
-                      <a:prstDash val="solid"/>
-                      <a:round/>
-                      <a:headEnd type="none" w="med" len="med"/>
-                      <a:tailEnd type="none" w="med" len="med"/>
-                    </a:lnT>
-                    <a:lnB w="6350" cap="flat" cmpd="sng" algn="ctr">
-                      <a:solidFill>
-                        <a:srgbClr val="C9D3CD"/>
-                      </a:solidFill>
-                      <a:prstDash val="solid"/>
-                      <a:round/>
-                      <a:headEnd type="none" w="med" len="med"/>
-                      <a:tailEnd type="none" w="med" len="med"/>
-                    </a:lnB>
-                    <a:solidFill>
-                      <a:srgbClr val="E9F5EE"/>
-                    </a:solidFill>
-                  </a:tcPr>
-                </a:tc>
-                <a:tc>
-                  <a:txBody>
-                    <a:bodyPr/>
-                    <a:lstStyle/>
-                    <a:p>
-                      <a:pPr algn="l" indent="0" marL="0">
-                        <a:buNone/>
-                      </a:pPr>
-                      <a:r>
-                        <a:rPr lang="en-US" sz="830" b="1" dirty="0">
-                          <a:solidFill>
-                            <a:srgbClr val="1F2A24"/>
-                          </a:solidFill>
-                          <a:latin typeface="Meiryo UI" pitchFamily="34" charset="0"/>
-                          <a:ea typeface="Meiryo UI" pitchFamily="34" charset="-122"/>
-                          <a:cs typeface="Meiryo UI" pitchFamily="34" charset="-120"/>
-                        </a:rPr>
-                        <a:t>企画業務への再配置FTE（削減はしない）</a:t>
-                      </a:r>
-                      <a:endParaRPr lang="en-US" sz="1200" dirty="0">
-                        <a:latin typeface="Meiryo UI" charset="0"/>
-                        <a:ea typeface="Meiryo UI" charset="0"/>
-                        <a:cs typeface="Meiryo UI" charset="0"/>
-                      </a:endParaRPr>
-                    </a:p>
-                  </a:txBody>
-                  <a:tcPr marL="22860" marR="22860" marT="22860" marB="22860" anchor="ctr">
-                    <a:lnL w="6350" cap="flat" cmpd="sng" algn="ctr">
-                      <a:solidFill>
-                        <a:srgbClr val="C9D3CD"/>
-                      </a:solidFill>
-                      <a:prstDash val="solid"/>
-                      <a:round/>
-                      <a:headEnd type="none" w="med" len="med"/>
-                      <a:tailEnd type="none" w="med" len="med"/>
-                    </a:lnL>
-                    <a:lnR w="6350" cap="flat" cmpd="sng" algn="ctr">
-                      <a:solidFill>
-                        <a:srgbClr val="C9D3CD"/>
-                      </a:solidFill>
-                      <a:prstDash val="solid"/>
-                      <a:round/>
-                      <a:headEnd type="none" w="med" len="med"/>
-                      <a:tailEnd type="none" w="med" len="med"/>
-                    </a:lnR>
-                    <a:lnT w="6350" cap="flat" cmpd="sng" algn="ctr">
-                      <a:solidFill>
-                        <a:srgbClr val="C9D3CD"/>
-                      </a:solidFill>
-                      <a:prstDash val="solid"/>
-                      <a:round/>
-                      <a:headEnd type="none" w="med" len="med"/>
-                      <a:tailEnd type="none" w="med" len="med"/>
-                    </a:lnT>
-                    <a:lnB w="6350" cap="flat" cmpd="sng" algn="ctr">
-                      <a:solidFill>
-                        <a:srgbClr val="C9D3CD"/>
-                      </a:solidFill>
-                      <a:prstDash val="solid"/>
-                      <a:round/>
-                      <a:headEnd type="none" w="med" len="med"/>
-                      <a:tailEnd type="none" w="med" len="med"/>
-                    </a:lnB>
-                    <a:solidFill>
-                      <a:srgbClr val="FFFFFF"/>
-                    </a:solidFill>
-                  </a:tcPr>
-                </a:tc>
-                <a:tc>
-                  <a:txBody>
-                    <a:bodyPr/>
-                    <a:lstStyle/>
-                    <a:p>
-                      <a:pPr algn="l" indent="0" marL="0">
-                        <a:buNone/>
-                      </a:pPr>
-                      <a:r>
-                        <a:rPr lang="en-US" sz="830" dirty="0">
-                          <a:solidFill>
-                            <a:srgbClr val="1F2A24"/>
-                          </a:solidFill>
-                          <a:latin typeface="Meiryo UI" pitchFamily="34" charset="0"/>
-                          <a:ea typeface="Meiryo UI" pitchFamily="34" charset="-122"/>
-                          <a:cs typeface="Meiryo UI" pitchFamily="34" charset="-120"/>
-                        </a:rPr>
-                        <a:t>0 → FY27：2FTE → FY29：12FTE</a:t>
-                      </a:r>
-                      <a:endParaRPr lang="en-US" sz="1200" dirty="0">
-                        <a:latin typeface="Meiryo UI" charset="0"/>
-                        <a:ea typeface="Meiryo UI" charset="0"/>
-                        <a:cs typeface="Meiryo UI" charset="0"/>
-                      </a:endParaRPr>
-                    </a:p>
-                  </a:txBody>
-                  <a:tcPr marL="22860" marR="22860" marT="22860" marB="22860" anchor="ctr">
-                    <a:lnL w="6350" cap="flat" cmpd="sng" algn="ctr">
-                      <a:solidFill>
-                        <a:srgbClr val="C9D3CD"/>
-                      </a:solidFill>
-                      <a:prstDash val="solid"/>
-                      <a:round/>
-                      <a:headEnd type="none" w="med" len="med"/>
-                      <a:tailEnd type="none" w="med" len="med"/>
-                    </a:lnL>
-                    <a:lnR w="6350" cap="flat" cmpd="sng" algn="ctr">
-                      <a:solidFill>
-                        <a:srgbClr val="C9D3CD"/>
-                      </a:solidFill>
-                      <a:prstDash val="solid"/>
-                      <a:round/>
-                      <a:headEnd type="none" w="med" len="med"/>
-                      <a:tailEnd type="none" w="med" len="med"/>
-                    </a:lnR>
-                    <a:lnT w="6350" cap="flat" cmpd="sng" algn="ctr">
-                      <a:solidFill>
-                        <a:srgbClr val="C9D3CD"/>
-                      </a:solidFill>
-                      <a:prstDash val="solid"/>
-                      <a:round/>
-                      <a:headEnd type="none" w="med" len="med"/>
-                      <a:tailEnd type="none" w="med" len="med"/>
-                    </a:lnT>
-                    <a:lnB w="6350" cap="flat" cmpd="sng" algn="ctr">
-                      <a:solidFill>
-                        <a:srgbClr val="C9D3CD"/>
-                      </a:solidFill>
-                      <a:prstDash val="solid"/>
-                      <a:round/>
-                      <a:headEnd type="none" w="med" len="med"/>
-                      <a:tailEnd type="none" w="med" len="med"/>
-                    </a:lnB>
-                    <a:solidFill>
-                      <a:srgbClr val="FFFFFF"/>
-                    </a:solidFill>
-                  </a:tcPr>
-                </a:tc>
-                <a:tc>
-                  <a:txBody>
-                    <a:bodyPr/>
-                    <a:lstStyle/>
-                    <a:p>
-                      <a:pPr algn="l" indent="0" marL="0">
-                        <a:buNone/>
-                      </a:pPr>
-                      <a:r>
-                        <a:rPr lang="en-US" sz="830" dirty="0">
-                          <a:solidFill>
-                            <a:srgbClr val="1F2A24"/>
-                          </a:solidFill>
-                          <a:latin typeface="Meiryo UI" pitchFamily="34" charset="0"/>
-                          <a:ea typeface="Meiryo UI" pitchFamily="34" charset="-122"/>
-                          <a:cs typeface="Meiryo UI" pitchFamily="34" charset="-120"/>
-                        </a:rPr>
-                        <a:t>半期／</a:t>
-                      </a:r>
-                      <a:endParaRPr lang="en-US" sz="1200" dirty="0">
-                        <a:latin typeface="Meiryo UI" charset="0"/>
-                        <a:ea typeface="Meiryo UI" charset="0"/>
-                        <a:cs typeface="Meiryo UI" charset="0"/>
-                      </a:endParaRPr>
-                    </a:p>
-                    <a:p>
-                      <a:pPr algn="ctr" indent="0" marL="0">
-                        <a:buNone/>
-                      </a:pPr>
-                      <a:r>
-                        <a:rPr lang="en-US" sz="750" b="1" dirty="0">
-                          <a:solidFill>
-                            <a:srgbClr val="5A6660"/>
-                          </a:solidFill>
-                          <a:latin typeface="Meiryo UI" pitchFamily="34" charset="0"/>
-                          <a:ea typeface="Meiryo UI" pitchFamily="34" charset="-122"/>
-                          <a:cs typeface="Meiryo UI" pitchFamily="34" charset="-120"/>
-                        </a:rPr>
-                        <a:t>遅行</a:t>
-                      </a:r>
-                      <a:endParaRPr lang="en-US" sz="1200" dirty="0">
-                        <a:latin typeface="Meiryo UI" charset="0"/>
-                        <a:ea typeface="Meiryo UI" charset="0"/>
-                        <a:cs typeface="Meiryo UI" charset="0"/>
-                      </a:endParaRPr>
-                    </a:p>
-                  </a:txBody>
-                  <a:tcPr marL="22860" marR="22860" marT="22860" marB="22860" anchor="ctr">
-                    <a:lnL w="6350" cap="flat" cmpd="sng" algn="ctr">
-                      <a:solidFill>
-                        <a:srgbClr val="C9D3CD"/>
-                      </a:solidFill>
-                      <a:prstDash val="solid"/>
-                      <a:round/>
-                      <a:headEnd type="none" w="med" len="med"/>
-                      <a:tailEnd type="none" w="med" len="med"/>
-                    </a:lnL>
-                    <a:lnR w="6350" cap="flat" cmpd="sng" algn="ctr">
-                      <a:solidFill>
-                        <a:srgbClr val="C9D3CD"/>
-                      </a:solidFill>
-                      <a:prstDash val="solid"/>
-                      <a:round/>
-                      <a:headEnd type="none" w="med" len="med"/>
-                      <a:tailEnd type="none" w="med" len="med"/>
-                    </a:lnR>
-                    <a:lnT w="6350" cap="flat" cmpd="sng" algn="ctr">
-                      <a:solidFill>
-                        <a:srgbClr val="C9D3CD"/>
-                      </a:solidFill>
-                      <a:prstDash val="solid"/>
-                      <a:round/>
-                      <a:headEnd type="none" w="med" len="med"/>
-                      <a:tailEnd type="none" w="med" len="med"/>
-                    </a:lnT>
-                    <a:lnB w="6350" cap="flat" cmpd="sng" algn="ctr">
-                      <a:solidFill>
-                        <a:srgbClr val="C9D3CD"/>
-                      </a:solidFill>
-                      <a:prstDash val="solid"/>
-                      <a:round/>
-                      <a:headEnd type="none" w="med" len="med"/>
-                      <a:tailEnd type="none" w="med" len="med"/>
-                    </a:lnB>
-                    <a:solidFill>
-                      <a:srgbClr val="FFFFFF"/>
-                    </a:solidFill>
-                  </a:tcPr>
-                </a:tc>
-              </a:tr>
-              <a:tr h="278892">
-                <a:tc>
-                  <a:txBody>
-                    <a:bodyPr/>
-                    <a:lstStyle/>
-                    <a:p>
-                      <a:pPr algn="l" indent="0" marL="0">
-                        <a:buNone/>
-                      </a:pPr>
-                      <a:r>
-                        <a:rPr lang="en-US" sz="830" b="1" dirty="0">
-                          <a:solidFill>
-                            <a:srgbClr val="1F2A24"/>
-                          </a:solidFill>
-                          <a:latin typeface="Meiryo UI" pitchFamily="34" charset="0"/>
-                          <a:ea typeface="Meiryo UI" pitchFamily="34" charset="-122"/>
-                          <a:cs typeface="Meiryo UI" pitchFamily="34" charset="-120"/>
-                        </a:rPr>
-                        <a:t>人材・組織（G4）</a:t>
-                      </a:r>
-                      <a:endParaRPr lang="en-US" sz="1200" dirty="0">
-                        <a:latin typeface="Meiryo UI" charset="0"/>
-                        <a:ea typeface="Meiryo UI" charset="0"/>
-                        <a:cs typeface="Meiryo UI" charset="0"/>
-                      </a:endParaRPr>
-                    </a:p>
-                  </a:txBody>
-                  <a:tcPr marL="22860" marR="22860" marT="22860" marB="22860" anchor="ctr">
-                    <a:lnL w="6350" cap="flat" cmpd="sng" algn="ctr">
-                      <a:solidFill>
-                        <a:srgbClr val="C9D3CD"/>
-                      </a:solidFill>
-                      <a:prstDash val="solid"/>
-                      <a:round/>
-                      <a:headEnd type="none" w="med" len="med"/>
-                      <a:tailEnd type="none" w="med" len="med"/>
-                    </a:lnL>
-                    <a:lnR w="6350" cap="flat" cmpd="sng" algn="ctr">
-                      <a:solidFill>
-                        <a:srgbClr val="C9D3CD"/>
-                      </a:solidFill>
-                      <a:prstDash val="solid"/>
-                      <a:round/>
-                      <a:headEnd type="none" w="med" len="med"/>
-                      <a:tailEnd type="none" w="med" len="med"/>
-                    </a:lnR>
-                    <a:lnT w="6350" cap="flat" cmpd="sng" algn="ctr">
-                      <a:solidFill>
-                        <a:srgbClr val="C9D3CD"/>
-                      </a:solidFill>
-                      <a:prstDash val="solid"/>
-                      <a:round/>
-                      <a:headEnd type="none" w="med" len="med"/>
-                      <a:tailEnd type="none" w="med" len="med"/>
-                    </a:lnT>
-                    <a:lnB w="6350" cap="flat" cmpd="sng" algn="ctr">
-                      <a:solidFill>
-                        <a:srgbClr val="C9D3CD"/>
-                      </a:solidFill>
-                      <a:prstDash val="solid"/>
-                      <a:round/>
-                      <a:headEnd type="none" w="med" len="med"/>
-                      <a:tailEnd type="none" w="med" len="med"/>
-                    </a:lnB>
-                    <a:solidFill>
-                      <a:srgbClr val="E9F5EE"/>
-                    </a:solidFill>
-                  </a:tcPr>
-                </a:tc>
-                <a:tc>
-                  <a:txBody>
-                    <a:bodyPr/>
-                    <a:lstStyle/>
-                    <a:p>
-                      <a:pPr algn="l" indent="0" marL="0">
-                        <a:buNone/>
-                      </a:pPr>
-                      <a:r>
-                        <a:rPr lang="en-US" sz="830" b="1" dirty="0">
-                          <a:solidFill>
-                            <a:srgbClr val="1F2A24"/>
-                          </a:solidFill>
-                          <a:latin typeface="Meiryo UI" pitchFamily="34" charset="0"/>
-                          <a:ea typeface="Meiryo UI" pitchFamily="34" charset="-122"/>
-                          <a:cs typeface="Meiryo UI" pitchFamily="34" charset="-120"/>
-                        </a:rPr>
-                        <a:t>運用起因の時間外労働</a:t>
-                      </a:r>
-                      <a:endParaRPr lang="en-US" sz="1200" dirty="0">
-                        <a:latin typeface="Meiryo UI" charset="0"/>
-                        <a:ea typeface="Meiryo UI" charset="0"/>
-                        <a:cs typeface="Meiryo UI" charset="0"/>
-                      </a:endParaRPr>
-                    </a:p>
-                  </a:txBody>
-                  <a:tcPr marL="22860" marR="22860" marT="22860" marB="22860" anchor="ctr">
-                    <a:lnL w="6350" cap="flat" cmpd="sng" algn="ctr">
-                      <a:solidFill>
-                        <a:srgbClr val="C9D3CD"/>
-                      </a:solidFill>
-                      <a:prstDash val="solid"/>
-                      <a:round/>
-                      <a:headEnd type="none" w="med" len="med"/>
-                      <a:tailEnd type="none" w="med" len="med"/>
-                    </a:lnL>
-                    <a:lnR w="6350" cap="flat" cmpd="sng" algn="ctr">
-                      <a:solidFill>
-                        <a:srgbClr val="C9D3CD"/>
-                      </a:solidFill>
-                      <a:prstDash val="solid"/>
-                      <a:round/>
-                      <a:headEnd type="none" w="med" len="med"/>
-                      <a:tailEnd type="none" w="med" len="med"/>
-                    </a:lnR>
-                    <a:lnT w="6350" cap="flat" cmpd="sng" algn="ctr">
-                      <a:solidFill>
-                        <a:srgbClr val="C9D3CD"/>
-                      </a:solidFill>
-                      <a:prstDash val="solid"/>
-                      <a:round/>
-                      <a:headEnd type="none" w="med" len="med"/>
-                      <a:tailEnd type="none" w="med" len="med"/>
-                    </a:lnT>
-                    <a:lnB w="6350" cap="flat" cmpd="sng" algn="ctr">
-                      <a:solidFill>
-                        <a:srgbClr val="C9D3CD"/>
-                      </a:solidFill>
-                      <a:prstDash val="solid"/>
-                      <a:round/>
-                      <a:headEnd type="none" w="med" len="med"/>
-                      <a:tailEnd type="none" w="med" len="med"/>
-                    </a:lnB>
-                    <a:solidFill>
-                      <a:srgbClr val="F2F4F3"/>
-                    </a:solidFill>
-                  </a:tcPr>
-                </a:tc>
-                <a:tc>
-                  <a:txBody>
-                    <a:bodyPr/>
-                    <a:lstStyle/>
-                    <a:p>
-                      <a:pPr algn="l" indent="0" marL="0">
-                        <a:buNone/>
-                      </a:pPr>
-                      <a:r>
-                        <a:rPr lang="en-US" sz="830" dirty="0">
-                          <a:solidFill>
-                            <a:srgbClr val="1F2A24"/>
-                          </a:solidFill>
-                          <a:latin typeface="Meiryo UI" pitchFamily="34" charset="0"/>
-                          <a:ea typeface="Meiryo UI" pitchFamily="34" charset="-122"/>
-                          <a:cs typeface="Meiryo UI" pitchFamily="34" charset="-120"/>
-                        </a:rPr>
-                        <a:t>Phase 0で実測 → 継続低減（毎月モニタリング）</a:t>
-                      </a:r>
-                      <a:endParaRPr lang="en-US" sz="1200" dirty="0">
-                        <a:latin typeface="Meiryo UI" charset="0"/>
-                        <a:ea typeface="Meiryo UI" charset="0"/>
-                        <a:cs typeface="Meiryo UI" charset="0"/>
-                      </a:endParaRPr>
-                    </a:p>
-                  </a:txBody>
-                  <a:tcPr marL="22860" marR="22860" marT="22860" marB="22860" anchor="ctr">
-                    <a:lnL w="6350" cap="flat" cmpd="sng" algn="ctr">
-                      <a:solidFill>
-                        <a:srgbClr val="C9D3CD"/>
-                      </a:solidFill>
-                      <a:prstDash val="solid"/>
-                      <a:round/>
-                      <a:headEnd type="none" w="med" len="med"/>
-                      <a:tailEnd type="none" w="med" len="med"/>
-                    </a:lnL>
-                    <a:lnR w="6350" cap="flat" cmpd="sng" algn="ctr">
-                      <a:solidFill>
-                        <a:srgbClr val="C9D3CD"/>
-                      </a:solidFill>
-                      <a:prstDash val="solid"/>
-                      <a:round/>
-                      <a:headEnd type="none" w="med" len="med"/>
-                      <a:tailEnd type="none" w="med" len="med"/>
-                    </a:lnR>
-                    <a:lnT w="6350" cap="flat" cmpd="sng" algn="ctr">
-                      <a:solidFill>
-                        <a:srgbClr val="C9D3CD"/>
-                      </a:solidFill>
-                      <a:prstDash val="solid"/>
-                      <a:round/>
-                      <a:headEnd type="none" w="med" len="med"/>
-                      <a:tailEnd type="none" w="med" len="med"/>
-                    </a:lnT>
-                    <a:lnB w="6350" cap="flat" cmpd="sng" algn="ctr">
-                      <a:solidFill>
-                        <a:srgbClr val="C9D3CD"/>
-                      </a:solidFill>
-                      <a:prstDash val="solid"/>
-                      <a:round/>
-                      <a:headEnd type="none" w="med" len="med"/>
-                      <a:tailEnd type="none" w="med" len="med"/>
-                    </a:lnB>
-                    <a:solidFill>
-                      <a:srgbClr val="F2F4F3"/>
-                    </a:solidFill>
-                  </a:tcPr>
-                </a:tc>
-                <a:tc>
-                  <a:txBody>
-                    <a:bodyPr/>
-                    <a:lstStyle/>
-                    <a:p>
-                      <a:pPr algn="l" indent="0" marL="0">
-                        <a:buNone/>
-                      </a:pPr>
-                      <a:r>
-                        <a:rPr lang="en-US" sz="830" dirty="0">
-                          <a:solidFill>
-                            <a:srgbClr val="1F2A24"/>
-                          </a:solidFill>
-                          <a:latin typeface="Meiryo UI" pitchFamily="34" charset="0"/>
-                          <a:ea typeface="Meiryo UI" pitchFamily="34" charset="-122"/>
-                          <a:cs typeface="Meiryo UI" pitchFamily="34" charset="-120"/>
-                        </a:rPr>
-                        <a:t>月次／</a:t>
-                      </a:r>
-                      <a:endParaRPr lang="en-US" sz="1200" dirty="0">
-                        <a:latin typeface="Meiryo UI" charset="0"/>
-                        <a:ea typeface="Meiryo UI" charset="0"/>
-                        <a:cs typeface="Meiryo UI" charset="0"/>
-                      </a:endParaRPr>
-                    </a:p>
-                    <a:p>
-                      <a:pPr algn="ctr" indent="0" marL="0">
-                        <a:buNone/>
-                      </a:pPr>
-                      <a:r>
-                        <a:rPr lang="en-US" sz="750" b="1" dirty="0">
-                          <a:solidFill>
-                            <a:srgbClr val="1F4E79"/>
-                          </a:solidFill>
-                          <a:latin typeface="Meiryo UI" pitchFamily="34" charset="0"/>
-                          <a:ea typeface="Meiryo UI" pitchFamily="34" charset="-122"/>
-                          <a:cs typeface="Meiryo UI" pitchFamily="34" charset="-120"/>
-                        </a:rPr>
-                        <a:t>先行</a:t>
-                      </a:r>
-                      <a:endParaRPr lang="en-US" sz="1200" dirty="0">
-                        <a:latin typeface="Meiryo UI" charset="0"/>
-                        <a:ea typeface="Meiryo UI" charset="0"/>
-                        <a:cs typeface="Meiryo UI" charset="0"/>
-                      </a:endParaRPr>
-                    </a:p>
-                  </a:txBody>
-                  <a:tcPr marL="22860" marR="22860" marT="22860" marB="22860" anchor="ctr">
-                    <a:lnL w="6350" cap="flat" cmpd="sng" algn="ctr">
-                      <a:solidFill>
-                        <a:srgbClr val="C9D3CD"/>
-                      </a:solidFill>
-                      <a:prstDash val="solid"/>
-                      <a:round/>
-                      <a:headEnd type="none" w="med" len="med"/>
-                      <a:tailEnd type="none" w="med" len="med"/>
-                    </a:lnL>
-                    <a:lnR w="6350" cap="flat" cmpd="sng" algn="ctr">
-                      <a:solidFill>
-                        <a:srgbClr val="C9D3CD"/>
-                      </a:solidFill>
-                      <a:prstDash val="solid"/>
-                      <a:round/>
-                      <a:headEnd type="none" w="med" len="med"/>
-                      <a:tailEnd type="none" w="med" len="med"/>
-                    </a:lnR>
-                    <a:lnT w="6350" cap="flat" cmpd="sng" algn="ctr">
-                      <a:solidFill>
-                        <a:srgbClr val="C9D3CD"/>
-                      </a:solidFill>
-                      <a:prstDash val="solid"/>
-                      <a:round/>
-                      <a:headEnd type="none" w="med" len="med"/>
-                      <a:tailEnd type="none" w="med" len="med"/>
-                    </a:lnT>
-                    <a:lnB w="6350" cap="flat" cmpd="sng" algn="ctr">
-                      <a:solidFill>
-                        <a:srgbClr val="C9D3CD"/>
-                      </a:solidFill>
-                      <a:prstDash val="solid"/>
-                      <a:round/>
-                      <a:headEnd type="none" w="med" len="med"/>
-                      <a:tailEnd type="none" w="med" len="med"/>
-                    </a:lnB>
-                    <a:solidFill>
-                      <a:srgbClr val="F2F4F3"/>
-                    </a:solidFill>
-                  </a:tcPr>
-                </a:tc>
-              </a:tr>
-              <a:tr h="278892">
-                <a:tc>
-                  <a:txBody>
-                    <a:bodyPr/>
-                    <a:lstStyle/>
-                    <a:p>
-                      <a:pPr algn="l" indent="0" marL="0">
-                        <a:buNone/>
-                      </a:pPr>
-                      <a:r>
-                        <a:rPr lang="en-US" sz="830" b="1" dirty="0">
-                          <a:solidFill>
-                            <a:srgbClr val="1F2A24"/>
-                          </a:solidFill>
-                          <a:latin typeface="Meiryo UI" pitchFamily="34" charset="0"/>
-                          <a:ea typeface="Meiryo UI" pitchFamily="34" charset="-122"/>
-                          <a:cs typeface="Meiryo UI" pitchFamily="34" charset="-120"/>
-                        </a:rPr>
-                        <a:t>リスク・ガバナンス（G1）</a:t>
-                      </a:r>
-                      <a:endParaRPr lang="en-US" sz="1200" dirty="0">
-                        <a:latin typeface="Meiryo UI" charset="0"/>
-                        <a:ea typeface="Meiryo UI" charset="0"/>
-                        <a:cs typeface="Meiryo UI" charset="0"/>
-                      </a:endParaRPr>
-                    </a:p>
-                  </a:txBody>
-                  <a:tcPr marL="22860" marR="22860" marT="22860" marB="22860" anchor="ctr">
-                    <a:lnL w="6350" cap="flat" cmpd="sng" algn="ctr">
-                      <a:solidFill>
-                        <a:srgbClr val="C9D3CD"/>
-                      </a:solidFill>
-                      <a:prstDash val="solid"/>
-                      <a:round/>
-                      <a:headEnd type="none" w="med" len="med"/>
-                      <a:tailEnd type="none" w="med" len="med"/>
-                    </a:lnL>
-                    <a:lnR w="6350" cap="flat" cmpd="sng" algn="ctr">
-                      <a:solidFill>
-                        <a:srgbClr val="C9D3CD"/>
-                      </a:solidFill>
-                      <a:prstDash val="solid"/>
-                      <a:round/>
-                      <a:headEnd type="none" w="med" len="med"/>
-                      <a:tailEnd type="none" w="med" len="med"/>
-                    </a:lnR>
-                    <a:lnT w="6350" cap="flat" cmpd="sng" algn="ctr">
-                      <a:solidFill>
-                        <a:srgbClr val="C9D3CD"/>
-                      </a:solidFill>
-                      <a:prstDash val="solid"/>
-                      <a:round/>
-                      <a:headEnd type="none" w="med" len="med"/>
-                      <a:tailEnd type="none" w="med" len="med"/>
-                    </a:lnT>
-                    <a:lnB w="6350" cap="flat" cmpd="sng" algn="ctr">
-                      <a:solidFill>
-                        <a:srgbClr val="C9D3CD"/>
-                      </a:solidFill>
-                      <a:prstDash val="solid"/>
-                      <a:round/>
-                      <a:headEnd type="none" w="med" len="med"/>
-                      <a:tailEnd type="none" w="med" len="med"/>
-                    </a:lnB>
-                    <a:solidFill>
-                      <a:srgbClr val="FBF1E9"/>
-                    </a:solidFill>
-                  </a:tcPr>
-                </a:tc>
-                <a:tc>
-                  <a:txBody>
-                    <a:bodyPr/>
-                    <a:lstStyle/>
-                    <a:p>
-                      <a:pPr algn="l" indent="0" marL="0">
-                        <a:buNone/>
-                      </a:pPr>
-                      <a:r>
-                        <a:rPr lang="en-US" sz="830" b="1" dirty="0">
-                          <a:solidFill>
-                            <a:srgbClr val="1F2A24"/>
-                          </a:solidFill>
-                          <a:latin typeface="Meiryo UI" pitchFamily="34" charset="0"/>
-                          <a:ea typeface="Meiryo UI" pitchFamily="34" charset="-122"/>
-                          <a:cs typeface="Meiryo UI" pitchFamily="34" charset="-120"/>
-                        </a:rPr>
-                        <a:t>特定個人依存業務（引継ぎ試験パス率）</a:t>
-                      </a:r>
-                      <a:endParaRPr lang="en-US" sz="1200" dirty="0">
-                        <a:latin typeface="Meiryo UI" charset="0"/>
-                        <a:ea typeface="Meiryo UI" charset="0"/>
-                        <a:cs typeface="Meiryo UI" charset="0"/>
-                      </a:endParaRPr>
-                    </a:p>
-                  </a:txBody>
-                  <a:tcPr marL="22860" marR="22860" marT="22860" marB="22860" anchor="ctr">
-                    <a:lnL w="6350" cap="flat" cmpd="sng" algn="ctr">
-                      <a:solidFill>
-                        <a:srgbClr val="C9D3CD"/>
-                      </a:solidFill>
-                      <a:prstDash val="solid"/>
-                      <a:round/>
-                      <a:headEnd type="none" w="med" len="med"/>
-                      <a:tailEnd type="none" w="med" len="med"/>
-                    </a:lnL>
-                    <a:lnR w="6350" cap="flat" cmpd="sng" algn="ctr">
-                      <a:solidFill>
-                        <a:srgbClr val="C9D3CD"/>
-                      </a:solidFill>
-                      <a:prstDash val="solid"/>
-                      <a:round/>
-                      <a:headEnd type="none" w="med" len="med"/>
-                      <a:tailEnd type="none" w="med" len="med"/>
-                    </a:lnR>
-                    <a:lnT w="6350" cap="flat" cmpd="sng" algn="ctr">
-                      <a:solidFill>
-                        <a:srgbClr val="C9D3CD"/>
-                      </a:solidFill>
-                      <a:prstDash val="solid"/>
-                      <a:round/>
-                      <a:headEnd type="none" w="med" len="med"/>
-                      <a:tailEnd type="none" w="med" len="med"/>
-                    </a:lnT>
-                    <a:lnB w="6350" cap="flat" cmpd="sng" algn="ctr">
-                      <a:solidFill>
-                        <a:srgbClr val="C9D3CD"/>
-                      </a:solidFill>
-                      <a:prstDash val="solid"/>
-                      <a:round/>
-                      <a:headEnd type="none" w="med" len="med"/>
-                      <a:tailEnd type="none" w="med" len="med"/>
-                    </a:lnB>
-                    <a:solidFill>
-                      <a:srgbClr val="FFFFFF"/>
-                    </a:solidFill>
-                  </a:tcPr>
-                </a:tc>
-                <a:tc>
-                  <a:txBody>
-                    <a:bodyPr/>
-                    <a:lstStyle/>
-                    <a:p>
-                      <a:pPr algn="l" indent="0" marL="0">
-                        <a:buNone/>
-                      </a:pPr>
-                      <a:r>
-                        <a:rPr lang="en-US" sz="830" dirty="0">
-                          <a:solidFill>
-                            <a:srgbClr val="1F2A24"/>
-                          </a:solidFill>
-                          <a:latin typeface="Meiryo UI" pitchFamily="34" charset="0"/>
-                          <a:ea typeface="Meiryo UI" pitchFamily="34" charset="-122"/>
-                          <a:cs typeface="Meiryo UI" pitchFamily="34" charset="-120"/>
-                        </a:rPr>
-                        <a:t>依存あり → ゼロ（パス率100%）</a:t>
-                      </a:r>
-                      <a:endParaRPr lang="en-US" sz="1200" dirty="0">
-                        <a:latin typeface="Meiryo UI" charset="0"/>
-                        <a:ea typeface="Meiryo UI" charset="0"/>
-                        <a:cs typeface="Meiryo UI" charset="0"/>
-                      </a:endParaRPr>
-                    </a:p>
-                  </a:txBody>
-                  <a:tcPr marL="22860" marR="22860" marT="22860" marB="22860" anchor="ctr">
-                    <a:lnL w="6350" cap="flat" cmpd="sng" algn="ctr">
-                      <a:solidFill>
-                        <a:srgbClr val="C9D3CD"/>
-                      </a:solidFill>
-                      <a:prstDash val="solid"/>
-                      <a:round/>
-                      <a:headEnd type="none" w="med" len="med"/>
-                      <a:tailEnd type="none" w="med" len="med"/>
-                    </a:lnL>
-                    <a:lnR w="6350" cap="flat" cmpd="sng" algn="ctr">
-                      <a:solidFill>
-                        <a:srgbClr val="C9D3CD"/>
-                      </a:solidFill>
-                      <a:prstDash val="solid"/>
-                      <a:round/>
-                      <a:headEnd type="none" w="med" len="med"/>
-                      <a:tailEnd type="none" w="med" len="med"/>
-                    </a:lnR>
-                    <a:lnT w="6350" cap="flat" cmpd="sng" algn="ctr">
-                      <a:solidFill>
-                        <a:srgbClr val="C9D3CD"/>
-                      </a:solidFill>
-                      <a:prstDash val="solid"/>
-                      <a:round/>
-                      <a:headEnd type="none" w="med" len="med"/>
-                      <a:tailEnd type="none" w="med" len="med"/>
-                    </a:lnT>
-                    <a:lnB w="6350" cap="flat" cmpd="sng" algn="ctr">
-                      <a:solidFill>
-                        <a:srgbClr val="C9D3CD"/>
-                      </a:solidFill>
-                      <a:prstDash val="solid"/>
-                      <a:round/>
-                      <a:headEnd type="none" w="med" len="med"/>
-                      <a:tailEnd type="none" w="med" len="med"/>
-                    </a:lnB>
-                    <a:solidFill>
-                      <a:srgbClr val="FFFFFF"/>
-                    </a:solidFill>
-                  </a:tcPr>
-                </a:tc>
-                <a:tc>
-                  <a:txBody>
-                    <a:bodyPr/>
-                    <a:lstStyle/>
-                    <a:p>
-                      <a:pPr algn="l" indent="0" marL="0">
-                        <a:buNone/>
-                      </a:pPr>
-                      <a:r>
-                        <a:rPr lang="en-US" sz="830" dirty="0">
-                          <a:solidFill>
-                            <a:srgbClr val="1F2A24"/>
-                          </a:solidFill>
-                          <a:latin typeface="Meiryo UI" pitchFamily="34" charset="0"/>
-                          <a:ea typeface="Meiryo UI" pitchFamily="34" charset="-122"/>
-                          <a:cs typeface="Meiryo UI" pitchFamily="34" charset="-120"/>
-                        </a:rPr>
-                        <a:t>四半期／</a:t>
-                      </a:r>
-                      <a:endParaRPr lang="en-US" sz="1200" dirty="0">
-                        <a:latin typeface="Meiryo UI" charset="0"/>
-                        <a:ea typeface="Meiryo UI" charset="0"/>
-                        <a:cs typeface="Meiryo UI" charset="0"/>
-                      </a:endParaRPr>
-                    </a:p>
-                    <a:p>
-                      <a:pPr algn="ctr" indent="0" marL="0">
-                        <a:buNone/>
-                      </a:pPr>
-                      <a:r>
-                        <a:rPr lang="en-US" sz="750" b="1" dirty="0">
-                          <a:solidFill>
-                            <a:srgbClr val="1F4E79"/>
-                          </a:solidFill>
-                          <a:latin typeface="Meiryo UI" pitchFamily="34" charset="0"/>
-                          <a:ea typeface="Meiryo UI" pitchFamily="34" charset="-122"/>
-                          <a:cs typeface="Meiryo UI" pitchFamily="34" charset="-120"/>
-                        </a:rPr>
-                        <a:t>先行</a:t>
-                      </a:r>
-                      <a:endParaRPr lang="en-US" sz="1200" dirty="0">
-                        <a:latin typeface="Meiryo UI" charset="0"/>
-                        <a:ea typeface="Meiryo UI" charset="0"/>
-                        <a:cs typeface="Meiryo UI" charset="0"/>
-                      </a:endParaRPr>
-                    </a:p>
-                  </a:txBody>
-                  <a:tcPr marL="22860" marR="22860" marT="22860" marB="22860" anchor="ctr">
-                    <a:lnL w="6350" cap="flat" cmpd="sng" algn="ctr">
-                      <a:solidFill>
-                        <a:srgbClr val="C9D3CD"/>
-                      </a:solidFill>
-                      <a:prstDash val="solid"/>
-                      <a:round/>
-                      <a:headEnd type="none" w="med" len="med"/>
-                      <a:tailEnd type="none" w="med" len="med"/>
-                    </a:lnL>
-                    <a:lnR w="6350" cap="flat" cmpd="sng" algn="ctr">
-                      <a:solidFill>
-                        <a:srgbClr val="C9D3CD"/>
-                      </a:solidFill>
-                      <a:prstDash val="solid"/>
-                      <a:round/>
-                      <a:headEnd type="none" w="med" len="med"/>
-                      <a:tailEnd type="none" w="med" len="med"/>
-                    </a:lnR>
-                    <a:lnT w="6350" cap="flat" cmpd="sng" algn="ctr">
-                      <a:solidFill>
-                        <a:srgbClr val="C9D3CD"/>
-                      </a:solidFill>
-                      <a:prstDash val="solid"/>
-                      <a:round/>
-                      <a:headEnd type="none" w="med" len="med"/>
-                      <a:tailEnd type="none" w="med" len="med"/>
-                    </a:lnT>
-                    <a:lnB w="6350" cap="flat" cmpd="sng" algn="ctr">
-                      <a:solidFill>
-                        <a:srgbClr val="C9D3CD"/>
-                      </a:solidFill>
-                      <a:prstDash val="solid"/>
-                      <a:round/>
-                      <a:headEnd type="none" w="med" len="med"/>
-                      <a:tailEnd type="none" w="med" len="med"/>
-                    </a:lnB>
-                    <a:solidFill>
-                      <a:srgbClr val="FFFFFF"/>
-                    </a:solidFill>
-                  </a:tcPr>
-                </a:tc>
-              </a:tr>
-              <a:tr h="278892">
-                <a:tc>
-                  <a:txBody>
-                    <a:bodyPr/>
-                    <a:lstStyle/>
-                    <a:p>
-                      <a:pPr algn="l" indent="0" marL="0">
-                        <a:buNone/>
-                      </a:pPr>
-                      <a:r>
-                        <a:rPr lang="en-US" sz="830" b="1" dirty="0">
-                          <a:solidFill>
-                            <a:srgbClr val="1F2A24"/>
-                          </a:solidFill>
-                          <a:latin typeface="Meiryo UI" pitchFamily="34" charset="0"/>
-                          <a:ea typeface="Meiryo UI" pitchFamily="34" charset="-122"/>
-                          <a:cs typeface="Meiryo UI" pitchFamily="34" charset="-120"/>
-                        </a:rPr>
-                        <a:t>リスク・ガバナンス（G1）</a:t>
-                      </a:r>
-                      <a:endParaRPr lang="en-US" sz="1200" dirty="0">
-                        <a:latin typeface="Meiryo UI" charset="0"/>
-                        <a:ea typeface="Meiryo UI" charset="0"/>
-                        <a:cs typeface="Meiryo UI" charset="0"/>
-                      </a:endParaRPr>
-                    </a:p>
-                  </a:txBody>
-                  <a:tcPr marL="22860" marR="22860" marT="22860" marB="22860" anchor="ctr">
-                    <a:lnL w="6350" cap="flat" cmpd="sng" algn="ctr">
-                      <a:solidFill>
-                        <a:srgbClr val="C9D3CD"/>
-                      </a:solidFill>
-                      <a:prstDash val="solid"/>
-                      <a:round/>
-                      <a:headEnd type="none" w="med" len="med"/>
-                      <a:tailEnd type="none" w="med" len="med"/>
-                    </a:lnL>
-                    <a:lnR w="6350" cap="flat" cmpd="sng" algn="ctr">
-                      <a:solidFill>
-                        <a:srgbClr val="C9D3CD"/>
-                      </a:solidFill>
-                      <a:prstDash val="solid"/>
-                      <a:round/>
-                      <a:headEnd type="none" w="med" len="med"/>
-                      <a:tailEnd type="none" w="med" len="med"/>
-                    </a:lnR>
-                    <a:lnT w="6350" cap="flat" cmpd="sng" algn="ctr">
-                      <a:solidFill>
-                        <a:srgbClr val="C9D3CD"/>
-                      </a:solidFill>
-                      <a:prstDash val="solid"/>
-                      <a:round/>
-                      <a:headEnd type="none" w="med" len="med"/>
-                      <a:tailEnd type="none" w="med" len="med"/>
-                    </a:lnT>
-                    <a:lnB w="6350" cap="flat" cmpd="sng" algn="ctr">
-                      <a:solidFill>
-                        <a:srgbClr val="C9D3CD"/>
-                      </a:solidFill>
-                      <a:prstDash val="solid"/>
-                      <a:round/>
-                      <a:headEnd type="none" w="med" len="med"/>
-                      <a:tailEnd type="none" w="med" len="med"/>
-                    </a:lnB>
-                    <a:solidFill>
-                      <a:srgbClr val="FBF1E9"/>
-                    </a:solidFill>
-                  </a:tcPr>
-                </a:tc>
-                <a:tc>
-                  <a:txBody>
-                    <a:bodyPr/>
-                    <a:lstStyle/>
-                    <a:p>
-                      <a:pPr algn="l" indent="0" marL="0">
-                        <a:buNone/>
-                      </a:pPr>
-                      <a:r>
-                        <a:rPr lang="en-US" sz="830" b="1" dirty="0">
-                          <a:solidFill>
-                            <a:srgbClr val="1F2A24"/>
-                          </a:solidFill>
-                          <a:latin typeface="Meiryo UI" pitchFamily="34" charset="0"/>
-                          <a:ea typeface="Meiryo UI" pitchFamily="34" charset="-122"/>
-                          <a:cs typeface="Meiryo UI" pitchFamily="34" charset="-120"/>
-                        </a:rPr>
-                        <a:t>手順書化率（未文書化業務の解消）</a:t>
-                      </a:r>
-                      <a:endParaRPr lang="en-US" sz="1200" dirty="0">
-                        <a:latin typeface="Meiryo UI" charset="0"/>
-                        <a:ea typeface="Meiryo UI" charset="0"/>
-                        <a:cs typeface="Meiryo UI" charset="0"/>
-                      </a:endParaRPr>
-                    </a:p>
-                  </a:txBody>
-                  <a:tcPr marL="22860" marR="22860" marT="22860" marB="22860" anchor="ctr">
-                    <a:lnL w="6350" cap="flat" cmpd="sng" algn="ctr">
-                      <a:solidFill>
-                        <a:srgbClr val="C9D3CD"/>
-                      </a:solidFill>
-                      <a:prstDash val="solid"/>
-                      <a:round/>
-                      <a:headEnd type="none" w="med" len="med"/>
-                      <a:tailEnd type="none" w="med" len="med"/>
-                    </a:lnL>
-                    <a:lnR w="6350" cap="flat" cmpd="sng" algn="ctr">
-                      <a:solidFill>
-                        <a:srgbClr val="C9D3CD"/>
-                      </a:solidFill>
-                      <a:prstDash val="solid"/>
-                      <a:round/>
-                      <a:headEnd type="none" w="med" len="med"/>
-                      <a:tailEnd type="none" w="med" len="med"/>
-                    </a:lnR>
-                    <a:lnT w="6350" cap="flat" cmpd="sng" algn="ctr">
-                      <a:solidFill>
-                        <a:srgbClr val="C9D3CD"/>
-                      </a:solidFill>
-                      <a:prstDash val="solid"/>
-                      <a:round/>
-                      <a:headEnd type="none" w="med" len="med"/>
-                      <a:tailEnd type="none" w="med" len="med"/>
-                    </a:lnT>
-                    <a:lnB w="6350" cap="flat" cmpd="sng" algn="ctr">
-                      <a:solidFill>
-                        <a:srgbClr val="C9D3CD"/>
-                      </a:solidFill>
-                      <a:prstDash val="solid"/>
-                      <a:round/>
-                      <a:headEnd type="none" w="med" len="med"/>
-                      <a:tailEnd type="none" w="med" len="med"/>
-                    </a:lnB>
-                    <a:solidFill>
-                      <a:srgbClr val="F2F4F3"/>
-                    </a:solidFill>
-                  </a:tcPr>
-                </a:tc>
-                <a:tc>
-                  <a:txBody>
-                    <a:bodyPr/>
-                    <a:lstStyle/>
-                    <a:p>
-                      <a:pPr algn="l" indent="0" marL="0">
-                        <a:buNone/>
-                      </a:pPr>
-                      <a:r>
-                        <a:rPr lang="en-US" sz="830" dirty="0">
-                          <a:solidFill>
-                            <a:srgbClr val="1F2A24"/>
-                          </a:solidFill>
-                          <a:latin typeface="Meiryo UI" pitchFamily="34" charset="0"/>
-                          <a:ea typeface="Meiryo UI" pitchFamily="34" charset="-122"/>
-                          <a:cs typeface="Meiryo UI" pitchFamily="34" charset="-120"/>
-                        </a:rPr>
-                        <a:t>未把握 → 100%（IPは当社帰属）</a:t>
-                      </a:r>
-                      <a:endParaRPr lang="en-US" sz="1200" dirty="0">
-                        <a:latin typeface="Meiryo UI" charset="0"/>
-                        <a:ea typeface="Meiryo UI" charset="0"/>
-                        <a:cs typeface="Meiryo UI" charset="0"/>
-                      </a:endParaRPr>
-                    </a:p>
-                  </a:txBody>
-                  <a:tcPr marL="22860" marR="22860" marT="22860" marB="22860" anchor="ctr">
-                    <a:lnL w="6350" cap="flat" cmpd="sng" algn="ctr">
-                      <a:solidFill>
-                        <a:srgbClr val="C9D3CD"/>
-                      </a:solidFill>
-                      <a:prstDash val="solid"/>
-                      <a:round/>
-                      <a:headEnd type="none" w="med" len="med"/>
-                      <a:tailEnd type="none" w="med" len="med"/>
-                    </a:lnL>
-                    <a:lnR w="6350" cap="flat" cmpd="sng" algn="ctr">
-                      <a:solidFill>
-                        <a:srgbClr val="C9D3CD"/>
-                      </a:solidFill>
-                      <a:prstDash val="solid"/>
-                      <a:round/>
-                      <a:headEnd type="none" w="med" len="med"/>
-                      <a:tailEnd type="none" w="med" len="med"/>
-                    </a:lnR>
-                    <a:lnT w="6350" cap="flat" cmpd="sng" algn="ctr">
-                      <a:solidFill>
-                        <a:srgbClr val="C9D3CD"/>
-                      </a:solidFill>
-                      <a:prstDash val="solid"/>
-                      <a:round/>
-                      <a:headEnd type="none" w="med" len="med"/>
-                      <a:tailEnd type="none" w="med" len="med"/>
-                    </a:lnT>
-                    <a:lnB w="6350" cap="flat" cmpd="sng" algn="ctr">
-                      <a:solidFill>
-                        <a:srgbClr val="C9D3CD"/>
-                      </a:solidFill>
-                      <a:prstDash val="solid"/>
-                      <a:round/>
-                      <a:headEnd type="none" w="med" len="med"/>
-                      <a:tailEnd type="none" w="med" len="med"/>
-                    </a:lnB>
-                    <a:solidFill>
-                      <a:srgbClr val="F2F4F3"/>
-                    </a:solidFill>
-                  </a:tcPr>
-                </a:tc>
-                <a:tc>
-                  <a:txBody>
-                    <a:bodyPr/>
-                    <a:lstStyle/>
-                    <a:p>
-                      <a:pPr algn="l" indent="0" marL="0">
-                        <a:buNone/>
-                      </a:pPr>
-                      <a:r>
-                        <a:rPr lang="en-US" sz="830" dirty="0">
-                          <a:solidFill>
-                            <a:srgbClr val="1F2A24"/>
-                          </a:solidFill>
-                          <a:latin typeface="Meiryo UI" pitchFamily="34" charset="0"/>
-                          <a:ea typeface="Meiryo UI" pitchFamily="34" charset="-122"/>
-                          <a:cs typeface="Meiryo UI" pitchFamily="34" charset="-120"/>
-                        </a:rPr>
-                        <a:t>四半期／</a:t>
-                      </a:r>
-                      <a:endParaRPr lang="en-US" sz="1200" dirty="0">
-                        <a:latin typeface="Meiryo UI" charset="0"/>
-                        <a:ea typeface="Meiryo UI" charset="0"/>
-                        <a:cs typeface="Meiryo UI" charset="0"/>
-                      </a:endParaRPr>
-                    </a:p>
-                    <a:p>
-                      <a:pPr algn="ctr" indent="0" marL="0">
-                        <a:buNone/>
-                      </a:pPr>
-                      <a:r>
-                        <a:rPr lang="en-US" sz="750" b="1" dirty="0">
-                          <a:solidFill>
-                            <a:srgbClr val="1F4E79"/>
-                          </a:solidFill>
-                          <a:latin typeface="Meiryo UI" pitchFamily="34" charset="0"/>
-                          <a:ea typeface="Meiryo UI" pitchFamily="34" charset="-122"/>
-                          <a:cs typeface="Meiryo UI" pitchFamily="34" charset="-120"/>
-                        </a:rPr>
-                        <a:t>先行</a:t>
-                      </a:r>
-                      <a:endParaRPr lang="en-US" sz="1200" dirty="0">
-                        <a:latin typeface="Meiryo UI" charset="0"/>
-                        <a:ea typeface="Meiryo UI" charset="0"/>
-                        <a:cs typeface="Meiryo UI" charset="0"/>
-                      </a:endParaRPr>
-                    </a:p>
-                  </a:txBody>
-                  <a:tcPr marL="22860" marR="22860" marT="22860" marB="22860" anchor="ctr">
-                    <a:lnL w="6350" cap="flat" cmpd="sng" algn="ctr">
-                      <a:solidFill>
-                        <a:srgbClr val="C9D3CD"/>
-                      </a:solidFill>
-                      <a:prstDash val="solid"/>
-                      <a:round/>
-                      <a:headEnd type="none" w="med" len="med"/>
-                      <a:tailEnd type="none" w="med" len="med"/>
-                    </a:lnL>
-                    <a:lnR w="6350" cap="flat" cmpd="sng" algn="ctr">
-                      <a:solidFill>
-                        <a:srgbClr val="C9D3CD"/>
-                      </a:solidFill>
-                      <a:prstDash val="solid"/>
-                      <a:round/>
-                      <a:headEnd type="none" w="med" len="med"/>
-                      <a:tailEnd type="none" w="med" len="med"/>
-                    </a:lnR>
-                    <a:lnT w="6350" cap="flat" cmpd="sng" algn="ctr">
-                      <a:solidFill>
-                        <a:srgbClr val="C9D3CD"/>
-                      </a:solidFill>
-                      <a:prstDash val="solid"/>
-                      <a:round/>
-                      <a:headEnd type="none" w="med" len="med"/>
-                      <a:tailEnd type="none" w="med" len="med"/>
-                    </a:lnT>
-                    <a:lnB w="6350" cap="flat" cmpd="sng" algn="ctr">
-                      <a:solidFill>
-                        <a:srgbClr val="C9D3CD"/>
-                      </a:solidFill>
-                      <a:prstDash val="solid"/>
-                      <a:round/>
-                      <a:headEnd type="none" w="med" len="med"/>
-                      <a:tailEnd type="none" w="med" len="med"/>
-                    </a:lnB>
-                    <a:solidFill>
-                      <a:srgbClr val="F2F4F3"/>
-                    </a:solidFill>
-                  </a:tcPr>
-                </a:tc>
-              </a:tr>
-              <a:tr h="278892">
-                <a:tc>
-                  <a:txBody>
-                    <a:bodyPr/>
-                    <a:lstStyle/>
-                    <a:p>
-                      <a:pPr algn="l" indent="0" marL="0">
-                        <a:buNone/>
-                      </a:pPr>
-                      <a:r>
-                        <a:rPr lang="en-US" sz="830" b="1" dirty="0">
-                          <a:solidFill>
-                            <a:srgbClr val="1F2A24"/>
-                          </a:solidFill>
-                          <a:latin typeface="Meiryo UI" pitchFamily="34" charset="0"/>
-                          <a:ea typeface="Meiryo UI" pitchFamily="34" charset="-122"/>
-                          <a:cs typeface="Meiryo UI" pitchFamily="34" charset="-120"/>
-                        </a:rPr>
-                        <a:t>リスク・ガバナンス（G1）</a:t>
-                      </a:r>
-                      <a:endParaRPr lang="en-US" sz="1200" dirty="0">
-                        <a:latin typeface="Meiryo UI" charset="0"/>
-                        <a:ea typeface="Meiryo UI" charset="0"/>
-                        <a:cs typeface="Meiryo UI" charset="0"/>
-                      </a:endParaRPr>
-                    </a:p>
-                  </a:txBody>
-                  <a:tcPr marL="22860" marR="22860" marT="22860" marB="22860" anchor="ctr">
-                    <a:lnL w="6350" cap="flat" cmpd="sng" algn="ctr">
-                      <a:solidFill>
-                        <a:srgbClr val="C9D3CD"/>
-                      </a:solidFill>
-                      <a:prstDash val="solid"/>
-                      <a:round/>
-                      <a:headEnd type="none" w="med" len="med"/>
-                      <a:tailEnd type="none" w="med" len="med"/>
-                    </a:lnL>
-                    <a:lnR w="6350" cap="flat" cmpd="sng" algn="ctr">
-                      <a:solidFill>
-                        <a:srgbClr val="C9D3CD"/>
-                      </a:solidFill>
-                      <a:prstDash val="solid"/>
-                      <a:round/>
-                      <a:headEnd type="none" w="med" len="med"/>
-                      <a:tailEnd type="none" w="med" len="med"/>
-                    </a:lnR>
-                    <a:lnT w="6350" cap="flat" cmpd="sng" algn="ctr">
-                      <a:solidFill>
-                        <a:srgbClr val="C9D3CD"/>
-                      </a:solidFill>
-                      <a:prstDash val="solid"/>
-                      <a:round/>
-                      <a:headEnd type="none" w="med" len="med"/>
-                      <a:tailEnd type="none" w="med" len="med"/>
-                    </a:lnT>
-                    <a:lnB w="6350" cap="flat" cmpd="sng" algn="ctr">
-                      <a:solidFill>
-                        <a:srgbClr val="C9D3CD"/>
-                      </a:solidFill>
-                      <a:prstDash val="solid"/>
-                      <a:round/>
-                      <a:headEnd type="none" w="med" len="med"/>
-                      <a:tailEnd type="none" w="med" len="med"/>
-                    </a:lnB>
-                    <a:solidFill>
-                      <a:srgbClr val="FBF1E9"/>
-                    </a:solidFill>
-                  </a:tcPr>
-                </a:tc>
-                <a:tc>
-                  <a:txBody>
-                    <a:bodyPr/>
-                    <a:lstStyle/>
-                    <a:p>
-                      <a:pPr algn="l" indent="0" marL="0">
-                        <a:buNone/>
-                      </a:pPr>
-                      <a:r>
-                        <a:rPr lang="en-US" sz="830" b="1" dirty="0">
-                          <a:solidFill>
-                            <a:srgbClr val="1F2A24"/>
-                          </a:solidFill>
-                          <a:latin typeface="Meiryo UI" pitchFamily="34" charset="0"/>
-                          <a:ea typeface="Meiryo UI" pitchFamily="34" charset="-122"/>
-                          <a:cs typeface="Meiryo UI" pitchFamily="34" charset="-120"/>
-                        </a:rPr>
-                        <a:t>IT統制関連の監査指摘件数</a:t>
-                      </a:r>
-                      <a:endParaRPr lang="en-US" sz="1200" dirty="0">
-                        <a:latin typeface="Meiryo UI" charset="0"/>
-                        <a:ea typeface="Meiryo UI" charset="0"/>
-                        <a:cs typeface="Meiryo UI" charset="0"/>
-                      </a:endParaRPr>
-                    </a:p>
-                  </a:txBody>
-                  <a:tcPr marL="22860" marR="22860" marT="22860" marB="22860" anchor="ctr">
-                    <a:lnL w="6350" cap="flat" cmpd="sng" algn="ctr">
-                      <a:solidFill>
-                        <a:srgbClr val="C9D3CD"/>
-                      </a:solidFill>
-                      <a:prstDash val="solid"/>
-                      <a:round/>
-                      <a:headEnd type="none" w="med" len="med"/>
-                      <a:tailEnd type="none" w="med" len="med"/>
-                    </a:lnL>
-                    <a:lnR w="6350" cap="flat" cmpd="sng" algn="ctr">
-                      <a:solidFill>
-                        <a:srgbClr val="C9D3CD"/>
-                      </a:solidFill>
-                      <a:prstDash val="solid"/>
-                      <a:round/>
-                      <a:headEnd type="none" w="med" len="med"/>
-                      <a:tailEnd type="none" w="med" len="med"/>
-                    </a:lnR>
-                    <a:lnT w="6350" cap="flat" cmpd="sng" algn="ctr">
-                      <a:solidFill>
-                        <a:srgbClr val="C9D3CD"/>
-                      </a:solidFill>
-                      <a:prstDash val="solid"/>
-                      <a:round/>
-                      <a:headEnd type="none" w="med" len="med"/>
-                      <a:tailEnd type="none" w="med" len="med"/>
-                    </a:lnT>
-                    <a:lnB w="6350" cap="flat" cmpd="sng" algn="ctr">
-                      <a:solidFill>
-                        <a:srgbClr val="C9D3CD"/>
-                      </a:solidFill>
-                      <a:prstDash val="solid"/>
-                      <a:round/>
-                      <a:headEnd type="none" w="med" len="med"/>
-                      <a:tailEnd type="none" w="med" len="med"/>
-                    </a:lnB>
-                    <a:solidFill>
-                      <a:srgbClr val="FFFFFF"/>
-                    </a:solidFill>
-                  </a:tcPr>
-                </a:tc>
-                <a:tc>
-                  <a:txBody>
-                    <a:bodyPr/>
-                    <a:lstStyle/>
-                    <a:p>
-                      <a:pPr algn="l" indent="0" marL="0">
-                        <a:buNone/>
-                      </a:pPr>
-                      <a:r>
-                        <a:rPr lang="en-US" sz="830" dirty="0">
-                          <a:solidFill>
-                            <a:srgbClr val="1F2A24"/>
-                          </a:solidFill>
-                          <a:latin typeface="Meiryo UI" pitchFamily="34" charset="0"/>
-                          <a:ea typeface="Meiryo UI" pitchFamily="34" charset="-122"/>
-                          <a:cs typeface="Meiryo UI" pitchFamily="34" charset="-120"/>
-                        </a:rPr>
-                        <a:t>Phase 0で棚卸し → ゼロを維持</a:t>
-                      </a:r>
-                      <a:endParaRPr lang="en-US" sz="1200" dirty="0">
-                        <a:latin typeface="Meiryo UI" charset="0"/>
-                        <a:ea typeface="Meiryo UI" charset="0"/>
-                        <a:cs typeface="Meiryo UI" charset="0"/>
-                      </a:endParaRPr>
-                    </a:p>
-                  </a:txBody>
-                  <a:tcPr marL="22860" marR="22860" marT="22860" marB="22860" anchor="ctr">
-                    <a:lnL w="6350" cap="flat" cmpd="sng" algn="ctr">
-                      <a:solidFill>
-                        <a:srgbClr val="C9D3CD"/>
-                      </a:solidFill>
-                      <a:prstDash val="solid"/>
-                      <a:round/>
-                      <a:headEnd type="none" w="med" len="med"/>
-                      <a:tailEnd type="none" w="med" len="med"/>
-                    </a:lnL>
-                    <a:lnR w="6350" cap="flat" cmpd="sng" algn="ctr">
-                      <a:solidFill>
-                        <a:srgbClr val="C9D3CD"/>
-                      </a:solidFill>
-                      <a:prstDash val="solid"/>
-                      <a:round/>
-                      <a:headEnd type="none" w="med" len="med"/>
-                      <a:tailEnd type="none" w="med" len="med"/>
-                    </a:lnR>
-                    <a:lnT w="6350" cap="flat" cmpd="sng" algn="ctr">
-                      <a:solidFill>
-                        <a:srgbClr val="C9D3CD"/>
-                      </a:solidFill>
-                      <a:prstDash val="solid"/>
-                      <a:round/>
-                      <a:headEnd type="none" w="med" len="med"/>
-                      <a:tailEnd type="none" w="med" len="med"/>
-                    </a:lnT>
-                    <a:lnB w="6350" cap="flat" cmpd="sng" algn="ctr">
-                      <a:solidFill>
-                        <a:srgbClr val="C9D3CD"/>
-                      </a:solidFill>
-                      <a:prstDash val="solid"/>
-                      <a:round/>
-                      <a:headEnd type="none" w="med" len="med"/>
-                      <a:tailEnd type="none" w="med" len="med"/>
-                    </a:lnB>
-                    <a:solidFill>
-                      <a:srgbClr val="FFFFFF"/>
-                    </a:solidFill>
-                  </a:tcPr>
-                </a:tc>
-                <a:tc>
-                  <a:txBody>
-                    <a:bodyPr/>
-                    <a:lstStyle/>
-                    <a:p>
-                      <a:pPr algn="l" indent="0" marL="0">
-                        <a:buNone/>
-                      </a:pPr>
-                      <a:r>
-                        <a:rPr lang="en-US" sz="830" dirty="0">
-                          <a:solidFill>
-                            <a:srgbClr val="1F2A24"/>
-                          </a:solidFill>
-                          <a:latin typeface="Meiryo UI" pitchFamily="34" charset="0"/>
-                          <a:ea typeface="Meiryo UI" pitchFamily="34" charset="-122"/>
-                          <a:cs typeface="Meiryo UI" pitchFamily="34" charset="-120"/>
-                        </a:rPr>
-                        <a:t>年次／</a:t>
-                      </a:r>
-                      <a:endParaRPr lang="en-US" sz="1200" dirty="0">
-                        <a:latin typeface="Meiryo UI" charset="0"/>
-                        <a:ea typeface="Meiryo UI" charset="0"/>
-                        <a:cs typeface="Meiryo UI" charset="0"/>
-                      </a:endParaRPr>
-                    </a:p>
-                    <a:p>
-                      <a:pPr algn="ctr" indent="0" marL="0">
-                        <a:buNone/>
-                      </a:pPr>
-                      <a:r>
-                        <a:rPr lang="en-US" sz="750" b="1" dirty="0">
-                          <a:solidFill>
-                            <a:srgbClr val="5A6660"/>
-                          </a:solidFill>
-                          <a:latin typeface="Meiryo UI" pitchFamily="34" charset="0"/>
-                          <a:ea typeface="Meiryo UI" pitchFamily="34" charset="-122"/>
-                          <a:cs typeface="Meiryo UI" pitchFamily="34" charset="-120"/>
-                        </a:rPr>
-                        <a:t>遅行</a:t>
-                      </a:r>
-                      <a:endParaRPr lang="en-US" sz="1200" dirty="0">
-                        <a:latin typeface="Meiryo UI" charset="0"/>
-                        <a:ea typeface="Meiryo UI" charset="0"/>
-                        <a:cs typeface="Meiryo UI" charset="0"/>
-                      </a:endParaRPr>
-                    </a:p>
-                  </a:txBody>
-                  <a:tcPr marL="22860" marR="22860" marT="22860" marB="22860" anchor="ctr">
+                  <a:tcPr marL="25603" marR="25603" marT="25603" marB="25603" anchor="ctr">
                     <a:lnL w="6350" cap="flat" cmpd="sng" algn="ctr">
                       <a:solidFill>
                         <a:srgbClr val="C9D3CD"/>

--- a/docs/KPI_ROI_経営報告.pptx
+++ b/docs/KPI_ROI_経営報告.pptx
@@ -1084,7 +1084,7 @@
                 <a:gridCol w="3867912"/>
                 <a:gridCol w="1463040"/>
               </a:tblGrid>
-              <a:tr h="324612">
+              <a:tr h="318211">
                 <a:tc>
                   <a:txBody>
                     <a:bodyPr/>
@@ -1358,7 +1358,7 @@
                   </a:tcPr>
                 </a:tc>
               </a:tr>
-              <a:tr h="324612">
+              <a:tr h="318211">
                 <a:tc>
                   <a:txBody>
                     <a:bodyPr/>
@@ -1653,7 +1653,7 @@
                   </a:tcPr>
                 </a:tc>
               </a:tr>
-              <a:tr h="324612">
+              <a:tr h="318211">
                 <a:tc>
                   <a:txBody>
                     <a:bodyPr/>
@@ -1948,7 +1948,7 @@
                   </a:tcPr>
                 </a:tc>
               </a:tr>
-              <a:tr h="324612">
+              <a:tr h="318211">
                 <a:tc>
                   <a:txBody>
                     <a:bodyPr/>
@@ -2243,7 +2243,7 @@
                   </a:tcPr>
                 </a:tc>
               </a:tr>
-              <a:tr h="324612">
+              <a:tr h="318211">
                 <a:tc>
                   <a:txBody>
                     <a:bodyPr/>
@@ -2538,7 +2538,7 @@
                   </a:tcPr>
                 </a:tc>
               </a:tr>
-              <a:tr h="324612">
+              <a:tr h="318211">
                 <a:tc>
                   <a:txBody>
                     <a:bodyPr/>
@@ -2833,7 +2833,7 @@
                   </a:tcPr>
                 </a:tc>
               </a:tr>
-              <a:tr h="324612">
+              <a:tr h="318211">
                 <a:tc>
                   <a:txBody>
                     <a:bodyPr/>
@@ -3128,7 +3128,7 @@
                   </a:tcPr>
                 </a:tc>
               </a:tr>
-              <a:tr h="324612">
+              <a:tr h="318211">
                 <a:tc>
                   <a:txBody>
                     <a:bodyPr/>
@@ -3423,7 +3423,7 @@
                   </a:tcPr>
                 </a:tc>
               </a:tr>
-              <a:tr h="324612">
+              <a:tr h="318211">
                 <a:tc>
                   <a:txBody>
                     <a:bodyPr/>
@@ -3509,7 +3509,7 @@
                           <a:ea typeface="Meiryo UI" pitchFamily="34" charset="-122"/>
                           <a:cs typeface="Meiryo UI" pitchFamily="34" charset="-120"/>
                         </a:rPr>
-                        <a:t>セキュリティ統制スコア（① 重大インシデント対応力40%＝件数・MTTD/MTTR ② 脆弱性対応SLA遵守率35% ③ 24/365監視カバレッジ率25%の加重平均）</a:t>
+                        <a:t>セキュリティ統制スコア（対応力・SLA遵守・監視カバレッジの加重平均）※1</a:t>
                       </a:r>
                       <a:endParaRPr lang="en-US" sz="1200" dirty="0">
                         <a:latin typeface="Meiryo UI" charset="0"/>
@@ -3577,7 +3577,7 @@
                           <a:ea typeface="Meiryo UI" pitchFamily="34" charset="-122"/>
                           <a:cs typeface="Meiryo UI" pitchFamily="34" charset="-120"/>
                         </a:rPr>
-                        <a:t>Phase 0で初回スコアリング → 80点以上を維持（契約更新時に重み見直し）</a:t>
+                        <a:t>Phase 0で初回スコアリング → 80点以上を維持</a:t>
                       </a:r>
                       <a:endParaRPr lang="en-US" sz="1200" dirty="0">
                         <a:latin typeface="Meiryo UI" charset="0"/>
@@ -3718,7 +3718,7 @@
                   </a:tcPr>
                 </a:tc>
               </a:tr>
-              <a:tr h="324612">
+              <a:tr h="318211">
                 <a:tc>
                   <a:txBody>
                     <a:bodyPr/>
@@ -4013,7 +4013,7 @@
                   </a:tcPr>
                 </a:tc>
               </a:tr>
-              <a:tr h="324612">
+              <a:tr h="318211">
                 <a:tc>
                   <a:txBody>
                     <a:bodyPr/>
@@ -4308,7 +4308,7 @@
                   </a:tcPr>
                 </a:tc>
               </a:tr>
-              <a:tr h="324612">
+              <a:tr h="318211">
                 <a:tc>
                   <a:txBody>
                     <a:bodyPr/>
@@ -4603,7 +4603,7 @@
                   </a:tcPr>
                 </a:tc>
               </a:tr>
-              <a:tr h="324612">
+              <a:tr h="318211">
                 <a:tc>
                   <a:txBody>
                     <a:bodyPr/>
@@ -4898,7 +4898,7 @@
                   </a:tcPr>
                 </a:tc>
               </a:tr>
-              <a:tr h="324612">
+              <a:tr h="318211">
                 <a:tc>
                   <a:txBody>
                     <a:bodyPr/>
@@ -5193,7 +5193,7 @@
                   </a:tcPr>
                 </a:tc>
               </a:tr>
-              <a:tr h="324612">
+              <a:tr h="318211">
                 <a:tc>
                   <a:txBody>
                     <a:bodyPr/>
@@ -5494,13 +5494,52 @@
       </p:graphicFrame>
       <p:sp>
         <p:nvSpPr>
-          <p:cNvPr id="5" name="Shape 2"/>
+          <p:cNvPr id="5" name="Text 2"/>
           <p:cNvSpPr/>
           <p:nvPr/>
         </p:nvSpPr>
         <p:spPr>
           <a:xfrm>
-            <a:off x="457200" y="6053328"/>
+            <a:off x="457200" y="5760720"/>
+            <a:ext cx="11247120" cy="219456"/>
+          </a:xfrm>
+          <a:prstGeom prst="rect">
+            <a:avLst/>
+          </a:prstGeom>
+          <a:noFill/>
+          <a:ln/>
+        </p:spPr>
+        <p:txBody>
+          <a:bodyPr wrap="square" lIns="0" tIns="0" rIns="0" bIns="0" rtlCol="0" anchor="ctr"/>
+          <a:lstStyle/>
+          <a:p>
+            <a:pPr indent="0" marL="0">
+              <a:buNone/>
+            </a:pPr>
+            <a:r>
+              <a:rPr lang="en-US" sz="780" dirty="0">
+                <a:solidFill>
+                  <a:srgbClr val="5A6660"/>
+                </a:solidFill>
+                <a:latin typeface="Meiryo UI" pitchFamily="34" charset="0"/>
+                <a:ea typeface="Meiryo UI" pitchFamily="34" charset="-122"/>
+                <a:cs typeface="Meiryo UI" pitchFamily="34" charset="-120"/>
+              </a:rPr>
+              <a:t>※1 重大インシデント対応力40%（件数・MTTD/MTTR）／脆弱性対応SLA遵守率35%／24時間365日監視カバレッジ率25%</a:t>
+            </a:r>
+            <a:endParaRPr lang="en-US" sz="780" dirty="0"/>
+          </a:p>
+        </p:txBody>
+      </p:sp>
+      <p:sp>
+        <p:nvSpPr>
+          <p:cNvPr id="6" name="Shape 3"/>
+          <p:cNvSpPr/>
+          <p:nvPr/>
+        </p:nvSpPr>
+        <p:spPr>
+          <a:xfrm>
+            <a:off x="457200" y="6016752"/>
             <a:ext cx="11274552" cy="512064"/>
           </a:xfrm>
           <a:prstGeom prst="roundRect">
@@ -5516,13 +5555,13 @@
       </p:sp>
       <p:sp>
         <p:nvSpPr>
-          <p:cNvPr id="6" name="Text 3"/>
+          <p:cNvPr id="7" name="Text 4"/>
           <p:cNvSpPr/>
           <p:nvPr/>
         </p:nvSpPr>
         <p:spPr>
           <a:xfrm>
-            <a:off x="731520" y="6053328"/>
+            <a:off x="731520" y="6016752"/>
             <a:ext cx="10789920" cy="512064"/>
           </a:xfrm>
           <a:prstGeom prst="rect">
